--- a/第三週(09-24)/第三週_第3節_簡報.pptx
+++ b/第三週(09-24)/第三週_第3節_簡報.pptx
@@ -2059,7 +2059,51 @@
                 <a:ea typeface="Arial Unicode MS"/>
                 <a:cs typeface="Arial Unicode MS"/>
               </a:rPr>
-              <a:t>如果前面進行得比預期快，還多出十分鐘以上，可以改發那份紙本學習單：「第三週_課堂練習_學習單.html」，用瀏覽器開、直接列印就是學生空白版（一頁十一題）。網址後面加上 ?ans 會變成教師解答版。學習單是</a:t>
+              <a:t>如果前面進行得比預期快，還多出十分鐘以上，可以改發那份紙本學習單。檔案有兩個：「第三週_課堂練習_學習單.html」是</a:t>
+            </a:r>
+            <a:r>
+              <a:rPr sz="1000" b="1" lang="zh-TW" dirty="0">
+                <a:solidFill>
+                  <a:srgbClr val="000000"/>
+                </a:solidFill>
+                <a:latin typeface="Arial Unicode MS"/>
+                <a:ea typeface="Arial Unicode MS"/>
+                <a:cs typeface="Arial Unicode MS"/>
+              </a:rPr>
+              <a:t>發給學生的題目版</a:t>
+            </a:r>
+            <a:r>
+              <a:rPr sz="1000" lang="zh-TW" dirty="0">
+                <a:solidFill>
+                  <a:srgbClr val="000000"/>
+                </a:solidFill>
+                <a:latin typeface="Arial Unicode MS"/>
+                <a:ea typeface="Arial Unicode MS"/>
+                <a:cs typeface="Arial Unicode MS"/>
+              </a:rPr>
+              <a:t>，「第三週_課堂練習_學習單_教師解答.html」是</a:t>
+            </a:r>
+            <a:r>
+              <a:rPr sz="1000" b="1" lang="zh-TW" dirty="0">
+                <a:solidFill>
+                  <a:srgbClr val="000000"/>
+                </a:solidFill>
+                <a:latin typeface="Arial Unicode MS"/>
+                <a:ea typeface="Arial Unicode MS"/>
+                <a:cs typeface="Arial Unicode MS"/>
+              </a:rPr>
+              <a:t>老師自己用的解答版</a:t>
+            </a:r>
+            <a:r>
+              <a:rPr sz="1000" lang="zh-TW" dirty="0">
+                <a:solidFill>
+                  <a:srgbClr val="000000"/>
+                </a:solidFill>
+                <a:latin typeface="Arial Unicode MS"/>
+                <a:ea typeface="Arial Unicode MS"/>
+                <a:cs typeface="Arial Unicode MS"/>
+              </a:rPr>
+              <a:t>，兩份都用瀏覽器開、直接列印即可。題目版三頁十一題，建議雙面印。學習單是</a:t>
             </a:r>
             <a:r>
               <a:rPr sz="1000" b="1" lang="zh-TW" dirty="0">

--- a/第三週(09-24)/第三週_第3節_簡報.pptx
+++ b/第三週(09-24)/第三週_第3節_簡報.pptx
@@ -2103,7 +2103,7 @@
                 <a:ea typeface="Arial Unicode MS"/>
                 <a:cs typeface="Arial Unicode MS"/>
               </a:rPr>
-              <a:t>，兩份都用瀏覽器開、直接列印即可。題目版三頁十一題，建議雙面印。學習單是</a:t>
+              <a:t>，兩份都用瀏覽器開、直接列印即可。兩份都剛好一張 A4，八題。解答版只列答案、不重複題目。學習單是</a:t>
             </a:r>
             <a:r>
               <a:rPr sz="1000" b="1" lang="zh-TW" dirty="0">

--- a/第三週(09-24)/第三週_第3節_簡報.pptx
+++ b/第三週(09-24)/第三週_第3節_簡報.pptx
@@ -7076,7 +7076,150 @@
                 <a:ea typeface="Arial Unicode MS"/>
                 <a:cs typeface="Arial Unicode MS"/>
               </a:rPr>
-              <a:t>先介紹這支影片。</a:t>
+              <a:t>先看左邊這兩張圖，建立預期，再看影片。</a:t>
+            </a:r>
+            <a:r>
+              <a:rPr sz="1000" lang="zh-TW" dirty="0">
+                <a:solidFill>
+                  <a:srgbClr val="000000"/>
+                </a:solidFill>
+                <a:latin typeface="Arial Unicode MS"/>
+                <a:ea typeface="Arial Unicode MS"/>
+                <a:cs typeface="Arial Unicode MS"/>
+              </a:rPr>
+              <a:t>
+</a:t>
+            </a:r>
+          </a:p>
+          <a:p>
+            <a:pPr algn="l">
+              <a:lnSpc>
+                <a:spcPct val="115000"/>
+              </a:lnSpc>
+              <a:spcAft>
+                <a:spcPts val="500"/>
+              </a:spcAft>
+            </a:pPr>
+            <a:r>
+              <a:rPr sz="1000" lang="zh-TW" dirty="0">
+                <a:solidFill>
+                  <a:srgbClr val="000000"/>
+                </a:solidFill>
+                <a:latin typeface="Arial Unicode MS"/>
+                <a:ea typeface="Arial Unicode MS"/>
+                <a:cs typeface="Arial Unicode MS"/>
+              </a:rPr>
+              <a:t>上面是大雨，下面是濃霧。兩張圖裡的</a:t>
+            </a:r>
+            <a:r>
+              <a:rPr sz="1000" b="1" lang="zh-TW" dirty="0">
+                <a:solidFill>
+                  <a:srgbClr val="000000"/>
+                </a:solidFill>
+                <a:latin typeface="Arial Unicode MS"/>
+                <a:ea typeface="Arial Unicode MS"/>
+                <a:cs typeface="Arial Unicode MS"/>
+              </a:rPr>
+              <a:t>車一樣、行人站的位置也一樣</a:t>
+            </a:r>
+            <a:r>
+              <a:rPr sz="1000" lang="zh-TW" dirty="0">
+                <a:solidFill>
+                  <a:srgbClr val="000000"/>
+                </a:solidFill>
+                <a:latin typeface="Arial Unicode MS"/>
+                <a:ea typeface="Arial Unicode MS"/>
+                <a:cs typeface="Arial Unicode MS"/>
+              </a:rPr>
+              <a:t>，只有天氣不同。
+</a:t>
+            </a:r>
+          </a:p>
+          <a:p>
+            <a:pPr algn="l">
+              <a:lnSpc>
+                <a:spcPct val="115000"/>
+              </a:lnSpc>
+              <a:spcAft>
+                <a:spcPts val="500"/>
+              </a:spcAft>
+            </a:pPr>
+            <a:r>
+              <a:rPr sz="1000" lang="zh-TW" dirty="0">
+                <a:solidFill>
+                  <a:srgbClr val="000000"/>
+                </a:solidFill>
+                <a:latin typeface="Arial Unicode MS"/>
+                <a:ea typeface="Arial Unicode MS"/>
+                <a:cs typeface="Arial Unicode MS"/>
+              </a:rPr>
+              <a:t>大雨那張，行人還看得到輪廓，只是雨絲擋在中間。濃霧那張——（指一下）——那個人幾乎整個被霧吃掉了。右下角的數字就是我們剛剛量過的：大雨相機只剩二十二公尺，濃霧只剩十六公尺。
+</a:t>
+            </a:r>
+          </a:p>
+          <a:p>
+            <a:pPr algn="l">
+              <a:lnSpc>
+                <a:spcPct val="115000"/>
+              </a:lnSpc>
+              <a:spcAft>
+                <a:spcPts val="500"/>
+              </a:spcAft>
+            </a:pPr>
+            <a:r>
+              <a:rPr sz="1000" lang="zh-TW" dirty="0">
+                <a:solidFill>
+                  <a:srgbClr val="000000"/>
+                </a:solidFill>
+                <a:latin typeface="Arial Unicode MS"/>
+                <a:ea typeface="Arial Unicode MS"/>
+                <a:cs typeface="Arial Unicode MS"/>
+              </a:rPr>
+              <a:t>請大家帶著這個預期看影片：</a:t>
+            </a:r>
+            <a:r>
+              <a:rPr sz="1000" b="1" lang="zh-TW" dirty="0">
+                <a:solidFill>
+                  <a:srgbClr val="000000"/>
+                </a:solidFill>
+                <a:latin typeface="Arial Unicode MS"/>
+                <a:ea typeface="Arial Unicode MS"/>
+                <a:cs typeface="Arial Unicode MS"/>
+              </a:rPr>
+              <a:t>如果車子只靠相機，在這兩種天氣下它看得到那個小孩嗎？</a:t>
+            </a:r>
+            <a:r>
+              <a:rPr sz="1000" lang="zh-TW" dirty="0">
+                <a:solidFill>
+                  <a:srgbClr val="000000"/>
+                </a:solidFill>
+                <a:latin typeface="Arial Unicode MS"/>
+                <a:ea typeface="Arial Unicode MS"/>
+                <a:cs typeface="Arial Unicode MS"/>
+              </a:rPr>
+              <a:t>
+</a:t>
+            </a:r>
+          </a:p>
+          <a:p>
+            <a:pPr algn="l">
+              <a:lnSpc>
+                <a:spcPct val="115000"/>
+              </a:lnSpc>
+              <a:spcAft>
+                <a:spcPts val="500"/>
+              </a:spcAft>
+            </a:pPr>
+            <a:r>
+              <a:rPr sz="1000" b="1" lang="zh-TW" dirty="0">
+                <a:solidFill>
+                  <a:srgbClr val="000000"/>
+                </a:solidFill>
+                <a:latin typeface="Arial Unicode MS"/>
+                <a:ea typeface="Arial Unicode MS"/>
+                <a:cs typeface="Arial Unicode MS"/>
+              </a:rPr>
+              <a:t>接下來介紹這支影片。</a:t>
             </a:r>
             <a:r>
               <a:rPr sz="1000" lang="zh-TW" dirty="0">
@@ -25002,6 +25145,1197 @@
         <p:spPr>
           <a:xfrm>
             <a:off x="502920" y="1243584"/>
+            <a:ext cx="3904488" cy="1261872"/>
+          </a:xfrm>
+          <a:prstGeom prst="roundRect">
+            <a:avLst>
+              <a:gd name="adj" fmla="val 6522"/>
+            </a:avLst>
+          </a:prstGeom>
+          <a:solidFill>
+            <a:srgbClr val="1B2A3A"/>
+          </a:solidFill>
+          <a:ln w="12700">
+            <a:solidFill>
+              <a:srgbClr val="DBE3EA"/>
+            </a:solidFill>
+            <a:prstDash val="solid"/>
+          </a:ln>
+        </p:spPr>
+      </p:sp>
+      <p:sp>
+        <p:nvSpPr>
+          <p:cNvPr id="5" name="Shape 3"/>
+          <p:cNvSpPr/>
+          <p:nvPr/>
+        </p:nvSpPr>
+        <p:spPr>
+          <a:xfrm>
+            <a:off x="539496" y="2231136"/>
+            <a:ext cx="3831336" cy="237744"/>
+          </a:xfrm>
+          <a:prstGeom prst="rect">
+            <a:avLst/>
+          </a:prstGeom>
+          <a:solidFill>
+            <a:srgbClr val="2C3E4E"/>
+          </a:solidFill>
+          <a:ln/>
+        </p:spPr>
+      </p:sp>
+      <p:sp>
+        <p:nvSpPr>
+          <p:cNvPr id="6" name="Shape 4"/>
+          <p:cNvSpPr/>
+          <p:nvPr/>
+        </p:nvSpPr>
+        <p:spPr>
+          <a:xfrm>
+            <a:off x="1649839" y="1335024"/>
+            <a:ext cx="91440" cy="274320"/>
+          </a:xfrm>
+          <a:prstGeom prst="line">
+            <a:avLst/>
+          </a:prstGeom>
+          <a:noFill/>
+          <a:ln w="12700">
+            <a:solidFill>
+              <a:srgbClr val="AFC8DC">
+                <a:alpha val="65000"/>
+              </a:srgbClr>
+            </a:solidFill>
+            <a:prstDash val="solid"/>
+          </a:ln>
+        </p:spPr>
+      </p:sp>
+      <p:sp>
+        <p:nvSpPr>
+          <p:cNvPr id="7" name="Shape 5"/>
+          <p:cNvSpPr/>
+          <p:nvPr/>
+        </p:nvSpPr>
+        <p:spPr>
+          <a:xfrm>
+            <a:off x="1995569" y="1335024"/>
+            <a:ext cx="91440" cy="274320"/>
+          </a:xfrm>
+          <a:prstGeom prst="line">
+            <a:avLst/>
+          </a:prstGeom>
+          <a:noFill/>
+          <a:ln w="12700">
+            <a:solidFill>
+              <a:srgbClr val="AFC8DC">
+                <a:alpha val="65000"/>
+              </a:srgbClr>
+            </a:solidFill>
+            <a:prstDash val="solid"/>
+          </a:ln>
+        </p:spPr>
+      </p:sp>
+      <p:sp>
+        <p:nvSpPr>
+          <p:cNvPr id="8" name="Shape 6"/>
+          <p:cNvSpPr/>
+          <p:nvPr/>
+        </p:nvSpPr>
+        <p:spPr>
+          <a:xfrm>
+            <a:off x="2341299" y="1335024"/>
+            <a:ext cx="91440" cy="274320"/>
+          </a:xfrm>
+          <a:prstGeom prst="line">
+            <a:avLst/>
+          </a:prstGeom>
+          <a:noFill/>
+          <a:ln w="12700">
+            <a:solidFill>
+              <a:srgbClr val="AFC8DC">
+                <a:alpha val="65000"/>
+              </a:srgbClr>
+            </a:solidFill>
+            <a:prstDash val="solid"/>
+          </a:ln>
+        </p:spPr>
+      </p:sp>
+      <p:sp>
+        <p:nvSpPr>
+          <p:cNvPr id="9" name="Shape 7"/>
+          <p:cNvSpPr/>
+          <p:nvPr/>
+        </p:nvSpPr>
+        <p:spPr>
+          <a:xfrm>
+            <a:off x="2687030" y="1335024"/>
+            <a:ext cx="91440" cy="274320"/>
+          </a:xfrm>
+          <a:prstGeom prst="line">
+            <a:avLst/>
+          </a:prstGeom>
+          <a:noFill/>
+          <a:ln w="12700">
+            <a:solidFill>
+              <a:srgbClr val="AFC8DC">
+                <a:alpha val="65000"/>
+              </a:srgbClr>
+            </a:solidFill>
+            <a:prstDash val="solid"/>
+          </a:ln>
+        </p:spPr>
+      </p:sp>
+      <p:sp>
+        <p:nvSpPr>
+          <p:cNvPr id="10" name="Shape 8"/>
+          <p:cNvSpPr/>
+          <p:nvPr/>
+        </p:nvSpPr>
+        <p:spPr>
+          <a:xfrm>
+            <a:off x="3032760" y="1335024"/>
+            <a:ext cx="91440" cy="274320"/>
+          </a:xfrm>
+          <a:prstGeom prst="line">
+            <a:avLst/>
+          </a:prstGeom>
+          <a:noFill/>
+          <a:ln w="12700">
+            <a:solidFill>
+              <a:srgbClr val="AFC8DC">
+                <a:alpha val="65000"/>
+              </a:srgbClr>
+            </a:solidFill>
+            <a:prstDash val="solid"/>
+          </a:ln>
+        </p:spPr>
+      </p:sp>
+      <p:sp>
+        <p:nvSpPr>
+          <p:cNvPr id="11" name="Shape 9"/>
+          <p:cNvSpPr/>
+          <p:nvPr/>
+        </p:nvSpPr>
+        <p:spPr>
+          <a:xfrm>
+            <a:off x="3378490" y="1335024"/>
+            <a:ext cx="91440" cy="274320"/>
+          </a:xfrm>
+          <a:prstGeom prst="line">
+            <a:avLst/>
+          </a:prstGeom>
+          <a:noFill/>
+          <a:ln w="12700">
+            <a:solidFill>
+              <a:srgbClr val="AFC8DC">
+                <a:alpha val="65000"/>
+              </a:srgbClr>
+            </a:solidFill>
+            <a:prstDash val="solid"/>
+          </a:ln>
+        </p:spPr>
+      </p:sp>
+      <p:sp>
+        <p:nvSpPr>
+          <p:cNvPr id="12" name="Shape 10"/>
+          <p:cNvSpPr/>
+          <p:nvPr/>
+        </p:nvSpPr>
+        <p:spPr>
+          <a:xfrm>
+            <a:off x="3724221" y="1335024"/>
+            <a:ext cx="91440" cy="274320"/>
+          </a:xfrm>
+          <a:prstGeom prst="line">
+            <a:avLst/>
+          </a:prstGeom>
+          <a:noFill/>
+          <a:ln w="12700">
+            <a:solidFill>
+              <a:srgbClr val="AFC8DC">
+                <a:alpha val="65000"/>
+              </a:srgbClr>
+            </a:solidFill>
+            <a:prstDash val="solid"/>
+          </a:ln>
+        </p:spPr>
+      </p:sp>
+      <p:sp>
+        <p:nvSpPr>
+          <p:cNvPr id="13" name="Shape 11"/>
+          <p:cNvSpPr/>
+          <p:nvPr/>
+        </p:nvSpPr>
+        <p:spPr>
+          <a:xfrm>
+            <a:off x="4069951" y="1335024"/>
+            <a:ext cx="91440" cy="274320"/>
+          </a:xfrm>
+          <a:prstGeom prst="line">
+            <a:avLst/>
+          </a:prstGeom>
+          <a:noFill/>
+          <a:ln w="12700">
+            <a:solidFill>
+              <a:srgbClr val="AFC8DC">
+                <a:alpha val="65000"/>
+              </a:srgbClr>
+            </a:solidFill>
+            <a:prstDash val="solid"/>
+          </a:ln>
+        </p:spPr>
+      </p:sp>
+      <p:sp>
+        <p:nvSpPr>
+          <p:cNvPr id="14" name="Shape 12"/>
+          <p:cNvSpPr/>
+          <p:nvPr/>
+        </p:nvSpPr>
+        <p:spPr>
+          <a:xfrm>
+            <a:off x="612648" y="1719072"/>
+            <a:ext cx="91440" cy="274320"/>
+          </a:xfrm>
+          <a:prstGeom prst="line">
+            <a:avLst/>
+          </a:prstGeom>
+          <a:noFill/>
+          <a:ln w="12700">
+            <a:solidFill>
+              <a:srgbClr val="AFC8DC">
+                <a:alpha val="65000"/>
+              </a:srgbClr>
+            </a:solidFill>
+            <a:prstDash val="solid"/>
+          </a:ln>
+        </p:spPr>
+      </p:sp>
+      <p:sp>
+        <p:nvSpPr>
+          <p:cNvPr id="15" name="Shape 13"/>
+          <p:cNvSpPr/>
+          <p:nvPr/>
+        </p:nvSpPr>
+        <p:spPr>
+          <a:xfrm>
+            <a:off x="958378" y="1719072"/>
+            <a:ext cx="91440" cy="274320"/>
+          </a:xfrm>
+          <a:prstGeom prst="line">
+            <a:avLst/>
+          </a:prstGeom>
+          <a:noFill/>
+          <a:ln w="12700">
+            <a:solidFill>
+              <a:srgbClr val="AFC8DC">
+                <a:alpha val="65000"/>
+              </a:srgbClr>
+            </a:solidFill>
+            <a:prstDash val="solid"/>
+          </a:ln>
+        </p:spPr>
+      </p:sp>
+      <p:sp>
+        <p:nvSpPr>
+          <p:cNvPr id="16" name="Shape 14"/>
+          <p:cNvSpPr/>
+          <p:nvPr/>
+        </p:nvSpPr>
+        <p:spPr>
+          <a:xfrm>
+            <a:off x="1304109" y="1719072"/>
+            <a:ext cx="91440" cy="274320"/>
+          </a:xfrm>
+          <a:prstGeom prst="line">
+            <a:avLst/>
+          </a:prstGeom>
+          <a:noFill/>
+          <a:ln w="12700">
+            <a:solidFill>
+              <a:srgbClr val="AFC8DC">
+                <a:alpha val="65000"/>
+              </a:srgbClr>
+            </a:solidFill>
+            <a:prstDash val="solid"/>
+          </a:ln>
+        </p:spPr>
+      </p:sp>
+      <p:sp>
+        <p:nvSpPr>
+          <p:cNvPr id="17" name="Shape 15"/>
+          <p:cNvSpPr/>
+          <p:nvPr/>
+        </p:nvSpPr>
+        <p:spPr>
+          <a:xfrm>
+            <a:off x="1649839" y="1719072"/>
+            <a:ext cx="91440" cy="274320"/>
+          </a:xfrm>
+          <a:prstGeom prst="line">
+            <a:avLst/>
+          </a:prstGeom>
+          <a:noFill/>
+          <a:ln w="12700">
+            <a:solidFill>
+              <a:srgbClr val="AFC8DC">
+                <a:alpha val="65000"/>
+              </a:srgbClr>
+            </a:solidFill>
+            <a:prstDash val="solid"/>
+          </a:ln>
+        </p:spPr>
+      </p:sp>
+      <p:sp>
+        <p:nvSpPr>
+          <p:cNvPr id="18" name="Shape 16"/>
+          <p:cNvSpPr/>
+          <p:nvPr/>
+        </p:nvSpPr>
+        <p:spPr>
+          <a:xfrm>
+            <a:off x="1995569" y="1719072"/>
+            <a:ext cx="91440" cy="274320"/>
+          </a:xfrm>
+          <a:prstGeom prst="line">
+            <a:avLst/>
+          </a:prstGeom>
+          <a:noFill/>
+          <a:ln w="12700">
+            <a:solidFill>
+              <a:srgbClr val="AFC8DC">
+                <a:alpha val="65000"/>
+              </a:srgbClr>
+            </a:solidFill>
+            <a:prstDash val="solid"/>
+          </a:ln>
+        </p:spPr>
+      </p:sp>
+      <p:sp>
+        <p:nvSpPr>
+          <p:cNvPr id="19" name="Shape 17"/>
+          <p:cNvSpPr/>
+          <p:nvPr/>
+        </p:nvSpPr>
+        <p:spPr>
+          <a:xfrm>
+            <a:off x="2341299" y="1719072"/>
+            <a:ext cx="91440" cy="274320"/>
+          </a:xfrm>
+          <a:prstGeom prst="line">
+            <a:avLst/>
+          </a:prstGeom>
+          <a:noFill/>
+          <a:ln w="12700">
+            <a:solidFill>
+              <a:srgbClr val="AFC8DC">
+                <a:alpha val="65000"/>
+              </a:srgbClr>
+            </a:solidFill>
+            <a:prstDash val="solid"/>
+          </a:ln>
+        </p:spPr>
+      </p:sp>
+      <p:sp>
+        <p:nvSpPr>
+          <p:cNvPr id="20" name="Shape 18"/>
+          <p:cNvSpPr/>
+          <p:nvPr/>
+        </p:nvSpPr>
+        <p:spPr>
+          <a:xfrm>
+            <a:off x="2687030" y="1719072"/>
+            <a:ext cx="91440" cy="274320"/>
+          </a:xfrm>
+          <a:prstGeom prst="line">
+            <a:avLst/>
+          </a:prstGeom>
+          <a:noFill/>
+          <a:ln w="12700">
+            <a:solidFill>
+              <a:srgbClr val="AFC8DC">
+                <a:alpha val="65000"/>
+              </a:srgbClr>
+            </a:solidFill>
+            <a:prstDash val="solid"/>
+          </a:ln>
+        </p:spPr>
+      </p:sp>
+      <p:sp>
+        <p:nvSpPr>
+          <p:cNvPr id="21" name="Shape 19"/>
+          <p:cNvSpPr/>
+          <p:nvPr/>
+        </p:nvSpPr>
+        <p:spPr>
+          <a:xfrm>
+            <a:off x="3032760" y="1719072"/>
+            <a:ext cx="91440" cy="274320"/>
+          </a:xfrm>
+          <a:prstGeom prst="line">
+            <a:avLst/>
+          </a:prstGeom>
+          <a:noFill/>
+          <a:ln w="12700">
+            <a:solidFill>
+              <a:srgbClr val="AFC8DC">
+                <a:alpha val="65000"/>
+              </a:srgbClr>
+            </a:solidFill>
+            <a:prstDash val="solid"/>
+          </a:ln>
+        </p:spPr>
+      </p:sp>
+      <p:sp>
+        <p:nvSpPr>
+          <p:cNvPr id="22" name="Shape 20"/>
+          <p:cNvSpPr/>
+          <p:nvPr/>
+        </p:nvSpPr>
+        <p:spPr>
+          <a:xfrm>
+            <a:off x="3378490" y="1719072"/>
+            <a:ext cx="91440" cy="274320"/>
+          </a:xfrm>
+          <a:prstGeom prst="line">
+            <a:avLst/>
+          </a:prstGeom>
+          <a:noFill/>
+          <a:ln w="12700">
+            <a:solidFill>
+              <a:srgbClr val="AFC8DC">
+                <a:alpha val="65000"/>
+              </a:srgbClr>
+            </a:solidFill>
+            <a:prstDash val="solid"/>
+          </a:ln>
+        </p:spPr>
+      </p:sp>
+      <p:sp>
+        <p:nvSpPr>
+          <p:cNvPr id="23" name="Shape 21"/>
+          <p:cNvSpPr/>
+          <p:nvPr/>
+        </p:nvSpPr>
+        <p:spPr>
+          <a:xfrm>
+            <a:off x="3724221" y="1719072"/>
+            <a:ext cx="91440" cy="274320"/>
+          </a:xfrm>
+          <a:prstGeom prst="line">
+            <a:avLst/>
+          </a:prstGeom>
+          <a:noFill/>
+          <a:ln w="12700">
+            <a:solidFill>
+              <a:srgbClr val="AFC8DC">
+                <a:alpha val="65000"/>
+              </a:srgbClr>
+            </a:solidFill>
+            <a:prstDash val="solid"/>
+          </a:ln>
+        </p:spPr>
+      </p:sp>
+      <p:sp>
+        <p:nvSpPr>
+          <p:cNvPr id="24" name="Shape 22"/>
+          <p:cNvSpPr/>
+          <p:nvPr/>
+        </p:nvSpPr>
+        <p:spPr>
+          <a:xfrm>
+            <a:off x="4069951" y="1719072"/>
+            <a:ext cx="91440" cy="274320"/>
+          </a:xfrm>
+          <a:prstGeom prst="line">
+            <a:avLst/>
+          </a:prstGeom>
+          <a:noFill/>
+          <a:ln w="12700">
+            <a:solidFill>
+              <a:srgbClr val="AFC8DC">
+                <a:alpha val="65000"/>
+              </a:srgbClr>
+            </a:solidFill>
+            <a:prstDash val="solid"/>
+          </a:ln>
+        </p:spPr>
+      </p:sp>
+      <p:sp>
+        <p:nvSpPr>
+          <p:cNvPr id="25" name="Shape 23"/>
+          <p:cNvSpPr/>
+          <p:nvPr/>
+        </p:nvSpPr>
+        <p:spPr>
+          <a:xfrm>
+            <a:off x="1014984" y="1860804"/>
+            <a:ext cx="576072" cy="148133"/>
+          </a:xfrm>
+          <a:prstGeom prst="roundRect">
+            <a:avLst>
+              <a:gd name="adj" fmla="val 24691"/>
+            </a:avLst>
+          </a:prstGeom>
+          <a:solidFill>
+            <a:srgbClr val="C8D3DE"/>
+          </a:solidFill>
+          <a:ln/>
+        </p:spPr>
+      </p:sp>
+      <p:sp>
+        <p:nvSpPr>
+          <p:cNvPr id="26" name="Shape 24"/>
+          <p:cNvSpPr/>
+          <p:nvPr/>
+        </p:nvSpPr>
+        <p:spPr>
+          <a:xfrm>
+            <a:off x="777240" y="2008937"/>
+            <a:ext cx="1051560" cy="222199"/>
+          </a:xfrm>
+          <a:prstGeom prst="roundRect">
+            <a:avLst>
+              <a:gd name="adj" fmla="val 20576"/>
+            </a:avLst>
+          </a:prstGeom>
+          <a:solidFill>
+            <a:srgbClr val="9FB0BE"/>
+          </a:solidFill>
+          <a:ln/>
+        </p:spPr>
+      </p:sp>
+      <p:sp>
+        <p:nvSpPr>
+          <p:cNvPr id="27" name="Shape 25"/>
+          <p:cNvSpPr/>
+          <p:nvPr/>
+        </p:nvSpPr>
+        <p:spPr>
+          <a:xfrm>
+            <a:off x="923544" y="2157984"/>
+            <a:ext cx="146304" cy="146304"/>
+          </a:xfrm>
+          <a:prstGeom prst="ellipse">
+            <a:avLst/>
+          </a:prstGeom>
+          <a:solidFill>
+            <a:srgbClr val="44525E"/>
+          </a:solidFill>
+          <a:ln/>
+        </p:spPr>
+      </p:sp>
+      <p:sp>
+        <p:nvSpPr>
+          <p:cNvPr id="28" name="Shape 26"/>
+          <p:cNvSpPr/>
+          <p:nvPr/>
+        </p:nvSpPr>
+        <p:spPr>
+          <a:xfrm>
+            <a:off x="1536192" y="2157984"/>
+            <a:ext cx="146304" cy="146304"/>
+          </a:xfrm>
+          <a:prstGeom prst="ellipse">
+            <a:avLst/>
+          </a:prstGeom>
+          <a:solidFill>
+            <a:srgbClr val="44525E"/>
+          </a:solidFill>
+          <a:ln/>
+        </p:spPr>
+      </p:sp>
+      <p:sp>
+        <p:nvSpPr>
+          <p:cNvPr id="29" name="Shape 27"/>
+          <p:cNvSpPr/>
+          <p:nvPr/>
+        </p:nvSpPr>
+        <p:spPr>
+          <a:xfrm flipV="1">
+            <a:off x="1828800" y="1664208"/>
+            <a:ext cx="1371600" cy="566928"/>
+          </a:xfrm>
+          <a:prstGeom prst="rtTriangle">
+            <a:avLst/>
+          </a:prstGeom>
+          <a:solidFill>
+            <a:srgbClr val="FFE9A8">
+              <a:alpha val="20000"/>
+            </a:srgbClr>
+          </a:solidFill>
+          <a:ln/>
+        </p:spPr>
+      </p:sp>
+      <p:sp>
+        <p:nvSpPr>
+          <p:cNvPr id="30" name="Shape 28"/>
+          <p:cNvSpPr/>
+          <p:nvPr/>
+        </p:nvSpPr>
+        <p:spPr>
+          <a:xfrm>
+            <a:off x="3195645" y="1835749"/>
+            <a:ext cx="100950" cy="100950"/>
+          </a:xfrm>
+          <a:prstGeom prst="ellipse">
+            <a:avLst/>
+          </a:prstGeom>
+          <a:solidFill>
+            <a:srgbClr val="6E8296"/>
+          </a:solidFill>
+          <a:ln/>
+        </p:spPr>
+      </p:sp>
+      <p:sp>
+        <p:nvSpPr>
+          <p:cNvPr id="31" name="Shape 29"/>
+          <p:cNvSpPr/>
+          <p:nvPr/>
+        </p:nvSpPr>
+        <p:spPr>
+          <a:xfrm>
+            <a:off x="3178820" y="1949318"/>
+            <a:ext cx="134600" cy="151425"/>
+          </a:xfrm>
+          <a:prstGeom prst="roundRect">
+            <a:avLst>
+              <a:gd name="adj" fmla="val 203804"/>
+            </a:avLst>
+          </a:prstGeom>
+          <a:solidFill>
+            <a:srgbClr val="6E8296"/>
+          </a:solidFill>
+          <a:ln/>
+        </p:spPr>
+      </p:sp>
+      <p:sp>
+        <p:nvSpPr>
+          <p:cNvPr id="32" name="Shape 30"/>
+          <p:cNvSpPr/>
+          <p:nvPr/>
+        </p:nvSpPr>
+        <p:spPr>
+          <a:xfrm rot="480000">
+            <a:off x="3187233" y="2096536"/>
+            <a:ext cx="37856" cy="109362"/>
+          </a:xfrm>
+          <a:prstGeom prst="rect">
+            <a:avLst/>
+          </a:prstGeom>
+          <a:solidFill>
+            <a:srgbClr val="6E8296"/>
+          </a:solidFill>
+          <a:ln/>
+        </p:spPr>
+      </p:sp>
+      <p:sp>
+        <p:nvSpPr>
+          <p:cNvPr id="33" name="Shape 31"/>
+          <p:cNvSpPr/>
+          <p:nvPr/>
+        </p:nvSpPr>
+        <p:spPr>
+          <a:xfrm rot="-480000">
+            <a:off x="3267151" y="2096536"/>
+            <a:ext cx="37856" cy="109362"/>
+          </a:xfrm>
+          <a:prstGeom prst="rect">
+            <a:avLst/>
+          </a:prstGeom>
+          <a:solidFill>
+            <a:srgbClr val="6E8296"/>
+          </a:solidFill>
+          <a:ln/>
+        </p:spPr>
+      </p:sp>
+      <p:sp>
+        <p:nvSpPr>
+          <p:cNvPr id="34" name="Text 32"/>
+          <p:cNvSpPr txBox="1"/>
+          <p:nvPr/>
+        </p:nvSpPr>
+        <p:spPr>
+          <a:xfrm>
+            <a:off x="612648" y="1298448"/>
+            <a:ext cx="3685032" cy="365760"/>
+          </a:xfrm>
+          <a:prstGeom prst="rect">
+            <a:avLst/>
+          </a:prstGeom>
+          <a:noFill/>
+          <a:ln/>
+        </p:spPr>
+        <p:txBody>
+          <a:bodyPr wrap="square" lIns="0" tIns="0" rIns="0" bIns="0" rtlCol="0" anchor="t"/>
+          <a:lstStyle/>
+          <a:p>
+            <a:pPr indent="0" marL="0">
+              <a:lnSpc>
+                <a:spcPct val="106000"/>
+              </a:lnSpc>
+              <a:buNone/>
+            </a:pPr>
+            <a:r>
+              <a:rPr lang="en-US" sz="1200" b="1" dirty="0">
+                <a:solidFill>
+                  <a:srgbClr val="C8DCEC"/>
+                </a:solidFill>
+                <a:latin typeface="Arial" pitchFamily="34" charset="0"/>
+                <a:ea typeface="Arial" pitchFamily="34" charset="-122"/>
+                <a:cs typeface="Arial" pitchFamily="34" charset="-120"/>
+              </a:rPr>
+              <a:t>Mưa to</a:t>
+            </a:r>
+            <a:endParaRPr lang="en-US" sz="1200" dirty="0"/>
+          </a:p>
+          <a:p>
+            <a:pPr indent="0" marL="0">
+              <a:lnSpc>
+                <a:spcPct val="106000"/>
+              </a:lnSpc>
+              <a:buNone/>
+            </a:pPr>
+            <a:r>
+              <a:rPr lang="en-US" sz="1050" dirty="0">
+                <a:solidFill>
+                  <a:srgbClr val="C8DCEC"/>
+                </a:solidFill>
+                <a:latin typeface="微軟正黑體" pitchFamily="34" charset="0"/>
+                <a:ea typeface="微軟正黑體" pitchFamily="34" charset="-122"/>
+                <a:cs typeface="微軟正黑體" pitchFamily="34" charset="-120"/>
+              </a:rPr>
+              <a:t>大雨</a:t>
+            </a:r>
+            <a:endParaRPr lang="en-US" sz="1200" dirty="0"/>
+          </a:p>
+        </p:txBody>
+      </p:sp>
+      <p:sp>
+        <p:nvSpPr>
+          <p:cNvPr id="35" name="Text 33"/>
+          <p:cNvSpPr txBox="1"/>
+          <p:nvPr/>
+        </p:nvSpPr>
+        <p:spPr>
+          <a:xfrm>
+            <a:off x="612648" y="2212848"/>
+            <a:ext cx="3685032" cy="237744"/>
+          </a:xfrm>
+          <a:prstGeom prst="rect">
+            <a:avLst/>
+          </a:prstGeom>
+          <a:noFill/>
+          <a:ln/>
+        </p:spPr>
+        <p:txBody>
+          <a:bodyPr wrap="square" lIns="0" tIns="0" rIns="0" bIns="0" rtlCol="0" anchor="ctr"/>
+          <a:lstStyle/>
+          <a:p>
+            <a:pPr algn="r" indent="0" marL="0">
+              <a:buNone/>
+            </a:pPr>
+            <a:r>
+              <a:rPr lang="en-US" sz="950" b="1" dirty="0">
+                <a:solidFill>
+                  <a:srgbClr val="C8DCEC"/>
+                </a:solidFill>
+                <a:latin typeface="Arial" pitchFamily="34" charset="0"/>
+                <a:ea typeface="Arial" pitchFamily="34" charset="-122"/>
+                <a:cs typeface="Arial" pitchFamily="34" charset="-120"/>
+              </a:rPr>
+              <a:t>camera 22 m · LiDAR 40 m</a:t>
+            </a:r>
+            <a:endParaRPr lang="en-US" sz="950" dirty="0"/>
+          </a:p>
+        </p:txBody>
+      </p:sp>
+      <p:sp>
+        <p:nvSpPr>
+          <p:cNvPr id="36" name="Shape 34"/>
+          <p:cNvSpPr/>
+          <p:nvPr/>
+        </p:nvSpPr>
+        <p:spPr>
+          <a:xfrm>
+            <a:off x="502920" y="2587752"/>
+            <a:ext cx="3904488" cy="1261872"/>
+          </a:xfrm>
+          <a:prstGeom prst="roundRect">
+            <a:avLst>
+              <a:gd name="adj" fmla="val 6522"/>
+            </a:avLst>
+          </a:prstGeom>
+          <a:solidFill>
+            <a:srgbClr val="9FB0BC"/>
+          </a:solidFill>
+          <a:ln w="12700">
+            <a:solidFill>
+              <a:srgbClr val="DBE3EA"/>
+            </a:solidFill>
+            <a:prstDash val="solid"/>
+          </a:ln>
+        </p:spPr>
+      </p:sp>
+      <p:sp>
+        <p:nvSpPr>
+          <p:cNvPr id="37" name="Shape 35"/>
+          <p:cNvSpPr/>
+          <p:nvPr/>
+        </p:nvSpPr>
+        <p:spPr>
+          <a:xfrm>
+            <a:off x="539496" y="3575304"/>
+            <a:ext cx="3831336" cy="237744"/>
+          </a:xfrm>
+          <a:prstGeom prst="rect">
+            <a:avLst/>
+          </a:prstGeom>
+          <a:solidFill>
+            <a:srgbClr val="8A9BA8"/>
+          </a:solidFill>
+          <a:ln/>
+        </p:spPr>
+      </p:sp>
+      <p:sp>
+        <p:nvSpPr>
+          <p:cNvPr id="38" name="Shape 36"/>
+          <p:cNvSpPr/>
+          <p:nvPr/>
+        </p:nvSpPr>
+        <p:spPr>
+          <a:xfrm>
+            <a:off x="1014984" y="3204972"/>
+            <a:ext cx="576072" cy="148133"/>
+          </a:xfrm>
+          <a:prstGeom prst="roundRect">
+            <a:avLst>
+              <a:gd name="adj" fmla="val 24691"/>
+            </a:avLst>
+          </a:prstGeom>
+          <a:solidFill>
+            <a:srgbClr val="7E93A4"/>
+          </a:solidFill>
+          <a:ln/>
+        </p:spPr>
+      </p:sp>
+      <p:sp>
+        <p:nvSpPr>
+          <p:cNvPr id="39" name="Shape 37"/>
+          <p:cNvSpPr/>
+          <p:nvPr/>
+        </p:nvSpPr>
+        <p:spPr>
+          <a:xfrm>
+            <a:off x="777240" y="3353105"/>
+            <a:ext cx="1051560" cy="222199"/>
+          </a:xfrm>
+          <a:prstGeom prst="roundRect">
+            <a:avLst>
+              <a:gd name="adj" fmla="val 20576"/>
+            </a:avLst>
+          </a:prstGeom>
+          <a:solidFill>
+            <a:srgbClr val="5E7182"/>
+          </a:solidFill>
+          <a:ln/>
+        </p:spPr>
+      </p:sp>
+      <p:sp>
+        <p:nvSpPr>
+          <p:cNvPr id="40" name="Shape 38"/>
+          <p:cNvSpPr/>
+          <p:nvPr/>
+        </p:nvSpPr>
+        <p:spPr>
+          <a:xfrm>
+            <a:off x="923544" y="3502152"/>
+            <a:ext cx="146304" cy="146304"/>
+          </a:xfrm>
+          <a:prstGeom prst="ellipse">
+            <a:avLst/>
+          </a:prstGeom>
+          <a:solidFill>
+            <a:srgbClr val="44525E"/>
+          </a:solidFill>
+          <a:ln/>
+        </p:spPr>
+      </p:sp>
+      <p:sp>
+        <p:nvSpPr>
+          <p:cNvPr id="41" name="Shape 39"/>
+          <p:cNvSpPr/>
+          <p:nvPr/>
+        </p:nvSpPr>
+        <p:spPr>
+          <a:xfrm>
+            <a:off x="1536192" y="3502152"/>
+            <a:ext cx="146304" cy="146304"/>
+          </a:xfrm>
+          <a:prstGeom prst="ellipse">
+            <a:avLst/>
+          </a:prstGeom>
+          <a:solidFill>
+            <a:srgbClr val="44525E"/>
+          </a:solidFill>
+          <a:ln/>
+        </p:spPr>
+      </p:sp>
+      <p:sp>
+        <p:nvSpPr>
+          <p:cNvPr id="42" name="Shape 40"/>
+          <p:cNvSpPr/>
+          <p:nvPr/>
+        </p:nvSpPr>
+        <p:spPr>
+          <a:xfrm flipV="1">
+            <a:off x="1828800" y="3008376"/>
+            <a:ext cx="1371600" cy="566928"/>
+          </a:xfrm>
+          <a:prstGeom prst="rtTriangle">
+            <a:avLst/>
+          </a:prstGeom>
+          <a:solidFill>
+            <a:srgbClr val="FFE9A8">
+              <a:alpha val="12000"/>
+            </a:srgbClr>
+          </a:solidFill>
+          <a:ln/>
+        </p:spPr>
+      </p:sp>
+      <p:sp>
+        <p:nvSpPr>
+          <p:cNvPr id="43" name="Shape 41"/>
+          <p:cNvSpPr/>
+          <p:nvPr/>
+        </p:nvSpPr>
+        <p:spPr>
+          <a:xfrm>
+            <a:off x="3195645" y="3179917"/>
+            <a:ext cx="100950" cy="100950"/>
+          </a:xfrm>
+          <a:prstGeom prst="ellipse">
+            <a:avLst/>
+          </a:prstGeom>
+          <a:solidFill>
+            <a:srgbClr val="7F8F9C"/>
+          </a:solidFill>
+          <a:ln/>
+        </p:spPr>
+      </p:sp>
+      <p:sp>
+        <p:nvSpPr>
+          <p:cNvPr id="44" name="Shape 42"/>
+          <p:cNvSpPr/>
+          <p:nvPr/>
+        </p:nvSpPr>
+        <p:spPr>
+          <a:xfrm>
+            <a:off x="3178820" y="3293486"/>
+            <a:ext cx="134600" cy="151425"/>
+          </a:xfrm>
+          <a:prstGeom prst="roundRect">
+            <a:avLst>
+              <a:gd name="adj" fmla="val 203804"/>
+            </a:avLst>
+          </a:prstGeom>
+          <a:solidFill>
+            <a:srgbClr val="7F8F9C"/>
+          </a:solidFill>
+          <a:ln/>
+        </p:spPr>
+      </p:sp>
+      <p:sp>
+        <p:nvSpPr>
+          <p:cNvPr id="45" name="Shape 43"/>
+          <p:cNvSpPr/>
+          <p:nvPr/>
+        </p:nvSpPr>
+        <p:spPr>
+          <a:xfrm rot="480000">
+            <a:off x="3187233" y="3440704"/>
+            <a:ext cx="37856" cy="109362"/>
+          </a:xfrm>
+          <a:prstGeom prst="rect">
+            <a:avLst/>
+          </a:prstGeom>
+          <a:solidFill>
+            <a:srgbClr val="7F8F9C"/>
+          </a:solidFill>
+          <a:ln/>
+        </p:spPr>
+      </p:sp>
+      <p:sp>
+        <p:nvSpPr>
+          <p:cNvPr id="46" name="Shape 44"/>
+          <p:cNvSpPr/>
+          <p:nvPr/>
+        </p:nvSpPr>
+        <p:spPr>
+          <a:xfrm rot="-480000">
+            <a:off x="3267151" y="3440704"/>
+            <a:ext cx="37856" cy="109362"/>
+          </a:xfrm>
+          <a:prstGeom prst="rect">
+            <a:avLst/>
+          </a:prstGeom>
+          <a:solidFill>
+            <a:srgbClr val="7F8F9C"/>
+          </a:solidFill>
+          <a:ln/>
+        </p:spPr>
+      </p:sp>
+      <p:sp>
+        <p:nvSpPr>
+          <p:cNvPr id="47" name="Shape 45"/>
+          <p:cNvSpPr/>
+          <p:nvPr/>
+        </p:nvSpPr>
+        <p:spPr>
+          <a:xfrm>
+            <a:off x="2298984" y="2624328"/>
+            <a:ext cx="2071848" cy="1188720"/>
+          </a:xfrm>
+          <a:prstGeom prst="rect">
+            <a:avLst/>
+          </a:prstGeom>
+          <a:solidFill>
+            <a:srgbClr val="FFFFFF">
+              <a:alpha val="24000"/>
+            </a:srgbClr>
+          </a:solidFill>
+          <a:ln/>
+        </p:spPr>
+      </p:sp>
+      <p:sp>
+        <p:nvSpPr>
+          <p:cNvPr id="48" name="Shape 46"/>
+          <p:cNvSpPr/>
+          <p:nvPr/>
+        </p:nvSpPr>
+        <p:spPr>
+          <a:xfrm>
+            <a:off x="3079882" y="2624328"/>
+            <a:ext cx="1290950" cy="1188720"/>
+          </a:xfrm>
+          <a:prstGeom prst="rect">
+            <a:avLst/>
+          </a:prstGeom>
+          <a:solidFill>
+            <a:srgbClr val="FFFFFF">
+              <a:alpha val="36000"/>
+            </a:srgbClr>
+          </a:solidFill>
+          <a:ln/>
+        </p:spPr>
+      </p:sp>
+      <p:sp>
+        <p:nvSpPr>
+          <p:cNvPr id="49" name="Text 47"/>
+          <p:cNvSpPr txBox="1"/>
+          <p:nvPr/>
+        </p:nvSpPr>
+        <p:spPr>
+          <a:xfrm>
+            <a:off x="612648" y="2642616"/>
+            <a:ext cx="3685032" cy="365760"/>
+          </a:xfrm>
+          <a:prstGeom prst="rect">
+            <a:avLst/>
+          </a:prstGeom>
+          <a:noFill/>
+          <a:ln/>
+        </p:spPr>
+        <p:txBody>
+          <a:bodyPr wrap="square" lIns="0" tIns="0" rIns="0" bIns="0" rtlCol="0" anchor="t"/>
+          <a:lstStyle/>
+          <a:p>
+            <a:pPr indent="0" marL="0">
+              <a:lnSpc>
+                <a:spcPct val="106000"/>
+              </a:lnSpc>
+              <a:buNone/>
+            </a:pPr>
+            <a:r>
+              <a:rPr lang="en-US" sz="1200" b="1" dirty="0">
+                <a:solidFill>
+                  <a:srgbClr val="24323C"/>
+                </a:solidFill>
+                <a:latin typeface="Arial" pitchFamily="34" charset="0"/>
+                <a:ea typeface="Arial" pitchFamily="34" charset="-122"/>
+                <a:cs typeface="Arial" pitchFamily="34" charset="-120"/>
+              </a:rPr>
+              <a:t>Sương mù dày</a:t>
+            </a:r>
+            <a:endParaRPr lang="en-US" sz="1200" dirty="0"/>
+          </a:p>
+          <a:p>
+            <a:pPr indent="0" marL="0">
+              <a:lnSpc>
+                <a:spcPct val="106000"/>
+              </a:lnSpc>
+              <a:buNone/>
+            </a:pPr>
+            <a:r>
+              <a:rPr lang="en-US" sz="1050" dirty="0">
+                <a:solidFill>
+                  <a:srgbClr val="24323C"/>
+                </a:solidFill>
+                <a:latin typeface="微軟正黑體" pitchFamily="34" charset="0"/>
+                <a:ea typeface="微軟正黑體" pitchFamily="34" charset="-122"/>
+                <a:cs typeface="微軟正黑體" pitchFamily="34" charset="-120"/>
+              </a:rPr>
+              <a:t>濃霧</a:t>
+            </a:r>
+            <a:endParaRPr lang="en-US" sz="1200" dirty="0"/>
+          </a:p>
+        </p:txBody>
+      </p:sp>
+      <p:sp>
+        <p:nvSpPr>
+          <p:cNvPr id="50" name="Text 48"/>
+          <p:cNvSpPr txBox="1"/>
+          <p:nvPr/>
+        </p:nvSpPr>
+        <p:spPr>
+          <a:xfrm>
+            <a:off x="612648" y="3557016"/>
+            <a:ext cx="3685032" cy="237744"/>
+          </a:xfrm>
+          <a:prstGeom prst="rect">
+            <a:avLst/>
+          </a:prstGeom>
+          <a:noFill/>
+          <a:ln/>
+        </p:spPr>
+        <p:txBody>
+          <a:bodyPr wrap="square" lIns="0" tIns="0" rIns="0" bIns="0" rtlCol="0" anchor="ctr"/>
+          <a:lstStyle/>
+          <a:p>
+            <a:pPr algn="r" indent="0" marL="0">
+              <a:buNone/>
+            </a:pPr>
+            <a:r>
+              <a:rPr lang="en-US" sz="950" b="1" dirty="0">
+                <a:solidFill>
+                  <a:srgbClr val="24323C"/>
+                </a:solidFill>
+                <a:latin typeface="Arial" pitchFamily="34" charset="0"/>
+                <a:ea typeface="Arial" pitchFamily="34" charset="-122"/>
+                <a:cs typeface="Arial" pitchFamily="34" charset="-120"/>
+              </a:rPr>
+              <a:t>camera 16 m · LiDAR 45 m</a:t>
+            </a:r>
+            <a:endParaRPr lang="en-US" sz="950" dirty="0"/>
+          </a:p>
+        </p:txBody>
+      </p:sp>
+      <p:sp>
+        <p:nvSpPr>
+          <p:cNvPr id="51" name="Shape 49"/>
+          <p:cNvSpPr/>
+          <p:nvPr/>
+        </p:nvSpPr>
+        <p:spPr>
+          <a:xfrm>
+            <a:off x="4736592" y="1243584"/>
             <a:ext cx="3904488" cy="2578608"/>
           </a:xfrm>
           <a:prstGeom prst="roundRect">
@@ -25022,122 +26356,34 @@
       </p:sp>
       <p:sp>
         <p:nvSpPr>
-          <p:cNvPr id="5" name="Shape 3"/>
+          <p:cNvPr id="52" name="Shape 50"/>
           <p:cNvSpPr/>
           <p:nvPr/>
         </p:nvSpPr>
         <p:spPr>
           <a:xfrm>
-            <a:off x="1372514" y="2174443"/>
-            <a:ext cx="885139" cy="502920"/>
-          </a:xfrm>
-          <a:prstGeom prst="roundRect">
-            <a:avLst>
-              <a:gd name="adj" fmla="val 25455"/>
-            </a:avLst>
+            <a:off x="4919472" y="1408176"/>
+            <a:ext cx="347472" cy="347472"/>
+          </a:xfrm>
+          <a:prstGeom prst="ellipse">
+            <a:avLst/>
           </a:prstGeom>
           <a:solidFill>
-            <a:srgbClr val="0B1F3A"/>
+            <a:srgbClr val="D9463E"/>
           </a:solidFill>
           <a:ln/>
         </p:spPr>
       </p:sp>
       <p:sp>
         <p:nvSpPr>
-          <p:cNvPr id="6" name="Shape 4"/>
-          <p:cNvSpPr/>
-          <p:nvPr/>
-        </p:nvSpPr>
-        <p:spPr>
-          <a:xfrm>
-            <a:off x="1573682" y="2073859"/>
-            <a:ext cx="261518" cy="120701"/>
-          </a:xfrm>
-          <a:prstGeom prst="roundRect">
-            <a:avLst>
-              <a:gd name="adj" fmla="val 227272"/>
-            </a:avLst>
-          </a:prstGeom>
-          <a:solidFill>
-            <a:srgbClr val="0B1F3A"/>
-          </a:solidFill>
-          <a:ln/>
-        </p:spPr>
-      </p:sp>
-      <p:sp>
-        <p:nvSpPr>
-          <p:cNvPr id="7" name="Shape 5"/>
-          <p:cNvSpPr/>
-          <p:nvPr/>
-        </p:nvSpPr>
-        <p:spPr>
-          <a:xfrm>
-            <a:off x="1654150" y="2254910"/>
-            <a:ext cx="321869" cy="321869"/>
-          </a:xfrm>
-          <a:prstGeom prst="ellipse">
-            <a:avLst/>
-          </a:prstGeom>
-          <a:solidFill>
-            <a:srgbClr val="FFFFFF"/>
-          </a:solidFill>
-          <a:ln/>
-        </p:spPr>
-      </p:sp>
-      <p:sp>
-        <p:nvSpPr>
-          <p:cNvPr id="8" name="Shape 6"/>
-          <p:cNvSpPr/>
-          <p:nvPr/>
-        </p:nvSpPr>
-        <p:spPr>
-          <a:xfrm>
-            <a:off x="1724558" y="2325319"/>
-            <a:ext cx="181051" cy="181051"/>
-          </a:xfrm>
-          <a:prstGeom prst="ellipse">
-            <a:avLst/>
-          </a:prstGeom>
-          <a:solidFill>
-            <a:srgbClr val="0B1F3A">
-              <a:alpha val="70000"/>
-            </a:srgbClr>
-          </a:solidFill>
-          <a:ln/>
-        </p:spPr>
-      </p:sp>
-      <p:sp>
-        <p:nvSpPr>
-          <p:cNvPr id="9" name="Shape 7"/>
-          <p:cNvSpPr/>
-          <p:nvPr/>
-        </p:nvSpPr>
-        <p:spPr>
-          <a:xfrm>
-            <a:off x="2056486" y="2234794"/>
-            <a:ext cx="100584" cy="100584"/>
-          </a:xfrm>
-          <a:prstGeom prst="ellipse">
-            <a:avLst/>
-          </a:prstGeom>
-          <a:solidFill>
-            <a:srgbClr val="FFFFFF">
-              <a:alpha val="60000"/>
-            </a:srgbClr>
-          </a:solidFill>
-          <a:ln/>
-        </p:spPr>
-      </p:sp>
-      <p:sp>
-        <p:nvSpPr>
-          <p:cNvPr id="10" name="Text 8"/>
+          <p:cNvPr id="53" name="Text 51"/>
           <p:cNvSpPr txBox="1"/>
           <p:nvPr/>
         </p:nvSpPr>
         <p:spPr>
           <a:xfrm>
-            <a:off x="2318004" y="2212848"/>
-            <a:ext cx="274320" cy="365760"/>
+            <a:off x="4919472" y="1453896"/>
+            <a:ext cx="347472" cy="256032"/>
           </a:xfrm>
           <a:prstGeom prst="rect">
             <a:avLst/>
@@ -25153,353 +26399,30 @@
               <a:buNone/>
             </a:pPr>
             <a:r>
-              <a:rPr lang="en-US" sz="1700" b="1" dirty="0">
-                <a:solidFill>
-                  <a:srgbClr val="5F7183"/>
-                </a:solidFill>
-                <a:latin typeface="微軟正黑體" pitchFamily="34" charset="0"/>
-                <a:ea typeface="微軟正黑體" pitchFamily="34" charset="-122"/>
-                <a:cs typeface="微軟正黑體" pitchFamily="34" charset="-120"/>
-              </a:rPr>
-              <a:t>vs</a:t>
-            </a:r>
-            <a:endParaRPr lang="en-US" sz="1700" dirty="0"/>
-          </a:p>
-        </p:txBody>
-      </p:sp>
-      <p:sp>
-        <p:nvSpPr>
-          <p:cNvPr id="11" name="Shape 9"/>
-          <p:cNvSpPr/>
-          <p:nvPr/>
-        </p:nvSpPr>
-        <p:spPr>
-          <a:xfrm rot="-2280000">
-            <a:off x="3257149" y="2057185"/>
-            <a:ext cx="341986" cy="36210"/>
-          </a:xfrm>
-          <a:prstGeom prst="rect">
-            <a:avLst/>
-          </a:prstGeom>
-          <a:solidFill>
-            <a:srgbClr val="0B1F3A">
-              <a:alpha val="45000"/>
-            </a:srgbClr>
-          </a:solidFill>
-          <a:ln/>
-        </p:spPr>
-      </p:sp>
-      <p:sp>
-        <p:nvSpPr>
-          <p:cNvPr id="12" name="Shape 10"/>
-          <p:cNvSpPr/>
-          <p:nvPr/>
-        </p:nvSpPr>
-        <p:spPr>
-          <a:xfrm rot="-1140000">
-            <a:off x="3323688" y="2179735"/>
-            <a:ext cx="341986" cy="36210"/>
-          </a:xfrm>
-          <a:prstGeom prst="rect">
-            <a:avLst/>
-          </a:prstGeom>
-          <a:solidFill>
-            <a:srgbClr val="0B1F3A">
-              <a:alpha val="45000"/>
-            </a:srgbClr>
-          </a:solidFill>
-          <a:ln/>
-        </p:spPr>
-      </p:sp>
-      <p:sp>
-        <p:nvSpPr>
-          <p:cNvPr id="13" name="Shape 11"/>
-          <p:cNvSpPr/>
-          <p:nvPr/>
-        </p:nvSpPr>
-        <p:spPr>
-          <a:xfrm>
-            <a:off x="3346704" y="2317272"/>
-            <a:ext cx="341986" cy="36210"/>
-          </a:xfrm>
-          <a:prstGeom prst="rect">
-            <a:avLst/>
-          </a:prstGeom>
-          <a:solidFill>
-            <a:srgbClr val="0B1F3A">
-              <a:alpha val="45000"/>
-            </a:srgbClr>
-          </a:solidFill>
-          <a:ln/>
-        </p:spPr>
-      </p:sp>
-      <p:sp>
-        <p:nvSpPr>
-          <p:cNvPr id="14" name="Shape 12"/>
-          <p:cNvSpPr/>
-          <p:nvPr/>
-        </p:nvSpPr>
-        <p:spPr>
-          <a:xfrm rot="1140000">
-            <a:off x="3323688" y="2454810"/>
-            <a:ext cx="341986" cy="36210"/>
-          </a:xfrm>
-          <a:prstGeom prst="rect">
-            <a:avLst/>
-          </a:prstGeom>
-          <a:solidFill>
-            <a:srgbClr val="0B1F3A">
-              <a:alpha val="45000"/>
-            </a:srgbClr>
-          </a:solidFill>
-          <a:ln/>
-        </p:spPr>
-      </p:sp>
-      <p:sp>
-        <p:nvSpPr>
-          <p:cNvPr id="15" name="Shape 13"/>
-          <p:cNvSpPr/>
-          <p:nvPr/>
-        </p:nvSpPr>
-        <p:spPr>
-          <a:xfrm rot="2280000">
-            <a:off x="3257149" y="2577360"/>
-            <a:ext cx="341986" cy="36210"/>
-          </a:xfrm>
-          <a:prstGeom prst="rect">
-            <a:avLst/>
-          </a:prstGeom>
-          <a:solidFill>
-            <a:srgbClr val="0B1F3A">
-              <a:alpha val="45000"/>
-            </a:srgbClr>
-          </a:solidFill>
-          <a:ln/>
-        </p:spPr>
-      </p:sp>
-      <p:sp>
-        <p:nvSpPr>
-          <p:cNvPr id="16" name="Shape 14"/>
-          <p:cNvSpPr/>
-          <p:nvPr/>
-        </p:nvSpPr>
-        <p:spPr>
-          <a:xfrm>
-            <a:off x="2813609" y="2134210"/>
-            <a:ext cx="362102" cy="130759"/>
-          </a:xfrm>
-          <a:prstGeom prst="ellipse">
-            <a:avLst/>
-          </a:prstGeom>
-          <a:solidFill>
-            <a:srgbClr val="0B1F3A"/>
-          </a:solidFill>
-          <a:ln/>
-        </p:spPr>
-      </p:sp>
-      <p:sp>
-        <p:nvSpPr>
-          <p:cNvPr id="17" name="Shape 15"/>
-          <p:cNvSpPr/>
-          <p:nvPr/>
-        </p:nvSpPr>
-        <p:spPr>
-          <a:xfrm>
-            <a:off x="2813609" y="2194560"/>
-            <a:ext cx="362102" cy="341986"/>
-          </a:xfrm>
-          <a:prstGeom prst="rect">
-            <a:avLst/>
-          </a:prstGeom>
-          <a:solidFill>
-            <a:srgbClr val="0B1F3A"/>
-          </a:solidFill>
-          <a:ln/>
-        </p:spPr>
-      </p:sp>
-      <p:sp>
-        <p:nvSpPr>
-          <p:cNvPr id="18" name="Shape 16"/>
-          <p:cNvSpPr/>
-          <p:nvPr/>
-        </p:nvSpPr>
-        <p:spPr>
-          <a:xfrm>
-            <a:off x="2813609" y="2466137"/>
-            <a:ext cx="362102" cy="130759"/>
-          </a:xfrm>
-          <a:prstGeom prst="ellipse">
-            <a:avLst/>
-          </a:prstGeom>
-          <a:solidFill>
-            <a:srgbClr val="0B1F3A"/>
-          </a:solidFill>
-          <a:ln/>
-        </p:spPr>
-      </p:sp>
-      <p:sp>
-        <p:nvSpPr>
-          <p:cNvPr id="19" name="Shape 17"/>
-          <p:cNvSpPr/>
-          <p:nvPr/>
-        </p:nvSpPr>
-        <p:spPr>
-          <a:xfrm>
-            <a:off x="2813609" y="2295144"/>
-            <a:ext cx="362102" cy="70409"/>
-          </a:xfrm>
-          <a:prstGeom prst="rect">
-            <a:avLst/>
-          </a:prstGeom>
-          <a:solidFill>
-            <a:srgbClr val="FFFFFF">
-              <a:alpha val="65000"/>
-            </a:srgbClr>
-          </a:solidFill>
-          <a:ln/>
-        </p:spPr>
-      </p:sp>
-      <p:sp>
-        <p:nvSpPr>
-          <p:cNvPr id="20" name="Shape 18"/>
-          <p:cNvSpPr/>
-          <p:nvPr/>
-        </p:nvSpPr>
-        <p:spPr>
-          <a:xfrm>
-            <a:off x="2934310" y="2596896"/>
-            <a:ext cx="120701" cy="140818"/>
-          </a:xfrm>
-          <a:prstGeom prst="rect">
-            <a:avLst/>
-          </a:prstGeom>
-          <a:solidFill>
-            <a:srgbClr val="0B1F3A">
-              <a:alpha val="60000"/>
-            </a:srgbClr>
-          </a:solidFill>
-          <a:ln/>
-        </p:spPr>
-      </p:sp>
-      <p:sp>
-        <p:nvSpPr>
-          <p:cNvPr id="21" name="Text 19"/>
-          <p:cNvSpPr txBox="1"/>
-          <p:nvPr/>
-        </p:nvSpPr>
-        <p:spPr>
-          <a:xfrm>
-            <a:off x="685800" y="3346704"/>
-            <a:ext cx="3538728" cy="365760"/>
-          </a:xfrm>
-          <a:prstGeom prst="rect">
-            <a:avLst/>
-          </a:prstGeom>
-          <a:noFill/>
-          <a:ln/>
-        </p:spPr>
-        <p:txBody>
-          <a:bodyPr wrap="square" lIns="0" tIns="0" rIns="0" bIns="0" rtlCol="0" anchor="t"/>
-          <a:lstStyle/>
-          <a:p>
-            <a:pPr algn="ctr" indent="0" marL="0">
-              <a:lnSpc>
-                <a:spcPct val="110000"/>
-              </a:lnSpc>
-              <a:buNone/>
-            </a:pPr>
-            <a:r>
-              <a:rPr lang="en-US" sz="1000" dirty="0">
-                <a:solidFill>
-                  <a:srgbClr val="5F7183"/>
+              <a:rPr lang="en-US" sz="1200" b="1" dirty="0">
+                <a:solidFill>
+                  <a:srgbClr val="FFFFFF"/>
                 </a:solidFill>
                 <a:latin typeface="Arial" pitchFamily="34" charset="0"/>
                 <a:ea typeface="Arial" pitchFamily="34" charset="-122"/>
                 <a:cs typeface="Arial" pitchFamily="34" charset="-120"/>
               </a:rPr>
-              <a:t>Chưa có ảnh thiết bị</a:t>
-            </a:r>
-            <a:endParaRPr lang="en-US" sz="1000" dirty="0"/>
-          </a:p>
-          <a:p>
-            <a:pPr algn="ctr" indent="0" marL="0">
-              <a:lnSpc>
-                <a:spcPct val="110000"/>
-              </a:lnSpc>
-              <a:buNone/>
-            </a:pPr>
-            <a:r>
-              <a:rPr lang="en-US" sz="950" dirty="0">
-                <a:solidFill>
-                  <a:srgbClr val="5F7183"/>
-                </a:solidFill>
-                <a:latin typeface="微軟正黑體" pitchFamily="34" charset="0"/>
-                <a:ea typeface="微軟正黑體" pitchFamily="34" charset="-122"/>
-                <a:cs typeface="微軟正黑體" pitchFamily="34" charset="-120"/>
-              </a:rPr>
-              <a:t>尚未取得實體照片</a:t>
-            </a:r>
-            <a:endParaRPr lang="en-US" sz="1000" dirty="0"/>
+              <a:t>▶</a:t>
+            </a:r>
+            <a:endParaRPr lang="en-US" sz="1200" dirty="0"/>
           </a:p>
         </p:txBody>
       </p:sp>
       <p:sp>
         <p:nvSpPr>
-          <p:cNvPr id="22" name="Shape 20"/>
-          <p:cNvSpPr/>
-          <p:nvPr/>
-        </p:nvSpPr>
-        <p:spPr>
-          <a:xfrm>
-            <a:off x="4736592" y="1243584"/>
-            <a:ext cx="3904488" cy="2578608"/>
-          </a:xfrm>
-          <a:prstGeom prst="roundRect">
-            <a:avLst>
-              <a:gd name="adj" fmla="val 3546"/>
-            </a:avLst>
-          </a:prstGeom>
-          <a:solidFill>
-            <a:srgbClr val="F4F7FA"/>
-          </a:solidFill>
-          <a:ln w="12700">
-            <a:solidFill>
-              <a:srgbClr val="DBE3EA"/>
-            </a:solidFill>
-            <a:prstDash val="solid"/>
-          </a:ln>
-        </p:spPr>
-      </p:sp>
-      <p:sp>
-        <p:nvSpPr>
-          <p:cNvPr id="23" name="Shape 21"/>
-          <p:cNvSpPr/>
-          <p:nvPr/>
-        </p:nvSpPr>
-        <p:spPr>
-          <a:xfrm>
-            <a:off x="4919472" y="1408176"/>
-            <a:ext cx="347472" cy="347472"/>
-          </a:xfrm>
-          <a:prstGeom prst="ellipse">
-            <a:avLst/>
-          </a:prstGeom>
-          <a:solidFill>
-            <a:srgbClr val="D9463E"/>
-          </a:solidFill>
-          <a:ln/>
-        </p:spPr>
-      </p:sp>
-      <p:sp>
-        <p:nvSpPr>
-          <p:cNvPr id="24" name="Text 22"/>
+          <p:cNvPr id="54" name="Text 52"/>
           <p:cNvSpPr txBox="1"/>
           <p:nvPr/>
         </p:nvSpPr>
         <p:spPr>
           <a:xfrm>
-            <a:off x="4919472" y="1453896"/>
-            <a:ext cx="347472" cy="256032"/>
+            <a:off x="5340096" y="1389888"/>
+            <a:ext cx="3118104" cy="420624"/>
           </a:xfrm>
           <a:prstGeom prst="rect">
             <a:avLst/>
@@ -25511,34 +26434,34 @@
           <a:bodyPr wrap="square" lIns="0" tIns="0" rIns="0" bIns="0" rtlCol="0" anchor="ctr"/>
           <a:lstStyle/>
           <a:p>
-            <a:pPr algn="ctr" indent="0" marL="0">
+            <a:pPr indent="0" marL="0">
               <a:buNone/>
             </a:pPr>
             <a:r>
-              <a:rPr lang="en-US" sz="1200" b="1" dirty="0">
-                <a:solidFill>
-                  <a:srgbClr val="FFFFFF"/>
+              <a:rPr lang="en-US" sz="1050" b="1" dirty="0">
+                <a:solidFill>
+                  <a:srgbClr val="0B1F3A"/>
                 </a:solidFill>
                 <a:latin typeface="Arial" pitchFamily="34" charset="0"/>
                 <a:ea typeface="Arial" pitchFamily="34" charset="-122"/>
                 <a:cs typeface="Arial" pitchFamily="34" charset="-120"/>
               </a:rPr>
-              <a:t>▶</a:t>
-            </a:r>
-            <a:endParaRPr lang="en-US" sz="1200" dirty="0"/>
+              <a:t>Can You Fool A Self Driving Car?</a:t>
+            </a:r>
+            <a:endParaRPr lang="en-US" sz="1050" dirty="0"/>
           </a:p>
         </p:txBody>
       </p:sp>
       <p:sp>
         <p:nvSpPr>
-          <p:cNvPr id="25" name="Text 23"/>
+          <p:cNvPr id="55" name="Text 53"/>
           <p:cNvSpPr txBox="1"/>
           <p:nvPr/>
         </p:nvSpPr>
         <p:spPr>
           <a:xfrm>
-            <a:off x="5340096" y="1389888"/>
-            <a:ext cx="3118104" cy="420624"/>
+            <a:off x="4919472" y="1847088"/>
+            <a:ext cx="3538728" cy="201168"/>
           </a:xfrm>
           <a:prstGeom prst="rect">
             <a:avLst/>
@@ -25554,62 +26477,23 @@
               <a:buNone/>
             </a:pPr>
             <a:r>
-              <a:rPr lang="en-US" sz="1050" b="1" dirty="0">
-                <a:solidFill>
-                  <a:srgbClr val="0B1F3A"/>
+              <a:rPr lang="en-US" sz="900" dirty="0">
+                <a:solidFill>
+                  <a:srgbClr val="5F7183"/>
                 </a:solidFill>
                 <a:latin typeface="Arial" pitchFamily="34" charset="0"/>
                 <a:ea typeface="Arial" pitchFamily="34" charset="-122"/>
                 <a:cs typeface="Arial" pitchFamily="34" charset="-120"/>
               </a:rPr>
-              <a:t>Can You Fool A Self Driving Car?</a:t>
-            </a:r>
-            <a:endParaRPr lang="en-US" sz="1050" dirty="0"/>
+              <a:t>Mark Rober　·　≈18:30</a:t>
+            </a:r>
+            <a:endParaRPr lang="en-US" sz="900" dirty="0"/>
           </a:p>
         </p:txBody>
       </p:sp>
       <p:sp>
         <p:nvSpPr>
-          <p:cNvPr id="26" name="Text 24"/>
-          <p:cNvSpPr txBox="1"/>
-          <p:nvPr/>
-        </p:nvSpPr>
-        <p:spPr>
-          <a:xfrm>
-            <a:off x="4919472" y="1847088"/>
-            <a:ext cx="3538728" cy="201168"/>
-          </a:xfrm>
-          <a:prstGeom prst="rect">
-            <a:avLst/>
-          </a:prstGeom>
-          <a:noFill/>
-          <a:ln/>
-        </p:spPr>
-        <p:txBody>
-          <a:bodyPr wrap="square" lIns="0" tIns="0" rIns="0" bIns="0" rtlCol="0" anchor="ctr"/>
-          <a:lstStyle/>
-          <a:p>
-            <a:pPr indent="0" marL="0">
-              <a:buNone/>
-            </a:pPr>
-            <a:r>
-              <a:rPr lang="en-US" sz="900" dirty="0">
-                <a:solidFill>
-                  <a:srgbClr val="5F7183"/>
-                </a:solidFill>
-                <a:latin typeface="Arial" pitchFamily="34" charset="0"/>
-                <a:ea typeface="Arial" pitchFamily="34" charset="-122"/>
-                <a:cs typeface="Arial" pitchFamily="34" charset="-120"/>
-              </a:rPr>
-              <a:t>Mark Rober　·　≈18:30</a:t>
-            </a:r>
-            <a:endParaRPr lang="en-US" sz="900" dirty="0"/>
-          </a:p>
-        </p:txBody>
-      </p:sp>
-      <p:sp>
-        <p:nvSpPr>
-          <p:cNvPr id="27" name="Text 25">
+          <p:cNvPr id="56" name="Text 54">
             <a:hlinkClick r:id="rId1" tooltip=""/>
           </p:cNvPr>
           <p:cNvSpPr txBox="1"/>
@@ -25657,7 +26541,7 @@
       </p:sp>
       <p:sp>
         <p:nvSpPr>
-          <p:cNvPr id="28" name="Shape 26"/>
+          <p:cNvPr id="57" name="Shape 55"/>
           <p:cNvSpPr/>
           <p:nvPr/>
         </p:nvSpPr>
@@ -25677,7 +26561,7 @@
       </p:sp>
       <p:sp>
         <p:nvSpPr>
-          <p:cNvPr id="29" name="Text 27"/>
+          <p:cNvPr id="58" name="Text 56"/>
           <p:cNvSpPr txBox="1"/>
           <p:nvPr/>
         </p:nvSpPr>
@@ -25739,7 +26623,7 @@
       </p:sp>
       <p:sp>
         <p:nvSpPr>
-          <p:cNvPr id="30" name="Shape 28"/>
+          <p:cNvPr id="59" name="Shape 57"/>
           <p:cNvSpPr/>
           <p:nvPr/>
         </p:nvSpPr>
@@ -25759,7 +26643,7 @@
       </p:sp>
       <p:sp>
         <p:nvSpPr>
-          <p:cNvPr id="31" name="Text 29"/>
+          <p:cNvPr id="60" name="Text 58"/>
           <p:cNvSpPr txBox="1"/>
           <p:nvPr/>
         </p:nvSpPr>
@@ -25821,7 +26705,7 @@
       </p:sp>
       <p:sp>
         <p:nvSpPr>
-          <p:cNvPr id="32" name="Shape 30"/>
+          <p:cNvPr id="61" name="Shape 59"/>
           <p:cNvSpPr/>
           <p:nvPr/>
         </p:nvSpPr>
@@ -25841,7 +26725,7 @@
       </p:sp>
       <p:sp>
         <p:nvSpPr>
-          <p:cNvPr id="33" name="Text 31"/>
+          <p:cNvPr id="62" name="Text 60"/>
           <p:cNvSpPr txBox="1"/>
           <p:nvPr/>
         </p:nvSpPr>
@@ -25903,7 +26787,7 @@
       </p:sp>
       <p:sp>
         <p:nvSpPr>
-          <p:cNvPr id="34" name="Shape 32"/>
+          <p:cNvPr id="63" name="Shape 61"/>
           <p:cNvSpPr/>
           <p:nvPr/>
         </p:nvSpPr>
@@ -25930,7 +26814,7 @@
       </p:sp>
       <p:sp>
         <p:nvSpPr>
-          <p:cNvPr id="35" name="Text 33"/>
+          <p:cNvPr id="64" name="Text 62"/>
           <p:cNvSpPr txBox="1"/>
           <p:nvPr/>
         </p:nvSpPr>
@@ -25992,7 +26876,7 @@
       </p:sp>
       <p:pic>
         <p:nvPicPr>
-          <p:cNvPr id="37" name="Image 0" descr="/Users/tsengchenghsun/Class/carClass/Claude outputs/第三週(9-24)/src/logo.png">    </p:cNvPr>
+          <p:cNvPr id="66" name="Image 0" descr="/Users/tsengchenghsun/Class/carClass/Claude outputs/第三週(9-24)/src/logo.png">    </p:cNvPr>
           <p:cNvPicPr>
             <a:picLocks noChangeAspect="1"/>
           </p:cNvPicPr>
@@ -26016,7 +26900,7 @@
       </p:pic>
       <p:sp>
         <p:nvSpPr>
-          <p:cNvPr id="38" name="Text 34"/>
+          <p:cNvPr id="67" name="Text 63"/>
           <p:cNvSpPr txBox="1"/>
           <p:nvPr/>
         </p:nvSpPr>
@@ -26055,7 +26939,7 @@
       </p:sp>
       <p:sp>
         <p:nvSpPr>
-          <p:cNvPr id="39" name="Text 35"/>
+          <p:cNvPr id="68" name="Text 64"/>
           <p:cNvSpPr txBox="1"/>
           <p:nvPr/>
         </p:nvSpPr>

--- a/第三週(09-24)/第三週_第3節_簡報.pptx
+++ b/第三週(09-24)/第三週_第3節_簡報.pptx
@@ -9861,8 +9861,8 @@
         </p:nvSpPr>
         <p:spPr>
           <a:xfrm>
-            <a:off x="502920" y="420624"/>
-            <a:ext cx="8138160" cy="274320"/>
+            <a:off x="502920" y="292608"/>
+            <a:ext cx="8138160" cy="841248"/>
           </a:xfrm>
           <a:prstGeom prst="rect">
             <a:avLst/>
@@ -9871,24 +9871,47 @@
           <a:ln/>
         </p:spPr>
         <p:txBody>
-          <a:bodyPr wrap="square" lIns="0" tIns="0" rIns="0" bIns="0" rtlCol="0" anchor="ctr"/>
+          <a:bodyPr wrap="square" lIns="0" tIns="0" rIns="0" bIns="0" rtlCol="0" anchor="t"/>
           <a:lstStyle/>
           <a:p>
             <a:pPr indent="0" marL="0">
+              <a:lnSpc>
+                <a:spcPct val="116000"/>
+              </a:lnSpc>
               <a:buNone/>
             </a:pPr>
             <a:r>
-              <a:rPr lang="en-US" sz="1250" b="1" dirty="0">
-                <a:solidFill>
-                  <a:srgbClr val="007F72"/>
+              <a:rPr lang="en-US" sz="2200" b="1" dirty="0">
+                <a:solidFill>
+                  <a:srgbClr val="0B1F3A"/>
                 </a:solidFill>
                 <a:latin typeface="Arial" pitchFamily="34" charset="0"/>
                 <a:ea typeface="Arial" pitchFamily="34" charset="-122"/>
                 <a:cs typeface="Arial" pitchFamily="34" charset="-120"/>
               </a:rPr>
-              <a:t>Không phải lỗi của thời tiết · 不是天氣的錯</a:t>
-            </a:r>
-            <a:endParaRPr lang="en-US" sz="1250" dirty="0"/>
+              <a:t>Giọt nước và vỏ bẩn là chuyện của chính chiếc xe</a:t>
+            </a:r>
+            <a:endParaRPr lang="en-US" sz="2200" dirty="0"/>
+          </a:p>
+          <a:p>
+            <a:pPr indent="0" marL="0">
+              <a:lnSpc>
+                <a:spcPct val="116000"/>
+              </a:lnSpc>
+              <a:buNone/>
+            </a:pPr>
+            <a:r>
+              <a:rPr lang="en-US" sz="1350" dirty="0">
+                <a:solidFill>
+                  <a:srgbClr val="5F7183"/>
+                </a:solidFill>
+                <a:latin typeface="微軟正黑體" pitchFamily="34" charset="0"/>
+                <a:ea typeface="微軟正黑體" pitchFamily="34" charset="-122"/>
+                <a:cs typeface="微軟正黑體" pitchFamily="34" charset="-120"/>
+              </a:rPr>
+              <a:t>水滴和罩子髒，是車子自己的問題</a:t>
+            </a:r>
+            <a:endParaRPr lang="en-US" sz="2200" dirty="0"/>
           </a:p>
         </p:txBody>
       </p:sp>
@@ -9900,20 +9923,38 @@
         </p:nvSpPr>
         <p:spPr>
           <a:xfrm>
-            <a:off x="502920" y="1101852"/>
-            <a:ext cx="2468880" cy="2514600"/>
-          </a:xfrm>
-          <a:prstGeom prst="roundRect">
-            <a:avLst>
-              <a:gd name="adj" fmla="val 4444"/>
-            </a:avLst>
+            <a:off x="2041855" y="1170432"/>
+            <a:ext cx="1316736" cy="1316736"/>
+          </a:xfrm>
+          <a:prstGeom prst="ellipse">
+            <a:avLst/>
           </a:prstGeom>
           <a:solidFill>
-            <a:srgbClr val="F4F7FA"/>
+            <a:srgbClr val="2B3945"/>
+          </a:solidFill>
+          <a:ln/>
+        </p:spPr>
+      </p:sp>
+      <p:sp>
+        <p:nvSpPr>
+          <p:cNvPr id="4" name="Shape 2"/>
+          <p:cNvSpPr/>
+          <p:nvPr/>
+        </p:nvSpPr>
+        <p:spPr>
+          <a:xfrm>
+            <a:off x="2133295" y="1261872"/>
+            <a:ext cx="1133856" cy="1133856"/>
+          </a:xfrm>
+          <a:prstGeom prst="ellipse">
+            <a:avLst/>
+          </a:prstGeom>
+          <a:solidFill>
+            <a:srgbClr val="12263A"/>
           </a:solidFill>
           <a:ln w="12700">
             <a:solidFill>
-              <a:srgbClr val="DBE3EA"/>
+              <a:srgbClr val="4A5A68"/>
             </a:solidFill>
             <a:prstDash val="solid"/>
           </a:ln>
@@ -9921,44 +9962,22 @@
       </p:sp>
       <p:sp>
         <p:nvSpPr>
-          <p:cNvPr id="4" name="Shape 2"/>
-          <p:cNvSpPr/>
-          <p:nvPr/>
-        </p:nvSpPr>
-        <p:spPr>
-          <a:xfrm>
-            <a:off x="401604" y="2194194"/>
-            <a:ext cx="659831" cy="374904"/>
-          </a:xfrm>
-          <a:prstGeom prst="roundRect">
-            <a:avLst>
-              <a:gd name="adj" fmla="val 34146"/>
-            </a:avLst>
-          </a:prstGeom>
-          <a:solidFill>
-            <a:srgbClr val="0B1F3A"/>
-          </a:solidFill>
-          <a:ln/>
-        </p:spPr>
-      </p:sp>
-      <p:sp>
-        <p:nvSpPr>
           <p:cNvPr id="5" name="Shape 3"/>
           <p:cNvSpPr/>
           <p:nvPr/>
         </p:nvSpPr>
         <p:spPr>
           <a:xfrm>
-            <a:off x="551566" y="2119213"/>
-            <a:ext cx="194950" cy="89977"/>
-          </a:xfrm>
-          <a:prstGeom prst="roundRect">
-            <a:avLst>
-              <a:gd name="adj" fmla="val 304878"/>
-            </a:avLst>
+            <a:off x="2348728" y="1420612"/>
+            <a:ext cx="396850" cy="255118"/>
+          </a:xfrm>
+          <a:prstGeom prst="ellipse">
+            <a:avLst/>
           </a:prstGeom>
           <a:solidFill>
-            <a:srgbClr val="0B1F3A"/>
+            <a:srgbClr val="FFFFFF">
+              <a:alpha val="18000"/>
+            </a:srgbClr>
           </a:solidFill>
           <a:ln/>
         </p:spPr>
@@ -9971,16 +9990,23 @@
         </p:nvSpPr>
         <p:spPr>
           <a:xfrm>
-            <a:off x="611551" y="2254179"/>
-            <a:ext cx="239939" cy="239939"/>
+            <a:off x="2456444" y="1653052"/>
+            <a:ext cx="147401" cy="147401"/>
           </a:xfrm>
           <a:prstGeom prst="ellipse">
             <a:avLst/>
           </a:prstGeom>
           <a:solidFill>
-            <a:srgbClr val="FFFFFF"/>
+            <a:srgbClr val="BFE3F5">
+              <a:alpha val="72000"/>
+            </a:srgbClr>
           </a:solidFill>
-          <a:ln/>
+          <a:ln w="9525">
+            <a:solidFill>
+              <a:srgbClr val="E8F6FF"/>
+            </a:solidFill>
+            <a:prstDash val="solid"/>
+          </a:ln>
         </p:spPr>
       </p:sp>
       <p:sp>
@@ -9991,18 +10017,23 @@
         </p:nvSpPr>
         <p:spPr>
           <a:xfrm>
-            <a:off x="664037" y="2306665"/>
-            <a:ext cx="134965" cy="134965"/>
+            <a:off x="2728570" y="1760769"/>
+            <a:ext cx="192756" cy="192756"/>
           </a:xfrm>
           <a:prstGeom prst="ellipse">
             <a:avLst/>
           </a:prstGeom>
           <a:solidFill>
-            <a:srgbClr val="0B1F3A">
-              <a:alpha val="70000"/>
+            <a:srgbClr val="BFE3F5">
+              <a:alpha val="72000"/>
             </a:srgbClr>
           </a:solidFill>
-          <a:ln/>
+          <a:ln w="9525">
+            <a:solidFill>
+              <a:srgbClr val="E8F6FF"/>
+            </a:solidFill>
+            <a:prstDash val="solid"/>
+          </a:ln>
         </p:spPr>
       </p:sp>
       <p:sp>
@@ -10013,30 +10044,62 @@
         </p:nvSpPr>
         <p:spPr>
           <a:xfrm>
-            <a:off x="911474" y="2239183"/>
-            <a:ext cx="74981" cy="74981"/>
+            <a:off x="2615184" y="1976201"/>
+            <a:ext cx="113386" cy="113386"/>
           </a:xfrm>
           <a:prstGeom prst="ellipse">
             <a:avLst/>
           </a:prstGeom>
           <a:solidFill>
-            <a:srgbClr val="FFFFFF">
-              <a:alpha val="60000"/>
+            <a:srgbClr val="BFE3F5">
+              <a:alpha val="72000"/>
             </a:srgbClr>
           </a:solidFill>
-          <a:ln/>
-        </p:spPr>
-      </p:sp>
-      <p:sp>
-        <p:nvSpPr>
-          <p:cNvPr id="9" name="Text 7"/>
+          <a:ln w="9525">
+            <a:solidFill>
+              <a:srgbClr val="E8F6FF"/>
+            </a:solidFill>
+            <a:prstDash val="solid"/>
+          </a:ln>
+        </p:spPr>
+      </p:sp>
+      <p:sp>
+        <p:nvSpPr>
+          <p:cNvPr id="9" name="Shape 7"/>
+          <p:cNvSpPr/>
+          <p:nvPr/>
+        </p:nvSpPr>
+        <p:spPr>
+          <a:xfrm>
+            <a:off x="2864632" y="1596360"/>
+            <a:ext cx="102047" cy="102047"/>
+          </a:xfrm>
+          <a:prstGeom prst="ellipse">
+            <a:avLst/>
+          </a:prstGeom>
+          <a:solidFill>
+            <a:srgbClr val="BFE3F5">
+              <a:alpha val="72000"/>
+            </a:srgbClr>
+          </a:solidFill>
+          <a:ln w="9525">
+            <a:solidFill>
+              <a:srgbClr val="E8F6FF"/>
+            </a:solidFill>
+            <a:prstDash val="solid"/>
+          </a:ln>
+        </p:spPr>
+      </p:sp>
+      <p:sp>
+        <p:nvSpPr>
+          <p:cNvPr id="10" name="Text 8"/>
           <p:cNvSpPr txBox="1"/>
           <p:nvPr/>
         </p:nvSpPr>
         <p:spPr>
           <a:xfrm>
-            <a:off x="1106424" y="2176272"/>
-            <a:ext cx="256032" cy="365760"/>
+            <a:off x="1237183" y="2542032"/>
+            <a:ext cx="2926080" cy="384048"/>
           </a:xfrm>
           <a:prstGeom prst="rect">
             <a:avLst/>
@@ -10045,14 +10108,37 @@
           <a:ln/>
         </p:spPr>
         <p:txBody>
-          <a:bodyPr wrap="square" lIns="0" tIns="0" rIns="0" bIns="0" rtlCol="0" anchor="ctr"/>
+          <a:bodyPr wrap="square" lIns="0" tIns="0" rIns="0" bIns="0" rtlCol="0" anchor="t"/>
           <a:lstStyle/>
           <a:p>
             <a:pPr algn="ctr" indent="0" marL="0">
+              <a:lnSpc>
+                <a:spcPct val="106000"/>
+              </a:lnSpc>
               <a:buNone/>
             </a:pPr>
             <a:r>
-              <a:rPr lang="en-US" sz="1700" b="1" dirty="0">
+              <a:rPr lang="en-US" sz="1250" b="1" dirty="0">
+                <a:solidFill>
+                  <a:srgbClr val="0B1F3A"/>
+                </a:solidFill>
+                <a:latin typeface="Arial" pitchFamily="34" charset="0"/>
+                <a:ea typeface="Arial" pitchFamily="34" charset="-122"/>
+                <a:cs typeface="Arial" pitchFamily="34" charset="-120"/>
+              </a:rPr>
+              <a:t>Giọt nước trên ống kính camera</a:t>
+            </a:r>
+            <a:endParaRPr lang="en-US" sz="1250" dirty="0"/>
+          </a:p>
+          <a:p>
+            <a:pPr algn="ctr" indent="0" marL="0">
+              <a:lnSpc>
+                <a:spcPct val="106000"/>
+              </a:lnSpc>
+              <a:buNone/>
+            </a:pPr>
+            <a:r>
+              <a:rPr lang="en-US" sz="1050" dirty="0">
                 <a:solidFill>
                   <a:srgbClr val="5F7183"/>
                 </a:solidFill>
@@ -10060,33 +10146,11 @@
                 <a:ea typeface="微軟正黑體" pitchFamily="34" charset="-122"/>
                 <a:cs typeface="微軟正黑體" pitchFamily="34" charset="-120"/>
               </a:rPr>
-              <a:t>＋</a:t>
-            </a:r>
-            <a:endParaRPr lang="en-US" sz="1700" dirty="0"/>
+              <a:t>相機鏡頭上的水滴</a:t>
+            </a:r>
+            <a:endParaRPr lang="en-US" sz="1250" dirty="0"/>
           </a:p>
         </p:txBody>
-      </p:sp>
-      <p:sp>
-        <p:nvSpPr>
-          <p:cNvPr id="10" name="Shape 8"/>
-          <p:cNvSpPr/>
-          <p:nvPr/>
-        </p:nvSpPr>
-        <p:spPr>
-          <a:xfrm rot="-2280000">
-            <a:off x="1858052" y="2106783"/>
-            <a:ext cx="254935" cy="26993"/>
-          </a:xfrm>
-          <a:prstGeom prst="rect">
-            <a:avLst/>
-          </a:prstGeom>
-          <a:solidFill>
-            <a:srgbClr val="0B1F3A">
-              <a:alpha val="45000"/>
-            </a:srgbClr>
-          </a:solidFill>
-          <a:ln/>
-        </p:spPr>
       </p:sp>
       <p:sp>
         <p:nvSpPr>
@@ -10095,313 +10159,185 @@
           <p:nvPr/>
         </p:nvSpPr>
         <p:spPr>
-          <a:xfrm rot="-1140000">
-            <a:off x="1907655" y="2198139"/>
-            <a:ext cx="254935" cy="26993"/>
+          <a:xfrm>
+            <a:off x="1237183" y="2944368"/>
+            <a:ext cx="2926080" cy="420624"/>
+          </a:xfrm>
+          <a:prstGeom prst="roundRect">
+            <a:avLst>
+              <a:gd name="adj" fmla="val 15217"/>
+            </a:avLst>
+          </a:prstGeom>
+          <a:solidFill>
+            <a:srgbClr val="FDECEC"/>
+          </a:solidFill>
+          <a:ln/>
+        </p:spPr>
+      </p:sp>
+      <p:sp>
+        <p:nvSpPr>
+          <p:cNvPr id="12" name="Text 10"/>
+          <p:cNvSpPr txBox="1"/>
+          <p:nvPr/>
+        </p:nvSpPr>
+        <p:spPr>
+          <a:xfrm>
+            <a:off x="1310335" y="2990088"/>
+            <a:ext cx="2779776" cy="347472"/>
           </a:xfrm>
           <a:prstGeom prst="rect">
             <a:avLst/>
           </a:prstGeom>
-          <a:solidFill>
-            <a:srgbClr val="0B1F3A">
-              <a:alpha val="45000"/>
-            </a:srgbClr>
-          </a:solidFill>
-          <a:ln/>
-        </p:spPr>
-      </p:sp>
-      <p:sp>
-        <p:nvSpPr>
-          <p:cNvPr id="12" name="Shape 10"/>
-          <p:cNvSpPr/>
-          <p:nvPr/>
-        </p:nvSpPr>
-        <p:spPr>
-          <a:xfrm>
-            <a:off x="1924812" y="2300667"/>
-            <a:ext cx="254935" cy="26993"/>
-          </a:xfrm>
-          <a:prstGeom prst="rect">
-            <a:avLst/>
-          </a:prstGeom>
-          <a:solidFill>
-            <a:srgbClr val="0B1F3A">
-              <a:alpha val="45000"/>
-            </a:srgbClr>
-          </a:solidFill>
-          <a:ln/>
-        </p:spPr>
-      </p:sp>
-      <p:sp>
-        <p:nvSpPr>
-          <p:cNvPr id="13" name="Shape 11"/>
-          <p:cNvSpPr/>
-          <p:nvPr/>
-        </p:nvSpPr>
-        <p:spPr>
-          <a:xfrm rot="1140000">
-            <a:off x="1907655" y="2403195"/>
-            <a:ext cx="254935" cy="26993"/>
-          </a:xfrm>
-          <a:prstGeom prst="rect">
-            <a:avLst/>
-          </a:prstGeom>
-          <a:solidFill>
-            <a:srgbClr val="0B1F3A">
-              <a:alpha val="45000"/>
-            </a:srgbClr>
-          </a:solidFill>
-          <a:ln/>
-        </p:spPr>
-      </p:sp>
-      <p:sp>
-        <p:nvSpPr>
-          <p:cNvPr id="14" name="Shape 12"/>
-          <p:cNvSpPr/>
-          <p:nvPr/>
-        </p:nvSpPr>
-        <p:spPr>
-          <a:xfrm rot="2280000">
-            <a:off x="1858052" y="2494551"/>
-            <a:ext cx="254935" cy="26993"/>
-          </a:xfrm>
-          <a:prstGeom prst="rect">
-            <a:avLst/>
-          </a:prstGeom>
-          <a:solidFill>
-            <a:srgbClr val="0B1F3A">
-              <a:alpha val="45000"/>
-            </a:srgbClr>
-          </a:solidFill>
-          <a:ln/>
-        </p:spPr>
-      </p:sp>
-      <p:sp>
-        <p:nvSpPr>
-          <p:cNvPr id="15" name="Shape 13"/>
-          <p:cNvSpPr/>
-          <p:nvPr/>
-        </p:nvSpPr>
-        <p:spPr>
-          <a:xfrm>
-            <a:off x="1527414" y="2164202"/>
-            <a:ext cx="269931" cy="97475"/>
-          </a:xfrm>
-          <a:prstGeom prst="ellipse">
-            <a:avLst/>
-          </a:prstGeom>
-          <a:solidFill>
-            <a:srgbClr val="0B1F3A"/>
-          </a:solidFill>
-          <a:ln/>
-        </p:spPr>
-      </p:sp>
-      <p:sp>
-        <p:nvSpPr>
-          <p:cNvPr id="16" name="Shape 14"/>
-          <p:cNvSpPr/>
-          <p:nvPr/>
-        </p:nvSpPr>
-        <p:spPr>
-          <a:xfrm>
-            <a:off x="1527414" y="2209190"/>
-            <a:ext cx="269931" cy="254935"/>
-          </a:xfrm>
-          <a:prstGeom prst="rect">
-            <a:avLst/>
-          </a:prstGeom>
-          <a:solidFill>
-            <a:srgbClr val="0B1F3A"/>
-          </a:solidFill>
-          <a:ln/>
-        </p:spPr>
-      </p:sp>
-      <p:sp>
-        <p:nvSpPr>
-          <p:cNvPr id="17" name="Shape 15"/>
-          <p:cNvSpPr/>
-          <p:nvPr/>
-        </p:nvSpPr>
-        <p:spPr>
-          <a:xfrm>
-            <a:off x="1527414" y="2411639"/>
-            <a:ext cx="269931" cy="97475"/>
-          </a:xfrm>
-          <a:prstGeom prst="ellipse">
-            <a:avLst/>
-          </a:prstGeom>
-          <a:solidFill>
-            <a:srgbClr val="0B1F3A"/>
-          </a:solidFill>
-          <a:ln/>
-        </p:spPr>
-      </p:sp>
-      <p:sp>
-        <p:nvSpPr>
-          <p:cNvPr id="18" name="Shape 16"/>
-          <p:cNvSpPr/>
-          <p:nvPr/>
-        </p:nvSpPr>
-        <p:spPr>
-          <a:xfrm>
-            <a:off x="1527414" y="2284171"/>
-            <a:ext cx="269931" cy="52487"/>
-          </a:xfrm>
-          <a:prstGeom prst="rect">
-            <a:avLst/>
-          </a:prstGeom>
-          <a:solidFill>
-            <a:srgbClr val="FFFFFF">
-              <a:alpha val="65000"/>
-            </a:srgbClr>
-          </a:solidFill>
-          <a:ln/>
-        </p:spPr>
-      </p:sp>
-      <p:sp>
-        <p:nvSpPr>
-          <p:cNvPr id="19" name="Shape 17"/>
-          <p:cNvSpPr/>
-          <p:nvPr/>
-        </p:nvSpPr>
-        <p:spPr>
-          <a:xfrm>
-            <a:off x="1617391" y="2509114"/>
-            <a:ext cx="89977" cy="104973"/>
-          </a:xfrm>
-          <a:prstGeom prst="rect">
-            <a:avLst/>
-          </a:prstGeom>
-          <a:solidFill>
-            <a:srgbClr val="0B1F3A">
-              <a:alpha val="60000"/>
-            </a:srgbClr>
-          </a:solidFill>
-          <a:ln/>
-        </p:spPr>
-      </p:sp>
-      <p:sp>
-        <p:nvSpPr>
-          <p:cNvPr id="20" name="Text 18"/>
-          <p:cNvSpPr txBox="1"/>
-          <p:nvPr/>
-        </p:nvSpPr>
-        <p:spPr>
-          <a:xfrm>
-            <a:off x="2112264" y="2176272"/>
-            <a:ext cx="256032" cy="365760"/>
-          </a:xfrm>
-          <a:prstGeom prst="rect">
-            <a:avLst/>
-          </a:prstGeom>
           <a:noFill/>
           <a:ln/>
         </p:spPr>
         <p:txBody>
-          <a:bodyPr wrap="square" lIns="0" tIns="0" rIns="0" bIns="0" rtlCol="0" anchor="ctr"/>
+          <a:bodyPr wrap="square" lIns="0" tIns="0" rIns="0" bIns="0" rtlCol="0" anchor="t"/>
           <a:lstStyle/>
           <a:p>
             <a:pPr algn="ctr" indent="0" marL="0">
+              <a:lnSpc>
+                <a:spcPct val="104000"/>
+              </a:lnSpc>
               <a:buNone/>
             </a:pPr>
             <a:r>
-              <a:rPr lang="en-US" sz="1700" b="1" dirty="0">
-                <a:solidFill>
-                  <a:srgbClr val="5F7183"/>
+              <a:rPr lang="en-US" sz="1050" b="1" dirty="0">
+                <a:solidFill>
+                  <a:srgbClr val="A32C25"/>
+                </a:solidFill>
+                <a:latin typeface="Arial" pitchFamily="34" charset="0"/>
+                <a:ea typeface="Arial" pitchFamily="34" charset="-122"/>
+                <a:cs typeface="Arial" pitchFamily="34" charset="-120"/>
+              </a:rPr>
+              <a:t>Vẫn ra khoảng cách, nhưng MẤT phân loại</a:t>
+            </a:r>
+            <a:endParaRPr lang="en-US" sz="1050" dirty="0"/>
+          </a:p>
+          <a:p>
+            <a:pPr algn="ctr" indent="0" marL="0">
+              <a:lnSpc>
+                <a:spcPct val="104000"/>
+              </a:lnSpc>
+              <a:buNone/>
+            </a:pPr>
+            <a:r>
+              <a:rPr lang="en-US" sz="950" dirty="0">
+                <a:solidFill>
+                  <a:srgbClr val="A32C25"/>
                 </a:solidFill>
                 <a:latin typeface="微軟正黑體" pitchFamily="34" charset="0"/>
                 <a:ea typeface="微軟正黑體" pitchFamily="34" charset="-122"/>
                 <a:cs typeface="微軟正黑體" pitchFamily="34" charset="-120"/>
               </a:rPr>
-              <a:t>＋</a:t>
-            </a:r>
-            <a:endParaRPr lang="en-US" sz="1700" dirty="0"/>
+              <a:t>距離還在，但認不出那是什麼</a:t>
+            </a:r>
+            <a:endParaRPr lang="en-US" sz="1050" dirty="0"/>
           </a:p>
         </p:txBody>
       </p:sp>
       <p:sp>
         <p:nvSpPr>
-          <p:cNvPr id="21" name="Shape 19"/>
+          <p:cNvPr id="13" name="Text 11"/>
+          <p:cNvSpPr txBox="1"/>
+          <p:nvPr/>
+        </p:nvSpPr>
+        <p:spPr>
+          <a:xfrm>
+            <a:off x="1164031" y="3419856"/>
+            <a:ext cx="3072384" cy="438912"/>
+          </a:xfrm>
+          <a:prstGeom prst="rect">
+            <a:avLst/>
+          </a:prstGeom>
+          <a:noFill/>
+          <a:ln/>
+        </p:spPr>
+        <p:txBody>
+          <a:bodyPr wrap="square" lIns="0" tIns="0" rIns="0" bIns="0" rtlCol="0" anchor="t"/>
+          <a:lstStyle/>
+          <a:p>
+            <a:pPr algn="ctr" indent="0" marL="0">
+              <a:lnSpc>
+                <a:spcPct val="106000"/>
+              </a:lnSpc>
+              <a:buNone/>
+            </a:pPr>
+            <a:r>
+              <a:rPr lang="en-US" sz="1000" b="1" dirty="0">
+                <a:solidFill>
+                  <a:srgbClr val="007F72"/>
+                </a:solidFill>
+                <a:latin typeface="Arial" pitchFamily="34" charset="0"/>
+                <a:ea typeface="Arial" pitchFamily="34" charset="-122"/>
+                <a:cs typeface="Arial" pitchFamily="34" charset="-120"/>
+              </a:rPr>
+              <a:t>Do cần gạt nước và vòi rửa — không phải do trời</a:t>
+            </a:r>
+            <a:endParaRPr lang="en-US" sz="1000" dirty="0"/>
+          </a:p>
+          <a:p>
+            <a:pPr algn="ctr" indent="0" marL="0">
+              <a:lnSpc>
+                <a:spcPct val="106000"/>
+              </a:lnSpc>
+              <a:buNone/>
+            </a:pPr>
+            <a:r>
+              <a:rPr lang="en-US" sz="900" dirty="0">
+                <a:solidFill>
+                  <a:srgbClr val="007F72"/>
+                </a:solidFill>
+                <a:latin typeface="微軟正黑體" pitchFamily="34" charset="0"/>
+                <a:ea typeface="微軟正黑體" pitchFamily="34" charset="-122"/>
+                <a:cs typeface="微軟正黑體" pitchFamily="34" charset="-120"/>
+              </a:rPr>
+              <a:t>取決於雨刷和清洗噴頭，不是老天爺</a:t>
+            </a:r>
+            <a:endParaRPr lang="en-US" sz="1000" dirty="0"/>
+          </a:p>
+        </p:txBody>
+      </p:sp>
+      <p:sp>
+        <p:nvSpPr>
+          <p:cNvPr id="14" name="Shape 12"/>
           <p:cNvSpPr/>
           <p:nvPr/>
         </p:nvSpPr>
         <p:spPr>
           <a:xfrm>
-            <a:off x="2653223" y="2059229"/>
-            <a:ext cx="179954" cy="164958"/>
-          </a:xfrm>
-          <a:prstGeom prst="roundRect">
-            <a:avLst>
-              <a:gd name="adj" fmla="val 110865"/>
-            </a:avLst>
+            <a:off x="5785409" y="1170432"/>
+            <a:ext cx="1316736" cy="1316736"/>
+          </a:xfrm>
+          <a:prstGeom prst="ellipse">
+            <a:avLst/>
           </a:prstGeom>
           <a:solidFill>
-            <a:srgbClr val="0B1F3A"/>
+            <a:srgbClr val="2B3945"/>
           </a:solidFill>
           <a:ln/>
         </p:spPr>
       </p:sp>
       <p:sp>
         <p:nvSpPr>
-          <p:cNvPr id="22" name="Shape 20"/>
+          <p:cNvPr id="15" name="Shape 13"/>
           <p:cNvSpPr/>
           <p:nvPr/>
         </p:nvSpPr>
         <p:spPr>
           <a:xfrm>
-            <a:off x="2458273" y="2081723"/>
-            <a:ext cx="164958" cy="119969"/>
-          </a:xfrm>
-          <a:prstGeom prst="rect">
+            <a:off x="5876849" y="1261872"/>
+            <a:ext cx="1133856" cy="1133856"/>
+          </a:xfrm>
+          <a:prstGeom prst="ellipse">
             <a:avLst/>
           </a:prstGeom>
           <a:solidFill>
-            <a:srgbClr val="0B1F3A">
-              <a:alpha val="60000"/>
-            </a:srgbClr>
+            <a:srgbClr val="1E3226"/>
           </a:solidFill>
-          <a:ln/>
-        </p:spPr>
-      </p:sp>
-      <p:sp>
-        <p:nvSpPr>
-          <p:cNvPr id="23" name="Shape 21"/>
-          <p:cNvSpPr/>
-          <p:nvPr/>
-        </p:nvSpPr>
-        <p:spPr>
-          <a:xfrm>
-            <a:off x="2863169" y="2081723"/>
-            <a:ext cx="164958" cy="119969"/>
-          </a:xfrm>
-          <a:prstGeom prst="rect">
-            <a:avLst/>
-          </a:prstGeom>
-          <a:solidFill>
-            <a:srgbClr val="0B1F3A">
-              <a:alpha val="60000"/>
-            </a:srgbClr>
-          </a:solidFill>
-          <a:ln/>
-        </p:spPr>
-      </p:sp>
-      <p:sp>
-        <p:nvSpPr>
-          <p:cNvPr id="24" name="Shape 22"/>
-          <p:cNvSpPr/>
-          <p:nvPr/>
-        </p:nvSpPr>
-        <p:spPr>
-          <a:xfrm rot="5400000">
-            <a:off x="2638227" y="2284171"/>
-            <a:ext cx="209946" cy="119969"/>
-          </a:xfrm>
-          <a:prstGeom prst="chevron">
-            <a:avLst/>
-          </a:prstGeom>
-          <a:ln w="31750">
+          <a:ln w="12700">
             <a:solidFill>
-              <a:srgbClr val="0B1F3A"/>
+              <a:srgbClr val="4A5A68"/>
             </a:solidFill>
             <a:prstDash val="solid"/>
           </a:ln>
@@ -10409,58 +10345,190 @@
       </p:sp>
       <p:sp>
         <p:nvSpPr>
-          <p:cNvPr id="25" name="Shape 23"/>
+          <p:cNvPr id="16" name="Shape 14"/>
           <p:cNvSpPr/>
           <p:nvPr/>
         </p:nvSpPr>
         <p:spPr>
-          <a:xfrm rot="5400000">
-            <a:off x="2593238" y="2404140"/>
-            <a:ext cx="299923" cy="134965"/>
-          </a:xfrm>
-          <a:prstGeom prst="chevron">
-            <a:avLst/>
-          </a:prstGeom>
-          <a:ln w="31750">
-            <a:solidFill>
-              <a:srgbClr val="0B1F3A">
-                <a:alpha val="55000"/>
-              </a:srgbClr>
-            </a:solidFill>
-            <a:prstDash val="solid"/>
-          </a:ln>
-        </p:spPr>
-      </p:sp>
-      <p:sp>
-        <p:nvSpPr>
-          <p:cNvPr id="26" name="Shape 24"/>
+          <a:xfrm>
+            <a:off x="6092281" y="1420612"/>
+            <a:ext cx="396850" cy="255118"/>
+          </a:xfrm>
+          <a:prstGeom prst="ellipse">
+            <a:avLst/>
+          </a:prstGeom>
+          <a:solidFill>
+            <a:srgbClr val="FFFFFF">
+              <a:alpha val="18000"/>
+            </a:srgbClr>
+          </a:solidFill>
+          <a:ln/>
+        </p:spPr>
+      </p:sp>
+      <p:sp>
+        <p:nvSpPr>
+          <p:cNvPr id="17" name="Shape 15"/>
           <p:cNvSpPr/>
           <p:nvPr/>
         </p:nvSpPr>
         <p:spPr>
           <a:xfrm>
-            <a:off x="2690713" y="2599091"/>
-            <a:ext cx="104973" cy="104973"/>
+            <a:off x="6194328" y="1715414"/>
+            <a:ext cx="113386" cy="113386"/>
           </a:xfrm>
           <a:prstGeom prst="ellipse">
             <a:avLst/>
           </a:prstGeom>
           <a:solidFill>
-            <a:srgbClr val="0B1F3A"/>
+            <a:srgbClr val="6B5233">
+              <a:alpha val="92000"/>
+            </a:srgbClr>
           </a:solidFill>
           <a:ln/>
         </p:spPr>
       </p:sp>
       <p:sp>
         <p:nvSpPr>
-          <p:cNvPr id="27" name="Text 25"/>
+          <p:cNvPr id="18" name="Shape 16"/>
+          <p:cNvSpPr/>
+          <p:nvPr/>
+        </p:nvSpPr>
+        <p:spPr>
+          <a:xfrm>
+            <a:off x="6460785" y="1619037"/>
+            <a:ext cx="79370" cy="79370"/>
+          </a:xfrm>
+          <a:prstGeom prst="ellipse">
+            <a:avLst/>
+          </a:prstGeom>
+          <a:solidFill>
+            <a:srgbClr val="6B5233">
+              <a:alpha val="92000"/>
+            </a:srgbClr>
+          </a:solidFill>
+          <a:ln/>
+        </p:spPr>
+      </p:sp>
+      <p:sp>
+        <p:nvSpPr>
+          <p:cNvPr id="19" name="Shape 17"/>
+          <p:cNvSpPr/>
+          <p:nvPr/>
+        </p:nvSpPr>
+        <p:spPr>
+          <a:xfrm>
+            <a:off x="6540155" y="1845808"/>
+            <a:ext cx="147401" cy="147401"/>
+          </a:xfrm>
+          <a:prstGeom prst="ellipse">
+            <a:avLst/>
+          </a:prstGeom>
+          <a:solidFill>
+            <a:srgbClr val="6B5233">
+              <a:alpha val="92000"/>
+            </a:srgbClr>
+          </a:solidFill>
+          <a:ln/>
+        </p:spPr>
+      </p:sp>
+      <p:sp>
+        <p:nvSpPr>
+          <p:cNvPr id="20" name="Shape 18"/>
+          <p:cNvSpPr/>
+          <p:nvPr/>
+        </p:nvSpPr>
+        <p:spPr>
+          <a:xfrm>
+            <a:off x="6327557" y="1950690"/>
+            <a:ext cx="96378" cy="96378"/>
+          </a:xfrm>
+          <a:prstGeom prst="ellipse">
+            <a:avLst/>
+          </a:prstGeom>
+          <a:solidFill>
+            <a:srgbClr val="6B5233">
+              <a:alpha val="92000"/>
+            </a:srgbClr>
+          </a:solidFill>
+          <a:ln/>
+        </p:spPr>
+      </p:sp>
+      <p:sp>
+        <p:nvSpPr>
+          <p:cNvPr id="21" name="Shape 19"/>
+          <p:cNvSpPr/>
+          <p:nvPr/>
+        </p:nvSpPr>
+        <p:spPr>
+          <a:xfrm>
+            <a:off x="6421100" y="1806123"/>
+            <a:ext cx="68031" cy="68031"/>
+          </a:xfrm>
+          <a:prstGeom prst="ellipse">
+            <a:avLst/>
+          </a:prstGeom>
+          <a:solidFill>
+            <a:srgbClr val="6B5233">
+              <a:alpha val="92000"/>
+            </a:srgbClr>
+          </a:solidFill>
+          <a:ln/>
+        </p:spPr>
+      </p:sp>
+      <p:sp>
+        <p:nvSpPr>
+          <p:cNvPr id="22" name="Shape 20"/>
+          <p:cNvSpPr/>
+          <p:nvPr/>
+        </p:nvSpPr>
+        <p:spPr>
+          <a:xfrm>
+            <a:off x="6174486" y="1933682"/>
+            <a:ext cx="62362" cy="62362"/>
+          </a:xfrm>
+          <a:prstGeom prst="ellipse">
+            <a:avLst/>
+          </a:prstGeom>
+          <a:solidFill>
+            <a:srgbClr val="6B5233">
+              <a:alpha val="92000"/>
+            </a:srgbClr>
+          </a:solidFill>
+          <a:ln/>
+        </p:spPr>
+      </p:sp>
+      <p:sp>
+        <p:nvSpPr>
+          <p:cNvPr id="23" name="Shape 21"/>
+          <p:cNvSpPr/>
+          <p:nvPr/>
+        </p:nvSpPr>
+        <p:spPr>
+          <a:xfrm>
+            <a:off x="6656375" y="1757934"/>
+            <a:ext cx="73701" cy="73701"/>
+          </a:xfrm>
+          <a:prstGeom prst="ellipse">
+            <a:avLst/>
+          </a:prstGeom>
+          <a:solidFill>
+            <a:srgbClr val="6B5233">
+              <a:alpha val="92000"/>
+            </a:srgbClr>
+          </a:solidFill>
+          <a:ln/>
+        </p:spPr>
+      </p:sp>
+      <p:sp>
+        <p:nvSpPr>
+          <p:cNvPr id="24" name="Text 22"/>
           <p:cNvSpPr txBox="1"/>
           <p:nvPr/>
         </p:nvSpPr>
         <p:spPr>
           <a:xfrm>
-            <a:off x="3429000" y="1217431"/>
-            <a:ext cx="5212080" cy="1005611"/>
+            <a:off x="4980737" y="2542032"/>
+            <a:ext cx="2926080" cy="384048"/>
           </a:xfrm>
           <a:prstGeom prst="rect">
             <a:avLst/>
@@ -10472,14 +10540,14 @@
           <a:bodyPr wrap="square" lIns="0" tIns="0" rIns="0" bIns="0" rtlCol="0" anchor="t"/>
           <a:lstStyle/>
           <a:p>
-            <a:pPr indent="0" marL="0">
-              <a:lnSpc>
-                <a:spcPct val="120000"/>
+            <a:pPr algn="ctr" indent="0" marL="0">
+              <a:lnSpc>
+                <a:spcPct val="106000"/>
               </a:lnSpc>
               <a:buNone/>
             </a:pPr>
             <a:r>
-              <a:rPr lang="en-US" sz="2300" b="1" dirty="0">
+              <a:rPr lang="en-US" sz="1250" b="1" dirty="0">
                 <a:solidFill>
                   <a:srgbClr val="0B1F3A"/>
                 </a:solidFill>
@@ -10487,42 +10555,64 @@
                 <a:ea typeface="Arial" pitchFamily="34" charset="-122"/>
                 <a:cs typeface="Arial" pitchFamily="34" charset="-120"/>
               </a:rPr>
-              <a:t>Giọt nước và vỏ bẩn là chuyện của chính chiếc xe</a:t>
-            </a:r>
-            <a:endParaRPr lang="en-US" sz="2300" dirty="0"/>
-          </a:p>
-          <a:p>
-            <a:pPr indent="0" marL="0">
-              <a:lnSpc>
-                <a:spcPct val="120000"/>
+              <a:t>Bùn đất trên vỏ LiDAR</a:t>
+            </a:r>
+            <a:endParaRPr lang="en-US" sz="1250" dirty="0"/>
+          </a:p>
+          <a:p>
+            <a:pPr algn="ctr" indent="0" marL="0">
+              <a:lnSpc>
+                <a:spcPct val="106000"/>
               </a:lnSpc>
               <a:buNone/>
             </a:pPr>
             <a:r>
-              <a:rPr lang="en-US" sz="1400" dirty="0">
-                <a:solidFill>
-                  <a:srgbClr val="007F72"/>
+              <a:rPr lang="en-US" sz="1050" dirty="0">
+                <a:solidFill>
+                  <a:srgbClr val="5F7183"/>
                 </a:solidFill>
                 <a:latin typeface="微軟正黑體" pitchFamily="34" charset="0"/>
                 <a:ea typeface="微軟正黑體" pitchFamily="34" charset="-122"/>
                 <a:cs typeface="微軟正黑體" pitchFamily="34" charset="-120"/>
               </a:rPr>
-              <a:t>水滴和罩子髒，是車子自己的問題</a:t>
-            </a:r>
-            <a:endParaRPr lang="en-US" sz="2300" dirty="0"/>
+              <a:t>光達罩上的泥沙</a:t>
+            </a:r>
+            <a:endParaRPr lang="en-US" sz="1250" dirty="0"/>
           </a:p>
         </p:txBody>
       </p:sp>
       <p:sp>
         <p:nvSpPr>
-          <p:cNvPr id="28" name="Text 26"/>
+          <p:cNvPr id="25" name="Shape 23"/>
+          <p:cNvSpPr/>
+          <p:nvPr/>
+        </p:nvSpPr>
+        <p:spPr>
+          <a:xfrm>
+            <a:off x="4980737" y="2944368"/>
+            <a:ext cx="2926080" cy="420624"/>
+          </a:xfrm>
+          <a:prstGeom prst="roundRect">
+            <a:avLst>
+              <a:gd name="adj" fmla="val 15217"/>
+            </a:avLst>
+          </a:prstGeom>
+          <a:solidFill>
+            <a:srgbClr val="FDECEC"/>
+          </a:solidFill>
+          <a:ln/>
+        </p:spPr>
+      </p:sp>
+      <p:sp>
+        <p:nvSpPr>
+          <p:cNvPr id="26" name="Text 24"/>
           <p:cNvSpPr txBox="1"/>
           <p:nvPr/>
         </p:nvSpPr>
         <p:spPr>
           <a:xfrm>
-            <a:off x="3429000" y="2314482"/>
-            <a:ext cx="5212080" cy="1277831"/>
+            <a:off x="5053889" y="2990088"/>
+            <a:ext cx="2779776" cy="347472"/>
           </a:xfrm>
           <a:prstGeom prst="rect">
             <a:avLst/>
@@ -10534,61 +10624,123 @@
           <a:bodyPr wrap="square" lIns="0" tIns="0" rIns="0" bIns="0" rtlCol="0" anchor="t"/>
           <a:lstStyle/>
           <a:p>
-            <a:pPr indent="0" marL="0">
-              <a:lnSpc>
-                <a:spcPct val="128000"/>
+            <a:pPr algn="ctr" indent="0" marL="0">
+              <a:lnSpc>
+                <a:spcPct val="104000"/>
               </a:lnSpc>
               <a:buNone/>
             </a:pPr>
             <a:r>
-              <a:rPr lang="en-US" sz="1250" dirty="0">
-                <a:solidFill>
-                  <a:srgbClr val="5F7183"/>
+              <a:rPr lang="en-US" sz="1050" b="1" dirty="0">
+                <a:solidFill>
+                  <a:srgbClr val="A32C25"/>
                 </a:solidFill>
                 <a:latin typeface="Arial" pitchFamily="34" charset="0"/>
                 <a:ea typeface="Arial" pitchFamily="34" charset="-122"/>
                 <a:cs typeface="Arial" pitchFamily="34" charset="-120"/>
               </a:rPr>
-              <a:t>Trời mưa là chuyện của ông trời. Nhưng ống kính có sạch không thì phụ thuộc vào cần gạt nước và hệ thống rửa; vỏ LiDAR bẩn là chuyện bảo dưỡng. Trong công cụ hai thứ này bật riêng, không tự đi kèm mưa.</a:t>
-            </a:r>
-            <a:endParaRPr lang="en-US" sz="1250" dirty="0"/>
-          </a:p>
-          <a:p>
-            <a:pPr indent="0" marL="0">
-              <a:lnSpc>
-                <a:spcPct val="128000"/>
+              <a:t>Tầm × 0,65　số điểm × 0,35</a:t>
+            </a:r>
+            <a:endParaRPr lang="en-US" sz="1050" dirty="0"/>
+          </a:p>
+          <a:p>
+            <a:pPr algn="ctr" indent="0" marL="0">
+              <a:lnSpc>
+                <a:spcPct val="104000"/>
               </a:lnSpc>
               <a:buNone/>
             </a:pPr>
             <a:r>
-              <a:rPr lang="en-US" sz="1150" dirty="0">
-                <a:solidFill>
-                  <a:srgbClr val="5F7183"/>
+              <a:rPr lang="en-US" sz="950" dirty="0">
+                <a:solidFill>
+                  <a:srgbClr val="A32C25"/>
                 </a:solidFill>
                 <a:latin typeface="微軟正黑體" pitchFamily="34" charset="0"/>
                 <a:ea typeface="微軟正黑體" pitchFamily="34" charset="-122"/>
                 <a:cs typeface="微軟正黑體" pitchFamily="34" charset="-120"/>
               </a:rPr>
-              <a:t>下不下雨是老天爺的事。但鏡頭乾不乾淨取決於雨刷和清洗系統；光達罩髒了是保養的問題。工具裡這兩個要分開按，不會跟著雨天自動打開。</a:t>
-            </a:r>
-            <a:endParaRPr lang="en-US" sz="1250" dirty="0"/>
+              <a:t>範圍 ×0.65　點數 ×0.35</a:t>
+            </a:r>
+            <a:endParaRPr lang="en-US" sz="1050" dirty="0"/>
           </a:p>
         </p:txBody>
       </p:sp>
       <p:sp>
         <p:nvSpPr>
-          <p:cNvPr id="29" name="Shape 27"/>
+          <p:cNvPr id="27" name="Text 25"/>
+          <p:cNvSpPr txBox="1"/>
+          <p:nvPr/>
+        </p:nvSpPr>
+        <p:spPr>
+          <a:xfrm>
+            <a:off x="4907585" y="3419856"/>
+            <a:ext cx="3072384" cy="438912"/>
+          </a:xfrm>
+          <a:prstGeom prst="rect">
+            <a:avLst/>
+          </a:prstGeom>
+          <a:noFill/>
+          <a:ln/>
+        </p:spPr>
+        <p:txBody>
+          <a:bodyPr wrap="square" lIns="0" tIns="0" rIns="0" bIns="0" rtlCol="0" anchor="t"/>
+          <a:lstStyle/>
+          <a:p>
+            <a:pPr algn="ctr" indent="0" marL="0">
+              <a:lnSpc>
+                <a:spcPct val="106000"/>
+              </a:lnSpc>
+              <a:buNone/>
+            </a:pPr>
+            <a:r>
+              <a:rPr lang="en-US" sz="1000" b="1" dirty="0">
+                <a:solidFill>
+                  <a:srgbClr val="007F72"/>
+                </a:solidFill>
+                <a:latin typeface="Arial" pitchFamily="34" charset="0"/>
+                <a:ea typeface="Arial" pitchFamily="34" charset="-122"/>
+                <a:cs typeface="Arial" pitchFamily="34" charset="-120"/>
+              </a:rPr>
+              <a:t>Do lịch bảo dưỡng — cũng không phải do trời</a:t>
+            </a:r>
+            <a:endParaRPr lang="en-US" sz="1000" dirty="0"/>
+          </a:p>
+          <a:p>
+            <a:pPr algn="ctr" indent="0" marL="0">
+              <a:lnSpc>
+                <a:spcPct val="106000"/>
+              </a:lnSpc>
+              <a:buNone/>
+            </a:pPr>
+            <a:r>
+              <a:rPr lang="en-US" sz="900" dirty="0">
+                <a:solidFill>
+                  <a:srgbClr val="007F72"/>
+                </a:solidFill>
+                <a:latin typeface="微軟正黑體" pitchFamily="34" charset="0"/>
+                <a:ea typeface="微軟正黑體" pitchFamily="34" charset="-122"/>
+                <a:cs typeface="微軟正黑體" pitchFamily="34" charset="-120"/>
+              </a:rPr>
+              <a:t>取決於保養週期，一樣不是老天爺</a:t>
+            </a:r>
+            <a:endParaRPr lang="en-US" sz="1000" dirty="0"/>
+          </a:p>
+        </p:txBody>
+      </p:sp>
+      <p:sp>
+        <p:nvSpPr>
+          <p:cNvPr id="28" name="Shape 26"/>
           <p:cNvSpPr/>
           <p:nvPr/>
         </p:nvSpPr>
         <p:spPr>
           <a:xfrm>
             <a:off x="502920" y="3913632"/>
-            <a:ext cx="8138160" cy="621792"/>
+            <a:ext cx="8138160" cy="603504"/>
           </a:xfrm>
           <a:prstGeom prst="roundRect">
             <a:avLst>
-              <a:gd name="adj" fmla="val 13235"/>
+              <a:gd name="adj" fmla="val 13636"/>
             </a:avLst>
           </a:prstGeom>
           <a:solidFill>
@@ -10604,13 +10756,13 @@
       </p:sp>
       <p:sp>
         <p:nvSpPr>
-          <p:cNvPr id="30" name="Text 28"/>
+          <p:cNvPr id="29" name="Text 27"/>
           <p:cNvSpPr txBox="1"/>
           <p:nvPr/>
         </p:nvSpPr>
         <p:spPr>
           <a:xfrm>
-            <a:off x="685800" y="3986784"/>
+            <a:off x="685800" y="3977640"/>
             <a:ext cx="7772400" cy="493776"/>
           </a:xfrm>
           <a:prstGeom prst="rect">
@@ -10625,12 +10777,12 @@
           <a:p>
             <a:pPr indent="0" marL="0">
               <a:lnSpc>
-                <a:spcPct val="116000"/>
+                <a:spcPct val="114000"/>
               </a:lnSpc>
               <a:buNone/>
             </a:pPr>
             <a:r>
-              <a:rPr lang="en-US" sz="1250" b="1" dirty="0">
+              <a:rPr lang="en-US" sz="1200" b="1" dirty="0">
                 <a:solidFill>
                   <a:srgbClr val="7A4E00"/>
                 </a:solidFill>
@@ -10638,19 +10790,19 @@
                 <a:ea typeface="Arial" pitchFamily="34" charset="-122"/>
                 <a:cs typeface="Arial" pitchFamily="34" charset="-120"/>
               </a:rPr>
-              <a:t>Vỏ LiDAR bẩn: tầm đo × 0,65 và số điểm × 0,35. Chồng thêm lên mưa thì rất nặng.</a:t>
-            </a:r>
-            <a:endParaRPr lang="en-US" sz="1250" dirty="0"/>
+              <a:t>Hai thứ này trong công cụ phải bấm riêng — chọn mưa to cũng KHÔNG tự kèm theo chúng.</a:t>
+            </a:r>
+            <a:endParaRPr lang="en-US" sz="1200" dirty="0"/>
           </a:p>
           <a:p>
             <a:pPr indent="0" marL="0">
               <a:lnSpc>
-                <a:spcPct val="116000"/>
+                <a:spcPct val="114000"/>
               </a:lnSpc>
               <a:buNone/>
             </a:pPr>
             <a:r>
-              <a:rPr lang="en-US" sz="1150" dirty="0">
+              <a:rPr lang="en-US" sz="1100" dirty="0">
                 <a:solidFill>
                   <a:srgbClr val="7A4E00"/>
                 </a:solidFill>
@@ -10658,15 +10810,15 @@
                 <a:ea typeface="微軟正黑體" pitchFamily="34" charset="-122"/>
                 <a:cs typeface="微軟正黑體" pitchFamily="34" charset="-120"/>
               </a:rPr>
-              <a:t>光達罩髒污：範圍 ×0.65、點數 ×0.35。再疊上雨天就很慘。</a:t>
-            </a:r>
-            <a:endParaRPr lang="en-US" sz="1250" dirty="0"/>
+              <a:t>工具裡這兩個要分開按——選了大雨也不會自動幫你加上去。</a:t>
+            </a:r>
+            <a:endParaRPr lang="en-US" sz="1200" dirty="0"/>
           </a:p>
         </p:txBody>
       </p:sp>
       <p:pic>
         <p:nvPicPr>
-          <p:cNvPr id="32" name="Image 0" descr="/Users/tsengchenghsun/Class/carClass/Claude outputs/第三週(9-24)/src/logo.png">    </p:cNvPr>
+          <p:cNvPr id="31" name="Image 0" descr="/Users/tsengchenghsun/Class/carClass/Claude outputs/第三週(9-24)/src/logo.png">    </p:cNvPr>
           <p:cNvPicPr>
             <a:picLocks noChangeAspect="1"/>
           </p:cNvPicPr>
@@ -10690,7 +10842,7 @@
       </p:pic>
       <p:sp>
         <p:nvSpPr>
-          <p:cNvPr id="33" name="Text 29"/>
+          <p:cNvPr id="32" name="Text 28"/>
           <p:cNvSpPr txBox="1"/>
           <p:nvPr/>
         </p:nvSpPr>
@@ -10729,7 +10881,7 @@
       </p:sp>
       <p:sp>
         <p:nvSpPr>
-          <p:cNvPr id="34" name="Text 30"/>
+          <p:cNvPr id="33" name="Text 29"/>
           <p:cNvSpPr txBox="1"/>
           <p:nvPr/>
         </p:nvSpPr>
@@ -10799,8 +10951,154 @@
         </p:nvSpPr>
         <p:spPr>
           <a:xfrm>
-            <a:off x="502920" y="420624"/>
-            <a:ext cx="8138160" cy="274320"/>
+            <a:off x="502920" y="292608"/>
+            <a:ext cx="8138160" cy="841248"/>
+          </a:xfrm>
+          <a:prstGeom prst="rect">
+            <a:avLst/>
+          </a:prstGeom>
+          <a:noFill/>
+          <a:ln/>
+        </p:spPr>
+        <p:txBody>
+          <a:bodyPr wrap="square" lIns="0" tIns="0" rIns="0" bIns="0" rtlCol="0" anchor="t"/>
+          <a:lstStyle/>
+          <a:p>
+            <a:pPr indent="0" marL="0">
+              <a:lnSpc>
+                <a:spcPct val="116000"/>
+              </a:lnSpc>
+              <a:buNone/>
+            </a:pPr>
+            <a:r>
+              <a:rPr lang="en-US" sz="2200" b="1" dirty="0">
+                <a:solidFill>
+                  <a:srgbClr val="0B1F3A"/>
+                </a:solidFill>
+                <a:latin typeface="Arial" pitchFamily="34" charset="0"/>
+                <a:ea typeface="Arial" pitchFamily="34" charset="-122"/>
+                <a:cs typeface="Arial" pitchFamily="34" charset="-120"/>
+              </a:rPr>
+              <a:t>Có dữ liệu không có nghĩa là dữ liệu đó đủ dùng</a:t>
+            </a:r>
+            <a:endParaRPr lang="en-US" sz="2200" dirty="0"/>
+          </a:p>
+          <a:p>
+            <a:pPr indent="0" marL="0">
+              <a:lnSpc>
+                <a:spcPct val="116000"/>
+              </a:lnSpc>
+              <a:buNone/>
+            </a:pPr>
+            <a:r>
+              <a:rPr lang="en-US" sz="1350" dirty="0">
+                <a:solidFill>
+                  <a:srgbClr val="5F7183"/>
+                </a:solidFill>
+                <a:latin typeface="微軟正黑體" pitchFamily="34" charset="0"/>
+                <a:ea typeface="微軟正黑體" pitchFamily="34" charset="-122"/>
+                <a:cs typeface="微軟正黑體" pitchFamily="34" charset="-120"/>
+              </a:rPr>
+              <a:t>有資料，不等於那份資料夠用</a:t>
+            </a:r>
+            <a:endParaRPr lang="en-US" sz="2200" dirty="0"/>
+          </a:p>
+        </p:txBody>
+      </p:sp>
+      <p:sp>
+        <p:nvSpPr>
+          <p:cNvPr id="3" name="Shape 1"/>
+          <p:cNvSpPr/>
+          <p:nvPr/>
+        </p:nvSpPr>
+        <p:spPr>
+          <a:xfrm>
+            <a:off x="502920" y="1316736"/>
+            <a:ext cx="3566160" cy="2249424"/>
+          </a:xfrm>
+          <a:prstGeom prst="roundRect">
+            <a:avLst>
+              <a:gd name="adj" fmla="val 4065"/>
+            </a:avLst>
+          </a:prstGeom>
+          <a:solidFill>
+            <a:srgbClr val="0B1F3A"/>
+          </a:solidFill>
+          <a:ln/>
+        </p:spPr>
+      </p:sp>
+      <p:sp>
+        <p:nvSpPr>
+          <p:cNvPr id="4" name="Text 2"/>
+          <p:cNvSpPr txBox="1"/>
+          <p:nvPr/>
+        </p:nvSpPr>
+        <p:spPr>
+          <a:xfrm>
+            <a:off x="667512" y="1444752"/>
+            <a:ext cx="3236976" cy="329184"/>
+          </a:xfrm>
+          <a:prstGeom prst="rect">
+            <a:avLst/>
+          </a:prstGeom>
+          <a:noFill/>
+          <a:ln/>
+        </p:spPr>
+        <p:txBody>
+          <a:bodyPr wrap="square" lIns="0" tIns="0" rIns="0" bIns="0" rtlCol="0" anchor="t"/>
+          <a:lstStyle/>
+          <a:p>
+            <a:pPr indent="0" marL="0">
+              <a:lnSpc>
+                <a:spcPct val="104000"/>
+              </a:lnSpc>
+              <a:buNone/>
+            </a:pPr>
+            <a:r>
+              <a:rPr lang="en-US" sz="1050" b="1" dirty="0">
+                <a:solidFill>
+                  <a:srgbClr val="00A896"/>
+                </a:solidFill>
+                <a:latin typeface="Arial" pitchFamily="34" charset="0"/>
+                <a:ea typeface="Arial" pitchFamily="34" charset="-122"/>
+                <a:cs typeface="Arial" pitchFamily="34" charset="-120"/>
+              </a:rPr>
+              <a:t>Radar vẫn báo đều đặn trong mưa to</a:t>
+            </a:r>
+            <a:endParaRPr lang="en-US" sz="1050" dirty="0"/>
+          </a:p>
+          <a:p>
+            <a:pPr indent="0" marL="0">
+              <a:lnSpc>
+                <a:spcPct val="104000"/>
+              </a:lnSpc>
+              <a:buNone/>
+            </a:pPr>
+            <a:r>
+              <a:rPr lang="en-US" sz="950" dirty="0">
+                <a:solidFill>
+                  <a:srgbClr val="00A896"/>
+                </a:solidFill>
+                <a:latin typeface="微軟正黑體" pitchFamily="34" charset="0"/>
+                <a:ea typeface="微軟正黑體" pitchFamily="34" charset="-122"/>
+                <a:cs typeface="微軟正黑體" pitchFamily="34" charset="-120"/>
+              </a:rPr>
+              <a:t>大雨裡雷達還是穩穩地回報</a:t>
+            </a:r>
+            <a:endParaRPr lang="en-US" sz="1050" dirty="0"/>
+          </a:p>
+        </p:txBody>
+      </p:sp>
+      <p:sp>
+        <p:nvSpPr>
+          <p:cNvPr id="5" name="Text 3"/>
+          <p:cNvSpPr txBox="1"/>
+          <p:nvPr/>
+        </p:nvSpPr>
+        <p:spPr>
+          <a:xfrm>
+            <a:off x="667512" y="1847088"/>
+            <a:ext cx="3236976" cy="566928"/>
           </a:xfrm>
           <a:prstGeom prst="rect">
             <a:avLst/>
@@ -10816,42 +11114,182 @@
               <a:buNone/>
             </a:pPr>
             <a:r>
-              <a:rPr lang="en-US" sz="1250" b="1" dirty="0">
-                <a:solidFill>
-                  <a:srgbClr val="007F72"/>
+              <a:rPr lang="en-US" sz="2700" b="1" dirty="0">
+                <a:solidFill>
+                  <a:srgbClr val="FFFFFF"/>
                 </a:solidFill>
                 <a:latin typeface="Arial" pitchFamily="34" charset="0"/>
                 <a:ea typeface="Arial" pitchFamily="34" charset="-122"/>
                 <a:cs typeface="Arial" pitchFamily="34" charset="-120"/>
               </a:rPr>
-              <a:t>Câu cuối cùng · 最後一句</a:t>
-            </a:r>
-            <a:endParaRPr lang="en-US" sz="1250" dirty="0"/>
+              <a:t>40.0 m</a:t>
+            </a:r>
+            <a:endParaRPr lang="en-US" sz="2700" dirty="0"/>
           </a:p>
         </p:txBody>
       </p:sp>
       <p:sp>
         <p:nvSpPr>
-          <p:cNvPr id="3" name="Shape 1"/>
+          <p:cNvPr id="6" name="Text 4"/>
+          <p:cNvSpPr txBox="1"/>
+          <p:nvPr/>
+        </p:nvSpPr>
+        <p:spPr>
+          <a:xfrm>
+            <a:off x="667512" y="2450592"/>
+            <a:ext cx="3236976" cy="402336"/>
+          </a:xfrm>
+          <a:prstGeom prst="rect">
+            <a:avLst/>
+          </a:prstGeom>
+          <a:noFill/>
+          <a:ln/>
+        </p:spPr>
+        <p:txBody>
+          <a:bodyPr wrap="square" lIns="0" tIns="0" rIns="0" bIns="0" rtlCol="0" anchor="t"/>
+          <a:lstStyle/>
+          <a:p>
+            <a:pPr indent="0" marL="0">
+              <a:lnSpc>
+                <a:spcPct val="108000"/>
+              </a:lnSpc>
+              <a:buNone/>
+            </a:pPr>
+            <a:r>
+              <a:rPr lang="en-US" sz="1150" b="1" dirty="0">
+                <a:solidFill>
+                  <a:srgbClr val="AFC3D4"/>
+                </a:solidFill>
+                <a:latin typeface="Arial" pitchFamily="34" charset="0"/>
+                <a:ea typeface="Arial" pitchFamily="34" charset="-122"/>
+                <a:cs typeface="Arial" pitchFamily="34" charset="-120"/>
+              </a:rPr>
+              <a:t>Vật cản chưa phân loại</a:t>
+            </a:r>
+            <a:endParaRPr lang="en-US" sz="1150" dirty="0"/>
+          </a:p>
+          <a:p>
+            <a:pPr indent="0" marL="0">
+              <a:lnSpc>
+                <a:spcPct val="108000"/>
+              </a:lnSpc>
+              <a:buNone/>
+            </a:pPr>
+            <a:r>
+              <a:rPr lang="en-US" sz="1050" dirty="0">
+                <a:solidFill>
+                  <a:srgbClr val="8AA0B4"/>
+                </a:solidFill>
+                <a:latin typeface="微軟正黑體" pitchFamily="34" charset="0"/>
+                <a:ea typeface="微軟正黑體" pitchFamily="34" charset="-122"/>
+                <a:cs typeface="微軟正黑體" pitchFamily="34" charset="-120"/>
+              </a:rPr>
+              <a:t>未分類障礙物</a:t>
+            </a:r>
+            <a:endParaRPr lang="en-US" sz="1150" dirty="0"/>
+          </a:p>
+        </p:txBody>
+      </p:sp>
+      <p:sp>
+        <p:nvSpPr>
+          <p:cNvPr id="7" name="Text 5"/>
+          <p:cNvSpPr txBox="1"/>
+          <p:nvPr/>
+        </p:nvSpPr>
+        <p:spPr>
+          <a:xfrm>
+            <a:off x="667512" y="3017520"/>
+            <a:ext cx="3236976" cy="402336"/>
+          </a:xfrm>
+          <a:prstGeom prst="rect">
+            <a:avLst/>
+          </a:prstGeom>
+          <a:noFill/>
+          <a:ln/>
+        </p:spPr>
+        <p:txBody>
+          <a:bodyPr wrap="square" lIns="0" tIns="0" rIns="0" bIns="0" rtlCol="0" anchor="t"/>
+          <a:lstStyle/>
+          <a:p>
+            <a:pPr indent="0" marL="0">
+              <a:lnSpc>
+                <a:spcPct val="104000"/>
+              </a:lnSpc>
+              <a:buNone/>
+            </a:pPr>
+            <a:r>
+              <a:rPr lang="en-US" sz="1000" b="1" dirty="0">
+                <a:solidFill>
+                  <a:srgbClr val="7E93A6"/>
+                </a:solidFill>
+                <a:latin typeface="Arial" pitchFamily="34" charset="0"/>
+                <a:ea typeface="Arial" pitchFamily="34" charset="-122"/>
+                <a:cs typeface="Arial" pitchFamily="34" charset="-120"/>
+              </a:rPr>
+              <a:t>Con số này chính xác, ổn định, không hề sai.</a:t>
+            </a:r>
+            <a:endParaRPr lang="en-US" sz="1000" dirty="0"/>
+          </a:p>
+          <a:p>
+            <a:pPr indent="0" marL="0">
+              <a:lnSpc>
+                <a:spcPct val="104000"/>
+              </a:lnSpc>
+              <a:buNone/>
+            </a:pPr>
+            <a:r>
+              <a:rPr lang="en-US" sz="900" dirty="0">
+                <a:solidFill>
+                  <a:srgbClr val="7E93A6"/>
+                </a:solidFill>
+                <a:latin typeface="微軟正黑體" pitchFamily="34" charset="0"/>
+                <a:ea typeface="微軟正黑體" pitchFamily="34" charset="-122"/>
+                <a:cs typeface="微軟正黑體" pitchFamily="34" charset="-120"/>
+              </a:rPr>
+              <a:t>這個數字準確、穩定，一點錯都沒有。</a:t>
+            </a:r>
+            <a:endParaRPr lang="en-US" sz="1000" dirty="0"/>
+          </a:p>
+        </p:txBody>
+      </p:sp>
+      <p:sp>
+        <p:nvSpPr>
+          <p:cNvPr id="8" name="Shape 6"/>
           <p:cNvSpPr/>
           <p:nvPr/>
         </p:nvSpPr>
         <p:spPr>
           <a:xfrm>
-            <a:off x="502920" y="1101852"/>
-            <a:ext cx="2468880" cy="2514600"/>
-          </a:xfrm>
-          <a:prstGeom prst="roundRect">
-            <a:avLst>
-              <a:gd name="adj" fmla="val 4444"/>
-            </a:avLst>
+            <a:off x="4187952" y="2295144"/>
+            <a:ext cx="768096" cy="292608"/>
+          </a:xfrm>
+          <a:prstGeom prst="rightArrow">
+            <a:avLst/>
           </a:prstGeom>
           <a:solidFill>
-            <a:srgbClr val="F4F7FA"/>
+            <a:srgbClr val="C4CFD9"/>
           </a:solidFill>
-          <a:ln w="12700">
+          <a:ln/>
+        </p:spPr>
+      </p:sp>
+      <p:sp>
+        <p:nvSpPr>
+          <p:cNvPr id="9" name="Shape 7"/>
+          <p:cNvSpPr/>
+          <p:nvPr/>
+        </p:nvSpPr>
+        <p:spPr>
+          <a:xfrm flipH="1">
+            <a:off x="4370832" y="2240280"/>
+            <a:ext cx="402336" cy="402336"/>
+          </a:xfrm>
+          <a:prstGeom prst="line">
+            <a:avLst/>
+          </a:prstGeom>
+          <a:noFill/>
+          <a:ln w="44450">
             <a:solidFill>
-              <a:srgbClr val="DBE3EA"/>
+              <a:srgbClr val="D9463E"/>
             </a:solidFill>
             <a:prstDash val="solid"/>
           </a:ln>
@@ -10859,87 +11297,22 @@
       </p:sp>
       <p:sp>
         <p:nvSpPr>
-          <p:cNvPr id="4" name="Shape 2"/>
+          <p:cNvPr id="10" name="Shape 8"/>
           <p:cNvSpPr/>
           <p:nvPr/>
         </p:nvSpPr>
         <p:spPr>
           <a:xfrm>
-            <a:off x="1019739" y="1978762"/>
-            <a:ext cx="228234" cy="209215"/>
-          </a:xfrm>
-          <a:prstGeom prst="roundRect">
-            <a:avLst>
-              <a:gd name="adj" fmla="val 87412"/>
-            </a:avLst>
-          </a:prstGeom>
-          <a:solidFill>
-            <a:srgbClr val="FFB020"/>
-          </a:solidFill>
-          <a:ln/>
-        </p:spPr>
-      </p:sp>
-      <p:sp>
-        <p:nvSpPr>
-          <p:cNvPr id="5" name="Shape 3"/>
-          <p:cNvSpPr/>
-          <p:nvPr/>
-        </p:nvSpPr>
-        <p:spPr>
-          <a:xfrm>
-            <a:off x="772485" y="2007291"/>
-            <a:ext cx="209215" cy="152156"/>
-          </a:xfrm>
-          <a:prstGeom prst="rect">
-            <a:avLst/>
-          </a:prstGeom>
-          <a:solidFill>
-            <a:srgbClr val="FFB020">
-              <a:alpha val="60000"/>
-            </a:srgbClr>
-          </a:solidFill>
-          <a:ln/>
-        </p:spPr>
-      </p:sp>
-      <p:sp>
-        <p:nvSpPr>
-          <p:cNvPr id="6" name="Shape 4"/>
-          <p:cNvSpPr/>
-          <p:nvPr/>
-        </p:nvSpPr>
-        <p:spPr>
-          <a:xfrm>
-            <a:off x="1286012" y="2007291"/>
-            <a:ext cx="209215" cy="152156"/>
-          </a:xfrm>
-          <a:prstGeom prst="rect">
-            <a:avLst/>
-          </a:prstGeom>
-          <a:solidFill>
-            <a:srgbClr val="FFB020">
-              <a:alpha val="60000"/>
-            </a:srgbClr>
-          </a:solidFill>
-          <a:ln/>
-        </p:spPr>
-      </p:sp>
-      <p:sp>
-        <p:nvSpPr>
-          <p:cNvPr id="7" name="Shape 5"/>
-          <p:cNvSpPr/>
-          <p:nvPr/>
-        </p:nvSpPr>
-        <p:spPr>
-          <a:xfrm rot="5400000">
-            <a:off x="1000719" y="2264054"/>
-            <a:ext cx="266273" cy="152156"/>
-          </a:xfrm>
-          <a:prstGeom prst="chevron">
-            <a:avLst/>
-          </a:prstGeom>
-          <a:ln w="31750">
+            <a:off x="4370832" y="2240280"/>
+            <a:ext cx="402336" cy="402336"/>
+          </a:xfrm>
+          <a:prstGeom prst="line">
+            <a:avLst/>
+          </a:prstGeom>
+          <a:noFill/>
+          <a:ln w="44450">
             <a:solidFill>
-              <a:srgbClr val="FFB020"/>
+              <a:srgbClr val="D9463E"/>
             </a:solidFill>
             <a:prstDash val="solid"/>
           </a:ln>
@@ -10947,23 +11320,26 @@
       </p:sp>
       <p:sp>
         <p:nvSpPr>
-          <p:cNvPr id="8" name="Shape 6"/>
+          <p:cNvPr id="11" name="Shape 9"/>
           <p:cNvSpPr/>
           <p:nvPr/>
         </p:nvSpPr>
         <p:spPr>
-          <a:xfrm rot="5400000">
-            <a:off x="943661" y="2416211"/>
-            <a:ext cx="380390" cy="171176"/>
-          </a:xfrm>
-          <a:prstGeom prst="chevron">
-            <a:avLst/>
-          </a:prstGeom>
-          <a:ln w="31750">
+          <a:xfrm>
+            <a:off x="5074920" y="1316736"/>
+            <a:ext cx="3566160" cy="2249424"/>
+          </a:xfrm>
+          <a:prstGeom prst="roundRect">
+            <a:avLst>
+              <a:gd name="adj" fmla="val 4065"/>
+            </a:avLst>
+          </a:prstGeom>
+          <a:solidFill>
+            <a:srgbClr val="FDECEC"/>
+          </a:solidFill>
+          <a:ln w="15875">
             <a:solidFill>
-              <a:srgbClr val="FFB020">
-                <a:alpha val="55000"/>
-              </a:srgbClr>
+              <a:srgbClr val="D9463E"/>
             </a:solidFill>
             <a:prstDash val="solid"/>
           </a:ln>
@@ -10971,34 +11347,158 @@
       </p:sp>
       <p:sp>
         <p:nvSpPr>
-          <p:cNvPr id="9" name="Shape 7"/>
+          <p:cNvPr id="12" name="Text 10"/>
+          <p:cNvSpPr txBox="1"/>
+          <p:nvPr/>
+        </p:nvSpPr>
+        <p:spPr>
+          <a:xfrm>
+            <a:off x="5239512" y="1444752"/>
+            <a:ext cx="3236976" cy="329184"/>
+          </a:xfrm>
+          <a:prstGeom prst="rect">
+            <a:avLst/>
+          </a:prstGeom>
+          <a:noFill/>
+          <a:ln/>
+        </p:spPr>
+        <p:txBody>
+          <a:bodyPr wrap="square" lIns="0" tIns="0" rIns="0" bIns="0" rtlCol="0" anchor="t"/>
+          <a:lstStyle/>
+          <a:p>
+            <a:pPr indent="0" marL="0">
+              <a:lnSpc>
+                <a:spcPct val="104000"/>
+              </a:lnSpc>
+              <a:buNone/>
+            </a:pPr>
+            <a:r>
+              <a:rPr lang="en-US" sz="1050" b="1" dirty="0">
+                <a:solidFill>
+                  <a:srgbClr val="D9463E"/>
+                </a:solidFill>
+                <a:latin typeface="Arial" pitchFamily="34" charset="0"/>
+                <a:ea typeface="Arial" pitchFamily="34" charset="-122"/>
+                <a:cs typeface="Arial" pitchFamily="34" charset="-120"/>
+              </a:rPr>
+              <a:t>Nhưng việc đang cần làm là…</a:t>
+            </a:r>
+            <a:endParaRPr lang="en-US" sz="1050" dirty="0"/>
+          </a:p>
+          <a:p>
+            <a:pPr indent="0" marL="0">
+              <a:lnSpc>
+                <a:spcPct val="104000"/>
+              </a:lnSpc>
+              <a:buNone/>
+            </a:pPr>
+            <a:r>
+              <a:rPr lang="en-US" sz="950" dirty="0">
+                <a:solidFill>
+                  <a:srgbClr val="D9463E"/>
+                </a:solidFill>
+                <a:latin typeface="微軟正黑體" pitchFamily="34" charset="0"/>
+                <a:ea typeface="微軟正黑體" pitchFamily="34" charset="-122"/>
+                <a:cs typeface="微軟正黑體" pitchFamily="34" charset="-120"/>
+              </a:rPr>
+              <a:t>但現在要做的事是……</a:t>
+            </a:r>
+            <a:endParaRPr lang="en-US" sz="1050" dirty="0"/>
+          </a:p>
+        </p:txBody>
+      </p:sp>
+      <p:sp>
+        <p:nvSpPr>
+          <p:cNvPr id="13" name="Shape 11"/>
           <p:cNvSpPr/>
           <p:nvPr/>
         </p:nvSpPr>
         <p:spPr>
           <a:xfrm>
-            <a:off x="1067288" y="2663464"/>
-            <a:ext cx="133137" cy="133137"/>
+            <a:off x="5349240" y="1883664"/>
+            <a:ext cx="402336" cy="1024128"/>
+          </a:xfrm>
+          <a:prstGeom prst="roundRect">
+            <a:avLst>
+              <a:gd name="adj" fmla="val 22727"/>
+            </a:avLst>
+          </a:prstGeom>
+          <a:solidFill>
+            <a:srgbClr val="3A4650"/>
+          </a:solidFill>
+          <a:ln/>
+        </p:spPr>
+      </p:sp>
+      <p:sp>
+        <p:nvSpPr>
+          <p:cNvPr id="14" name="Shape 12"/>
+          <p:cNvSpPr/>
+          <p:nvPr/>
+        </p:nvSpPr>
+        <p:spPr>
+          <a:xfrm>
+            <a:off x="5440680" y="1975104"/>
+            <a:ext cx="219456" cy="219456"/>
           </a:xfrm>
           <a:prstGeom prst="ellipse">
             <a:avLst/>
           </a:prstGeom>
           <a:solidFill>
-            <a:srgbClr val="FFB020"/>
+            <a:srgbClr val="9AA6B0"/>
           </a:solidFill>
           <a:ln/>
         </p:spPr>
       </p:sp>
       <p:sp>
         <p:nvSpPr>
-          <p:cNvPr id="10" name="Text 8"/>
+          <p:cNvPr id="15" name="Shape 13"/>
+          <p:cNvSpPr/>
+          <p:nvPr/>
+        </p:nvSpPr>
+        <p:spPr>
+          <a:xfrm>
+            <a:off x="5440680" y="2286000"/>
+            <a:ext cx="219456" cy="219456"/>
+          </a:xfrm>
+          <a:prstGeom prst="ellipse">
+            <a:avLst/>
+          </a:prstGeom>
+          <a:solidFill>
+            <a:srgbClr val="9AA6B0"/>
+          </a:solidFill>
+          <a:ln/>
+        </p:spPr>
+      </p:sp>
+      <p:sp>
+        <p:nvSpPr>
+          <p:cNvPr id="16" name="Shape 14"/>
+          <p:cNvSpPr/>
+          <p:nvPr/>
+        </p:nvSpPr>
+        <p:spPr>
+          <a:xfrm>
+            <a:off x="5440680" y="2596896"/>
+            <a:ext cx="219456" cy="219456"/>
+          </a:xfrm>
+          <a:prstGeom prst="ellipse">
+            <a:avLst/>
+          </a:prstGeom>
+          <a:solidFill>
+            <a:srgbClr val="9AA6B0"/>
+          </a:solidFill>
+          <a:ln/>
+        </p:spPr>
+      </p:sp>
+      <p:sp>
+        <p:nvSpPr>
+          <p:cNvPr id="17" name="Text 15"/>
           <p:cNvSpPr txBox="1"/>
           <p:nvPr/>
         </p:nvSpPr>
         <p:spPr>
           <a:xfrm>
-            <a:off x="1609344" y="2176272"/>
-            <a:ext cx="256032" cy="365760"/>
+            <a:off x="5788152" y="2121408"/>
+            <a:ext cx="420624" cy="548640"/>
           </a:xfrm>
           <a:prstGeom prst="rect">
             <a:avLst/>
@@ -11010,94 +11510,96 @@
           <a:bodyPr wrap="square" lIns="0" tIns="0" rIns="0" bIns="0" rtlCol="0" anchor="ctr"/>
           <a:lstStyle/>
           <a:p>
-            <a:pPr algn="ctr" indent="0" marL="0">
+            <a:pPr indent="0" marL="0">
               <a:buNone/>
             </a:pPr>
             <a:r>
-              <a:rPr lang="en-US" sz="1700" b="1" dirty="0">
-                <a:solidFill>
-                  <a:srgbClr val="5F7183"/>
+              <a:rPr lang="en-US" sz="3200" b="1" dirty="0">
+                <a:solidFill>
+                  <a:srgbClr val="D9463E"/>
+                </a:solidFill>
+                <a:latin typeface="Arial" pitchFamily="34" charset="0"/>
+                <a:ea typeface="Arial" pitchFamily="34" charset="-122"/>
+                <a:cs typeface="Arial" pitchFamily="34" charset="-120"/>
+              </a:rPr>
+              <a:t>?</a:t>
+            </a:r>
+            <a:endParaRPr lang="en-US" sz="3200" dirty="0"/>
+          </a:p>
+        </p:txBody>
+      </p:sp>
+      <p:sp>
+        <p:nvSpPr>
+          <p:cNvPr id="18" name="Text 16"/>
+          <p:cNvSpPr txBox="1"/>
+          <p:nvPr/>
+        </p:nvSpPr>
+        <p:spPr>
+          <a:xfrm>
+            <a:off x="6080760" y="1865376"/>
+            <a:ext cx="2395728" cy="731520"/>
+          </a:xfrm>
+          <a:prstGeom prst="rect">
+            <a:avLst/>
+          </a:prstGeom>
+          <a:noFill/>
+          <a:ln/>
+        </p:spPr>
+        <p:txBody>
+          <a:bodyPr wrap="square" lIns="0" tIns="0" rIns="0" bIns="0" rtlCol="0" anchor="t"/>
+          <a:lstStyle/>
+          <a:p>
+            <a:pPr indent="0" marL="0">
+              <a:lnSpc>
+                <a:spcPct val="112000"/>
+              </a:lnSpc>
+              <a:buNone/>
+            </a:pPr>
+            <a:r>
+              <a:rPr lang="en-US" sz="1300" b="1" dirty="0">
+                <a:solidFill>
+                  <a:srgbClr val="A32C25"/>
+                </a:solidFill>
+                <a:latin typeface="Arial" pitchFamily="34" charset="0"/>
+                <a:ea typeface="Arial" pitchFamily="34" charset="-122"/>
+                <a:cs typeface="Arial" pitchFamily="34" charset="-120"/>
+              </a:rPr>
+              <a:t>Đèn đang đỏ hay xanh?</a:t>
+            </a:r>
+            <a:endParaRPr lang="en-US" sz="1300" dirty="0"/>
+          </a:p>
+          <a:p>
+            <a:pPr indent="0" marL="0">
+              <a:lnSpc>
+                <a:spcPct val="112000"/>
+              </a:lnSpc>
+              <a:buNone/>
+            </a:pPr>
+            <a:r>
+              <a:rPr lang="en-US" sz="1100" dirty="0">
+                <a:solidFill>
+                  <a:srgbClr val="A32C25"/>
                 </a:solidFill>
                 <a:latin typeface="微軟正黑體" pitchFamily="34" charset="0"/>
                 <a:ea typeface="微軟正黑體" pitchFamily="34" charset="-122"/>
                 <a:cs typeface="微軟正黑體" pitchFamily="34" charset="-120"/>
               </a:rPr>
-              <a:t>＋</a:t>
-            </a:r>
-            <a:endParaRPr lang="en-US" sz="1700" dirty="0"/>
+              <a:t>現在是紅燈還是綠燈？</a:t>
+            </a:r>
+            <a:endParaRPr lang="en-US" sz="1300" dirty="0"/>
           </a:p>
         </p:txBody>
       </p:sp>
       <p:sp>
         <p:nvSpPr>
-          <p:cNvPr id="11" name="Shape 9"/>
-          <p:cNvSpPr/>
-          <p:nvPr/>
-        </p:nvSpPr>
-        <p:spPr>
-          <a:xfrm>
-            <a:off x="1903415" y="1978762"/>
-            <a:ext cx="874898" cy="760781"/>
-          </a:xfrm>
-          <a:prstGeom prst="triangle">
-            <a:avLst/>
-          </a:prstGeom>
-          <a:solidFill>
-            <a:srgbClr val="FFB020"/>
-          </a:solidFill>
-          <a:ln/>
-        </p:spPr>
-      </p:sp>
-      <p:sp>
-        <p:nvSpPr>
-          <p:cNvPr id="12" name="Shape 10"/>
-          <p:cNvSpPr/>
-          <p:nvPr/>
-        </p:nvSpPr>
-        <p:spPr>
-          <a:xfrm>
-            <a:off x="2302825" y="2245035"/>
-            <a:ext cx="76078" cy="247254"/>
-          </a:xfrm>
-          <a:prstGeom prst="rect">
-            <a:avLst/>
-          </a:prstGeom>
-          <a:solidFill>
-            <a:srgbClr val="FFFFFF"/>
-          </a:solidFill>
-          <a:ln/>
-        </p:spPr>
-      </p:sp>
-      <p:sp>
-        <p:nvSpPr>
-          <p:cNvPr id="13" name="Shape 11"/>
-          <p:cNvSpPr/>
-          <p:nvPr/>
-        </p:nvSpPr>
-        <p:spPr>
-          <a:xfrm>
-            <a:off x="2293315" y="2549347"/>
-            <a:ext cx="95098" cy="95098"/>
-          </a:xfrm>
-          <a:prstGeom prst="ellipse">
-            <a:avLst/>
-          </a:prstGeom>
-          <a:solidFill>
-            <a:srgbClr val="FFFFFF"/>
-          </a:solidFill>
-          <a:ln/>
-        </p:spPr>
-      </p:sp>
-      <p:sp>
-        <p:nvSpPr>
-          <p:cNvPr id="14" name="Text 12"/>
+          <p:cNvPr id="19" name="Text 17"/>
           <p:cNvSpPr txBox="1"/>
           <p:nvPr/>
         </p:nvSpPr>
         <p:spPr>
           <a:xfrm>
-            <a:off x="3429000" y="1319005"/>
-            <a:ext cx="5212080" cy="1005611"/>
+            <a:off x="5239512" y="3017520"/>
+            <a:ext cx="3236976" cy="402336"/>
           </a:xfrm>
           <a:prstGeom prst="rect">
             <a:avLst/>
@@ -11111,121 +11613,59 @@
           <a:p>
             <a:pPr indent="0" marL="0">
               <a:lnSpc>
-                <a:spcPct val="120000"/>
+                <a:spcPct val="104000"/>
               </a:lnSpc>
               <a:buNone/>
             </a:pPr>
             <a:r>
-              <a:rPr lang="en-US" sz="2300" b="1" dirty="0">
-                <a:solidFill>
-                  <a:srgbClr val="0B1F3A"/>
+              <a:rPr lang="en-US" sz="1000" b="1" dirty="0">
+                <a:solidFill>
+                  <a:srgbClr val="A32C25"/>
                 </a:solidFill>
                 <a:latin typeface="Arial" pitchFamily="34" charset="0"/>
                 <a:ea typeface="Arial" pitchFamily="34" charset="-122"/>
                 <a:cs typeface="Arial" pitchFamily="34" charset="-120"/>
               </a:rPr>
-              <a:t>Có dữ liệu không có nghĩa là dữ liệu đó đủ dùng</a:t>
-            </a:r>
-            <a:endParaRPr lang="en-US" sz="2300" dirty="0"/>
+              <a:t>Radar không đọc được màu đèn. Số 40.0 m vô dụng ở đây.</a:t>
+            </a:r>
+            <a:endParaRPr lang="en-US" sz="1000" dirty="0"/>
           </a:p>
           <a:p>
             <a:pPr indent="0" marL="0">
               <a:lnSpc>
-                <a:spcPct val="120000"/>
+                <a:spcPct val="104000"/>
               </a:lnSpc>
               <a:buNone/>
             </a:pPr>
             <a:r>
-              <a:rPr lang="en-US" sz="1400" dirty="0">
-                <a:solidFill>
-                  <a:srgbClr val="007F72"/>
+              <a:rPr lang="en-US" sz="900" dirty="0">
+                <a:solidFill>
+                  <a:srgbClr val="A32C25"/>
                 </a:solidFill>
                 <a:latin typeface="微軟正黑體" pitchFamily="34" charset="0"/>
                 <a:ea typeface="微軟正黑體" pitchFamily="34" charset="-122"/>
                 <a:cs typeface="微軟正黑體" pitchFamily="34" charset="-120"/>
               </a:rPr>
-              <a:t>有資料，不等於那份資料夠用</a:t>
-            </a:r>
-            <a:endParaRPr lang="en-US" sz="2300" dirty="0"/>
+              <a:t>雷達讀不出燈色，那個 40.0 公尺在這件事上完全沒用。</a:t>
+            </a:r>
+            <a:endParaRPr lang="en-US" sz="1000" dirty="0"/>
           </a:p>
         </p:txBody>
       </p:sp>
       <p:sp>
         <p:nvSpPr>
-          <p:cNvPr id="15" name="Text 13"/>
-          <p:cNvSpPr txBox="1"/>
-          <p:nvPr/>
-        </p:nvSpPr>
-        <p:spPr>
-          <a:xfrm>
-            <a:off x="3429000" y="2416057"/>
-            <a:ext cx="5212080" cy="1074682"/>
-          </a:xfrm>
-          <a:prstGeom prst="rect">
-            <a:avLst/>
-          </a:prstGeom>
-          <a:noFill/>
-          <a:ln/>
-        </p:spPr>
-        <p:txBody>
-          <a:bodyPr wrap="square" lIns="0" tIns="0" rIns="0" bIns="0" rtlCol="0" anchor="t"/>
-          <a:lstStyle/>
-          <a:p>
-            <a:pPr indent="0" marL="0">
-              <a:lnSpc>
-                <a:spcPct val="128000"/>
-              </a:lnSpc>
-              <a:buNone/>
-            </a:pPr>
-            <a:r>
-              <a:rPr lang="en-US" sz="1250" dirty="0">
-                <a:solidFill>
-                  <a:srgbClr val="5F7183"/>
-                </a:solidFill>
-                <a:latin typeface="Arial" pitchFamily="34" charset="0"/>
-                <a:ea typeface="Arial" pitchFamily="34" charset="-122"/>
-                <a:cs typeface="Arial" pitchFamily="34" charset="-120"/>
-              </a:rPr>
-              <a:t>Trong mưa to, radar vẫn báo “có vật cản, 40 m” rất đều. Nhưng nếu việc cần làm là biết đèn đang đỏ hay xanh, thì con số đó hoàn toàn vô dụng.</a:t>
-            </a:r>
-            <a:endParaRPr lang="en-US" sz="1250" dirty="0"/>
-          </a:p>
-          <a:p>
-            <a:pPr indent="0" marL="0">
-              <a:lnSpc>
-                <a:spcPct val="128000"/>
-              </a:lnSpc>
-              <a:buNone/>
-            </a:pPr>
-            <a:r>
-              <a:rPr lang="en-US" sz="1150" dirty="0">
-                <a:solidFill>
-                  <a:srgbClr val="5F7183"/>
-                </a:solidFill>
-                <a:latin typeface="微軟正黑體" pitchFamily="34" charset="0"/>
-                <a:ea typeface="微軟正黑體" pitchFamily="34" charset="-122"/>
-                <a:cs typeface="微軟正黑體" pitchFamily="34" charset="-120"/>
-              </a:rPr>
-              <a:t>大雨裡雷達還是穩穩地說「40 公尺有障礙物」。但如果現在要做的事是判斷紅燈綠燈，那個數字一點用都沒有。</a:t>
-            </a:r>
-            <a:endParaRPr lang="en-US" sz="1250" dirty="0"/>
-          </a:p>
-        </p:txBody>
-      </p:sp>
-      <p:sp>
-        <p:nvSpPr>
-          <p:cNvPr id="16" name="Shape 14"/>
+          <p:cNvPr id="20" name="Shape 18"/>
           <p:cNvSpPr/>
           <p:nvPr/>
         </p:nvSpPr>
         <p:spPr>
           <a:xfrm>
             <a:off x="502920" y="3913632"/>
-            <a:ext cx="8138160" cy="621792"/>
+            <a:ext cx="8138160" cy="603504"/>
           </a:xfrm>
           <a:prstGeom prst="roundRect">
             <a:avLst>
-              <a:gd name="adj" fmla="val 13235"/>
+              <a:gd name="adj" fmla="val 13636"/>
             </a:avLst>
           </a:prstGeom>
           <a:solidFill>
@@ -11241,13 +11681,13 @@
       </p:sp>
       <p:sp>
         <p:nvSpPr>
-          <p:cNvPr id="17" name="Text 15"/>
+          <p:cNvPr id="21" name="Text 19"/>
           <p:cNvSpPr txBox="1"/>
           <p:nvPr/>
         </p:nvSpPr>
         <p:spPr>
           <a:xfrm>
-            <a:off x="685800" y="3986784"/>
+            <a:off x="685800" y="3977640"/>
             <a:ext cx="7772400" cy="493776"/>
           </a:xfrm>
           <a:prstGeom prst="rect">
@@ -11262,12 +11702,12 @@
           <a:p>
             <a:pPr indent="0" marL="0">
               <a:lnSpc>
-                <a:spcPct val="116000"/>
+                <a:spcPct val="114000"/>
               </a:lnSpc>
               <a:buNone/>
             </a:pPr>
             <a:r>
-              <a:rPr lang="en-US" sz="1250" b="1" dirty="0">
+              <a:rPr lang="en-US" sz="1200" b="1" dirty="0">
                 <a:solidFill>
                   <a:srgbClr val="7A4E00"/>
                 </a:solidFill>
@@ -11275,19 +11715,19 @@
                 <a:ea typeface="Arial" pitchFamily="34" charset="-122"/>
                 <a:cs typeface="Arial" pitchFamily="34" charset="-120"/>
               </a:rPr>
-              <a:t>Luôn hỏi: dữ liệu này có giải quyết được việc đang làm không?</a:t>
-            </a:r>
-            <a:endParaRPr lang="en-US" sz="1250" dirty="0"/>
+              <a:t>Luôn hỏi một câu: dữ liệu này có giải quyết được việc đang làm không?</a:t>
+            </a:r>
+            <a:endParaRPr lang="en-US" sz="1200" dirty="0"/>
           </a:p>
           <a:p>
             <a:pPr indent="0" marL="0">
               <a:lnSpc>
-                <a:spcPct val="116000"/>
+                <a:spcPct val="114000"/>
               </a:lnSpc>
               <a:buNone/>
             </a:pPr>
             <a:r>
-              <a:rPr lang="en-US" sz="1150" dirty="0">
+              <a:rPr lang="en-US" sz="1100" dirty="0">
                 <a:solidFill>
                   <a:srgbClr val="7A4E00"/>
                 </a:solidFill>
@@ -11297,13 +11737,13 @@
               </a:rPr>
               <a:t>永遠要問一句：這份資料，能解決我現在這件事嗎？</a:t>
             </a:r>
-            <a:endParaRPr lang="en-US" sz="1250" dirty="0"/>
+            <a:endParaRPr lang="en-US" sz="1200" dirty="0"/>
           </a:p>
         </p:txBody>
       </p:sp>
       <p:pic>
         <p:nvPicPr>
-          <p:cNvPr id="19" name="Image 0" descr="/Users/tsengchenghsun/Class/carClass/Claude outputs/第三週(9-24)/src/logo.png">    </p:cNvPr>
+          <p:cNvPr id="23" name="Image 0" descr="/Users/tsengchenghsun/Class/carClass/Claude outputs/第三週(9-24)/src/logo.png">    </p:cNvPr>
           <p:cNvPicPr>
             <a:picLocks noChangeAspect="1"/>
           </p:cNvPicPr>
@@ -11327,7 +11767,7 @@
       </p:pic>
       <p:sp>
         <p:nvSpPr>
-          <p:cNvPr id="20" name="Text 16"/>
+          <p:cNvPr id="24" name="Text 20"/>
           <p:cNvSpPr txBox="1"/>
           <p:nvPr/>
         </p:nvSpPr>
@@ -11366,7 +11806,7 @@
       </p:sp>
       <p:sp>
         <p:nvSpPr>
-          <p:cNvPr id="21" name="Text 17"/>
+          <p:cNvPr id="25" name="Text 21"/>
           <p:cNvSpPr txBox="1"/>
           <p:nvPr/>
         </p:nvSpPr>

--- a/第三週(09-24)/第三週_第3節_簡報.pptx
+++ b/第三週(09-24)/第三週_第3節_簡報.pptx
@@ -1013,11 +1013,11 @@
                 <a:spcPct val="115000"/>
               </a:lnSpc>
               <a:spcAft>
-                <a:spcPts val="550"/>
+                <a:spcPts val="500"/>
               </a:spcAft>
             </a:pPr>
             <a:r>
-              <a:rPr sz="1100" lang="zh-TW" dirty="0">
+              <a:rPr sz="1000" lang="zh-TW" dirty="0">
                 <a:solidFill>
                   <a:srgbClr val="000000"/>
                 </a:solidFill>
@@ -1035,11 +1035,11 @@
                 <a:spcPct val="115000"/>
               </a:lnSpc>
               <a:spcAft>
-                <a:spcPts val="550"/>
+                <a:spcPts val="500"/>
               </a:spcAft>
             </a:pPr>
             <a:r>
-              <a:rPr sz="1100" lang="zh-TW" dirty="0">
+              <a:rPr sz="1000" lang="zh-TW" dirty="0">
                 <a:solidFill>
                   <a:srgbClr val="000000"/>
                 </a:solidFill>
@@ -1057,11 +1057,11 @@
                 <a:spcPct val="115000"/>
               </a:lnSpc>
               <a:spcAft>
-                <a:spcPts val="550"/>
+                <a:spcPts val="500"/>
               </a:spcAft>
             </a:pPr>
             <a:r>
-              <a:rPr sz="1100" lang="zh-TW" dirty="0">
+              <a:rPr sz="1000" lang="zh-TW" dirty="0">
                 <a:solidFill>
                   <a:srgbClr val="000000"/>
                 </a:solidFill>
@@ -1072,7 +1072,7 @@
               <a:t>但是</a:t>
             </a:r>
             <a:r>
-              <a:rPr sz="1100" b="1" lang="zh-TW" dirty="0">
+              <a:rPr sz="1000" b="1" lang="zh-TW" dirty="0">
                 <a:solidFill>
                   <a:srgbClr val="000000"/>
                 </a:solidFill>
@@ -1083,7 +1083,7 @@
               <a:t>鏡頭上有沒有水滴</a:t>
             </a:r>
             <a:r>
-              <a:rPr sz="1100" lang="zh-TW" dirty="0">
+              <a:rPr sz="1000" lang="zh-TW" dirty="0">
                 <a:solidFill>
                   <a:srgbClr val="000000"/>
                 </a:solidFill>
@@ -1094,7 +1094,7 @@
               <a:t>，這是車子自己的事——取決於有沒有雨刷、清洗噴頭做得好不好、多久洗一次。</a:t>
             </a:r>
             <a:r>
-              <a:rPr sz="1100" b="1" lang="zh-TW" dirty="0">
+              <a:rPr sz="1000" b="1" lang="zh-TW" dirty="0">
                 <a:solidFill>
                   <a:srgbClr val="000000"/>
                 </a:solidFill>
@@ -1105,7 +1105,7 @@
               <a:t>光達的罩子髒了</a:t>
             </a:r>
             <a:r>
-              <a:rPr sz="1100" lang="zh-TW" dirty="0">
+              <a:rPr sz="1000" lang="zh-TW" dirty="0">
                 <a:solidFill>
                   <a:srgbClr val="000000"/>
                 </a:solidFill>
@@ -1123,11 +1123,11 @@
                 <a:spcPct val="115000"/>
               </a:lnSpc>
               <a:spcAft>
-                <a:spcPts val="550"/>
+                <a:spcPts val="500"/>
               </a:spcAft>
             </a:pPr>
             <a:r>
-              <a:rPr sz="1100" lang="zh-TW" dirty="0">
+              <a:rPr sz="1000" lang="zh-TW" dirty="0">
                 <a:solidFill>
                   <a:srgbClr val="000000"/>
                 </a:solidFill>
@@ -1145,11 +1145,11 @@
                 <a:spcPct val="115000"/>
               </a:lnSpc>
               <a:spcAft>
-                <a:spcPts val="550"/>
+                <a:spcPts val="500"/>
               </a:spcAft>
             </a:pPr>
             <a:r>
-              <a:rPr sz="1100" lang="zh-TW" dirty="0">
+              <a:rPr sz="1000" lang="zh-TW" dirty="0">
                 <a:solidFill>
                   <a:srgbClr val="000000"/>
                 </a:solidFill>
@@ -1160,7 +1160,7 @@
               <a:t>所以按水滴的時候，請大家</a:t>
             </a:r>
             <a:r>
-              <a:rPr sz="1100" b="1" lang="zh-TW" dirty="0">
+              <a:rPr sz="1000" b="1" lang="zh-TW" dirty="0">
                 <a:solidFill>
                   <a:srgbClr val="000000"/>
                 </a:solidFill>
@@ -1171,7 +1171,7 @@
               <a:t>只看相機那張卡</a:t>
             </a:r>
             <a:r>
-              <a:rPr sz="1100" lang="zh-TW" dirty="0">
+              <a:rPr sz="1000" lang="zh-TW" dirty="0">
                 <a:solidFill>
                   <a:srgbClr val="000000"/>
                 </a:solidFill>
@@ -1182,7 +1182,7 @@
               <a:t>，其他五張本來就不會動，那不是程式壞掉，那正是重點：</a:t>
             </a:r>
             <a:r>
-              <a:rPr sz="1100" b="1" lang="zh-TW" dirty="0">
+              <a:rPr sz="1000" b="1" lang="zh-TW" dirty="0">
                 <a:solidFill>
                   <a:srgbClr val="000000"/>
                 </a:solidFill>
@@ -1193,7 +1193,7 @@
               <a:t>這是車子自己的問題，不是天氣的問題</a:t>
             </a:r>
             <a:r>
-              <a:rPr sz="1100" lang="zh-TW" dirty="0">
+              <a:rPr sz="1000" lang="zh-TW" dirty="0">
                 <a:solidFill>
                   <a:srgbClr val="000000"/>
                 </a:solidFill>
@@ -1211,11 +1211,11 @@
                 <a:spcPct val="115000"/>
               </a:lnSpc>
               <a:spcAft>
-                <a:spcPts val="550"/>
+                <a:spcPts val="500"/>
               </a:spcAft>
             </a:pPr>
             <a:r>
-              <a:rPr sz="1100" lang="zh-TW" dirty="0">
+              <a:rPr sz="1000" lang="zh-TW" dirty="0">
                 <a:solidFill>
                   <a:srgbClr val="000000"/>
                 </a:solidFill>
@@ -1233,11 +1233,275 @@
                 <a:spcPct val="115000"/>
               </a:lnSpc>
               <a:spcAft>
-                <a:spcPts val="550"/>
+                <a:spcPts val="500"/>
               </a:spcAft>
             </a:pPr>
             <a:r>
-              <a:rPr sz="1100" lang="zh-TW" dirty="0">
+              <a:rPr sz="1000" b="1" lang="zh-TW" dirty="0">
+                <a:solidFill>
+                  <a:srgbClr val="000000"/>
+                </a:solidFill>
+                <a:latin typeface="Arial Unicode MS"/>
+                <a:ea typeface="Arial Unicode MS"/>
+                <a:cs typeface="Arial Unicode MS"/>
+              </a:rPr>
+              <a:t>（這兩個數字一定會有同學問是哪裡來的。這是個好問題，請老實回答，並且順便教一個重要的分辨。）</a:t>
+            </a:r>
+            <a:r>
+              <a:rPr sz="1000" lang="zh-TW" dirty="0">
+                <a:solidFill>
+                  <a:srgbClr val="000000"/>
+                </a:solidFill>
+                <a:latin typeface="Arial Unicode MS"/>
+                <a:ea typeface="Arial Unicode MS"/>
+                <a:cs typeface="Arial Unicode MS"/>
+              </a:rPr>
+              <a:t>
+</a:t>
+            </a:r>
+          </a:p>
+          <a:p>
+            <a:pPr algn="l">
+              <a:lnSpc>
+                <a:spcPct val="115000"/>
+              </a:lnSpc>
+              <a:spcAft>
+                <a:spcPts val="500"/>
+              </a:spcAft>
+            </a:pPr>
+            <a:r>
+              <a:rPr sz="1000" lang="zh-TW" dirty="0">
+                <a:solidFill>
+                  <a:srgbClr val="000000"/>
+                </a:solidFill>
+                <a:latin typeface="Arial Unicode MS"/>
+                <a:ea typeface="Arial Unicode MS"/>
+                <a:cs typeface="Arial Unicode MS"/>
+              </a:rPr>
+              <a:t>「零點六五和零點三五是</a:t>
+            </a:r>
+            <a:r>
+              <a:rPr sz="1000" b="1" lang="zh-TW" dirty="0">
+                <a:solidFill>
+                  <a:srgbClr val="000000"/>
+                </a:solidFill>
+                <a:latin typeface="Arial Unicode MS"/>
+                <a:ea typeface="Arial Unicode MS"/>
+                <a:cs typeface="Arial Unicode MS"/>
+              </a:rPr>
+              <a:t>我為了上課設定的數值</a:t>
+            </a:r>
+            <a:r>
+              <a:rPr sz="1000" lang="zh-TW" dirty="0">
+                <a:solidFill>
+                  <a:srgbClr val="000000"/>
+                </a:solidFill>
+                <a:latin typeface="Arial Unicode MS"/>
+                <a:ea typeface="Arial Unicode MS"/>
+                <a:cs typeface="Arial Unicode MS"/>
+              </a:rPr>
+              <a:t>，不是量測出來的，也不是哪一家的規格書上的數字。
+</a:t>
+            </a:r>
+          </a:p>
+          <a:p>
+            <a:pPr algn="l">
+              <a:lnSpc>
+                <a:spcPct val="115000"/>
+              </a:lnSpc>
+              <a:spcAft>
+                <a:spcPts val="500"/>
+              </a:spcAft>
+            </a:pPr>
+            <a:r>
+              <a:rPr sz="1000" lang="zh-TW" dirty="0">
+                <a:solidFill>
+                  <a:srgbClr val="000000"/>
+                </a:solidFill>
+                <a:latin typeface="Arial Unicode MS"/>
+                <a:ea typeface="Arial Unicode MS"/>
+                <a:cs typeface="Arial Unicode MS"/>
+              </a:rPr>
+              <a:t>但是有一件事是真的：</a:t>
+            </a:r>
+            <a:r>
+              <a:rPr sz="1000" b="1" lang="zh-TW" dirty="0">
+                <a:solidFill>
+                  <a:srgbClr val="000000"/>
+                </a:solidFill>
+                <a:latin typeface="Arial Unicode MS"/>
+                <a:ea typeface="Arial Unicode MS"/>
+                <a:cs typeface="Arial Unicode MS"/>
+              </a:rPr>
+              <a:t>點數掉得比有效距離快。</a:t>
+            </a:r>
+            <a:r>
+              <a:rPr sz="1000" lang="zh-TW" dirty="0">
+                <a:solidFill>
+                  <a:srgbClr val="000000"/>
+                </a:solidFill>
+                <a:latin typeface="Arial Unicode MS"/>
+                <a:ea typeface="Arial Unicode MS"/>
+                <a:cs typeface="Arial Unicode MS"/>
+              </a:rPr>
+              <a:t>為什麼？髒污擋住一部分雷射，回波就變弱。遠處的回波本來就弱，再被削一次就低於偵測門檻，那個點整個不見。所以最先失去的永遠是遠處的點。這個</a:t>
+            </a:r>
+            <a:r>
+              <a:rPr sz="1000" b="1" lang="zh-TW" dirty="0">
+                <a:solidFill>
+                  <a:srgbClr val="000000"/>
+                </a:solidFill>
+                <a:latin typeface="Arial Unicode MS"/>
+                <a:ea typeface="Arial Unicode MS"/>
+                <a:cs typeface="Arial Unicode MS"/>
+              </a:rPr>
+              <a:t>方向</a:t>
+            </a:r>
+            <a:r>
+              <a:rPr sz="1000" lang="zh-TW" dirty="0">
+                <a:solidFill>
+                  <a:srgbClr val="000000"/>
+                </a:solidFill>
+                <a:latin typeface="Arial Unicode MS"/>
+                <a:ea typeface="Arial Unicode MS"/>
+                <a:cs typeface="Arial Unicode MS"/>
+              </a:rPr>
+              <a:t>是物理決定的，我才把點數的倍率設得比範圍更低。
+</a:t>
+            </a:r>
+          </a:p>
+          <a:p>
+            <a:pPr algn="l">
+              <a:lnSpc>
+                <a:spcPct val="115000"/>
+              </a:lnSpc>
+              <a:spcAft>
+                <a:spcPts val="500"/>
+              </a:spcAft>
+            </a:pPr>
+            <a:r>
+              <a:rPr sz="1000" lang="zh-TW" dirty="0">
+                <a:solidFill>
+                  <a:srgbClr val="000000"/>
+                </a:solidFill>
+                <a:latin typeface="Arial Unicode MS"/>
+                <a:ea typeface="Arial Unicode MS"/>
+                <a:cs typeface="Arial Unicode MS"/>
+              </a:rPr>
+              <a:t>真實世界沒有單一的通則，因為它取決於：髒的是什麼（灰塵、泥、鹽、水膜，還是壓扁的蟲）、蓋住多少比例、蓋在雷射出口正中間還是邊緣、以及那顆光達用的波長。所以規格書上不會寫「髒了剩幾成」，只會寫它有沒有自動清潔或加熱、以及</a:t>
+            </a:r>
+            <a:r>
+              <a:rPr sz="1000" b="1" lang="zh-TW" dirty="0">
+                <a:solidFill>
+                  <a:srgbClr val="000000"/>
+                </a:solidFill>
+                <a:latin typeface="Arial Unicode MS"/>
+                <a:ea typeface="Arial Unicode MS"/>
+                <a:cs typeface="Arial Unicode MS"/>
+              </a:rPr>
+              <a:t>能不能偵測到自己被遮住</a:t>
+            </a:r>
+            <a:r>
+              <a:rPr sz="1000" lang="zh-TW" dirty="0">
+                <a:solidFill>
+                  <a:srgbClr val="000000"/>
+                </a:solidFill>
+                <a:latin typeface="Arial Unicode MS"/>
+                <a:ea typeface="Arial Unicode MS"/>
+                <a:cs typeface="Arial Unicode MS"/>
+              </a:rPr>
+              <a:t>了。」
+</a:t>
+            </a:r>
+          </a:p>
+          <a:p>
+            <a:pPr algn="l">
+              <a:lnSpc>
+                <a:spcPct val="115000"/>
+              </a:lnSpc>
+              <a:spcAft>
+                <a:spcPts val="500"/>
+              </a:spcAft>
+            </a:pPr>
+            <a:r>
+              <a:rPr sz="1000" b="1" lang="zh-TW" dirty="0">
+                <a:solidFill>
+                  <a:srgbClr val="000000"/>
+                </a:solidFill>
+                <a:latin typeface="Arial Unicode MS"/>
+                <a:ea typeface="Arial Unicode MS"/>
+                <a:cs typeface="Arial Unicode MS"/>
+              </a:rPr>
+              <a:t>請把這句話送給同學：數字的大小是我編的，數字的方向不是。</a:t>
+            </a:r>
+            <a:r>
+              <a:rPr sz="1000" lang="zh-TW" dirty="0">
+                <a:solidFill>
+                  <a:srgbClr val="000000"/>
+                </a:solidFill>
+                <a:latin typeface="Arial Unicode MS"/>
+                <a:ea typeface="Arial Unicode MS"/>
+                <a:cs typeface="Arial Unicode MS"/>
+              </a:rPr>
+              <a:t>今天所有的環境倍率都一樣——晴天八十、濃霧十六，這些具體數字是課堂模型；但「霧削相機比削雷達兇」這個關係，是波長決定的，換成真實的車也一樣成立。
+</a:t>
+            </a:r>
+          </a:p>
+          <a:p>
+            <a:pPr algn="l">
+              <a:lnSpc>
+                <a:spcPct val="115000"/>
+              </a:lnSpc>
+              <a:spcAft>
+                <a:spcPts val="500"/>
+              </a:spcAft>
+            </a:pPr>
+            <a:r>
+              <a:rPr sz="1000" lang="zh-TW" dirty="0">
+                <a:solidFill>
+                  <a:srgbClr val="000000"/>
+                </a:solidFill>
+                <a:latin typeface="Arial Unicode MS"/>
+                <a:ea typeface="Arial Unicode MS"/>
+                <a:cs typeface="Arial Unicode MS"/>
+              </a:rPr>
+              <a:t>（這正是你們以後看任何模擬、任何 demo 都要做的分辨：</a:t>
+            </a:r>
+            <a:r>
+              <a:rPr sz="1000" b="1" lang="zh-TW" dirty="0">
+                <a:solidFill>
+                  <a:srgbClr val="000000"/>
+                </a:solidFill>
+                <a:latin typeface="Arial Unicode MS"/>
+                <a:ea typeface="Arial Unicode MS"/>
+                <a:cs typeface="Arial Unicode MS"/>
+              </a:rPr>
+              <a:t>哪些是設定，哪些是物理。</a:t>
+            </a:r>
+            <a:r>
+              <a:rPr sz="1000" lang="zh-TW" dirty="0">
+                <a:solidFill>
+                  <a:srgbClr val="000000"/>
+                </a:solidFill>
+                <a:latin typeface="Arial Unicode MS"/>
+                <a:ea typeface="Arial Unicode MS"/>
+                <a:cs typeface="Arial Unicode MS"/>
+              </a:rPr>
+              <a:t>）
+</a:t>
+            </a:r>
+          </a:p>
+          <a:p>
+            <a:pPr algn="l">
+              <a:lnSpc>
+                <a:spcPct val="115000"/>
+              </a:lnSpc>
+              <a:spcAft>
+                <a:spcPts val="500"/>
+              </a:spcAft>
+            </a:pPr>
+            <a:r>
+              <a:rPr sz="1000" lang="zh-TW" dirty="0">
                 <a:solidFill>
                   <a:srgbClr val="000000"/>
                 </a:solidFill>
@@ -1248,7 +1512,7 @@
               <a:t>工程上的意思是：有一部分的「感測器失效」其實是</a:t>
             </a:r>
             <a:r>
-              <a:rPr sz="1100" b="1" lang="zh-TW" dirty="0">
+              <a:rPr sz="1000" b="1" lang="zh-TW" dirty="0">
                 <a:solidFill>
                   <a:srgbClr val="000000"/>
                 </a:solidFill>
@@ -1259,7 +1523,7 @@
               <a:t>維護問題</a:t>
             </a:r>
             <a:r>
-              <a:rPr sz="1100" lang="zh-TW" dirty="0">
+              <a:rPr sz="1000" lang="zh-TW" dirty="0">
                 <a:solidFill>
                   <a:srgbClr val="000000"/>
                 </a:solidFill>
@@ -1277,11 +1541,11 @@
                 <a:spcPct val="115000"/>
               </a:lnSpc>
               <a:spcAft>
-                <a:spcPts val="550"/>
+                <a:spcPts val="500"/>
               </a:spcAft>
             </a:pPr>
             <a:r>
-              <a:rPr sz="1100" lang="zh-TW" dirty="0">
+              <a:rPr sz="1000" lang="zh-TW" dirty="0">
                 <a:solidFill>
                   <a:srgbClr val="000000"/>
                 </a:solidFill>
@@ -6756,11 +7020,11 @@
                 <a:spcPct val="115000"/>
               </a:lnSpc>
               <a:spcAft>
-                <a:spcPts val="575"/>
+                <a:spcPts val="525"/>
               </a:spcAft>
             </a:pPr>
             <a:r>
-              <a:rPr sz="1150" lang="zh-TW" dirty="0">
+              <a:rPr sz="1050" lang="zh-TW" dirty="0">
                 <a:solidFill>
                   <a:srgbClr val="000000"/>
                 </a:solidFill>
@@ -6778,11 +7042,77 @@
                 <a:spcPct val="115000"/>
               </a:lnSpc>
               <a:spcAft>
-                <a:spcPts val="575"/>
+                <a:spcPts val="525"/>
               </a:spcAft>
             </a:pPr>
             <a:r>
-              <a:rPr sz="1150" lang="zh-TW" dirty="0">
+              <a:rPr sz="1050" lang="zh-TW" dirty="0">
+                <a:solidFill>
+                  <a:srgbClr val="000000"/>
+                </a:solidFill>
+                <a:latin typeface="Arial Unicode MS"/>
+                <a:ea typeface="Arial Unicode MS"/>
+                <a:cs typeface="Arial Unicode MS"/>
+              </a:rPr>
+              <a:t>（先聲明一件事，表格最下面那一行也寫了：</a:t>
+            </a:r>
+            <a:r>
+              <a:rPr sz="1050" b="1" lang="zh-TW" dirty="0">
+                <a:solidFill>
+                  <a:srgbClr val="000000"/>
+                </a:solidFill>
+                <a:latin typeface="Arial Unicode MS"/>
+                <a:ea typeface="Arial Unicode MS"/>
+                <a:cs typeface="Arial Unicode MS"/>
+              </a:rPr>
+              <a:t>這些具體數字是課堂模型的設定值，不是任何產品的規格。</a:t>
+            </a:r>
+            <a:r>
+              <a:rPr sz="1050" lang="zh-TW" dirty="0">
+                <a:solidFill>
+                  <a:srgbClr val="000000"/>
+                </a:solidFill>
+                <a:latin typeface="Arial Unicode MS"/>
+                <a:ea typeface="Arial Unicode MS"/>
+                <a:cs typeface="Arial Unicode MS"/>
+              </a:rPr>
+              <a:t>真正要記的不是八十或十六這些數字，是</a:t>
+            </a:r>
+            <a:r>
+              <a:rPr sz="1050" b="1" lang="zh-TW" dirty="0">
+                <a:solidFill>
+                  <a:srgbClr val="000000"/>
+                </a:solidFill>
+                <a:latin typeface="Arial Unicode MS"/>
+                <a:ea typeface="Arial Unicode MS"/>
+                <a:cs typeface="Arial Unicode MS"/>
+              </a:rPr>
+              <a:t>欄與欄之間的關係</a:t>
+            </a:r>
+            <a:r>
+              <a:rPr sz="1050" lang="zh-TW" dirty="0">
+                <a:solidFill>
+                  <a:srgbClr val="000000"/>
+                </a:solidFill>
+                <a:latin typeface="Arial Unicode MS"/>
+                <a:ea typeface="Arial Unicode MS"/>
+                <a:cs typeface="Arial Unicode MS"/>
+              </a:rPr>
+              <a:t>——哪一種掉得快、哪一種幾乎不動。）
+</a:t>
+            </a:r>
+          </a:p>
+          <a:p>
+            <a:pPr algn="l">
+              <a:lnSpc>
+                <a:spcPct val="115000"/>
+              </a:lnSpc>
+              <a:spcAft>
+                <a:spcPts val="525"/>
+              </a:spcAft>
+            </a:pPr>
+            <a:r>
+              <a:rPr sz="1050" lang="zh-TW" dirty="0">
                 <a:solidFill>
                   <a:srgbClr val="000000"/>
                 </a:solidFill>
@@ -6793,7 +7123,7 @@
               <a:t>先看雷達那一欄，從上到下：兩百五十、兩百五十、兩百五十、兩百二十五、兩百、兩百二十五——幾乎沒動。直到</a:t>
             </a:r>
             <a:r>
-              <a:rPr sz="1150" b="1" lang="zh-TW" dirty="0">
+              <a:rPr sz="1050" b="1" lang="zh-TW" dirty="0">
                 <a:solidFill>
                   <a:srgbClr val="000000"/>
                 </a:solidFill>
@@ -6804,7 +7134,7 @@
               <a:t>最後一列</a:t>
             </a:r>
             <a:r>
-              <a:rPr sz="1150" lang="zh-TW" dirty="0">
+              <a:rPr sz="1050" lang="zh-TW" dirty="0">
                 <a:solidFill>
                   <a:srgbClr val="000000"/>
                 </a:solidFill>
@@ -6822,11 +7152,11 @@
                 <a:spcPct val="115000"/>
               </a:lnSpc>
               <a:spcAft>
-                <a:spcPts val="575"/>
+                <a:spcPts val="525"/>
               </a:spcAft>
             </a:pPr>
             <a:r>
-              <a:rPr sz="1150" lang="zh-TW" dirty="0">
+              <a:rPr sz="1050" lang="zh-TW" dirty="0">
                 <a:solidFill>
                   <a:srgbClr val="000000"/>
                 </a:solidFill>
@@ -6844,11 +7174,11 @@
                 <a:spcPct val="115000"/>
               </a:lnSpc>
               <a:spcAft>
-                <a:spcPts val="575"/>
+                <a:spcPts val="525"/>
               </a:spcAft>
             </a:pPr>
             <a:r>
-              <a:rPr sz="1150" lang="zh-TW" dirty="0">
+              <a:rPr sz="1050" lang="zh-TW" dirty="0">
                 <a:solidFill>
                   <a:srgbClr val="000000"/>
                 </a:solidFill>
@@ -6866,11 +7196,11 @@
                 <a:spcPct val="115000"/>
               </a:lnSpc>
               <a:spcAft>
-                <a:spcPts val="575"/>
+                <a:spcPts val="525"/>
               </a:spcAft>
             </a:pPr>
             <a:r>
-              <a:rPr sz="1150" lang="zh-TW" dirty="0">
+              <a:rPr sz="1050" lang="zh-TW" dirty="0">
                 <a:solidFill>
                   <a:srgbClr val="000000"/>
                 </a:solidFill>
@@ -6888,11 +7218,11 @@
                 <a:spcPct val="115000"/>
               </a:lnSpc>
               <a:spcAft>
-                <a:spcPts val="575"/>
+                <a:spcPts val="525"/>
               </a:spcAft>
             </a:pPr>
             <a:r>
-              <a:rPr sz="1150" b="1" lang="zh-TW" dirty="0">
+              <a:rPr sz="1050" b="1" lang="zh-TW" dirty="0">
                 <a:solidFill>
                   <a:srgbClr val="000000"/>
                 </a:solidFill>
@@ -6903,7 +7233,7 @@
               <a:t>它很耐命，可是它給的東西很少。</a:t>
             </a:r>
             <a:r>
-              <a:rPr sz="1150" lang="zh-TW" dirty="0">
+              <a:rPr sz="1050" lang="zh-TW" dirty="0">
                 <a:solidFill>
                   <a:srgbClr val="000000"/>
                 </a:solidFill>
@@ -6921,11 +7251,11 @@
                 <a:spcPct val="115000"/>
               </a:lnSpc>
               <a:spcAft>
-                <a:spcPts val="575"/>
+                <a:spcPts val="525"/>
               </a:spcAft>
             </a:pPr>
             <a:r>
-              <a:rPr sz="1150" lang="zh-TW" dirty="0">
+              <a:rPr sz="1050" lang="zh-TW" dirty="0">
                 <a:solidFill>
                   <a:srgbClr val="000000"/>
                 </a:solidFill>
@@ -6943,11 +7273,11 @@
                 <a:spcPct val="115000"/>
               </a:lnSpc>
               <a:spcAft>
-                <a:spcPts val="575"/>
+                <a:spcPts val="525"/>
               </a:spcAft>
             </a:pPr>
             <a:r>
-              <a:rPr sz="1150" lang="zh-TW" dirty="0">
+              <a:rPr sz="1050" lang="zh-TW" dirty="0">
                 <a:solidFill>
                   <a:srgbClr val="000000"/>
                 </a:solidFill>
@@ -10639,7 +10969,7 @@
                 <a:ea typeface="Arial" pitchFamily="34" charset="-122"/>
                 <a:cs typeface="Arial" pitchFamily="34" charset="-120"/>
               </a:rPr>
-              <a:t>Tầm × 0,65　số điểm × 0,35</a:t>
+              <a:t>Tầm × 0,65　số điểm × 0,35　(tham số lớp học)</a:t>
             </a:r>
             <a:endParaRPr lang="en-US" sz="1050" dirty="0"/>
           </a:p>
@@ -10659,7 +10989,7 @@
                 <a:ea typeface="微軟正黑體" pitchFamily="34" charset="-122"/>
                 <a:cs typeface="微軟正黑體" pitchFamily="34" charset="-120"/>
               </a:rPr>
-              <a:t>範圍 ×0.65　點數 ×0.35</a:t>
+              <a:t>範圍 ×0.65　點數 ×0.35　（課堂設定值）</a:t>
             </a:r>
             <a:endParaRPr lang="en-US" sz="1050" dirty="0"/>
           </a:p>

--- a/第三週(09-24)/第三週_第3節_簡報.pptx
+++ b/第三週(09-24)/第三週_第3節_簡報.pptx
@@ -1322,7 +1322,7 @@
                 <a:ea typeface="Arial Unicode MS"/>
                 <a:cs typeface="Arial Unicode MS"/>
               </a:rPr>
-              <a:t>但是有一件事是真的：</a:t>
+              <a:t>不過有一件事值得講清楚：罩子髒，其實是</a:t>
             </a:r>
             <a:r>
               <a:rPr sz="1000" b="1" lang="zh-TW" dirty="0">
@@ -1333,7 +1333,7 @@
                 <a:ea typeface="Arial Unicode MS"/>
                 <a:cs typeface="Arial Unicode MS"/>
               </a:rPr>
-              <a:t>點數掉得比有效距離快。</a:t>
+              <a:t>兩種不同的機制</a:t>
             </a:r>
             <a:r>
               <a:rPr sz="1000" lang="zh-TW" dirty="0">
@@ -1344,29 +1344,7 @@
                 <a:ea typeface="Arial Unicode MS"/>
                 <a:cs typeface="Arial Unicode MS"/>
               </a:rPr>
-              <a:t>為什麼？髒污擋住一部分雷射，回波就變弱。遠處的回波本來就弱，再被削一次就低於偵測門檻，那個點整個不見。所以最先失去的永遠是遠處的點。這個</a:t>
-            </a:r>
-            <a:r>
-              <a:rPr sz="1000" b="1" lang="zh-TW" dirty="0">
-                <a:solidFill>
-                  <a:srgbClr val="000000"/>
-                </a:solidFill>
-                <a:latin typeface="Arial Unicode MS"/>
-                <a:ea typeface="Arial Unicode MS"/>
-                <a:cs typeface="Arial Unicode MS"/>
-              </a:rPr>
-              <a:t>方向</a:t>
-            </a:r>
-            <a:r>
-              <a:rPr sz="1000" lang="zh-TW" dirty="0">
-                <a:solidFill>
-                  <a:srgbClr val="000000"/>
-                </a:solidFill>
-                <a:latin typeface="Arial Unicode MS"/>
-                <a:ea typeface="Arial Unicode MS"/>
-                <a:cs typeface="Arial Unicode MS"/>
-              </a:rPr>
-              <a:t>是物理決定的，我才把點數的倍率設得比範圍更低。
+              <a:t>同時在作用。
 </a:t>
             </a:r>
           </a:p>
@@ -1388,7 +1366,7 @@
                 <a:ea typeface="Arial Unicode MS"/>
                 <a:cs typeface="Arial Unicode MS"/>
               </a:rPr>
-              <a:t>真實世界沒有單一的通則，因為它取決於：髒的是什麼（灰塵、泥、鹽、水膜，還是壓扁的蟲）、蓋住多少比例、蓋在雷射出口正中間還是邊緣、以及那顆光達用的波長。所以規格書上不會寫「髒了剩幾成」，只會寫它有沒有自動清潔或加熱、以及</a:t>
+              <a:t>第一種是</a:t>
             </a:r>
             <a:r>
               <a:rPr sz="1000" b="1" lang="zh-TW" dirty="0">
@@ -1399,7 +1377,7 @@
                 <a:ea typeface="Arial Unicode MS"/>
                 <a:cs typeface="Arial Unicode MS"/>
               </a:rPr>
-              <a:t>能不能偵測到自己被遮住</a:t>
+              <a:t>遮住</a:t>
             </a:r>
             <a:r>
               <a:rPr sz="1000" lang="zh-TW" dirty="0">
@@ -1410,7 +1388,29 @@
                 <a:ea typeface="Arial Unicode MS"/>
                 <a:cs typeface="Arial Unicode MS"/>
               </a:rPr>
-              <a:t>了。」
+              <a:t>。泥點完全蓋住罩子的某一塊，那個方向的雷射根本射不出去，所以那個方向永遠不會有點——</a:t>
+            </a:r>
+            <a:r>
+              <a:rPr sz="1000" b="1" lang="zh-TW" dirty="0">
+                <a:solidFill>
+                  <a:srgbClr val="000000"/>
+                </a:solidFill>
+                <a:latin typeface="Arial Unicode MS"/>
+                <a:ea typeface="Arial Unicode MS"/>
+                <a:cs typeface="Arial Unicode MS"/>
+              </a:rPr>
+              <a:t>不管目標站多近都一樣</a:t>
+            </a:r>
+            <a:r>
+              <a:rPr sz="1000" lang="zh-TW" dirty="0">
+                <a:solidFill>
+                  <a:srgbClr val="000000"/>
+                </a:solidFill>
+                <a:latin typeface="Arial Unicode MS"/>
+                <a:ea typeface="Arial Unicode MS"/>
+                <a:cs typeface="Arial Unicode MS"/>
+              </a:rPr>
+              <a:t>。這直接把點數打掉一塊。
 </a:t>
             </a:r>
           </a:p>
@@ -1424,6 +1424,17 @@
               </a:spcAft>
             </a:pPr>
             <a:r>
+              <a:rPr sz="1000" lang="zh-TW" dirty="0">
+                <a:solidFill>
+                  <a:srgbClr val="000000"/>
+                </a:solidFill>
+                <a:latin typeface="Arial Unicode MS"/>
+                <a:ea typeface="Arial Unicode MS"/>
+                <a:cs typeface="Arial Unicode MS"/>
+              </a:rPr>
+              <a:t>第二種是</a:t>
+            </a:r>
+            <a:r>
               <a:rPr sz="1000" b="1" lang="zh-TW" dirty="0">
                 <a:solidFill>
                   <a:srgbClr val="000000"/>
@@ -1432,7 +1443,7 @@
                 <a:ea typeface="Arial Unicode MS"/>
                 <a:cs typeface="Arial Unicode MS"/>
               </a:rPr>
-              <a:t>請把這句話送給同學：數字的大小是我編的，數字的方向不是。</a:t>
+              <a:t>變弱</a:t>
             </a:r>
             <a:r>
               <a:rPr sz="1000" lang="zh-TW" dirty="0">
@@ -1443,7 +1454,29 @@
                 <a:ea typeface="Arial Unicode MS"/>
                 <a:cs typeface="Arial Unicode MS"/>
               </a:rPr>
-              <a:t>今天所有的環境倍率都一樣——晴天八十、濃霧十六，這些具體數字是課堂模型；但「霧削相機比削雷達兇」這個關係，是波長決定的，換成真實的車也一樣成立。
+              <a:t>。沒被完全蓋住、只蒙上一層薄灰的地方，雷射還是出得去，但回波變弱了。遠處的回波本來就弱，再削一次就低於偵測門檻——這讓</a:t>
+            </a:r>
+            <a:r>
+              <a:rPr sz="1000" b="1" lang="zh-TW" dirty="0">
+                <a:solidFill>
+                  <a:srgbClr val="000000"/>
+                </a:solidFill>
+                <a:latin typeface="Arial Unicode MS"/>
+                <a:ea typeface="Arial Unicode MS"/>
+                <a:cs typeface="Arial Unicode MS"/>
+              </a:rPr>
+              <a:t>有效距離</a:t>
+            </a:r>
+            <a:r>
+              <a:rPr sz="1000" lang="zh-TW" dirty="0">
+                <a:solidFill>
+                  <a:srgbClr val="000000"/>
+                </a:solidFill>
+                <a:latin typeface="Arial Unicode MS"/>
+                <a:ea typeface="Arial Unicode MS"/>
+                <a:cs typeface="Arial Unicode MS"/>
+              </a:rPr>
+              <a:t>縮短。
 </a:t>
             </a:r>
           </a:p>
@@ -1465,7 +1498,29 @@
                 <a:ea typeface="Arial Unicode MS"/>
                 <a:cs typeface="Arial Unicode MS"/>
               </a:rPr>
-              <a:t>（這正是你們以後看任何模擬、任何 demo 都要做的分辨：</a:t>
+              <a:t>所以「點數變少」和「看不了那麼遠」，是被兩種不同的機制打到的，不是同一件事的兩種說法。
+</a:t>
+            </a:r>
+          </a:p>
+          <a:p>
+            <a:pPr algn="l">
+              <a:lnSpc>
+                <a:spcPct val="115000"/>
+              </a:lnSpc>
+              <a:spcAft>
+                <a:spcPts val="500"/>
+              </a:spcAft>
+            </a:pPr>
+            <a:r>
+              <a:rPr sz="1000" lang="zh-TW" dirty="0">
+                <a:solidFill>
+                  <a:srgbClr val="000000"/>
+                </a:solidFill>
+                <a:latin typeface="Arial Unicode MS"/>
+                <a:ea typeface="Arial Unicode MS"/>
+                <a:cs typeface="Arial Unicode MS"/>
+              </a:rPr>
+              <a:t>那哪一個掉得比較多？取決於髒污是</a:t>
             </a:r>
             <a:r>
               <a:rPr sz="1000" b="1" lang="zh-TW" dirty="0">
@@ -1476,6 +1531,193 @@
                 <a:ea typeface="Arial Unicode MS"/>
                 <a:cs typeface="Arial Unicode MS"/>
               </a:rPr>
+              <a:t>一塊一塊的</a:t>
+            </a:r>
+            <a:r>
+              <a:rPr sz="1000" lang="zh-TW" dirty="0">
+                <a:solidFill>
+                  <a:srgbClr val="000000"/>
+                </a:solidFill>
+                <a:latin typeface="Arial Unicode MS"/>
+                <a:ea typeface="Arial Unicode MS"/>
+                <a:cs typeface="Arial Unicode MS"/>
+              </a:rPr>
+              <a:t>還是</a:t>
+            </a:r>
+            <a:r>
+              <a:rPr sz="1000" b="1" lang="zh-TW" dirty="0">
+                <a:solidFill>
+                  <a:srgbClr val="000000"/>
+                </a:solidFill>
+                <a:latin typeface="Arial Unicode MS"/>
+                <a:ea typeface="Arial Unicode MS"/>
+                <a:cs typeface="Arial Unicode MS"/>
+              </a:rPr>
+              <a:t>均勻一層</a:t>
+            </a:r>
+            <a:r>
+              <a:rPr sz="1000" lang="zh-TW" dirty="0">
+                <a:solidFill>
+                  <a:srgbClr val="000000"/>
+                </a:solidFill>
+                <a:latin typeface="Arial Unicode MS"/>
+                <a:ea typeface="Arial Unicode MS"/>
+                <a:cs typeface="Arial Unicode MS"/>
+              </a:rPr>
+              <a:t>的，沒有通則。我在工具裡把點數設得掉更多，是因為我想讓大家看到『</a:t>
+            </a:r>
+            <a:r>
+              <a:rPr sz="1000" b="1" lang="zh-TW" dirty="0">
+                <a:solidFill>
+                  <a:srgbClr val="000000"/>
+                </a:solidFill>
+                <a:latin typeface="Arial Unicode MS"/>
+                <a:ea typeface="Arial Unicode MS"/>
+                <a:cs typeface="Arial Unicode MS"/>
+              </a:rPr>
+              <a:t>東西還在，但只剩幾個點</a:t>
+            </a:r>
+            <a:r>
+              <a:rPr sz="1000" lang="zh-TW" dirty="0">
+                <a:solidFill>
+                  <a:srgbClr val="000000"/>
+                </a:solidFill>
+                <a:latin typeface="Arial Unicode MS"/>
+                <a:ea typeface="Arial Unicode MS"/>
+                <a:cs typeface="Arial Unicode MS"/>
+              </a:rPr>
+              <a:t>』那個狀態——那正是最危險的狀態。
+</a:t>
+            </a:r>
+          </a:p>
+          <a:p>
+            <a:pPr algn="l">
+              <a:lnSpc>
+                <a:spcPct val="115000"/>
+              </a:lnSpc>
+              <a:spcAft>
+                <a:spcPts val="500"/>
+              </a:spcAft>
+            </a:pPr>
+            <a:r>
+              <a:rPr sz="1000" lang="zh-TW" dirty="0">
+                <a:solidFill>
+                  <a:srgbClr val="000000"/>
+                </a:solidFill>
+                <a:latin typeface="Arial Unicode MS"/>
+                <a:ea typeface="Arial Unicode MS"/>
+                <a:cs typeface="Arial Unicode MS"/>
+              </a:rPr>
+              <a:t>真實世界為什麼沒有通則？因為它取決於：髒的是什麼（灰塵、泥、鹽、水膜，還是壓扁的蟲）、蓋住多少比例、蓋在雷射出口正中間還是邊緣、以及那顆光達用的波長。所以規格書上不會寫「髒了剩幾成」，只會寫它有沒有自動清潔或加熱、以及</a:t>
+            </a:r>
+            <a:r>
+              <a:rPr sz="1000" b="1" lang="zh-TW" dirty="0">
+                <a:solidFill>
+                  <a:srgbClr val="000000"/>
+                </a:solidFill>
+                <a:latin typeface="Arial Unicode MS"/>
+                <a:ea typeface="Arial Unicode MS"/>
+                <a:cs typeface="Arial Unicode MS"/>
+              </a:rPr>
+              <a:t>能不能偵測到自己被遮住</a:t>
+            </a:r>
+            <a:r>
+              <a:rPr sz="1000" lang="zh-TW" dirty="0">
+                <a:solidFill>
+                  <a:srgbClr val="000000"/>
+                </a:solidFill>
+                <a:latin typeface="Arial Unicode MS"/>
+                <a:ea typeface="Arial Unicode MS"/>
+                <a:cs typeface="Arial Unicode MS"/>
+              </a:rPr>
+              <a:t>了。」
+</a:t>
+            </a:r>
+          </a:p>
+          <a:p>
+            <a:pPr algn="l">
+              <a:lnSpc>
+                <a:spcPct val="115000"/>
+              </a:lnSpc>
+              <a:spcAft>
+                <a:spcPts val="500"/>
+              </a:spcAft>
+            </a:pPr>
+            <a:r>
+              <a:rPr sz="1000" b="1" lang="zh-TW" dirty="0">
+                <a:solidFill>
+                  <a:srgbClr val="000000"/>
+                </a:solidFill>
+                <a:latin typeface="Arial Unicode MS"/>
+                <a:ea typeface="Arial Unicode MS"/>
+                <a:cs typeface="Arial Unicode MS"/>
+              </a:rPr>
+              <a:t>順便教一個分辨的習慣。</a:t>
+            </a:r>
+            <a:r>
+              <a:rPr sz="1000" lang="zh-TW" dirty="0">
+                <a:solidFill>
+                  <a:srgbClr val="000000"/>
+                </a:solidFill>
+                <a:latin typeface="Arial Unicode MS"/>
+                <a:ea typeface="Arial Unicode MS"/>
+                <a:cs typeface="Arial Unicode MS"/>
+              </a:rPr>
+              <a:t>今天所有的數字都是課堂模型——晴天八十、濃霧十六，這些具體數值是我設的。但有些</a:t>
+            </a:r>
+            <a:r>
+              <a:rPr sz="1000" b="1" lang="zh-TW" dirty="0">
+                <a:solidFill>
+                  <a:srgbClr val="000000"/>
+                </a:solidFill>
+                <a:latin typeface="Arial Unicode MS"/>
+                <a:ea typeface="Arial Unicode MS"/>
+                <a:cs typeface="Arial Unicode MS"/>
+              </a:rPr>
+              <a:t>關係</a:t>
+            </a:r>
+            <a:r>
+              <a:rPr sz="1000" lang="zh-TW" dirty="0">
+                <a:solidFill>
+                  <a:srgbClr val="000000"/>
+                </a:solidFill>
+                <a:latin typeface="Arial Unicode MS"/>
+                <a:ea typeface="Arial Unicode MS"/>
+                <a:cs typeface="Arial Unicode MS"/>
+              </a:rPr>
+              <a:t>不是我設的：「霧削相機比削雷達兇」是波長決定的，「距離兩倍、誤差四倍」是幾何決定的，換成真實的車一樣成立。
+</a:t>
+            </a:r>
+          </a:p>
+          <a:p>
+            <a:pPr algn="l">
+              <a:lnSpc>
+                <a:spcPct val="115000"/>
+              </a:lnSpc>
+              <a:spcAft>
+                <a:spcPts val="500"/>
+              </a:spcAft>
+            </a:pPr>
+            <a:r>
+              <a:rPr sz="1000" lang="zh-TW" dirty="0">
+                <a:solidFill>
+                  <a:srgbClr val="000000"/>
+                </a:solidFill>
+                <a:latin typeface="Arial Unicode MS"/>
+                <a:ea typeface="Arial Unicode MS"/>
+                <a:cs typeface="Arial Unicode MS"/>
+              </a:rPr>
+              <a:t>（這就是你們以後看任何模擬、任何 demo 都要做的分辨：</a:t>
+            </a:r>
+            <a:r>
+              <a:rPr sz="1000" b="1" lang="zh-TW" dirty="0">
+                <a:solidFill>
+                  <a:srgbClr val="000000"/>
+                </a:solidFill>
+                <a:latin typeface="Arial Unicode MS"/>
+                <a:ea typeface="Arial Unicode MS"/>
+                <a:cs typeface="Arial Unicode MS"/>
+              </a:rPr>
               <a:t>哪些是設定，哪些是物理。</a:t>
             </a:r>
             <a:r>
@@ -1487,7 +1729,7 @@
                 <a:ea typeface="Arial Unicode MS"/>
                 <a:cs typeface="Arial Unicode MS"/>
               </a:rPr>
-              <a:t>）
+              <a:t>剛剛髒污那兩個數字，答案是「都是設定」；濃霧那一整排，答案是「數字是設定，大小關係是物理」。）
 </a:t>
             </a:r>
           </a:p>

--- a/第三週(09-24)/第三週_第3節_簡報.pptx
+++ b/第三週(09-24)/第三週_第3節_簡報.pptx
@@ -794,7 +794,7 @@
                 <a:ea typeface="Arial Unicode MS"/>
                 <a:cs typeface="Arial Unicode MS"/>
               </a:rPr>
-              <a:t>這就是水滴最麻煩的地方：它不是讓相機整個瞎掉，是讓它</a:t>
+              <a:t>這就是水滴最麻煩的地方：它不是讓相機完全看不到，是讓它</a:t>
             </a:r>
             <a:r>
               <a:rPr sz="1150" b="1" lang="zh-TW" dirty="0">
@@ -1135,7 +1135,7 @@
                 <a:ea typeface="Arial Unicode MS"/>
                 <a:cs typeface="Arial Unicode MS"/>
               </a:rPr>
-              <a:t>這就是為什麼工具裡把它們分成兩區。上面那區叫「外部環境」，晴天、夜間、濃霧、大雨——按下去會同時打到好幾種感測器。下面那區叫「單一感測器故障」，只有兩顆：鏡頭水滴、光達罩髒污——一顆只打一種。
+              <a:t>這就是為什麼工具裡把它們分成兩區。上面那區叫「外部環境」，晴天、夜間、濃霧、大雨——按下去會同時影響好幾種感測器。下面那區叫「單一感測器故障」，只有兩顆：鏡頭水滴、光達罩髒污——一顆只打一種。
 </a:t>
             </a:r>
           </a:p>
@@ -1223,7 +1223,7 @@
                 <a:ea typeface="Arial Unicode MS"/>
                 <a:cs typeface="Arial Unicode MS"/>
               </a:rPr>
-              <a:t>光達罩髒污的效果是乘法：有效範圍乘零點六五，點數乘零點三五。如果又碰上下雨，兩個效果疊在一起，那就非常慘了。大家可以自己按按看。
+              <a:t>光達罩髒污的效果是乘法：有效範圍乘零點六五，點數乘零點三五。如果又碰上下雨，兩個效果加在一起，情況就很嚴重了。大家可以自己按按看。
 </a:t>
             </a:r>
           </a:p>
@@ -1410,7 +1410,7 @@
                 <a:ea typeface="Arial Unicode MS"/>
                 <a:cs typeface="Arial Unicode MS"/>
               </a:rPr>
-              <a:t>。這直接把點數打掉一塊。
+              <a:t>。這會讓一部分的點直接消失。
 </a:t>
             </a:r>
           </a:p>
@@ -1454,7 +1454,7 @@
                 <a:ea typeface="Arial Unicode MS"/>
                 <a:cs typeface="Arial Unicode MS"/>
               </a:rPr>
-              <a:t>。沒被完全蓋住、只蒙上一層薄灰的地方，雷射還是出得去，但回波變弱了。遠處的回波本來就弱，再削一次就低於偵測門檻——這讓</a:t>
+              <a:t>。沒被完全蓋住、只蒙上一層薄灰的地方，雷射還是出得去，但回波變弱了。遠處的回波本來就弱，再變弱一次就低於偵測的門檻——這讓</a:t>
             </a:r>
             <a:r>
               <a:rPr sz="1000" b="1" lang="zh-TW" dirty="0">
@@ -1498,7 +1498,7 @@
                 <a:ea typeface="Arial Unicode MS"/>
                 <a:cs typeface="Arial Unicode MS"/>
               </a:rPr>
-              <a:t>所以「點數變少」和「看不了那麼遠」，是被兩種不同的機制打到的，不是同一件事的兩種說法。
+              <a:t>所以「點數變少」和「看不了那麼遠」，是兩種不同的原因造成的，不是同一件事的兩種說法。
 </a:t>
             </a:r>
           </a:p>
@@ -1685,7 +1685,7 @@
                 <a:ea typeface="Arial Unicode MS"/>
                 <a:cs typeface="Arial Unicode MS"/>
               </a:rPr>
-              <a:t>不是我設的：「霧削相機比削雷達兇」是波長決定的，「距離兩倍、誤差四倍」是幾何決定的，換成真實的車一樣成立。
+              <a:t>不是我設的：「起霧的時候，相機看得到的距離比雷達短很多」是波長決定的，「距離兩倍、誤差四倍」是幾何決定的，換成真實的車一樣成立。
 </a:t>
             </a:r>
           </a:p>
@@ -4226,7 +4226,7 @@
                 <a:ea typeface="Arial Unicode MS"/>
                 <a:cs typeface="Arial Unicode MS"/>
               </a:rPr>
-              <a:t>。為什麼？白天太陽把柏油路曬到五、六十度，比人還熱，人就淹沒在背景裡了；晚上路面涼下來，人是整條路上最熱的東西，一下子就跳出來。
+              <a:t>。為什麼？白天太陽把柏油路曬到五、六十度，比人還熱，人跟背景的溫度差不多，就分不出來了；晚上路面涼下來，人是整條路上最熱的東西，一下子就跳出來。
 </a:t>
             </a:r>
           </a:p>
@@ -4314,7 +4314,7 @@
                 <a:ea typeface="Arial Unicode MS"/>
                 <a:cs typeface="Arial Unicode MS"/>
               </a:rPr>
-              <a:t>（預期答案：天一黑就瞎了。）
+              <a:t>（預期答案：天一黑就什麼都看不到了。）
 </a:t>
             </a:r>
           </a:p>
@@ -4523,7 +4523,7 @@
                 <a:ea typeface="Arial Unicode MS"/>
                 <a:cs typeface="Arial Unicode MS"/>
               </a:rPr>
-              <a:t>（預期答案：夜間只有相機壞；濃霧是相機、光達、熱像三個一起被削弱。）
+              <a:t>（預期答案：夜間只有相機壞；濃霧是相機、光達、熱像三個一起變差。）
 </a:t>
             </a:r>
           </a:p>
@@ -4589,7 +4589,7 @@
                 <a:ea typeface="Arial Unicode MS"/>
                 <a:cs typeface="Arial Unicode MS"/>
               </a:rPr>
-              <a:t>請注意這個差別：光達是「還看得到但變糊」，相機是「整個看不到」，熱像是「掉了四成但還夠用」。三種被削弱的程度不一樣。
+              <a:t>請注意這個差別：光達是「還看得到但變糊」，相機是「整個看不到」，熱像是「掉了四成但還夠用」。三種變差的程度不一樣。
 </a:t>
             </a:r>
           </a:p>
@@ -5326,7 +5326,7 @@
                 <a:ea typeface="Arial Unicode MS"/>
                 <a:cs typeface="Arial Unicode MS"/>
               </a:rPr>
-              <a:t>請大家記住這個模式：</a:t>
+              <a:t>請大家記住這個現象：</a:t>
             </a:r>
             <a:r>
               <a:rPr sz="1000" b="1" lang="zh-TW" dirty="0">
@@ -5337,7 +5337,7 @@
                 <a:ea typeface="Arial Unicode MS"/>
                 <a:cs typeface="Arial Unicode MS"/>
               </a:rPr>
-              <a:t>感測器失效常常是懸崖式的，不是斜坡式的。</a:t>
+              <a:t>感測器失效常常不是慢慢變差，而是到了某一個程度就整個不見。</a:t>
             </a:r>
             <a:r>
               <a:rPr sz="1000" lang="zh-TW" dirty="0">
@@ -5348,7 +5348,7 @@
                 <a:ea typeface="Arial Unicode MS"/>
                 <a:cs typeface="Arial Unicode MS"/>
               </a:rPr>
-              <a:t>前一秒還好好的，雨大一級就整個沒了。這也是為什麼自駕車不能「看狀況還可以就繼續開」，而是要設一條線，過線就交還給人。
+              <a:t>前一秒還讀得到數字，雨再大一級就什麼都沒有了。這也是為什麼自駕車不能「看狀況還可以就繼續開」，而是要設一條線，過線就交還給人。
 </a:t>
             </a:r>
           </a:p>
@@ -5458,29 +5458,7 @@
                 <a:ea typeface="Arial Unicode MS"/>
                 <a:cs typeface="Arial Unicode MS"/>
               </a:rPr>
-              <a:t>順便看光達：十五、十三、九、六。這個是</a:t>
-            </a:r>
-            <a:r>
-              <a:rPr sz="1000" b="1" lang="zh-TW" dirty="0">
-                <a:solidFill>
-                  <a:srgbClr val="000000"/>
-                </a:solidFill>
-                <a:latin typeface="Arial Unicode MS"/>
-                <a:ea typeface="Arial Unicode MS"/>
-                <a:cs typeface="Arial Unicode MS"/>
-              </a:rPr>
-              <a:t>斜坡式</a:t>
-            </a:r>
-            <a:r>
-              <a:rPr sz="1000" lang="zh-TW" dirty="0">
-                <a:solidFill>
-                  <a:srgbClr val="000000"/>
-                </a:solidFill>
-                <a:latin typeface="Arial Unicode MS"/>
-                <a:ea typeface="Arial Unicode MS"/>
-                <a:cs typeface="Arial Unicode MS"/>
-              </a:rPr>
-              <a:t>的，慢慢掉。因為雨滴會把雷射散射掉一部分，雨愈大散射愈多。
+              <a:t>順便看光達：十五、十三、九、六。這個就是慢慢往下掉的，雨每大一點就少一些。因為雨滴會把雷射散射掉一部分，雨愈大散射愈多。
 </a:t>
             </a:r>
           </a:p>
@@ -5502,73 +5480,7 @@
                 <a:ea typeface="Arial Unicode MS"/>
                 <a:cs typeface="Arial Unicode MS"/>
               </a:rPr>
-              <a:t>所以同一場雨，對三種感測器做了三件不同的事：相機是</a:t>
-            </a:r>
-            <a:r>
-              <a:rPr sz="1000" b="1" lang="zh-TW" dirty="0">
-                <a:solidFill>
-                  <a:srgbClr val="000000"/>
-                </a:solidFill>
-                <a:latin typeface="Arial Unicode MS"/>
-                <a:ea typeface="Arial Unicode MS"/>
-                <a:cs typeface="Arial Unicode MS"/>
-              </a:rPr>
-              <a:t>懸崖</a:t>
-            </a:r>
-            <a:r>
-              <a:rPr sz="1000" lang="zh-TW" dirty="0">
-                <a:solidFill>
-                  <a:srgbClr val="000000"/>
-                </a:solidFill>
-                <a:latin typeface="Arial Unicode MS"/>
-                <a:ea typeface="Arial Unicode MS"/>
-                <a:cs typeface="Arial Unicode MS"/>
-              </a:rPr>
-              <a:t>，光達是</a:t>
-            </a:r>
-            <a:r>
-              <a:rPr sz="1000" b="1" lang="zh-TW" dirty="0">
-                <a:solidFill>
-                  <a:srgbClr val="000000"/>
-                </a:solidFill>
-                <a:latin typeface="Arial Unicode MS"/>
-                <a:ea typeface="Arial Unicode MS"/>
-                <a:cs typeface="Arial Unicode MS"/>
-              </a:rPr>
-              <a:t>斜坡</a:t>
-            </a:r>
-            <a:r>
-              <a:rPr sz="1000" lang="zh-TW" dirty="0">
-                <a:solidFill>
-                  <a:srgbClr val="000000"/>
-                </a:solidFill>
-                <a:latin typeface="Arial Unicode MS"/>
-                <a:ea typeface="Arial Unicode MS"/>
-                <a:cs typeface="Arial Unicode MS"/>
-              </a:rPr>
-              <a:t>，雷達幾乎</a:t>
-            </a:r>
-            <a:r>
-              <a:rPr sz="1000" b="1" lang="zh-TW" dirty="0">
-                <a:solidFill>
-                  <a:srgbClr val="000000"/>
-                </a:solidFill>
-                <a:latin typeface="Arial Unicode MS"/>
-                <a:ea typeface="Arial Unicode MS"/>
-                <a:cs typeface="Arial Unicode MS"/>
-              </a:rPr>
-              <a:t>沒事</a:t>
-            </a:r>
-            <a:r>
-              <a:rPr sz="1000" lang="zh-TW" dirty="0">
-                <a:solidFill>
-                  <a:srgbClr val="000000"/>
-                </a:solidFill>
-                <a:latin typeface="Arial Unicode MS"/>
-                <a:ea typeface="Arial Unicode MS"/>
-                <a:cs typeface="Arial Unicode MS"/>
-              </a:rPr>
-              <a:t>。
+              <a:t>所以同一場雨，對三種感測器做了三件不一樣的事：相機是到了某個程度就整個不見，光達是慢慢變少，雷達幾乎沒有變化。
 </a:t>
             </a:r>
           </a:p>
@@ -6229,7 +6141,7 @@
                 <a:ea typeface="Arial Unicode MS"/>
                 <a:cs typeface="Arial Unicode MS"/>
               </a:rPr>
-              <a:t>的波長跟霧滴差不多大，所以被擋掉一部分，但沒那麼慘——一百四十三掉到九十。
+              <a:t>的波長跟霧滴差不多大，所以被擋掉一部分，但沒有那麼嚴重——從一百四十三掉到九十。
 </a:t>
             </a:r>
           </a:p>
@@ -6669,7 +6581,7 @@
                 <a:ea typeface="Arial Unicode MS"/>
                 <a:cs typeface="Arial Unicode MS"/>
               </a:rPr>
-              <a:t>對。前面所有的天氣，雷達都穩如泰山，因為霧滴只有幾微米、雨滴不到兩公釐，都比它的波長小。但雪花不一樣，雪花</a:t>
+              <a:t>對。前面所有的天氣，雷達幾乎都沒有變化，因為霧滴只有幾微米、雨滴不到兩公釐，都比它的波長小很多。但雪花不一樣，雪花的大小</a:t>
             </a:r>
             <a:r>
               <a:rPr sz="1000" b="1" lang="zh-TW" dirty="0">
@@ -6680,7 +6592,7 @@
                 <a:ea typeface="Arial Unicode MS"/>
                 <a:cs typeface="Arial Unicode MS"/>
               </a:rPr>
-              <a:t>追上它了</a:t>
+              <a:t>已經跟它的波長差不多了</a:t>
             </a:r>
             <a:r>
               <a:rPr sz="1000" lang="zh-TW" dirty="0">
@@ -6856,7 +6768,7 @@
                 <a:ea typeface="Arial Unicode MS"/>
                 <a:cs typeface="Arial Unicode MS"/>
               </a:rPr>
-              <a:t>下雪是今天把雷達削得最兇的一種</a:t>
+              <a:t>下雪是今天讓雷達掉最多的一種天氣</a:t>
             </a:r>
             <a:r>
               <a:rPr sz="1000" lang="zh-TW" dirty="0">
@@ -6911,7 +6823,7 @@
                 <a:ea typeface="Arial Unicode MS"/>
                 <a:cs typeface="Arial Unicode MS"/>
               </a:rPr>
-              <a:t>再看光達：三十五公尺，比大雨的四十還慘。為什麼？兩個原因。第一，雪花又大又不規則，散射比雨嚴重。第二，飄在空中的雪花</a:t>
+              <a:t>再看光達：三十五公尺，比大雨的四十還要短。為什麼？兩個原因。第一，雪花又大又不規則，散射比雨嚴重。第二，飄在空中的雪花</a:t>
             </a:r>
             <a:r>
               <a:rPr sz="1000" b="1" lang="zh-TW" dirty="0">
@@ -7725,7 +7637,7 @@
                 <a:ea typeface="Arial Unicode MS"/>
                 <a:cs typeface="Arial Unicode MS"/>
               </a:rPr>
-              <a:t>大雨那張，行人還看得到輪廓，只是雨絲擋在中間。濃霧那張——（指一下）——那個人幾乎整個被霧吃掉了。右下角的數字就是我們剛剛量過的：大雨相機只剩二十二公尺，濃霧只剩十六公尺。
+              <a:t>大雨那張，行人還看得到輪廓，只是雨絲擋在中間。濃霧那張——（指一下）——那個人幾乎被霧蓋住，看不見了。右下角的數字就是我們剛剛量過的：大雨相機只剩二十二公尺，濃霧只剩十六公尺。
 </a:t>
             </a:r>
           </a:p>
@@ -10316,7 +10228,7 @@
                 <a:ea typeface="微軟正黑體" pitchFamily="34" charset="-122"/>
                 <a:cs typeface="微軟正黑體" pitchFamily="34" charset="-120"/>
               </a:rPr>
-              <a:t>距離還在，但「行人」這個標籤不見了。只壞掉一半。</a:t>
+              <a:t>距離還在，但「行人」這個標籤不見了——等於只剩一半的功能。</a:t>
             </a:r>
             <a:endParaRPr lang="en-US" sz="1250" dirty="0"/>
           </a:p>
@@ -17192,7 +17104,7 @@
                 <a:ea typeface="微軟正黑體" pitchFamily="34" charset="-122"/>
                 <a:cs typeface="微軟正黑體" pitchFamily="34" charset="-120"/>
               </a:rPr>
-              <a:t>沒有光就沒得看。天一黑就等於瞎了。</a:t>
+              <a:t>沒有光就沒得看。天一黑就什麼都看不到。</a:t>
             </a:r>
             <a:endParaRPr lang="en-US" sz="1050" dirty="0"/>
           </a:p>
@@ -21197,7 +21109,7 @@
                 <a:ea typeface="微軟正黑體" pitchFamily="34" charset="-122"/>
                 <a:cs typeface="微軟正黑體" pitchFamily="34" charset="-120"/>
               </a:rPr>
-              <a:t>相機、光達：霧削得最兇</a:t>
+              <a:t>相機、光達：在霧裡看得最短</a:t>
             </a:r>
             <a:endParaRPr lang="en-US" sz="950" dirty="0"/>
           </a:p>
@@ -22351,7 +22263,7 @@
                 <a:ea typeface="微軟正黑體" pitchFamily="34" charset="-122"/>
                 <a:cs typeface="微軟正黑體" pitchFamily="34" charset="-120"/>
               </a:rPr>
-              <a:t>這是今天唯一一種，連雷達都被拉下來的天氣。</a:t>
+              <a:t>這是今天唯一一種，連雷達都會變差的天氣。</a:t>
             </a:r>
             <a:endParaRPr lang="en-US" sz="1250" dirty="0"/>
           </a:p>
@@ -24201,7 +24113,7 @@
                           <a:ea typeface="微軟正黑體" pitchFamily="34" charset="-122"/>
                           <a:cs typeface="微軟正黑體" pitchFamily="34" charset="-120"/>
                         </a:rPr>
-                        <a:t>九種裡相機最慘的一種</a:t>
+                        <a:t>九種條件裡，相機的距離縮得最短</a:t>
                       </a:r>
                       <a:endParaRPr lang="en-US" sz="1200" dirty="0"/>
                     </a:p>
@@ -25005,7 +24917,7 @@
                           <a:ea typeface="微軟正黑體" pitchFamily="34" charset="-122"/>
                           <a:cs typeface="微軟正黑體" pitchFamily="34" charset="-120"/>
                         </a:rPr>
-                        <a:t>三種一起被削弱，雷達剩最多</a:t>
+                        <a:t>三種的距離一起變短，雷達還剩最多</a:t>
                       </a:r>
                       <a:endParaRPr lang="en-US" sz="1200" dirty="0"/>
                     </a:p>
@@ -25407,7 +25319,7 @@
                           <a:ea typeface="微軟正黑體" pitchFamily="34" charset="-122"/>
                           <a:cs typeface="微軟正黑體" pitchFamily="34" charset="-120"/>
                         </a:rPr>
-                        <a:t>相機最慘；光達掉一半以上</a:t>
+                        <a:t>相機縮得最短；光達少了一半以上</a:t>
                       </a:r>
                       <a:endParaRPr lang="en-US" sz="1200" dirty="0"/>
                     </a:p>

--- a/第三週(09-24)/第三週_第3節_簡報.pptx
+++ b/第三週(09-24)/第三週_第3節_簡報.pptx
@@ -12020,7 +12020,7 @@
         </p:nvSpPr>
         <p:spPr>
           <a:xfrm>
-            <a:off x="6080760" y="1865376"/>
+            <a:off x="6080760" y="1883664"/>
             <a:ext cx="2395728" cy="731520"/>
           </a:xfrm>
           <a:prstGeom prst="rect">
@@ -16824,8 +16824,8 @@
         </p:nvSpPr>
         <p:spPr>
           <a:xfrm>
-            <a:off x="1636410" y="2336475"/>
-            <a:ext cx="92172" cy="92172"/>
+            <a:off x="1644091" y="2321113"/>
+            <a:ext cx="76810" cy="76810"/>
           </a:xfrm>
           <a:prstGeom prst="ellipse">
             <a:avLst/>
@@ -16844,12 +16844,12 @@
         </p:nvSpPr>
         <p:spPr>
           <a:xfrm>
-            <a:off x="1621048" y="2440168"/>
+            <a:off x="1621048" y="2405604"/>
             <a:ext cx="122895" cy="138257"/>
           </a:xfrm>
           <a:prstGeom prst="roundRect">
             <a:avLst>
-              <a:gd name="adj" fmla="val 223215"/>
+              <a:gd name="adj" fmla="val 208334"/>
             </a:avLst>
           </a:prstGeom>
           <a:solidFill>
@@ -16865,9 +16865,9 @@
           <p:nvPr/>
         </p:nvSpPr>
         <p:spPr>
-          <a:xfrm rot="480000">
-            <a:off x="1628729" y="2574585"/>
-            <a:ext cx="34564" cy="99852"/>
+          <a:xfrm rot="960000">
+            <a:off x="1599926" y="2417125"/>
+            <a:ext cx="30724" cy="99852"/>
           </a:xfrm>
           <a:prstGeom prst="rect">
             <a:avLst/>
@@ -16885,9 +16885,9 @@
           <p:nvPr/>
         </p:nvSpPr>
         <p:spPr>
-          <a:xfrm rot="-480000">
-            <a:off x="1701698" y="2574585"/>
-            <a:ext cx="34564" cy="99852"/>
+          <a:xfrm rot="-960000">
+            <a:off x="1734342" y="2417125"/>
+            <a:ext cx="30724" cy="99852"/>
           </a:xfrm>
           <a:prstGeom prst="rect">
             <a:avLst/>
@@ -16905,6 +16905,46 @@
           <p:nvPr/>
         </p:nvSpPr>
         <p:spPr>
+          <a:xfrm rot="300000">
+            <a:off x="1642171" y="2524658"/>
+            <a:ext cx="34564" cy="138257"/>
+          </a:xfrm>
+          <a:prstGeom prst="rect">
+            <a:avLst/>
+          </a:prstGeom>
+          <a:solidFill>
+            <a:srgbClr val="5F7183"/>
+          </a:solidFill>
+          <a:ln/>
+        </p:spPr>
+      </p:sp>
+      <p:sp>
+        <p:nvSpPr>
+          <p:cNvPr id="21" name="Shape 19"/>
+          <p:cNvSpPr/>
+          <p:nvPr/>
+        </p:nvSpPr>
+        <p:spPr>
+          <a:xfrm rot="-300000">
+            <a:off x="1688257" y="2524658"/>
+            <a:ext cx="34564" cy="138257"/>
+          </a:xfrm>
+          <a:prstGeom prst="rect">
+            <a:avLst/>
+          </a:prstGeom>
+          <a:solidFill>
+            <a:srgbClr val="5F7183"/>
+          </a:solidFill>
+          <a:ln/>
+        </p:spPr>
+      </p:sp>
+      <p:sp>
+        <p:nvSpPr>
+          <p:cNvPr id="22" name="Shape 20"/>
+          <p:cNvSpPr/>
+          <p:nvPr/>
+        </p:nvSpPr>
+        <p:spPr>
           <a:xfrm>
             <a:off x="1929384" y="2423160"/>
             <a:ext cx="310896" cy="164592"/>
@@ -16920,7 +16960,7 @@
       </p:sp>
       <p:sp>
         <p:nvSpPr>
-          <p:cNvPr id="21" name="Shape 19"/>
+          <p:cNvPr id="23" name="Shape 21"/>
           <p:cNvSpPr/>
           <p:nvPr/>
         </p:nvSpPr>
@@ -16942,7 +16982,7 @@
       </p:sp>
       <p:sp>
         <p:nvSpPr>
-          <p:cNvPr id="22" name="Shape 20"/>
+          <p:cNvPr id="24" name="Shape 22"/>
           <p:cNvSpPr/>
           <p:nvPr/>
         </p:nvSpPr>
@@ -16964,7 +17004,7 @@
       </p:sp>
       <p:sp>
         <p:nvSpPr>
-          <p:cNvPr id="23" name="Shape 21"/>
+          <p:cNvPr id="25" name="Shape 23"/>
           <p:cNvSpPr/>
           <p:nvPr/>
         </p:nvSpPr>
@@ -16984,7 +17024,7 @@
       </p:sp>
       <p:sp>
         <p:nvSpPr>
-          <p:cNvPr id="24" name="Shape 22"/>
+          <p:cNvPr id="26" name="Shape 24"/>
           <p:cNvSpPr/>
           <p:nvPr/>
         </p:nvSpPr>
@@ -17006,7 +17046,7 @@
       </p:sp>
       <p:sp>
         <p:nvSpPr>
-          <p:cNvPr id="25" name="Shape 23"/>
+          <p:cNvPr id="27" name="Shape 25"/>
           <p:cNvSpPr/>
           <p:nvPr/>
         </p:nvSpPr>
@@ -17028,7 +17068,7 @@
       </p:sp>
       <p:sp>
         <p:nvSpPr>
-          <p:cNvPr id="26" name="Shape 24"/>
+          <p:cNvPr id="28" name="Shape 26"/>
           <p:cNvSpPr/>
           <p:nvPr/>
         </p:nvSpPr>
@@ -17050,7 +17090,7 @@
       </p:sp>
       <p:sp>
         <p:nvSpPr>
-          <p:cNvPr id="27" name="Text 25"/>
+          <p:cNvPr id="29" name="Text 27"/>
           <p:cNvSpPr txBox="1"/>
           <p:nvPr/>
         </p:nvSpPr>
@@ -17112,7 +17152,7 @@
       </p:sp>
       <p:sp>
         <p:nvSpPr>
-          <p:cNvPr id="28" name="Shape 26"/>
+          <p:cNvPr id="30" name="Shape 28"/>
           <p:cNvSpPr/>
           <p:nvPr/>
         </p:nvSpPr>
@@ -17139,7 +17179,7 @@
       </p:sp>
       <p:sp>
         <p:nvSpPr>
-          <p:cNvPr id="29" name="Text 27"/>
+          <p:cNvPr id="31" name="Text 29"/>
           <p:cNvSpPr txBox="1"/>
           <p:nvPr/>
         </p:nvSpPr>
@@ -17201,7 +17241,7 @@
       </p:sp>
       <p:sp>
         <p:nvSpPr>
-          <p:cNvPr id="30" name="Text 28"/>
+          <p:cNvPr id="32" name="Text 30"/>
           <p:cNvSpPr txBox="1"/>
           <p:nvPr/>
         </p:nvSpPr>
@@ -17263,7 +17303,7 @@
       </p:sp>
       <p:sp>
         <p:nvSpPr>
-          <p:cNvPr id="31" name="Shape 29"/>
+          <p:cNvPr id="33" name="Shape 31"/>
           <p:cNvSpPr/>
           <p:nvPr/>
         </p:nvSpPr>
@@ -17285,7 +17325,7 @@
       </p:sp>
       <p:sp>
         <p:nvSpPr>
-          <p:cNvPr id="32" name="Shape 30"/>
+          <p:cNvPr id="34" name="Shape 32"/>
           <p:cNvSpPr/>
           <p:nvPr/>
         </p:nvSpPr>
@@ -17307,7 +17347,7 @@
       </p:sp>
       <p:sp>
         <p:nvSpPr>
-          <p:cNvPr id="33" name="Shape 31"/>
+          <p:cNvPr id="35" name="Shape 33"/>
           <p:cNvSpPr/>
           <p:nvPr/>
         </p:nvSpPr>
@@ -17329,7 +17369,7 @@
       </p:sp>
       <p:sp>
         <p:nvSpPr>
-          <p:cNvPr id="34" name="Shape 32"/>
+          <p:cNvPr id="36" name="Shape 34"/>
           <p:cNvSpPr/>
           <p:nvPr/>
         </p:nvSpPr>
@@ -17351,7 +17391,7 @@
       </p:sp>
       <p:sp>
         <p:nvSpPr>
-          <p:cNvPr id="35" name="Shape 33"/>
+          <p:cNvPr id="37" name="Shape 35"/>
           <p:cNvSpPr/>
           <p:nvPr/>
         </p:nvSpPr>
@@ -17373,7 +17413,7 @@
       </p:sp>
       <p:sp>
         <p:nvSpPr>
-          <p:cNvPr id="36" name="Shape 34"/>
+          <p:cNvPr id="38" name="Shape 36"/>
           <p:cNvSpPr/>
           <p:nvPr/>
         </p:nvSpPr>
@@ -17393,7 +17433,7 @@
       </p:sp>
       <p:sp>
         <p:nvSpPr>
-          <p:cNvPr id="37" name="Shape 35"/>
+          <p:cNvPr id="39" name="Shape 37"/>
           <p:cNvSpPr/>
           <p:nvPr/>
         </p:nvSpPr>
@@ -17413,7 +17453,7 @@
       </p:sp>
       <p:sp>
         <p:nvSpPr>
-          <p:cNvPr id="38" name="Shape 36"/>
+          <p:cNvPr id="40" name="Shape 38"/>
           <p:cNvSpPr/>
           <p:nvPr/>
         </p:nvSpPr>
@@ -17433,7 +17473,7 @@
       </p:sp>
       <p:sp>
         <p:nvSpPr>
-          <p:cNvPr id="39" name="Shape 37"/>
+          <p:cNvPr id="41" name="Shape 39"/>
           <p:cNvSpPr/>
           <p:nvPr/>
         </p:nvSpPr>
@@ -17455,7 +17495,7 @@
       </p:sp>
       <p:sp>
         <p:nvSpPr>
-          <p:cNvPr id="40" name="Shape 38"/>
+          <p:cNvPr id="42" name="Shape 40"/>
           <p:cNvSpPr/>
           <p:nvPr/>
         </p:nvSpPr>
@@ -17477,7 +17517,7 @@
       </p:sp>
       <p:sp>
         <p:nvSpPr>
-          <p:cNvPr id="41" name="Shape 39"/>
+          <p:cNvPr id="43" name="Shape 41"/>
           <p:cNvSpPr/>
           <p:nvPr/>
         </p:nvSpPr>
@@ -17497,14 +17537,14 @@
       </p:sp>
       <p:sp>
         <p:nvSpPr>
-          <p:cNvPr id="42" name="Shape 40"/>
+          <p:cNvPr id="44" name="Shape 42"/>
           <p:cNvSpPr/>
           <p:nvPr/>
         </p:nvSpPr>
         <p:spPr>
           <a:xfrm>
-            <a:off x="5007498" y="2336475"/>
-            <a:ext cx="92172" cy="92172"/>
+            <a:off x="5015179" y="2321113"/>
+            <a:ext cx="76810" cy="76810"/>
           </a:xfrm>
           <a:prstGeom prst="ellipse">
             <a:avLst/>
@@ -17517,18 +17557,18 @@
       </p:sp>
       <p:sp>
         <p:nvSpPr>
-          <p:cNvPr id="43" name="Shape 41"/>
+          <p:cNvPr id="45" name="Shape 43"/>
           <p:cNvSpPr/>
           <p:nvPr/>
         </p:nvSpPr>
         <p:spPr>
           <a:xfrm>
-            <a:off x="4992136" y="2440168"/>
+            <a:off x="4992136" y="2405604"/>
             <a:ext cx="122895" cy="138257"/>
           </a:xfrm>
           <a:prstGeom prst="roundRect">
             <a:avLst>
-              <a:gd name="adj" fmla="val 223215"/>
+              <a:gd name="adj" fmla="val 208334"/>
             </a:avLst>
           </a:prstGeom>
           <a:solidFill>
@@ -17539,14 +17579,14 @@
       </p:sp>
       <p:sp>
         <p:nvSpPr>
-          <p:cNvPr id="44" name="Shape 42"/>
+          <p:cNvPr id="46" name="Shape 44"/>
           <p:cNvSpPr/>
           <p:nvPr/>
         </p:nvSpPr>
         <p:spPr>
-          <a:xfrm rot="480000">
-            <a:off x="4999817" y="2574585"/>
-            <a:ext cx="34564" cy="99852"/>
+          <a:xfrm rot="960000">
+            <a:off x="4971014" y="2417125"/>
+            <a:ext cx="30724" cy="99852"/>
           </a:xfrm>
           <a:prstGeom prst="rect">
             <a:avLst/>
@@ -17559,14 +17599,14 @@
       </p:sp>
       <p:sp>
         <p:nvSpPr>
-          <p:cNvPr id="45" name="Shape 43"/>
+          <p:cNvPr id="47" name="Shape 45"/>
           <p:cNvSpPr/>
           <p:nvPr/>
         </p:nvSpPr>
         <p:spPr>
-          <a:xfrm rot="-480000">
-            <a:off x="5072786" y="2574585"/>
-            <a:ext cx="34564" cy="99852"/>
+          <a:xfrm rot="-960000">
+            <a:off x="5105430" y="2417125"/>
+            <a:ext cx="30724" cy="99852"/>
           </a:xfrm>
           <a:prstGeom prst="rect">
             <a:avLst/>
@@ -17579,7 +17619,47 @@
       </p:sp>
       <p:sp>
         <p:nvSpPr>
-          <p:cNvPr id="46" name="Shape 44"/>
+          <p:cNvPr id="48" name="Shape 46"/>
+          <p:cNvSpPr/>
+          <p:nvPr/>
+        </p:nvSpPr>
+        <p:spPr>
+          <a:xfrm rot="300000">
+            <a:off x="5013259" y="2524658"/>
+            <a:ext cx="34564" cy="138257"/>
+          </a:xfrm>
+          <a:prstGeom prst="rect">
+            <a:avLst/>
+          </a:prstGeom>
+          <a:solidFill>
+            <a:srgbClr val="5F7183"/>
+          </a:solidFill>
+          <a:ln/>
+        </p:spPr>
+      </p:sp>
+      <p:sp>
+        <p:nvSpPr>
+          <p:cNvPr id="49" name="Shape 47"/>
+          <p:cNvSpPr/>
+          <p:nvPr/>
+        </p:nvSpPr>
+        <p:spPr>
+          <a:xfrm rot="-300000">
+            <a:off x="5059345" y="2524658"/>
+            <a:ext cx="34564" cy="138257"/>
+          </a:xfrm>
+          <a:prstGeom prst="rect">
+            <a:avLst/>
+          </a:prstGeom>
+          <a:solidFill>
+            <a:srgbClr val="5F7183"/>
+          </a:solidFill>
+          <a:ln/>
+        </p:spPr>
+      </p:sp>
+      <p:sp>
+        <p:nvSpPr>
+          <p:cNvPr id="50" name="Shape 48"/>
           <p:cNvSpPr/>
           <p:nvPr/>
         </p:nvSpPr>
@@ -17601,7 +17681,7 @@
       </p:sp>
       <p:sp>
         <p:nvSpPr>
-          <p:cNvPr id="47" name="Text 45"/>
+          <p:cNvPr id="51" name="Text 49"/>
           <p:cNvSpPr txBox="1"/>
           <p:nvPr/>
         </p:nvSpPr>
@@ -17663,7 +17743,7 @@
       </p:sp>
       <p:sp>
         <p:nvSpPr>
-          <p:cNvPr id="48" name="Shape 46"/>
+          <p:cNvPr id="52" name="Shape 50"/>
           <p:cNvSpPr/>
           <p:nvPr/>
         </p:nvSpPr>
@@ -17690,7 +17770,7 @@
       </p:sp>
       <p:sp>
         <p:nvSpPr>
-          <p:cNvPr id="49" name="Text 47"/>
+          <p:cNvPr id="53" name="Text 51"/>
           <p:cNvSpPr txBox="1"/>
           <p:nvPr/>
         </p:nvSpPr>
@@ -17752,7 +17832,7 @@
       </p:sp>
       <p:sp>
         <p:nvSpPr>
-          <p:cNvPr id="50" name="Text 48"/>
+          <p:cNvPr id="54" name="Text 52"/>
           <p:cNvSpPr txBox="1"/>
           <p:nvPr/>
         </p:nvSpPr>
@@ -17814,14 +17894,14 @@
       </p:sp>
       <p:sp>
         <p:nvSpPr>
-          <p:cNvPr id="51" name="Shape 49"/>
+          <p:cNvPr id="55" name="Shape 53"/>
           <p:cNvSpPr/>
           <p:nvPr/>
         </p:nvSpPr>
         <p:spPr>
           <a:xfrm>
-            <a:off x="6641226" y="2336475"/>
-            <a:ext cx="92172" cy="92172"/>
+            <a:off x="6648907" y="2321113"/>
+            <a:ext cx="76810" cy="76810"/>
           </a:xfrm>
           <a:prstGeom prst="ellipse">
             <a:avLst/>
@@ -17834,18 +17914,18 @@
       </p:sp>
       <p:sp>
         <p:nvSpPr>
-          <p:cNvPr id="52" name="Shape 50"/>
+          <p:cNvPr id="56" name="Shape 54"/>
           <p:cNvSpPr/>
           <p:nvPr/>
         </p:nvSpPr>
         <p:spPr>
           <a:xfrm>
-            <a:off x="6625864" y="2440168"/>
+            <a:off x="6625864" y="2405604"/>
             <a:ext cx="122895" cy="138257"/>
           </a:xfrm>
           <a:prstGeom prst="roundRect">
             <a:avLst>
-              <a:gd name="adj" fmla="val 223215"/>
+              <a:gd name="adj" fmla="val 208334"/>
             </a:avLst>
           </a:prstGeom>
           <a:solidFill>
@@ -17856,14 +17936,14 @@
       </p:sp>
       <p:sp>
         <p:nvSpPr>
-          <p:cNvPr id="53" name="Shape 51"/>
+          <p:cNvPr id="57" name="Shape 55"/>
           <p:cNvSpPr/>
           <p:nvPr/>
         </p:nvSpPr>
         <p:spPr>
-          <a:xfrm rot="480000">
-            <a:off x="6633545" y="2574585"/>
-            <a:ext cx="34564" cy="99852"/>
+          <a:xfrm rot="960000">
+            <a:off x="6604742" y="2417125"/>
+            <a:ext cx="30724" cy="99852"/>
           </a:xfrm>
           <a:prstGeom prst="rect">
             <a:avLst/>
@@ -17876,14 +17956,14 @@
       </p:sp>
       <p:sp>
         <p:nvSpPr>
-          <p:cNvPr id="54" name="Shape 52"/>
+          <p:cNvPr id="58" name="Shape 56"/>
           <p:cNvSpPr/>
           <p:nvPr/>
         </p:nvSpPr>
         <p:spPr>
-          <a:xfrm rot="-480000">
-            <a:off x="6706514" y="2574585"/>
-            <a:ext cx="34564" cy="99852"/>
+          <a:xfrm rot="-960000">
+            <a:off x="6739158" y="2417125"/>
+            <a:ext cx="30724" cy="99852"/>
           </a:xfrm>
           <a:prstGeom prst="rect">
             <a:avLst/>
@@ -17896,7 +17976,47 @@
       </p:sp>
       <p:sp>
         <p:nvSpPr>
-          <p:cNvPr id="55" name="Shape 53"/>
+          <p:cNvPr id="59" name="Shape 57"/>
+          <p:cNvSpPr/>
+          <p:nvPr/>
+        </p:nvSpPr>
+        <p:spPr>
+          <a:xfrm rot="300000">
+            <a:off x="6646987" y="2524658"/>
+            <a:ext cx="34564" cy="138257"/>
+          </a:xfrm>
+          <a:prstGeom prst="rect">
+            <a:avLst/>
+          </a:prstGeom>
+          <a:solidFill>
+            <a:srgbClr val="D9463E"/>
+          </a:solidFill>
+          <a:ln/>
+        </p:spPr>
+      </p:sp>
+      <p:sp>
+        <p:nvSpPr>
+          <p:cNvPr id="60" name="Shape 58"/>
+          <p:cNvSpPr/>
+          <p:nvPr/>
+        </p:nvSpPr>
+        <p:spPr>
+          <a:xfrm rot="-300000">
+            <a:off x="6693073" y="2524658"/>
+            <a:ext cx="34564" cy="138257"/>
+          </a:xfrm>
+          <a:prstGeom prst="rect">
+            <a:avLst/>
+          </a:prstGeom>
+          <a:solidFill>
+            <a:srgbClr val="D9463E"/>
+          </a:solidFill>
+          <a:ln/>
+        </p:spPr>
+      </p:sp>
+      <p:sp>
+        <p:nvSpPr>
+          <p:cNvPr id="61" name="Shape 59"/>
           <p:cNvSpPr/>
           <p:nvPr/>
         </p:nvSpPr>
@@ -17922,7 +18042,7 @@
       </p:sp>
       <p:sp>
         <p:nvSpPr>
-          <p:cNvPr id="56" name="Shape 54"/>
+          <p:cNvPr id="62" name="Shape 60"/>
           <p:cNvSpPr/>
           <p:nvPr/>
         </p:nvSpPr>
@@ -17950,7 +18070,7 @@
       </p:sp>
       <p:sp>
         <p:nvSpPr>
-          <p:cNvPr id="57" name="Shape 55"/>
+          <p:cNvPr id="63" name="Shape 61"/>
           <p:cNvSpPr/>
           <p:nvPr/>
         </p:nvSpPr>
@@ -17978,7 +18098,7 @@
       </p:sp>
       <p:sp>
         <p:nvSpPr>
-          <p:cNvPr id="58" name="Shape 56"/>
+          <p:cNvPr id="64" name="Shape 62"/>
           <p:cNvSpPr/>
           <p:nvPr/>
         </p:nvSpPr>
@@ -17998,7 +18118,7 @@
       </p:sp>
       <p:sp>
         <p:nvSpPr>
-          <p:cNvPr id="59" name="Shape 57"/>
+          <p:cNvPr id="65" name="Shape 63"/>
           <p:cNvSpPr/>
           <p:nvPr/>
         </p:nvSpPr>
@@ -18020,7 +18140,7 @@
       </p:sp>
       <p:sp>
         <p:nvSpPr>
-          <p:cNvPr id="60" name="Shape 58"/>
+          <p:cNvPr id="66" name="Shape 64"/>
           <p:cNvSpPr/>
           <p:nvPr/>
         </p:nvSpPr>
@@ -18042,7 +18162,7 @@
       </p:sp>
       <p:sp>
         <p:nvSpPr>
-          <p:cNvPr id="61" name="Shape 59"/>
+          <p:cNvPr id="67" name="Shape 65"/>
           <p:cNvSpPr/>
           <p:nvPr/>
         </p:nvSpPr>
@@ -18062,7 +18182,7 @@
       </p:sp>
       <p:sp>
         <p:nvSpPr>
-          <p:cNvPr id="62" name="Shape 60"/>
+          <p:cNvPr id="68" name="Shape 66"/>
           <p:cNvSpPr/>
           <p:nvPr/>
         </p:nvSpPr>
@@ -18084,7 +18204,7 @@
       </p:sp>
       <p:sp>
         <p:nvSpPr>
-          <p:cNvPr id="63" name="Shape 61"/>
+          <p:cNvPr id="69" name="Shape 67"/>
           <p:cNvSpPr/>
           <p:nvPr/>
         </p:nvSpPr>
@@ -18106,7 +18226,7 @@
       </p:sp>
       <p:sp>
         <p:nvSpPr>
-          <p:cNvPr id="64" name="Shape 62"/>
+          <p:cNvPr id="70" name="Shape 68"/>
           <p:cNvSpPr/>
           <p:nvPr/>
         </p:nvSpPr>
@@ -18128,7 +18248,7 @@
       </p:sp>
       <p:sp>
         <p:nvSpPr>
-          <p:cNvPr id="65" name="Text 63"/>
+          <p:cNvPr id="71" name="Text 69"/>
           <p:cNvSpPr txBox="1"/>
           <p:nvPr/>
         </p:nvSpPr>
@@ -18190,7 +18310,7 @@
       </p:sp>
       <p:sp>
         <p:nvSpPr>
-          <p:cNvPr id="66" name="Shape 64"/>
+          <p:cNvPr id="72" name="Shape 70"/>
           <p:cNvSpPr/>
           <p:nvPr/>
         </p:nvSpPr>
@@ -18217,7 +18337,7 @@
       </p:sp>
       <p:sp>
         <p:nvSpPr>
-          <p:cNvPr id="67" name="Text 65"/>
+          <p:cNvPr id="73" name="Text 71"/>
           <p:cNvSpPr txBox="1"/>
           <p:nvPr/>
         </p:nvSpPr>
@@ -18279,7 +18399,7 @@
       </p:sp>
       <p:pic>
         <p:nvPicPr>
-          <p:cNvPr id="69" name="Image 0" descr="/Users/tsengchenghsun/Class/carClass/Claude outputs/第三週(9-24)/src/logo.png">    </p:cNvPr>
+          <p:cNvPr id="75" name="Image 0" descr="/Users/tsengchenghsun/Class/carClass/Claude outputs/第三週(9-24)/src/logo.png">    </p:cNvPr>
           <p:cNvPicPr>
             <a:picLocks noChangeAspect="1"/>
           </p:cNvPicPr>
@@ -18303,7 +18423,7 @@
       </p:pic>
       <p:sp>
         <p:nvSpPr>
-          <p:cNvPr id="70" name="Text 66"/>
+          <p:cNvPr id="76" name="Text 72"/>
           <p:cNvSpPr txBox="1"/>
           <p:nvPr/>
         </p:nvSpPr>
@@ -18342,7 +18462,7 @@
       </p:sp>
       <p:sp>
         <p:nvSpPr>
-          <p:cNvPr id="71" name="Text 67"/>
+          <p:cNvPr id="77" name="Text 73"/>
           <p:cNvSpPr txBox="1"/>
           <p:nvPr/>
         </p:nvSpPr>
@@ -26696,8 +26816,8 @@
         </p:nvSpPr>
         <p:spPr>
           <a:xfrm>
-            <a:off x="3195645" y="1835749"/>
-            <a:ext cx="100950" cy="100950"/>
+            <a:off x="3204058" y="1818924"/>
+            <a:ext cx="84125" cy="84125"/>
           </a:xfrm>
           <a:prstGeom prst="ellipse">
             <a:avLst/>
@@ -26716,12 +26836,12 @@
         </p:nvSpPr>
         <p:spPr>
           <a:xfrm>
-            <a:off x="3178820" y="1949318"/>
+            <a:off x="3178820" y="1911462"/>
             <a:ext cx="134600" cy="151425"/>
           </a:xfrm>
           <a:prstGeom prst="roundRect">
             <a:avLst>
-              <a:gd name="adj" fmla="val 203804"/>
+              <a:gd name="adj" fmla="val 190217"/>
             </a:avLst>
           </a:prstGeom>
           <a:solidFill>
@@ -26737,9 +26857,9 @@
           <p:nvPr/>
         </p:nvSpPr>
         <p:spPr>
-          <a:xfrm rot="480000">
-            <a:off x="3187233" y="2096536"/>
-            <a:ext cx="37856" cy="109362"/>
+          <a:xfrm rot="960000">
+            <a:off x="3155686" y="1924080"/>
+            <a:ext cx="33650" cy="109362"/>
           </a:xfrm>
           <a:prstGeom prst="rect">
             <a:avLst/>
@@ -26757,9 +26877,9 @@
           <p:nvPr/>
         </p:nvSpPr>
         <p:spPr>
-          <a:xfrm rot="-480000">
-            <a:off x="3267151" y="2096536"/>
-            <a:ext cx="37856" cy="109362"/>
+          <a:xfrm rot="-960000">
+            <a:off x="3302904" y="1924080"/>
+            <a:ext cx="33650" cy="109362"/>
           </a:xfrm>
           <a:prstGeom prst="rect">
             <a:avLst/>
@@ -26772,7 +26892,47 @@
       </p:sp>
       <p:sp>
         <p:nvSpPr>
-          <p:cNvPr id="34" name="Text 32"/>
+          <p:cNvPr id="34" name="Shape 32"/>
+          <p:cNvSpPr/>
+          <p:nvPr/>
+        </p:nvSpPr>
+        <p:spPr>
+          <a:xfrm rot="300000">
+            <a:off x="3201954" y="2041855"/>
+            <a:ext cx="37856" cy="151425"/>
+          </a:xfrm>
+          <a:prstGeom prst="rect">
+            <a:avLst/>
+          </a:prstGeom>
+          <a:solidFill>
+            <a:srgbClr val="6E8296"/>
+          </a:solidFill>
+          <a:ln/>
+        </p:spPr>
+      </p:sp>
+      <p:sp>
+        <p:nvSpPr>
+          <p:cNvPr id="35" name="Shape 33"/>
+          <p:cNvSpPr/>
+          <p:nvPr/>
+        </p:nvSpPr>
+        <p:spPr>
+          <a:xfrm rot="-300000">
+            <a:off x="3252429" y="2041855"/>
+            <a:ext cx="37856" cy="151425"/>
+          </a:xfrm>
+          <a:prstGeom prst="rect">
+            <a:avLst/>
+          </a:prstGeom>
+          <a:solidFill>
+            <a:srgbClr val="6E8296"/>
+          </a:solidFill>
+          <a:ln/>
+        </p:spPr>
+      </p:sp>
+      <p:sp>
+        <p:nvSpPr>
+          <p:cNvPr id="36" name="Text 34"/>
           <p:cNvSpPr txBox="1"/>
           <p:nvPr/>
         </p:nvSpPr>
@@ -26834,7 +26994,7 @@
       </p:sp>
       <p:sp>
         <p:nvSpPr>
-          <p:cNvPr id="35" name="Text 33"/>
+          <p:cNvPr id="37" name="Text 35"/>
           <p:cNvSpPr txBox="1"/>
           <p:nvPr/>
         </p:nvSpPr>
@@ -26873,7 +27033,7 @@
       </p:sp>
       <p:sp>
         <p:nvSpPr>
-          <p:cNvPr id="36" name="Shape 34"/>
+          <p:cNvPr id="38" name="Shape 36"/>
           <p:cNvSpPr/>
           <p:nvPr/>
         </p:nvSpPr>
@@ -26900,7 +27060,7 @@
       </p:sp>
       <p:sp>
         <p:nvSpPr>
-          <p:cNvPr id="37" name="Shape 35"/>
+          <p:cNvPr id="39" name="Shape 37"/>
           <p:cNvSpPr/>
           <p:nvPr/>
         </p:nvSpPr>
@@ -26920,7 +27080,7 @@
       </p:sp>
       <p:sp>
         <p:nvSpPr>
-          <p:cNvPr id="38" name="Shape 36"/>
+          <p:cNvPr id="40" name="Shape 38"/>
           <p:cNvSpPr/>
           <p:nvPr/>
         </p:nvSpPr>
@@ -26942,7 +27102,7 @@
       </p:sp>
       <p:sp>
         <p:nvSpPr>
-          <p:cNvPr id="39" name="Shape 37"/>
+          <p:cNvPr id="41" name="Shape 39"/>
           <p:cNvSpPr/>
           <p:nvPr/>
         </p:nvSpPr>
@@ -26964,7 +27124,7 @@
       </p:sp>
       <p:sp>
         <p:nvSpPr>
-          <p:cNvPr id="40" name="Shape 38"/>
+          <p:cNvPr id="42" name="Shape 40"/>
           <p:cNvSpPr/>
           <p:nvPr/>
         </p:nvSpPr>
@@ -26984,7 +27144,7 @@
       </p:sp>
       <p:sp>
         <p:nvSpPr>
-          <p:cNvPr id="41" name="Shape 39"/>
+          <p:cNvPr id="43" name="Shape 41"/>
           <p:cNvSpPr/>
           <p:nvPr/>
         </p:nvSpPr>
@@ -27004,7 +27164,7 @@
       </p:sp>
       <p:sp>
         <p:nvSpPr>
-          <p:cNvPr id="42" name="Shape 40"/>
+          <p:cNvPr id="44" name="Shape 42"/>
           <p:cNvSpPr/>
           <p:nvPr/>
         </p:nvSpPr>
@@ -27026,14 +27186,14 @@
       </p:sp>
       <p:sp>
         <p:nvSpPr>
-          <p:cNvPr id="43" name="Shape 41"/>
+          <p:cNvPr id="45" name="Shape 43"/>
           <p:cNvSpPr/>
           <p:nvPr/>
         </p:nvSpPr>
         <p:spPr>
           <a:xfrm>
-            <a:off x="3195645" y="3179917"/>
-            <a:ext cx="100950" cy="100950"/>
+            <a:off x="3204058" y="3163092"/>
+            <a:ext cx="84125" cy="84125"/>
           </a:xfrm>
           <a:prstGeom prst="ellipse">
             <a:avLst/>
@@ -27046,18 +27206,18 @@
       </p:sp>
       <p:sp>
         <p:nvSpPr>
-          <p:cNvPr id="44" name="Shape 42"/>
+          <p:cNvPr id="46" name="Shape 44"/>
           <p:cNvSpPr/>
           <p:nvPr/>
         </p:nvSpPr>
         <p:spPr>
           <a:xfrm>
-            <a:off x="3178820" y="3293486"/>
+            <a:off x="3178820" y="3255630"/>
             <a:ext cx="134600" cy="151425"/>
           </a:xfrm>
           <a:prstGeom prst="roundRect">
             <a:avLst>
-              <a:gd name="adj" fmla="val 203804"/>
+              <a:gd name="adj" fmla="val 190217"/>
             </a:avLst>
           </a:prstGeom>
           <a:solidFill>
@@ -27068,14 +27228,14 @@
       </p:sp>
       <p:sp>
         <p:nvSpPr>
-          <p:cNvPr id="45" name="Shape 43"/>
+          <p:cNvPr id="47" name="Shape 45"/>
           <p:cNvSpPr/>
           <p:nvPr/>
         </p:nvSpPr>
         <p:spPr>
-          <a:xfrm rot="480000">
-            <a:off x="3187233" y="3440704"/>
-            <a:ext cx="37856" cy="109362"/>
+          <a:xfrm rot="960000">
+            <a:off x="3155686" y="3268248"/>
+            <a:ext cx="33650" cy="109362"/>
           </a:xfrm>
           <a:prstGeom prst="rect">
             <a:avLst/>
@@ -27088,14 +27248,14 @@
       </p:sp>
       <p:sp>
         <p:nvSpPr>
-          <p:cNvPr id="46" name="Shape 44"/>
+          <p:cNvPr id="48" name="Shape 46"/>
           <p:cNvSpPr/>
           <p:nvPr/>
         </p:nvSpPr>
         <p:spPr>
-          <a:xfrm rot="-480000">
-            <a:off x="3267151" y="3440704"/>
-            <a:ext cx="37856" cy="109362"/>
+          <a:xfrm rot="-960000">
+            <a:off x="3302904" y="3268248"/>
+            <a:ext cx="33650" cy="109362"/>
           </a:xfrm>
           <a:prstGeom prst="rect">
             <a:avLst/>
@@ -27108,7 +27268,47 @@
       </p:sp>
       <p:sp>
         <p:nvSpPr>
-          <p:cNvPr id="47" name="Shape 45"/>
+          <p:cNvPr id="49" name="Shape 47"/>
+          <p:cNvSpPr/>
+          <p:nvPr/>
+        </p:nvSpPr>
+        <p:spPr>
+          <a:xfrm rot="300000">
+            <a:off x="3201954" y="3386023"/>
+            <a:ext cx="37856" cy="151425"/>
+          </a:xfrm>
+          <a:prstGeom prst="rect">
+            <a:avLst/>
+          </a:prstGeom>
+          <a:solidFill>
+            <a:srgbClr val="7F8F9C"/>
+          </a:solidFill>
+          <a:ln/>
+        </p:spPr>
+      </p:sp>
+      <p:sp>
+        <p:nvSpPr>
+          <p:cNvPr id="50" name="Shape 48"/>
+          <p:cNvSpPr/>
+          <p:nvPr/>
+        </p:nvSpPr>
+        <p:spPr>
+          <a:xfrm rot="-300000">
+            <a:off x="3252429" y="3386023"/>
+            <a:ext cx="37856" cy="151425"/>
+          </a:xfrm>
+          <a:prstGeom prst="rect">
+            <a:avLst/>
+          </a:prstGeom>
+          <a:solidFill>
+            <a:srgbClr val="7F8F9C"/>
+          </a:solidFill>
+          <a:ln/>
+        </p:spPr>
+      </p:sp>
+      <p:sp>
+        <p:nvSpPr>
+          <p:cNvPr id="51" name="Shape 49"/>
           <p:cNvSpPr/>
           <p:nvPr/>
         </p:nvSpPr>
@@ -27130,7 +27330,7 @@
       </p:sp>
       <p:sp>
         <p:nvSpPr>
-          <p:cNvPr id="48" name="Shape 46"/>
+          <p:cNvPr id="52" name="Shape 50"/>
           <p:cNvSpPr/>
           <p:nvPr/>
         </p:nvSpPr>
@@ -27152,7 +27352,7 @@
       </p:sp>
       <p:sp>
         <p:nvSpPr>
-          <p:cNvPr id="49" name="Text 47"/>
+          <p:cNvPr id="53" name="Text 51"/>
           <p:cNvSpPr txBox="1"/>
           <p:nvPr/>
         </p:nvSpPr>
@@ -27214,7 +27414,7 @@
       </p:sp>
       <p:sp>
         <p:nvSpPr>
-          <p:cNvPr id="50" name="Text 48"/>
+          <p:cNvPr id="54" name="Text 52"/>
           <p:cNvSpPr txBox="1"/>
           <p:nvPr/>
         </p:nvSpPr>
@@ -27253,7 +27453,7 @@
       </p:sp>
       <p:sp>
         <p:nvSpPr>
-          <p:cNvPr id="51" name="Shape 49"/>
+          <p:cNvPr id="55" name="Shape 53"/>
           <p:cNvSpPr/>
           <p:nvPr/>
         </p:nvSpPr>
@@ -27280,7 +27480,7 @@
       </p:sp>
       <p:sp>
         <p:nvSpPr>
-          <p:cNvPr id="52" name="Shape 50"/>
+          <p:cNvPr id="56" name="Shape 54"/>
           <p:cNvSpPr/>
           <p:nvPr/>
         </p:nvSpPr>
@@ -27300,7 +27500,7 @@
       </p:sp>
       <p:sp>
         <p:nvSpPr>
-          <p:cNvPr id="53" name="Text 51"/>
+          <p:cNvPr id="57" name="Text 55"/>
           <p:cNvSpPr txBox="1"/>
           <p:nvPr/>
         </p:nvSpPr>
@@ -27339,7 +27539,7 @@
       </p:sp>
       <p:sp>
         <p:nvSpPr>
-          <p:cNvPr id="54" name="Text 52"/>
+          <p:cNvPr id="58" name="Text 56"/>
           <p:cNvSpPr txBox="1"/>
           <p:nvPr/>
         </p:nvSpPr>
@@ -27378,7 +27578,7 @@
       </p:sp>
       <p:sp>
         <p:nvSpPr>
-          <p:cNvPr id="55" name="Text 53"/>
+          <p:cNvPr id="59" name="Text 57"/>
           <p:cNvSpPr txBox="1"/>
           <p:nvPr/>
         </p:nvSpPr>
@@ -27417,7 +27617,7 @@
       </p:sp>
       <p:sp>
         <p:nvSpPr>
-          <p:cNvPr id="56" name="Text 54">
+          <p:cNvPr id="60" name="Text 58">
             <a:hlinkClick r:id="rId1" tooltip=""/>
           </p:cNvPr>
           <p:cNvSpPr txBox="1"/>
@@ -27465,7 +27665,7 @@
       </p:sp>
       <p:sp>
         <p:nvSpPr>
-          <p:cNvPr id="57" name="Shape 55"/>
+          <p:cNvPr id="61" name="Shape 59"/>
           <p:cNvSpPr/>
           <p:nvPr/>
         </p:nvSpPr>
@@ -27485,7 +27685,7 @@
       </p:sp>
       <p:sp>
         <p:nvSpPr>
-          <p:cNvPr id="58" name="Text 56"/>
+          <p:cNvPr id="62" name="Text 60"/>
           <p:cNvSpPr txBox="1"/>
           <p:nvPr/>
         </p:nvSpPr>
@@ -27547,7 +27747,7 @@
       </p:sp>
       <p:sp>
         <p:nvSpPr>
-          <p:cNvPr id="59" name="Shape 57"/>
+          <p:cNvPr id="63" name="Shape 61"/>
           <p:cNvSpPr/>
           <p:nvPr/>
         </p:nvSpPr>
@@ -27567,7 +27767,7 @@
       </p:sp>
       <p:sp>
         <p:nvSpPr>
-          <p:cNvPr id="60" name="Text 58"/>
+          <p:cNvPr id="64" name="Text 62"/>
           <p:cNvSpPr txBox="1"/>
           <p:nvPr/>
         </p:nvSpPr>
@@ -27629,7 +27829,7 @@
       </p:sp>
       <p:sp>
         <p:nvSpPr>
-          <p:cNvPr id="61" name="Shape 59"/>
+          <p:cNvPr id="65" name="Shape 63"/>
           <p:cNvSpPr/>
           <p:nvPr/>
         </p:nvSpPr>
@@ -27649,7 +27849,7 @@
       </p:sp>
       <p:sp>
         <p:nvSpPr>
-          <p:cNvPr id="62" name="Text 60"/>
+          <p:cNvPr id="66" name="Text 64"/>
           <p:cNvSpPr txBox="1"/>
           <p:nvPr/>
         </p:nvSpPr>
@@ -27711,7 +27911,7 @@
       </p:sp>
       <p:sp>
         <p:nvSpPr>
-          <p:cNvPr id="63" name="Shape 61"/>
+          <p:cNvPr id="67" name="Shape 65"/>
           <p:cNvSpPr/>
           <p:nvPr/>
         </p:nvSpPr>
@@ -27738,7 +27938,7 @@
       </p:sp>
       <p:sp>
         <p:nvSpPr>
-          <p:cNvPr id="64" name="Text 62"/>
+          <p:cNvPr id="68" name="Text 66"/>
           <p:cNvSpPr txBox="1"/>
           <p:nvPr/>
         </p:nvSpPr>
@@ -27800,7 +28000,7 @@
       </p:sp>
       <p:pic>
         <p:nvPicPr>
-          <p:cNvPr id="66" name="Image 0" descr="/Users/tsengchenghsun/Class/carClass/Claude outputs/第三週(9-24)/src/logo.png">    </p:cNvPr>
+          <p:cNvPr id="70" name="Image 0" descr="/Users/tsengchenghsun/Class/carClass/Claude outputs/第三週(9-24)/src/logo.png">    </p:cNvPr>
           <p:cNvPicPr>
             <a:picLocks noChangeAspect="1"/>
           </p:cNvPicPr>
@@ -27824,7 +28024,7 @@
       </p:pic>
       <p:sp>
         <p:nvSpPr>
-          <p:cNvPr id="67" name="Text 63"/>
+          <p:cNvPr id="71" name="Text 67"/>
           <p:cNvSpPr txBox="1"/>
           <p:nvPr/>
         </p:nvSpPr>
@@ -27863,7 +28063,7 @@
       </p:sp>
       <p:sp>
         <p:nvSpPr>
-          <p:cNvPr id="68" name="Text 64"/>
+          <p:cNvPr id="72" name="Text 68"/>
           <p:cNvSpPr txBox="1"/>
           <p:nvPr/>
         </p:nvSpPr>

--- a/第三週(09-24)/第三週_第3節_簡報.pptx
+++ b/第三週(09-24)/第三週_第3節_簡報.pptx
@@ -26127,7 +26127,7 @@
         <p:spPr>
           <a:xfrm>
             <a:off x="502920" y="676656"/>
-            <a:ext cx="8138160" cy="713232"/>
+            <a:ext cx="8138160" cy="560684"/>
           </a:xfrm>
           <a:prstGeom prst="rect">
             <a:avLst/>
@@ -26188,12 +26188,12 @@
         </p:nvSpPr>
         <p:spPr>
           <a:xfrm>
-            <a:off x="502920" y="1243584"/>
-            <a:ext cx="3904488" cy="1261872"/>
+            <a:off x="502920" y="1255628"/>
+            <a:ext cx="3904488" cy="1255850"/>
           </a:xfrm>
           <a:prstGeom prst="roundRect">
             <a:avLst>
-              <a:gd name="adj" fmla="val 6522"/>
+              <a:gd name="adj" fmla="val 6553"/>
             </a:avLst>
           </a:prstGeom>
           <a:solidFill>
@@ -26215,7 +26215,7 @@
         </p:nvSpPr>
         <p:spPr>
           <a:xfrm>
-            <a:off x="539496" y="2231136"/>
+            <a:off x="539496" y="2237158"/>
             <a:ext cx="3831336" cy="237744"/>
           </a:xfrm>
           <a:prstGeom prst="rect">
@@ -26235,7 +26235,7 @@
         </p:nvSpPr>
         <p:spPr>
           <a:xfrm>
-            <a:off x="1649839" y="1335024"/>
+            <a:off x="1649839" y="1347068"/>
             <a:ext cx="91440" cy="274320"/>
           </a:xfrm>
           <a:prstGeom prst="line">
@@ -26260,7 +26260,7 @@
         </p:nvSpPr>
         <p:spPr>
           <a:xfrm>
-            <a:off x="1995569" y="1335024"/>
+            <a:off x="1995569" y="1347068"/>
             <a:ext cx="91440" cy="274320"/>
           </a:xfrm>
           <a:prstGeom prst="line">
@@ -26285,7 +26285,7 @@
         </p:nvSpPr>
         <p:spPr>
           <a:xfrm>
-            <a:off x="2341299" y="1335024"/>
+            <a:off x="2341299" y="1347068"/>
             <a:ext cx="91440" cy="274320"/>
           </a:xfrm>
           <a:prstGeom prst="line">
@@ -26310,7 +26310,7 @@
         </p:nvSpPr>
         <p:spPr>
           <a:xfrm>
-            <a:off x="2687030" y="1335024"/>
+            <a:off x="2687030" y="1347068"/>
             <a:ext cx="91440" cy="274320"/>
           </a:xfrm>
           <a:prstGeom prst="line">
@@ -26335,7 +26335,7 @@
         </p:nvSpPr>
         <p:spPr>
           <a:xfrm>
-            <a:off x="3032760" y="1335024"/>
+            <a:off x="3032760" y="1347068"/>
             <a:ext cx="91440" cy="274320"/>
           </a:xfrm>
           <a:prstGeom prst="line">
@@ -26360,7 +26360,7 @@
         </p:nvSpPr>
         <p:spPr>
           <a:xfrm>
-            <a:off x="3378490" y="1335024"/>
+            <a:off x="3378490" y="1347068"/>
             <a:ext cx="91440" cy="274320"/>
           </a:xfrm>
           <a:prstGeom prst="line">
@@ -26385,7 +26385,7 @@
         </p:nvSpPr>
         <p:spPr>
           <a:xfrm>
-            <a:off x="3724221" y="1335024"/>
+            <a:off x="3724221" y="1347068"/>
             <a:ext cx="91440" cy="274320"/>
           </a:xfrm>
           <a:prstGeom prst="line">
@@ -26410,7 +26410,7 @@
         </p:nvSpPr>
         <p:spPr>
           <a:xfrm>
-            <a:off x="4069951" y="1335024"/>
+            <a:off x="4069951" y="1347068"/>
             <a:ext cx="91440" cy="274320"/>
           </a:xfrm>
           <a:prstGeom prst="line">
@@ -26435,7 +26435,7 @@
         </p:nvSpPr>
         <p:spPr>
           <a:xfrm>
-            <a:off x="612648" y="1719072"/>
+            <a:off x="612648" y="1731116"/>
             <a:ext cx="91440" cy="274320"/>
           </a:xfrm>
           <a:prstGeom prst="line">
@@ -26460,7 +26460,7 @@
         </p:nvSpPr>
         <p:spPr>
           <a:xfrm>
-            <a:off x="958378" y="1719072"/>
+            <a:off x="958378" y="1731116"/>
             <a:ext cx="91440" cy="274320"/>
           </a:xfrm>
           <a:prstGeom prst="line">
@@ -26485,7 +26485,7 @@
         </p:nvSpPr>
         <p:spPr>
           <a:xfrm>
-            <a:off x="1304109" y="1719072"/>
+            <a:off x="1304109" y="1731116"/>
             <a:ext cx="91440" cy="274320"/>
           </a:xfrm>
           <a:prstGeom prst="line">
@@ -26510,7 +26510,7 @@
         </p:nvSpPr>
         <p:spPr>
           <a:xfrm>
-            <a:off x="1649839" y="1719072"/>
+            <a:off x="1649839" y="1731116"/>
             <a:ext cx="91440" cy="274320"/>
           </a:xfrm>
           <a:prstGeom prst="line">
@@ -26535,7 +26535,7 @@
         </p:nvSpPr>
         <p:spPr>
           <a:xfrm>
-            <a:off x="1995569" y="1719072"/>
+            <a:off x="1995569" y="1731116"/>
             <a:ext cx="91440" cy="274320"/>
           </a:xfrm>
           <a:prstGeom prst="line">
@@ -26560,7 +26560,7 @@
         </p:nvSpPr>
         <p:spPr>
           <a:xfrm>
-            <a:off x="2341299" y="1719072"/>
+            <a:off x="2341299" y="1731116"/>
             <a:ext cx="91440" cy="274320"/>
           </a:xfrm>
           <a:prstGeom prst="line">
@@ -26585,7 +26585,7 @@
         </p:nvSpPr>
         <p:spPr>
           <a:xfrm>
-            <a:off x="2687030" y="1719072"/>
+            <a:off x="2687030" y="1731116"/>
             <a:ext cx="91440" cy="274320"/>
           </a:xfrm>
           <a:prstGeom prst="line">
@@ -26610,7 +26610,7 @@
         </p:nvSpPr>
         <p:spPr>
           <a:xfrm>
-            <a:off x="3032760" y="1719072"/>
+            <a:off x="3032760" y="1731116"/>
             <a:ext cx="91440" cy="274320"/>
           </a:xfrm>
           <a:prstGeom prst="line">
@@ -26635,7 +26635,7 @@
         </p:nvSpPr>
         <p:spPr>
           <a:xfrm>
-            <a:off x="3378490" y="1719072"/>
+            <a:off x="3378490" y="1731116"/>
             <a:ext cx="91440" cy="274320"/>
           </a:xfrm>
           <a:prstGeom prst="line">
@@ -26660,7 +26660,7 @@
         </p:nvSpPr>
         <p:spPr>
           <a:xfrm>
-            <a:off x="3724221" y="1719072"/>
+            <a:off x="3724221" y="1731116"/>
             <a:ext cx="91440" cy="274320"/>
           </a:xfrm>
           <a:prstGeom prst="line">
@@ -26685,7 +26685,7 @@
         </p:nvSpPr>
         <p:spPr>
           <a:xfrm>
-            <a:off x="4069951" y="1719072"/>
+            <a:off x="4069951" y="1731116"/>
             <a:ext cx="91440" cy="274320"/>
           </a:xfrm>
           <a:prstGeom prst="line">
@@ -26710,7 +26710,7 @@
         </p:nvSpPr>
         <p:spPr>
           <a:xfrm>
-            <a:off x="1014984" y="1860804"/>
+            <a:off x="1014984" y="1866826"/>
             <a:ext cx="576072" cy="148133"/>
           </a:xfrm>
           <a:prstGeom prst="roundRect">
@@ -26732,7 +26732,7 @@
         </p:nvSpPr>
         <p:spPr>
           <a:xfrm>
-            <a:off x="777240" y="2008937"/>
+            <a:off x="777240" y="2014959"/>
             <a:ext cx="1051560" cy="222199"/>
           </a:xfrm>
           <a:prstGeom prst="roundRect">
@@ -26754,7 +26754,7 @@
         </p:nvSpPr>
         <p:spPr>
           <a:xfrm>
-            <a:off x="923544" y="2157984"/>
+            <a:off x="923544" y="2164006"/>
             <a:ext cx="146304" cy="146304"/>
           </a:xfrm>
           <a:prstGeom prst="ellipse">
@@ -26774,7 +26774,7 @@
         </p:nvSpPr>
         <p:spPr>
           <a:xfrm>
-            <a:off x="1536192" y="2157984"/>
+            <a:off x="1536192" y="2164006"/>
             <a:ext cx="146304" cy="146304"/>
           </a:xfrm>
           <a:prstGeom prst="ellipse">
@@ -26794,7 +26794,7 @@
         </p:nvSpPr>
         <p:spPr>
           <a:xfrm flipV="1">
-            <a:off x="1828800" y="1664208"/>
+            <a:off x="1828800" y="1670230"/>
             <a:ext cx="1371600" cy="566928"/>
           </a:xfrm>
           <a:prstGeom prst="rtTriangle">
@@ -26816,7 +26816,7 @@
         </p:nvSpPr>
         <p:spPr>
           <a:xfrm>
-            <a:off x="3204058" y="1818924"/>
+            <a:off x="3204058" y="1824947"/>
             <a:ext cx="84125" cy="84125"/>
           </a:xfrm>
           <a:prstGeom prst="ellipse">
@@ -26836,7 +26836,7 @@
         </p:nvSpPr>
         <p:spPr>
           <a:xfrm>
-            <a:off x="3178820" y="1911462"/>
+            <a:off x="3178820" y="1917484"/>
             <a:ext cx="134600" cy="151425"/>
           </a:xfrm>
           <a:prstGeom prst="roundRect">
@@ -26858,7 +26858,7 @@
         </p:nvSpPr>
         <p:spPr>
           <a:xfrm rot="960000">
-            <a:off x="3155686" y="1924080"/>
+            <a:off x="3155686" y="1930103"/>
             <a:ext cx="33650" cy="109362"/>
           </a:xfrm>
           <a:prstGeom prst="rect">
@@ -26878,7 +26878,7 @@
         </p:nvSpPr>
         <p:spPr>
           <a:xfrm rot="-960000">
-            <a:off x="3302904" y="1924080"/>
+            <a:off x="3302904" y="1930103"/>
             <a:ext cx="33650" cy="109362"/>
           </a:xfrm>
           <a:prstGeom prst="rect">
@@ -26898,7 +26898,7 @@
         </p:nvSpPr>
         <p:spPr>
           <a:xfrm rot="300000">
-            <a:off x="3201954" y="2041855"/>
+            <a:off x="3201954" y="2047877"/>
             <a:ext cx="37856" cy="151425"/>
           </a:xfrm>
           <a:prstGeom prst="rect">
@@ -26918,7 +26918,7 @@
         </p:nvSpPr>
         <p:spPr>
           <a:xfrm rot="-300000">
-            <a:off x="3252429" y="2041855"/>
+            <a:off x="3252429" y="2047877"/>
             <a:ext cx="37856" cy="151425"/>
           </a:xfrm>
           <a:prstGeom prst="rect">
@@ -26938,7 +26938,7 @@
         </p:nvSpPr>
         <p:spPr>
           <a:xfrm>
-            <a:off x="612648" y="1298448"/>
+            <a:off x="612648" y="1310492"/>
             <a:ext cx="3685032" cy="365760"/>
           </a:xfrm>
           <a:prstGeom prst="rect">
@@ -27000,7 +27000,7 @@
         </p:nvSpPr>
         <p:spPr>
           <a:xfrm>
-            <a:off x="612648" y="2212848"/>
+            <a:off x="612648" y="2218870"/>
             <a:ext cx="3685032" cy="237744"/>
           </a:xfrm>
           <a:prstGeom prst="rect">
@@ -27039,12 +27039,12 @@
         </p:nvSpPr>
         <p:spPr>
           <a:xfrm>
-            <a:off x="502920" y="2587752"/>
-            <a:ext cx="3904488" cy="1261872"/>
+            <a:off x="502920" y="2593774"/>
+            <a:ext cx="3904488" cy="1255850"/>
           </a:xfrm>
           <a:prstGeom prst="roundRect">
             <a:avLst>
-              <a:gd name="adj" fmla="val 6522"/>
+              <a:gd name="adj" fmla="val 6553"/>
             </a:avLst>
           </a:prstGeom>
           <a:solidFill>
@@ -27314,8 +27314,8 @@
         </p:nvSpPr>
         <p:spPr>
           <a:xfrm>
-            <a:off x="2298984" y="2624328"/>
-            <a:ext cx="2071848" cy="1188720"/>
+            <a:off x="2298984" y="2630350"/>
+            <a:ext cx="2071848" cy="1182698"/>
           </a:xfrm>
           <a:prstGeom prst="rect">
             <a:avLst/>
@@ -27336,8 +27336,8 @@
         </p:nvSpPr>
         <p:spPr>
           <a:xfrm>
-            <a:off x="3079882" y="2624328"/>
-            <a:ext cx="1290950" cy="1188720"/>
+            <a:off x="3079882" y="2630350"/>
+            <a:ext cx="1290950" cy="1182698"/>
           </a:xfrm>
           <a:prstGeom prst="rect">
             <a:avLst/>
@@ -27358,7 +27358,7 @@
         </p:nvSpPr>
         <p:spPr>
           <a:xfrm>
-            <a:off x="612648" y="2642616"/>
+            <a:off x="612648" y="2648638"/>
             <a:ext cx="3685032" cy="365760"/>
           </a:xfrm>
           <a:prstGeom prst="rect">
@@ -27459,12 +27459,12 @@
         </p:nvSpPr>
         <p:spPr>
           <a:xfrm>
-            <a:off x="4736592" y="1243584"/>
-            <a:ext cx="3904488" cy="2578608"/>
+            <a:off x="4736592" y="1255628"/>
+            <a:ext cx="3904488" cy="2566564"/>
           </a:xfrm>
           <a:prstGeom prst="roundRect">
             <a:avLst>
-              <a:gd name="adj" fmla="val 3546"/>
+              <a:gd name="adj" fmla="val 3563"/>
             </a:avLst>
           </a:prstGeom>
           <a:solidFill>
@@ -27486,7 +27486,7 @@
         </p:nvSpPr>
         <p:spPr>
           <a:xfrm>
-            <a:off x="4919472" y="1408176"/>
+            <a:off x="4919472" y="1420220"/>
             <a:ext cx="347472" cy="347472"/>
           </a:xfrm>
           <a:prstGeom prst="ellipse">
@@ -27506,7 +27506,7 @@
         </p:nvSpPr>
         <p:spPr>
           <a:xfrm>
-            <a:off x="4919472" y="1453896"/>
+            <a:off x="4919472" y="1465940"/>
             <a:ext cx="347472" cy="256032"/>
           </a:xfrm>
           <a:prstGeom prst="rect">
@@ -27545,7 +27545,7 @@
         </p:nvSpPr>
         <p:spPr>
           <a:xfrm>
-            <a:off x="5340096" y="1389888"/>
+            <a:off x="5340096" y="1401932"/>
             <a:ext cx="3118104" cy="420624"/>
           </a:xfrm>
           <a:prstGeom prst="rect">
@@ -27584,7 +27584,7 @@
         </p:nvSpPr>
         <p:spPr>
           <a:xfrm>
-            <a:off x="4919472" y="1847088"/>
+            <a:off x="4919472" y="1859132"/>
             <a:ext cx="3538728" cy="201168"/>
           </a:xfrm>
           <a:prstGeom prst="rect">
@@ -27625,7 +27625,7 @@
         </p:nvSpPr>
         <p:spPr>
           <a:xfrm>
-            <a:off x="4919472" y="2029968"/>
+            <a:off x="4919472" y="2042012"/>
             <a:ext cx="3538728" cy="201168"/>
           </a:xfrm>
           <a:prstGeom prst="rect">
@@ -27671,7 +27671,7 @@
         </p:nvSpPr>
         <p:spPr>
           <a:xfrm>
-            <a:off x="4919472" y="2304288"/>
+            <a:off x="4919472" y="2316332"/>
             <a:ext cx="36576" cy="237744"/>
           </a:xfrm>
           <a:prstGeom prst="rect">
@@ -27691,7 +27691,7 @@
         </p:nvSpPr>
         <p:spPr>
           <a:xfrm>
-            <a:off x="5047488" y="2267712"/>
+            <a:off x="5047488" y="2279756"/>
             <a:ext cx="3429000" cy="456079"/>
           </a:xfrm>
           <a:prstGeom prst="rect">
@@ -27753,7 +27753,7 @@
         </p:nvSpPr>
         <p:spPr>
           <a:xfrm>
-            <a:off x="4919472" y="2796943"/>
+            <a:off x="4919472" y="2808987"/>
             <a:ext cx="36576" cy="237744"/>
           </a:xfrm>
           <a:prstGeom prst="rect">
@@ -27773,7 +27773,7 @@
         </p:nvSpPr>
         <p:spPr>
           <a:xfrm>
-            <a:off x="5047488" y="2760367"/>
+            <a:off x="5047488" y="2772411"/>
             <a:ext cx="3429000" cy="456079"/>
           </a:xfrm>
           <a:prstGeom prst="rect">
@@ -27835,7 +27835,7 @@
         </p:nvSpPr>
         <p:spPr>
           <a:xfrm>
-            <a:off x="4919472" y="3289598"/>
+            <a:off x="4919472" y="3301642"/>
             <a:ext cx="36576" cy="237744"/>
           </a:xfrm>
           <a:prstGeom prst="rect">
@@ -27855,7 +27855,7 @@
         </p:nvSpPr>
         <p:spPr>
           <a:xfrm>
-            <a:off x="5047488" y="3253022"/>
+            <a:off x="5047488" y="3265066"/>
             <a:ext cx="3429000" cy="456079"/>
           </a:xfrm>
           <a:prstGeom prst="rect">

--- a/第三週(09-24)/第三週_第3節_簡報.pptx
+++ b/第三週(09-24)/第三週_第3節_簡報.pptx
@@ -6944,7 +6944,7 @@
                 <a:ea typeface="Arial Unicode MS"/>
                 <a:cs typeface="Arial Unicode MS"/>
               </a:rPr>
-              <a:t>九種條件裡，這是唯一一種能讓雷達整個消失的。</a:t>
+              <a:t>在一百八十公尺這個距離，九種條件裡只有下雪會讓雷達讀不到。</a:t>
             </a:r>
             <a:r>
               <a:rPr sz="1000" lang="zh-TW" dirty="0">
@@ -22528,7 +22528,7 @@
                 <a:ea typeface="Arial" pitchFamily="34" charset="-122"/>
                 <a:cs typeface="Arial" pitchFamily="34" charset="-120"/>
               </a:rPr>
-              <a:t>Chín điều kiện, ai còn nhìn được bao xa</a:t>
+              <a:t>Bảy trong chín điều kiện: ai còn nhìn được bao xa</a:t>
             </a:r>
             <a:endParaRPr lang="en-US" sz="2200" dirty="0"/>
           </a:p>
@@ -22548,7 +22548,7 @@
                 <a:ea typeface="微軟正黑體" pitchFamily="34" charset="-122"/>
                 <a:cs typeface="微軟正黑體" pitchFamily="34" charset="-120"/>
               </a:rPr>
-              <a:t>九種條件，誰還看得到多遠</a:t>
+              <a:t>九種條件裡挑七種，誰還看得到多遠</a:t>
             </a:r>
             <a:endParaRPr lang="en-US" sz="2200" dirty="0"/>
           </a:p>
@@ -24216,7 +24216,7 @@
                           <a:ea typeface="Arial" pitchFamily="34" charset="-122"/>
                           <a:cs typeface="Arial" pitchFamily="34" charset="-120"/>
                         </a:rPr>
-                        <a:t>Camera tệ nhất trong chín điều kiện</a:t>
+                        <a:t>Chỉ camera bị ảnh hưởng; LiDAR và radar gần như không đổi</a:t>
                       </a:r>
                       <a:endParaRPr lang="en-US" sz="1200" dirty="0"/>
                     </a:p>
@@ -24233,7 +24233,7 @@
                           <a:ea typeface="微軟正黑體" pitchFamily="34" charset="-122"/>
                           <a:cs typeface="微軟正黑體" pitchFamily="34" charset="-120"/>
                         </a:rPr>
-                        <a:t>九種條件裡，相機的距離縮得最短</a:t>
+                        <a:t>只有相機受影響；光達和雷達幾乎不動</a:t>
                       </a:r>
                       <a:endParaRPr lang="en-US" sz="1200" dirty="0"/>
                     </a:p>
@@ -25898,7 +25898,7 @@
         </p:nvSpPr>
         <p:spPr>
           <a:xfrm>
-            <a:off x="502920" y="4294048"/>
+            <a:off x="502920" y="4451361"/>
             <a:ext cx="8138160" cy="457200"/>
           </a:xfrm>
           <a:prstGeom prst="rect">

--- a/第三週(09-24)/第三週_第3節_簡報.pptx
+++ b/第三週(09-24)/第三週_第3節_簡報.pptx
@@ -672,19 +672,19 @@
                 <a:spcPct val="115000"/>
               </a:lnSpc>
               <a:spcAft>
-                <a:spcPts val="575"/>
+                <a:spcPts val="600"/>
               </a:spcAft>
             </a:pPr>
             <a:r>
-              <a:rPr sz="1150" lang="zh-TW" dirty="0">
-                <a:solidFill>
-                  <a:srgbClr val="000000"/>
-                </a:solidFill>
-                <a:latin typeface="Arial Unicode MS"/>
-                <a:ea typeface="Arial Unicode MS"/>
-                <a:cs typeface="Arial Unicode MS"/>
-              </a:rPr>
-              <a:t>第三位同學。這一輪要看的東西比較細，但我覺得是今天最重要的。
+              <a:rPr sz="1200" lang="zh-TW" dirty="0">
+                <a:solidFill>
+                  <a:srgbClr val="000000"/>
+                </a:solidFill>
+                <a:latin typeface="Arial Unicode MS"/>
+                <a:ea typeface="Arial Unicode MS"/>
+                <a:cs typeface="Arial Unicode MS"/>
+              </a:rPr>
+              <a:t>第三位同學。這一輪要看的東西比較細，可是我覺得是今天最重要的。
 </a:t>
             </a:r>
           </a:p>
@@ -694,19 +694,19 @@
                 <a:spcPct val="115000"/>
               </a:lnSpc>
               <a:spcAft>
-                <a:spcPts val="575"/>
+                <a:spcPts val="600"/>
               </a:spcAft>
             </a:pPr>
             <a:r>
-              <a:rPr sz="1150" lang="zh-TW" dirty="0">
-                <a:solidFill>
-                  <a:srgbClr val="000000"/>
-                </a:solidFill>
-                <a:latin typeface="Arial Unicode MS"/>
-                <a:ea typeface="Arial Unicode MS"/>
-                <a:cs typeface="Arial Unicode MS"/>
-              </a:rPr>
-              <a:t>先回到晴天，把行人拖到二十公尺。相機讀得到，誤差大概正負零點一五，類別「行人」。
+              <a:rPr sz="1200" lang="zh-TW" dirty="0">
+                <a:solidFill>
+                  <a:srgbClr val="000000"/>
+                </a:solidFill>
+                <a:latin typeface="Arial Unicode MS"/>
+                <a:ea typeface="Arial Unicode MS"/>
+                <a:cs typeface="Arial Unicode MS"/>
+              </a:rPr>
+              <a:t>先回到晴天，把行人拖到二十公尺。相機讀得到，誤差大概正負零點一五，類別寫「行人」。
 </a:t>
             </a:r>
           </a:p>
@@ -716,11 +716,11 @@
                 <a:spcPct val="115000"/>
               </a:lnSpc>
               <a:spcAft>
-                <a:spcPts val="575"/>
+                <a:spcPts val="600"/>
               </a:spcAft>
             </a:pPr>
             <a:r>
-              <a:rPr sz="1150" lang="zh-TW" dirty="0">
+              <a:rPr sz="1200" lang="zh-TW" dirty="0">
                 <a:solidFill>
                   <a:srgbClr val="000000"/>
                 </a:solidFill>
@@ -738,19 +738,19 @@
                 <a:spcPct val="115000"/>
               </a:lnSpc>
               <a:spcAft>
-                <a:spcPts val="575"/>
+                <a:spcPts val="600"/>
               </a:spcAft>
             </a:pPr>
             <a:r>
-              <a:rPr sz="1150" lang="zh-TW" dirty="0">
-                <a:solidFill>
-                  <a:srgbClr val="000000"/>
-                </a:solidFill>
-                <a:latin typeface="Arial Unicode MS"/>
-                <a:ea typeface="Arial Unicode MS"/>
-                <a:cs typeface="Arial Unicode MS"/>
-              </a:rPr>
-              <a:t>（預期結果：有效距離乘 0.7；相機的距離還在，但類別立刻變成「類別未知」。）
+              <a:rPr sz="1200" lang="zh-TW" dirty="0">
+                <a:solidFill>
+                  <a:srgbClr val="000000"/>
+                </a:solidFill>
+                <a:latin typeface="Arial Unicode MS"/>
+                <a:ea typeface="Arial Unicode MS"/>
+                <a:cs typeface="Arial Unicode MS"/>
+              </a:rPr>
+              <a:t>大家看清楚這一格發生什麼事。距離還在，相機還是說二十公尺左右。可是上面那一行，從「行人」變成「類別未知」。
 </a:t>
             </a:r>
           </a:p>
@@ -760,19 +760,41 @@
                 <a:spcPct val="115000"/>
               </a:lnSpc>
               <a:spcAft>
-                <a:spcPts val="575"/>
+                <a:spcPts val="600"/>
               </a:spcAft>
             </a:pPr>
             <a:r>
-              <a:rPr sz="1150" lang="zh-TW" dirty="0">
-                <a:solidFill>
-                  <a:srgbClr val="000000"/>
-                </a:solidFill>
-                <a:latin typeface="Arial Unicode MS"/>
-                <a:ea typeface="Arial Unicode MS"/>
-                <a:cs typeface="Arial Unicode MS"/>
-              </a:rPr>
-              <a:t>大家看清楚這一格發生什麼事。距離還在——相機還是說二十公尺左右。可是上面那一行，從「行人」變成「類別未知」。
+              <a:rPr sz="1200" lang="zh-TW" dirty="0">
+                <a:solidFill>
+                  <a:srgbClr val="000000"/>
+                </a:solidFill>
+                <a:latin typeface="Arial Unicode MS"/>
+                <a:ea typeface="Arial Unicode MS"/>
+                <a:cs typeface="Arial Unicode MS"/>
+              </a:rPr>
+              <a:t>這就是水滴最麻煩的地方：它不是讓相機完全看不到，是讓它</a:t>
+            </a:r>
+            <a:r>
+              <a:rPr sz="1200" b="1" lang="zh-TW" dirty="0">
+                <a:solidFill>
+                  <a:srgbClr val="000000"/>
+                </a:solidFill>
+                <a:latin typeface="Arial Unicode MS"/>
+                <a:ea typeface="Arial Unicode MS"/>
+                <a:cs typeface="Arial Unicode MS"/>
+              </a:rPr>
+              <a:t>只剩一半的功能</a:t>
+            </a:r>
+            <a:r>
+              <a:rPr sz="1200" lang="zh-TW" dirty="0">
+                <a:solidFill>
+                  <a:srgbClr val="000000"/>
+                </a:solidFill>
+                <a:latin typeface="Arial Unicode MS"/>
+                <a:ea typeface="Arial Unicode MS"/>
+                <a:cs typeface="Arial Unicode MS"/>
+              </a:rPr>
+              <a:t>。它還看得到那裡有一個東西，可是認不出來那是什麼。
 </a:t>
             </a:r>
           </a:p>
@@ -782,41 +804,19 @@
                 <a:spcPct val="115000"/>
               </a:lnSpc>
               <a:spcAft>
-                <a:spcPts val="575"/>
+                <a:spcPts val="600"/>
               </a:spcAft>
             </a:pPr>
             <a:r>
-              <a:rPr sz="1150" lang="zh-TW" dirty="0">
-                <a:solidFill>
-                  <a:srgbClr val="000000"/>
-                </a:solidFill>
-                <a:latin typeface="Arial Unicode MS"/>
-                <a:ea typeface="Arial Unicode MS"/>
-                <a:cs typeface="Arial Unicode MS"/>
-              </a:rPr>
-              <a:t>這就是水滴最麻煩的地方：它不是讓相機完全看不到，是讓它</a:t>
-            </a:r>
-            <a:r>
-              <a:rPr sz="1150" b="1" lang="zh-TW" dirty="0">
-                <a:solidFill>
-                  <a:srgbClr val="000000"/>
-                </a:solidFill>
-                <a:latin typeface="Arial Unicode MS"/>
-                <a:ea typeface="Arial Unicode MS"/>
-                <a:cs typeface="Arial Unicode MS"/>
-              </a:rPr>
-              <a:t>只剩一半的功能</a:t>
-            </a:r>
-            <a:r>
-              <a:rPr sz="1150" lang="zh-TW" dirty="0">
-                <a:solidFill>
-                  <a:srgbClr val="000000"/>
-                </a:solidFill>
-                <a:latin typeface="Arial Unicode MS"/>
-                <a:ea typeface="Arial Unicode MS"/>
-                <a:cs typeface="Arial Unicode MS"/>
-              </a:rPr>
-              <a:t>。它還看得到那裡有個東西，可是認不出來那是什麼。
+              <a:rPr sz="1200" lang="zh-TW" dirty="0">
+                <a:solidFill>
+                  <a:srgbClr val="000000"/>
+                </a:solidFill>
+                <a:latin typeface="Arial Unicode MS"/>
+                <a:ea typeface="Arial Unicode MS"/>
+                <a:cs typeface="Arial Unicode MS"/>
+              </a:rPr>
+              <a:t>現在請全班看其他五張卡。光達說：二十公尺，未分類障礙物。雷達說：二十公尺，未分類障礙物。熱像還認得出人體熱訊號，可是如果今天目標不是人，是一個路障，熱像也沒轍。
 </a:t>
             </a:r>
           </a:p>
@@ -826,19 +826,41 @@
                 <a:spcPct val="115000"/>
               </a:lnSpc>
               <a:spcAft>
-                <a:spcPts val="575"/>
+                <a:spcPts val="600"/>
               </a:spcAft>
             </a:pPr>
             <a:r>
-              <a:rPr sz="1150" lang="zh-TW" dirty="0">
-                <a:solidFill>
-                  <a:srgbClr val="000000"/>
-                </a:solidFill>
-                <a:latin typeface="Arial Unicode MS"/>
-                <a:ea typeface="Arial Unicode MS"/>
-                <a:cs typeface="Arial Unicode MS"/>
-              </a:rPr>
-              <a:t>現在請全班看其他五張卡。光達說：二十公尺，未分類障礙物。雷達說：二十公尺，未分類障礙物。熱像還認得出人體熱訊號，但如果今天目標不是人，是一個路障，熱像也沒轍。
+              <a:rPr sz="1200" lang="zh-TW" dirty="0">
+                <a:solidFill>
+                  <a:srgbClr val="000000"/>
+                </a:solidFill>
+                <a:latin typeface="Arial Unicode MS"/>
+                <a:ea typeface="Arial Unicode MS"/>
+                <a:cs typeface="Arial Unicode MS"/>
+              </a:rPr>
+              <a:t>所以這裡有一件更麻煩的事：</a:t>
+            </a:r>
+            <a:r>
+              <a:rPr sz="1200" b="1" lang="zh-TW" dirty="0">
+                <a:solidFill>
+                  <a:srgbClr val="000000"/>
+                </a:solidFill>
+                <a:latin typeface="Arial Unicode MS"/>
+                <a:ea typeface="Arial Unicode MS"/>
+                <a:cs typeface="Arial Unicode MS"/>
+              </a:rPr>
+              <a:t>其他感測器補得上距離，補不上類別。</a:t>
+            </a:r>
+            <a:r>
+              <a:rPr sz="1200" lang="zh-TW" dirty="0">
+                <a:solidFill>
+                  <a:srgbClr val="000000"/>
+                </a:solidFill>
+                <a:latin typeface="Arial Unicode MS"/>
+                <a:ea typeface="Arial Unicode MS"/>
+                <a:cs typeface="Arial Unicode MS"/>
+              </a:rPr>
+              <a:t>這台車知道前面二十公尺有東西，卻不知道那是一個人。
 </a:t>
             </a:r>
           </a:p>
@@ -848,55 +870,11 @@
                 <a:spcPct val="115000"/>
               </a:lnSpc>
               <a:spcAft>
-                <a:spcPts val="575"/>
+                <a:spcPts val="600"/>
               </a:spcAft>
             </a:pPr>
             <a:r>
-              <a:rPr sz="1150" lang="zh-TW" dirty="0">
-                <a:solidFill>
-                  <a:srgbClr val="000000"/>
-                </a:solidFill>
-                <a:latin typeface="Arial Unicode MS"/>
-                <a:ea typeface="Arial Unicode MS"/>
-                <a:cs typeface="Arial Unicode MS"/>
-              </a:rPr>
-              <a:t>所以這裡有一個更麻煩的事：</a:t>
-            </a:r>
-            <a:r>
-              <a:rPr sz="1150" b="1" lang="zh-TW" dirty="0">
-                <a:solidFill>
-                  <a:srgbClr val="000000"/>
-                </a:solidFill>
-                <a:latin typeface="Arial Unicode MS"/>
-                <a:ea typeface="Arial Unicode MS"/>
-                <a:cs typeface="Arial Unicode MS"/>
-              </a:rPr>
-              <a:t>其他感測器補得上距離，補不上類別</a:t>
-            </a:r>
-            <a:r>
-              <a:rPr sz="1150" lang="zh-TW" dirty="0">
-                <a:solidFill>
-                  <a:srgbClr val="000000"/>
-                </a:solidFill>
-                <a:latin typeface="Arial Unicode MS"/>
-                <a:ea typeface="Arial Unicode MS"/>
-                <a:cs typeface="Arial Unicode MS"/>
-              </a:rPr>
-              <a:t>。這台車知道前面二十公尺有東西，卻不知道那是一個人。
-</a:t>
-            </a:r>
-          </a:p>
-          <a:p>
-            <a:pPr algn="l">
-              <a:lnSpc>
-                <a:spcPct val="115000"/>
-              </a:lnSpc>
-              <a:spcAft>
-                <a:spcPts val="575"/>
-              </a:spcAft>
-            </a:pPr>
-            <a:r>
-              <a:rPr sz="1150" lang="zh-TW" dirty="0">
+              <a:rPr sz="1200" lang="zh-TW" dirty="0">
                 <a:solidFill>
                   <a:srgbClr val="000000"/>
                 </a:solidFill>
@@ -1047,7 +1025,7 @@
                 <a:ea typeface="Arial Unicode MS"/>
                 <a:cs typeface="Arial Unicode MS"/>
               </a:rPr>
-              <a:t>下不下雨，我們決定不了。那是老天爺的事，只能寫進運行條件。
+              <a:t>下不下雨，我們決定不了，那是老天爺的事，只能寫進運行條件。
 </a:t>
             </a:r>
           </a:p>
@@ -1069,7 +1047,7 @@
                 <a:ea typeface="Arial Unicode MS"/>
                 <a:cs typeface="Arial Unicode MS"/>
               </a:rPr>
-              <a:t>但是</a:t>
+              <a:t>可是</a:t>
             </a:r>
             <a:r>
               <a:rPr sz="1000" b="1" lang="zh-TW" dirty="0">
@@ -1091,7 +1069,7 @@
                 <a:ea typeface="Arial Unicode MS"/>
                 <a:cs typeface="Arial Unicode MS"/>
               </a:rPr>
-              <a:t>，這是車子自己的事——取決於有沒有雨刷、清洗噴頭做得好不好、多久洗一次。</a:t>
+              <a:t>，這是車子自己的事，取決於有沒有雨刷、清洗噴頭做得好不好、多久洗一次。</a:t>
             </a:r>
             <a:r>
               <a:rPr sz="1000" b="1" lang="zh-TW" dirty="0">
@@ -1135,7 +1113,7 @@
                 <a:ea typeface="Arial Unicode MS"/>
                 <a:cs typeface="Arial Unicode MS"/>
               </a:rPr>
-              <a:t>這就是為什麼工具裡把它們分成兩區。上面那區叫「外部環境」，晴天、夜間、濃霧、大雨——按下去會同時影響好幾種感測器。下面那區叫「單一感測器故障」，只有兩顆：鏡頭水滴、光達罩髒污——一顆只打一種。
+              <a:t>這就是為什麼工具裡把它們分成兩區。上面那一區叫「外部環境」，晴天、夜間、濃霧、大雨，按下去會同時影響好幾種感測器。下面那一區叫「單一感測器故障」，只有兩顆，鏡頭水滴和光達罩髒污，一顆只打一種。
 </a:t>
             </a:r>
           </a:p>
@@ -1179,7 +1157,7 @@
                 <a:ea typeface="Arial Unicode MS"/>
                 <a:cs typeface="Arial Unicode MS"/>
               </a:rPr>
-              <a:t>，其他五張本來就不會動，那不是程式壞掉，那正是重點：</a:t>
+              <a:t>。其他五張本來就不會動，那不是程式壞掉，那正是重點：</a:t>
             </a:r>
             <a:r>
               <a:rPr sz="1000" b="1" lang="zh-TW" dirty="0">
@@ -1190,7 +1168,7 @@
                 <a:ea typeface="Arial Unicode MS"/>
                 <a:cs typeface="Arial Unicode MS"/>
               </a:rPr>
-              <a:t>這是車子自己的問題，不是天氣的問題</a:t>
+              <a:t>這是車子自己的問題，不是天氣的問題。</a:t>
             </a:r>
             <a:r>
               <a:rPr sz="1000" lang="zh-TW" dirty="0">
@@ -1201,7 +1179,7 @@
                 <a:ea typeface="Arial Unicode MS"/>
                 <a:cs typeface="Arial Unicode MS"/>
               </a:rPr>
-              <a:t>。選了大雨也不會自動幫你加水滴，兩個要分別按，這樣才能一次只改一樣。
+              <a:t>選了大雨也不會自動幫你加水滴，兩個要分別按，這樣才能一次只改一樣。
 </a:t>
             </a:r>
           </a:p>
@@ -1237,6 +1215,17 @@
               </a:spcAft>
             </a:pPr>
             <a:r>
+              <a:rPr sz="1000" lang="zh-TW" dirty="0">
+                <a:solidFill>
+                  <a:srgbClr val="000000"/>
+                </a:solidFill>
+                <a:latin typeface="Arial Unicode MS"/>
+                <a:ea typeface="Arial Unicode MS"/>
+                <a:cs typeface="Arial Unicode MS"/>
+              </a:rPr>
+              <a:t>這兩個數字一定會有同學問是哪裡來的。我老實回答：零點六五和零點三五是</a:t>
+            </a:r>
+            <a:r>
               <a:rPr sz="1000" b="1" lang="zh-TW" dirty="0">
                 <a:solidFill>
                   <a:srgbClr val="000000"/>
@@ -1245,7 +1234,7 @@
                 <a:ea typeface="Arial Unicode MS"/>
                 <a:cs typeface="Arial Unicode MS"/>
               </a:rPr>
-              <a:t>（這兩個數字一定會有同學問是哪裡來的。這是個好問題，請老實回答，並且順便教一個重要的分辨。）</a:t>
+              <a:t>我為了上課設定的數值</a:t>
             </a:r>
             <a:r>
               <a:rPr sz="1000" lang="zh-TW" dirty="0">
@@ -1256,7 +1245,7 @@
                 <a:ea typeface="Arial Unicode MS"/>
                 <a:cs typeface="Arial Unicode MS"/>
               </a:rPr>
-              <a:t>
+              <a:t>，不是量測出來的，也不是哪一家規格書上的數字。
 </a:t>
             </a:r>
           </a:p>
@@ -1278,7 +1267,7 @@
                 <a:ea typeface="Arial Unicode MS"/>
                 <a:cs typeface="Arial Unicode MS"/>
               </a:rPr>
-              <a:t>「零點六五和零點三五是</a:t>
+              <a:t>不過有一件事值得講清楚。罩子髒，其實是</a:t>
             </a:r>
             <a:r>
               <a:rPr sz="1000" b="1" lang="zh-TW" dirty="0">
@@ -1289,7 +1278,7 @@
                 <a:ea typeface="Arial Unicode MS"/>
                 <a:cs typeface="Arial Unicode MS"/>
               </a:rPr>
-              <a:t>我為了上課設定的數值</a:t>
+              <a:t>兩種不同的機制</a:t>
             </a:r>
             <a:r>
               <a:rPr sz="1000" lang="zh-TW" dirty="0">
@@ -1300,7 +1289,7 @@
                 <a:ea typeface="Arial Unicode MS"/>
                 <a:cs typeface="Arial Unicode MS"/>
               </a:rPr>
-              <a:t>，不是量測出來的，也不是哪一家的規格書上的數字。
+              <a:t>同時在作用。
 </a:t>
             </a:r>
           </a:p>
@@ -1322,7 +1311,7 @@
                 <a:ea typeface="Arial Unicode MS"/>
                 <a:cs typeface="Arial Unicode MS"/>
               </a:rPr>
-              <a:t>不過有一件事值得講清楚：罩子髒，其實是</a:t>
+              <a:t>第一種是</a:t>
             </a:r>
             <a:r>
               <a:rPr sz="1000" b="1" lang="zh-TW" dirty="0">
@@ -1333,7 +1322,7 @@
                 <a:ea typeface="Arial Unicode MS"/>
                 <a:cs typeface="Arial Unicode MS"/>
               </a:rPr>
-              <a:t>兩種不同的機制</a:t>
+              <a:t>遮住</a:t>
             </a:r>
             <a:r>
               <a:rPr sz="1000" lang="zh-TW" dirty="0">
@@ -1344,7 +1333,29 @@
                 <a:ea typeface="Arial Unicode MS"/>
                 <a:cs typeface="Arial Unicode MS"/>
               </a:rPr>
-              <a:t>同時在作用。
+              <a:t>。泥點完全蓋住罩子的某一塊，那個方向的雷射根本射不出去，所以那個方向永遠不會有點，</a:t>
+            </a:r>
+            <a:r>
+              <a:rPr sz="1000" b="1" lang="zh-TW" dirty="0">
+                <a:solidFill>
+                  <a:srgbClr val="000000"/>
+                </a:solidFill>
+                <a:latin typeface="Arial Unicode MS"/>
+                <a:ea typeface="Arial Unicode MS"/>
+                <a:cs typeface="Arial Unicode MS"/>
+              </a:rPr>
+              <a:t>不管目標站多近都一樣</a:t>
+            </a:r>
+            <a:r>
+              <a:rPr sz="1000" lang="zh-TW" dirty="0">
+                <a:solidFill>
+                  <a:srgbClr val="000000"/>
+                </a:solidFill>
+                <a:latin typeface="Arial Unicode MS"/>
+                <a:ea typeface="Arial Unicode MS"/>
+                <a:cs typeface="Arial Unicode MS"/>
+              </a:rPr>
+              <a:t>。這會讓一部分的點直接消失。
 </a:t>
             </a:r>
           </a:p>
@@ -1366,7 +1377,7 @@
                 <a:ea typeface="Arial Unicode MS"/>
                 <a:cs typeface="Arial Unicode MS"/>
               </a:rPr>
-              <a:t>第一種是</a:t>
+              <a:t>第二種是</a:t>
             </a:r>
             <a:r>
               <a:rPr sz="1000" b="1" lang="zh-TW" dirty="0">
@@ -1377,7 +1388,7 @@
                 <a:ea typeface="Arial Unicode MS"/>
                 <a:cs typeface="Arial Unicode MS"/>
               </a:rPr>
-              <a:t>遮住</a:t>
+              <a:t>變弱</a:t>
             </a:r>
             <a:r>
               <a:rPr sz="1000" lang="zh-TW" dirty="0">
@@ -1388,7 +1399,7 @@
                 <a:ea typeface="Arial Unicode MS"/>
                 <a:cs typeface="Arial Unicode MS"/>
               </a:rPr>
-              <a:t>。泥點完全蓋住罩子的某一塊，那個方向的雷射根本射不出去，所以那個方向永遠不會有點——</a:t>
+              <a:t>。沒有被完全蓋住、只蒙上一層薄灰的地方，雷射還是出得去，可是回波變弱了。遠處的回波本來就弱，再變弱一次就低於偵測的門檻，這會讓</a:t>
             </a:r>
             <a:r>
               <a:rPr sz="1000" b="1" lang="zh-TW" dirty="0">
@@ -1399,7 +1410,7 @@
                 <a:ea typeface="Arial Unicode MS"/>
                 <a:cs typeface="Arial Unicode MS"/>
               </a:rPr>
-              <a:t>不管目標站多近都一樣</a:t>
+              <a:t>有效距離</a:t>
             </a:r>
             <a:r>
               <a:rPr sz="1000" lang="zh-TW" dirty="0">
@@ -1410,7 +1421,7 @@
                 <a:ea typeface="Arial Unicode MS"/>
                 <a:cs typeface="Arial Unicode MS"/>
               </a:rPr>
-              <a:t>。這會讓一部分的點直接消失。
+              <a:t>縮短。
 </a:t>
             </a:r>
           </a:p>
@@ -1432,51 +1443,7 @@
                 <a:ea typeface="Arial Unicode MS"/>
                 <a:cs typeface="Arial Unicode MS"/>
               </a:rPr>
-              <a:t>第二種是</a:t>
-            </a:r>
-            <a:r>
-              <a:rPr sz="1000" b="1" lang="zh-TW" dirty="0">
-                <a:solidFill>
-                  <a:srgbClr val="000000"/>
-                </a:solidFill>
-                <a:latin typeface="Arial Unicode MS"/>
-                <a:ea typeface="Arial Unicode MS"/>
-                <a:cs typeface="Arial Unicode MS"/>
-              </a:rPr>
-              <a:t>變弱</a:t>
-            </a:r>
-            <a:r>
-              <a:rPr sz="1000" lang="zh-TW" dirty="0">
-                <a:solidFill>
-                  <a:srgbClr val="000000"/>
-                </a:solidFill>
-                <a:latin typeface="Arial Unicode MS"/>
-                <a:ea typeface="Arial Unicode MS"/>
-                <a:cs typeface="Arial Unicode MS"/>
-              </a:rPr>
-              <a:t>。沒被完全蓋住、只蒙上一層薄灰的地方，雷射還是出得去，但回波變弱了。遠處的回波本來就弱，再變弱一次就低於偵測的門檻——這讓</a:t>
-            </a:r>
-            <a:r>
-              <a:rPr sz="1000" b="1" lang="zh-TW" dirty="0">
-                <a:solidFill>
-                  <a:srgbClr val="000000"/>
-                </a:solidFill>
-                <a:latin typeface="Arial Unicode MS"/>
-                <a:ea typeface="Arial Unicode MS"/>
-                <a:cs typeface="Arial Unicode MS"/>
-              </a:rPr>
-              <a:t>有效距離</a:t>
-            </a:r>
-            <a:r>
-              <a:rPr sz="1000" lang="zh-TW" dirty="0">
-                <a:solidFill>
-                  <a:srgbClr val="000000"/>
-                </a:solidFill>
-                <a:latin typeface="Arial Unicode MS"/>
-                <a:ea typeface="Arial Unicode MS"/>
-                <a:cs typeface="Arial Unicode MS"/>
-              </a:rPr>
-              <a:t>縮短。
+              <a:t>所以「點數變少」和「看不了那麼遠」，是兩種不同的原因造成的，不是同一件事的兩種說法。
 </a:t>
             </a:r>
           </a:p>
@@ -1498,7 +1465,73 @@
                 <a:ea typeface="Arial Unicode MS"/>
                 <a:cs typeface="Arial Unicode MS"/>
               </a:rPr>
-              <a:t>所以「點數變少」和「看不了那麼遠」，是兩種不同的原因造成的，不是同一件事的兩種說法。
+              <a:t>那哪一個掉得比較多？取決於髒污是</a:t>
+            </a:r>
+            <a:r>
+              <a:rPr sz="1000" b="1" lang="zh-TW" dirty="0">
+                <a:solidFill>
+                  <a:srgbClr val="000000"/>
+                </a:solidFill>
+                <a:latin typeface="Arial Unicode MS"/>
+                <a:ea typeface="Arial Unicode MS"/>
+                <a:cs typeface="Arial Unicode MS"/>
+              </a:rPr>
+              <a:t>一塊一塊的</a:t>
+            </a:r>
+            <a:r>
+              <a:rPr sz="1000" lang="zh-TW" dirty="0">
+                <a:solidFill>
+                  <a:srgbClr val="000000"/>
+                </a:solidFill>
+                <a:latin typeface="Arial Unicode MS"/>
+                <a:ea typeface="Arial Unicode MS"/>
+                <a:cs typeface="Arial Unicode MS"/>
+              </a:rPr>
+              <a:t>還是</a:t>
+            </a:r>
+            <a:r>
+              <a:rPr sz="1000" b="1" lang="zh-TW" dirty="0">
+                <a:solidFill>
+                  <a:srgbClr val="000000"/>
+                </a:solidFill>
+                <a:latin typeface="Arial Unicode MS"/>
+                <a:ea typeface="Arial Unicode MS"/>
+                <a:cs typeface="Arial Unicode MS"/>
+              </a:rPr>
+              <a:t>均勻一層</a:t>
+            </a:r>
+            <a:r>
+              <a:rPr sz="1000" lang="zh-TW" dirty="0">
+                <a:solidFill>
+                  <a:srgbClr val="000000"/>
+                </a:solidFill>
+                <a:latin typeface="Arial Unicode MS"/>
+                <a:ea typeface="Arial Unicode MS"/>
+                <a:cs typeface="Arial Unicode MS"/>
+              </a:rPr>
+              <a:t>的，沒有通則。我在工具裡把點數設得掉更多，是因為我想讓大家看到「</a:t>
+            </a:r>
+            <a:r>
+              <a:rPr sz="1000" b="1" lang="zh-TW" dirty="0">
+                <a:solidFill>
+                  <a:srgbClr val="000000"/>
+                </a:solidFill>
+                <a:latin typeface="Arial Unicode MS"/>
+                <a:ea typeface="Arial Unicode MS"/>
+                <a:cs typeface="Arial Unicode MS"/>
+              </a:rPr>
+              <a:t>東西還在，但是只剩幾個點</a:t>
+            </a:r>
+            <a:r>
+              <a:rPr sz="1000" lang="zh-TW" dirty="0">
+                <a:solidFill>
+                  <a:srgbClr val="000000"/>
+                </a:solidFill>
+                <a:latin typeface="Arial Unicode MS"/>
+                <a:ea typeface="Arial Unicode MS"/>
+                <a:cs typeface="Arial Unicode MS"/>
+              </a:rPr>
+              <a:t>」那個狀態，那正是最危險的狀態。
 </a:t>
             </a:r>
           </a:p>
@@ -1520,7 +1553,7 @@
                 <a:ea typeface="Arial Unicode MS"/>
                 <a:cs typeface="Arial Unicode MS"/>
               </a:rPr>
-              <a:t>那哪一個掉得比較多？取決於髒污是</a:t>
+              <a:t>真實世界為什麼沒有通則？因為它取決於髒的是什麼——灰塵、泥、鹽、水膜，還是壓扁的蟲；蓋住多少比例；蓋在雷射出口的正中間還是邊緣；還有那顆光達用的波長。所以規格書上不會寫「髒了剩幾成」，只會寫它有沒有自動清潔或加熱，以及</a:t>
             </a:r>
             <a:r>
               <a:rPr sz="1000" b="1" lang="zh-TW" dirty="0">
@@ -1531,7 +1564,7 @@
                 <a:ea typeface="Arial Unicode MS"/>
                 <a:cs typeface="Arial Unicode MS"/>
               </a:rPr>
-              <a:t>一塊一塊的</a:t>
+              <a:t>能不能偵測到自己被遮住</a:t>
             </a:r>
             <a:r>
               <a:rPr sz="1000" lang="zh-TW" dirty="0">
@@ -1542,51 +1575,7 @@
                 <a:ea typeface="Arial Unicode MS"/>
                 <a:cs typeface="Arial Unicode MS"/>
               </a:rPr>
-              <a:t>還是</a:t>
-            </a:r>
-            <a:r>
-              <a:rPr sz="1000" b="1" lang="zh-TW" dirty="0">
-                <a:solidFill>
-                  <a:srgbClr val="000000"/>
-                </a:solidFill>
-                <a:latin typeface="Arial Unicode MS"/>
-                <a:ea typeface="Arial Unicode MS"/>
-                <a:cs typeface="Arial Unicode MS"/>
-              </a:rPr>
-              <a:t>均勻一層</a:t>
-            </a:r>
-            <a:r>
-              <a:rPr sz="1000" lang="zh-TW" dirty="0">
-                <a:solidFill>
-                  <a:srgbClr val="000000"/>
-                </a:solidFill>
-                <a:latin typeface="Arial Unicode MS"/>
-                <a:ea typeface="Arial Unicode MS"/>
-                <a:cs typeface="Arial Unicode MS"/>
-              </a:rPr>
-              <a:t>的，沒有通則。我在工具裡把點數設得掉更多，是因為我想讓大家看到『</a:t>
-            </a:r>
-            <a:r>
-              <a:rPr sz="1000" b="1" lang="zh-TW" dirty="0">
-                <a:solidFill>
-                  <a:srgbClr val="000000"/>
-                </a:solidFill>
-                <a:latin typeface="Arial Unicode MS"/>
-                <a:ea typeface="Arial Unicode MS"/>
-                <a:cs typeface="Arial Unicode MS"/>
-              </a:rPr>
-              <a:t>東西還在，但只剩幾個點</a:t>
-            </a:r>
-            <a:r>
-              <a:rPr sz="1000" lang="zh-TW" dirty="0">
-                <a:solidFill>
-                  <a:srgbClr val="000000"/>
-                </a:solidFill>
-                <a:latin typeface="Arial Unicode MS"/>
-                <a:ea typeface="Arial Unicode MS"/>
-                <a:cs typeface="Arial Unicode MS"/>
-              </a:rPr>
-              <a:t>』那個狀態——那正是最危險的狀態。
+              <a:t>。
 </a:t>
             </a:r>
           </a:p>
@@ -1608,7 +1597,7 @@
                 <a:ea typeface="Arial Unicode MS"/>
                 <a:cs typeface="Arial Unicode MS"/>
               </a:rPr>
-              <a:t>真實世界為什麼沒有通則？因為它取決於：髒的是什麼（灰塵、泥、鹽、水膜，還是壓扁的蟲）、蓋住多少比例、蓋在雷射出口正中間還是邊緣、以及那顆光達用的波長。所以規格書上不會寫「髒了剩幾成」，只會寫它有沒有自動清潔或加熱、以及</a:t>
+              <a:t>順便教大家一個分辨的習慣。今天所有的數字都是課堂模型，晴天八十、濃霧十六，這些具體數值是我設的。可是有些</a:t>
             </a:r>
             <a:r>
               <a:rPr sz="1000" b="1" lang="zh-TW" dirty="0">
@@ -1619,7 +1608,7 @@
                 <a:ea typeface="Arial Unicode MS"/>
                 <a:cs typeface="Arial Unicode MS"/>
               </a:rPr>
-              <a:t>能不能偵測到自己被遮住</a:t>
+              <a:t>關係</a:t>
             </a:r>
             <a:r>
               <a:rPr sz="1000" lang="zh-TW" dirty="0">
@@ -1630,7 +1619,7 @@
                 <a:ea typeface="Arial Unicode MS"/>
                 <a:cs typeface="Arial Unicode MS"/>
               </a:rPr>
-              <a:t>了。」
+              <a:t>不是我設的：「起霧的時候，相機看得到的距離比雷達短很多」是波長決定的，「距離兩倍、誤差四倍」是幾何決定的，換成真實的車一樣成立。
 </a:t>
             </a:r>
           </a:p>
@@ -1644,6 +1633,17 @@
               </a:spcAft>
             </a:pPr>
             <a:r>
+              <a:rPr sz="1000" lang="zh-TW" dirty="0">
+                <a:solidFill>
+                  <a:srgbClr val="000000"/>
+                </a:solidFill>
+                <a:latin typeface="Arial Unicode MS"/>
+                <a:ea typeface="Arial Unicode MS"/>
+                <a:cs typeface="Arial Unicode MS"/>
+              </a:rPr>
+              <a:t>這就是大家以後看任何模擬、任何展示都要做的分辨：</a:t>
+            </a:r>
+            <a:r>
               <a:rPr sz="1000" b="1" lang="zh-TW" dirty="0">
                 <a:solidFill>
                   <a:srgbClr val="000000"/>
@@ -1652,7 +1652,7 @@
                 <a:ea typeface="Arial Unicode MS"/>
                 <a:cs typeface="Arial Unicode MS"/>
               </a:rPr>
-              <a:t>順便教一個分辨的習慣。</a:t>
+              <a:t>哪些是設定，哪些是物理。</a:t>
             </a:r>
             <a:r>
               <a:rPr sz="1000" lang="zh-TW" dirty="0">
@@ -1663,29 +1663,7 @@
                 <a:ea typeface="Arial Unicode MS"/>
                 <a:cs typeface="Arial Unicode MS"/>
               </a:rPr>
-              <a:t>今天所有的數字都是課堂模型——晴天八十、濃霧十六，這些具體數值是我設的。但有些</a:t>
-            </a:r>
-            <a:r>
-              <a:rPr sz="1000" b="1" lang="zh-TW" dirty="0">
-                <a:solidFill>
-                  <a:srgbClr val="000000"/>
-                </a:solidFill>
-                <a:latin typeface="Arial Unicode MS"/>
-                <a:ea typeface="Arial Unicode MS"/>
-                <a:cs typeface="Arial Unicode MS"/>
-              </a:rPr>
-              <a:t>關係</a:t>
-            </a:r>
-            <a:r>
-              <a:rPr sz="1000" lang="zh-TW" dirty="0">
-                <a:solidFill>
-                  <a:srgbClr val="000000"/>
-                </a:solidFill>
-                <a:latin typeface="Arial Unicode MS"/>
-                <a:ea typeface="Arial Unicode MS"/>
-                <a:cs typeface="Arial Unicode MS"/>
-              </a:rPr>
-              <a:t>不是我設的：「起霧的時候，相機看得到的距離比雷達短很多」是波長決定的，「距離兩倍、誤差四倍」是幾何決定的，換成真實的車一樣成立。
+              <a:t>剛剛髒污那兩個數字，答案是「都是設定」；濃霧那一整排，答案是「數字是設定，大小關係是物理」。
 </a:t>
             </a:r>
           </a:p>
@@ -1707,7 +1685,7 @@
                 <a:ea typeface="Arial Unicode MS"/>
                 <a:cs typeface="Arial Unicode MS"/>
               </a:rPr>
-              <a:t>（這就是你們以後看任何模擬、任何 demo 都要做的分辨：</a:t>
+              <a:t>工程上的意思是：有一部分的「感測器失效」其實是</a:t>
             </a:r>
             <a:r>
               <a:rPr sz="1000" b="1" lang="zh-TW" dirty="0">
@@ -1718,7 +1696,7 @@
                 <a:ea typeface="Arial Unicode MS"/>
                 <a:cs typeface="Arial Unicode MS"/>
               </a:rPr>
-              <a:t>哪些是設定，哪些是物理。</a:t>
+              <a:t>維護問題</a:t>
             </a:r>
             <a:r>
               <a:rPr sz="1000" lang="zh-TW" dirty="0">
@@ -1729,7 +1707,7 @@
                 <a:ea typeface="Arial Unicode MS"/>
                 <a:cs typeface="Arial Unicode MS"/>
               </a:rPr>
-              <a:t>剛剛髒污那兩個數字，答案是「都是設定」；濃霧那一整排，答案是「數字是設定，大小關係是物理」。）
+              <a:t>，不是技術極限。一台每天洗車的自駕計程車，跟一台放在戶外積灰三個月的車，能力差很多。
 </a:t>
             </a:r>
           </a:p>
@@ -1751,51 +1729,7 @@
                 <a:ea typeface="Arial Unicode MS"/>
                 <a:cs typeface="Arial Unicode MS"/>
               </a:rPr>
-              <a:t>工程上的意思是：有一部分的「感測器失效」其實是</a:t>
-            </a:r>
-            <a:r>
-              <a:rPr sz="1000" b="1" lang="zh-TW" dirty="0">
-                <a:solidFill>
-                  <a:srgbClr val="000000"/>
-                </a:solidFill>
-                <a:latin typeface="Arial Unicode MS"/>
-                <a:ea typeface="Arial Unicode MS"/>
-                <a:cs typeface="Arial Unicode MS"/>
-              </a:rPr>
-              <a:t>維護問題</a:t>
-            </a:r>
-            <a:r>
-              <a:rPr sz="1000" lang="zh-TW" dirty="0">
-                <a:solidFill>
-                  <a:srgbClr val="000000"/>
-                </a:solidFill>
-                <a:latin typeface="Arial Unicode MS"/>
-                <a:ea typeface="Arial Unicode MS"/>
-                <a:cs typeface="Arial Unicode MS"/>
-              </a:rPr>
-              <a:t>，不是技術極限。一台每天洗車的自駕計程車，和一台放在戶外積灰三個月的車，能力差很多。
-</a:t>
-            </a:r>
-          </a:p>
-          <a:p>
-            <a:pPr algn="l">
-              <a:lnSpc>
-                <a:spcPct val="115000"/>
-              </a:lnSpc>
-              <a:spcAft>
-                <a:spcPts val="500"/>
-              </a:spcAft>
-            </a:pPr>
-            <a:r>
-              <a:rPr sz="1000" lang="zh-TW" dirty="0">
-                <a:solidFill>
-                  <a:srgbClr val="000000"/>
-                </a:solidFill>
-                <a:latin typeface="Arial Unicode MS"/>
-                <a:ea typeface="Arial Unicode MS"/>
-                <a:cs typeface="Arial Unicode MS"/>
-              </a:rPr>
-              <a:t>這件事期末專題可以寫——你的 ODD 裡面要不要寫「需要每日清潔感測器」？</a:t>
+              <a:t>這件事期末專題可以寫：你的 ODD 裡面，要不要寫「需要每日清潔感測器」？</a:t>
             </a:r>
           </a:p>
         </p:txBody>
@@ -2531,129 +2465,19 @@
                 <a:spcPct val="115000"/>
               </a:lnSpc>
               <a:spcAft>
-                <a:spcPts val="500"/>
+                <a:spcPts val="600"/>
               </a:spcAft>
             </a:pPr>
             <a:r>
-              <a:rPr sz="1000" lang="zh-TW" dirty="0">
-                <a:solidFill>
-                  <a:srgbClr val="000000"/>
-                </a:solidFill>
-                <a:latin typeface="Arial Unicode MS"/>
-                <a:ea typeface="Arial Unicode MS"/>
-                <a:cs typeface="Arial Unicode MS"/>
-              </a:rPr>
-              <a:t>（</a:t>
-            </a:r>
-            <a:r>
-              <a:rPr sz="1000" b="1" lang="zh-TW" dirty="0">
-                <a:solidFill>
-                  <a:srgbClr val="000000"/>
-                </a:solidFill>
-                <a:latin typeface="Arial Unicode MS"/>
-                <a:ea typeface="Arial Unicode MS"/>
-                <a:cs typeface="Arial Unicode MS"/>
-              </a:rPr>
-              <a:t>備案，開始前先看時間。</a:t>
-            </a:r>
-            <a:r>
-              <a:rPr sz="1000" lang="zh-TW" dirty="0">
-                <a:solidFill>
-                  <a:srgbClr val="000000"/>
-                </a:solidFill>
-                <a:latin typeface="Arial Unicode MS"/>
-                <a:ea typeface="Arial Unicode MS"/>
-                <a:cs typeface="Arial Unicode MS"/>
-              </a:rPr>
-              <a:t>如果前面進行得比預期快，還多出十分鐘以上，可以改發那份紙本學習單。檔案有兩個：「第三週_課堂練習_學習單.html」是</a:t>
-            </a:r>
-            <a:r>
-              <a:rPr sz="1000" b="1" lang="zh-TW" dirty="0">
-                <a:solidFill>
-                  <a:srgbClr val="000000"/>
-                </a:solidFill>
-                <a:latin typeface="Arial Unicode MS"/>
-                <a:ea typeface="Arial Unicode MS"/>
-                <a:cs typeface="Arial Unicode MS"/>
-              </a:rPr>
-              <a:t>發給學生的題目版</a:t>
-            </a:r>
-            <a:r>
-              <a:rPr sz="1000" lang="zh-TW" dirty="0">
-                <a:solidFill>
-                  <a:srgbClr val="000000"/>
-                </a:solidFill>
-                <a:latin typeface="Arial Unicode MS"/>
-                <a:ea typeface="Arial Unicode MS"/>
-                <a:cs typeface="Arial Unicode MS"/>
-              </a:rPr>
-              <a:t>，「第三週_課堂練習_學習單_教師解答.html」是</a:t>
-            </a:r>
-            <a:r>
-              <a:rPr sz="1000" b="1" lang="zh-TW" dirty="0">
-                <a:solidFill>
-                  <a:srgbClr val="000000"/>
-                </a:solidFill>
-                <a:latin typeface="Arial Unicode MS"/>
-                <a:ea typeface="Arial Unicode MS"/>
-                <a:cs typeface="Arial Unicode MS"/>
-              </a:rPr>
-              <a:t>老師自己用的解答版</a:t>
-            </a:r>
-            <a:r>
-              <a:rPr sz="1000" lang="zh-TW" dirty="0">
-                <a:solidFill>
-                  <a:srgbClr val="000000"/>
-                </a:solidFill>
-                <a:latin typeface="Arial Unicode MS"/>
-                <a:ea typeface="Arial Unicode MS"/>
-                <a:cs typeface="Arial Unicode MS"/>
-              </a:rPr>
-              <a:t>，兩份都用瀏覽器開、直接列印即可。兩份都剛好一張 A4，八題。解答版只列答案、不重複題目。學習單是</a:t>
-            </a:r>
-            <a:r>
-              <a:rPr sz="1000" b="1" lang="zh-TW" dirty="0">
-                <a:solidFill>
-                  <a:srgbClr val="000000"/>
-                </a:solidFill>
-                <a:latin typeface="Arial Unicode MS"/>
-                <a:ea typeface="Arial Unicode MS"/>
-                <a:cs typeface="Arial Unicode MS"/>
-              </a:rPr>
-              <a:t>個人</a:t>
-            </a:r>
-            <a:r>
-              <a:rPr sz="1000" lang="zh-TW" dirty="0">
-                <a:solidFill>
-                  <a:srgbClr val="000000"/>
-                </a:solidFill>
-                <a:latin typeface="Arial Unicode MS"/>
-                <a:ea typeface="Arial Unicode MS"/>
-                <a:cs typeface="Arial Unicode MS"/>
-              </a:rPr>
-              <a:t>作答、用筆寫、下課前交；下面這個分組任務是</a:t>
-            </a:r>
-            <a:r>
-              <a:rPr sz="1000" b="1" lang="zh-TW" dirty="0">
-                <a:solidFill>
-                  <a:srgbClr val="000000"/>
-                </a:solidFill>
-                <a:latin typeface="Arial Unicode MS"/>
-                <a:ea typeface="Arial Unicode MS"/>
-                <a:cs typeface="Arial Unicode MS"/>
-              </a:rPr>
-              <a:t>口頭</a:t>
-            </a:r>
-            <a:r>
-              <a:rPr sz="1000" lang="zh-TW" dirty="0">
-                <a:solidFill>
-                  <a:srgbClr val="000000"/>
-                </a:solidFill>
-                <a:latin typeface="Arial Unicode MS"/>
-                <a:ea typeface="Arial Unicode MS"/>
-                <a:cs typeface="Arial Unicode MS"/>
-              </a:rPr>
-              <a:t>發表。兩個可以只做一個，也可以先讓各組討論、再各自寫學習單。學習單的每一題都能用今天的工具當場驗證，所以學生寫完可以自己對。）
+              <a:rPr sz="1200" lang="zh-TW" dirty="0">
+                <a:solidFill>
+                  <a:srgbClr val="000000"/>
+                </a:solidFill>
+                <a:latin typeface="Arial Unicode MS"/>
+                <a:ea typeface="Arial Unicode MS"/>
+                <a:cs typeface="Arial Unicode MS"/>
+              </a:rPr>
+              <a:t>最後十分鐘，六組，每組認養一種感測器。第一組相機、第二組光達、第三組雷達、第四組超音波、第五組衛星定位、第六組熱像。
 </a:t>
             </a:r>
           </a:p>
@@ -2663,19 +2487,19 @@
                 <a:spcPct val="115000"/>
               </a:lnSpc>
               <a:spcAft>
-                <a:spcPts val="500"/>
+                <a:spcPts val="600"/>
               </a:spcAft>
             </a:pPr>
             <a:r>
-              <a:rPr sz="1000" lang="zh-TW" dirty="0">
-                <a:solidFill>
-                  <a:srgbClr val="000000"/>
-                </a:solidFill>
-                <a:latin typeface="Arial Unicode MS"/>
-                <a:ea typeface="Arial Unicode MS"/>
-                <a:cs typeface="Arial Unicode MS"/>
-              </a:rPr>
-              <a:t>最後十分鐘，六組每組認養一種感測器。
+              <a:rPr sz="1200" lang="zh-TW" dirty="0">
+                <a:solidFill>
+                  <a:srgbClr val="000000"/>
+                </a:solidFill>
+                <a:latin typeface="Arial Unicode MS"/>
+                <a:ea typeface="Arial Unicode MS"/>
+                <a:cs typeface="Arial Unicode MS"/>
+              </a:rPr>
+              <a:t>每一組只寫兩行。
 </a:t>
             </a:r>
           </a:p>
@@ -2685,55 +2509,11 @@
                 <a:spcPct val="115000"/>
               </a:lnSpc>
               <a:spcAft>
-                <a:spcPts val="500"/>
+                <a:spcPts val="600"/>
               </a:spcAft>
             </a:pPr>
             <a:r>
-              <a:rPr sz="1000" lang="zh-TW" dirty="0">
-                <a:solidFill>
-                  <a:srgbClr val="000000"/>
-                </a:solidFill>
-                <a:latin typeface="Arial Unicode MS"/>
-                <a:ea typeface="Arial Unicode MS"/>
-                <a:cs typeface="Arial Unicode MS"/>
-              </a:rPr>
-              <a:t>（分配：第一組相機、第二組光達、第三組雷達、第四組超音波、第五組衛星定位、第六組熱像。）
-</a:t>
-            </a:r>
-          </a:p>
-          <a:p>
-            <a:pPr algn="l">
-              <a:lnSpc>
-                <a:spcPct val="115000"/>
-              </a:lnSpc>
-              <a:spcAft>
-                <a:spcPts val="500"/>
-              </a:spcAft>
-            </a:pPr>
-            <a:r>
-              <a:rPr sz="1000" lang="zh-TW" dirty="0">
-                <a:solidFill>
-                  <a:srgbClr val="000000"/>
-                </a:solidFill>
-                <a:latin typeface="Arial Unicode MS"/>
-                <a:ea typeface="Arial Unicode MS"/>
-                <a:cs typeface="Arial Unicode MS"/>
-              </a:rPr>
-              <a:t>每組只寫兩行。
-</a:t>
-            </a:r>
-          </a:p>
-          <a:p>
-            <a:pPr algn="l">
-              <a:lnSpc>
-                <a:spcPct val="115000"/>
-              </a:lnSpc>
-              <a:spcAft>
-                <a:spcPts val="500"/>
-              </a:spcAft>
-            </a:pPr>
-            <a:r>
-              <a:rPr sz="1000" lang="zh-TW" dirty="0">
+              <a:rPr sz="1200" lang="zh-TW" dirty="0">
                 <a:solidFill>
                   <a:srgbClr val="000000"/>
                 </a:solidFill>
@@ -2744,7 +2524,7 @@
               <a:t>第一行：你那一種送回來什麼是別人沒有的？這一行我要求要有</a:t>
             </a:r>
             <a:r>
-              <a:rPr sz="1000" b="1" lang="zh-TW" dirty="0">
+              <a:rPr sz="1200" b="1" lang="zh-TW" dirty="0">
                 <a:solidFill>
                   <a:srgbClr val="000000"/>
                 </a:solidFill>
@@ -2755,7 +2535,7 @@
               <a:t>今天看到的數字</a:t>
             </a:r>
             <a:r>
-              <a:rPr sz="1000" lang="zh-TW" dirty="0">
+              <a:rPr sz="1200" lang="zh-TW" dirty="0">
                 <a:solidFill>
                   <a:srgbClr val="000000"/>
                 </a:solidFill>
@@ -2773,19 +2553,19 @@
                 <a:spcPct val="115000"/>
               </a:lnSpc>
               <a:spcAft>
-                <a:spcPts val="500"/>
+                <a:spcPts val="600"/>
               </a:spcAft>
             </a:pPr>
             <a:r>
-              <a:rPr sz="1000" lang="zh-TW" dirty="0">
-                <a:solidFill>
-                  <a:srgbClr val="000000"/>
-                </a:solidFill>
-                <a:latin typeface="Arial Unicode MS"/>
-                <a:ea typeface="Arial Unicode MS"/>
-                <a:cs typeface="Arial Unicode MS"/>
-              </a:rPr>
-              <a:t>第二行比較難，也是我真正想看的：什麼條件會讓它失效？那時候誰來補它？
+              <a:rPr sz="1200" lang="zh-TW" dirty="0">
+                <a:solidFill>
+                  <a:srgbClr val="000000"/>
+                </a:solidFill>
+                <a:latin typeface="Arial Unicode MS"/>
+                <a:ea typeface="Arial Unicode MS"/>
+                <a:cs typeface="Arial Unicode MS"/>
+              </a:rPr>
+              <a:t>第二行比較難，也是我真正想看的：什麼條件會讓它失效？那個時候誰來補它？
 </a:t>
             </a:r>
           </a:p>
@@ -2795,19 +2575,19 @@
                 <a:spcPct val="115000"/>
               </a:lnSpc>
               <a:spcAft>
-                <a:spcPts val="500"/>
+                <a:spcPts val="600"/>
               </a:spcAft>
             </a:pPr>
             <a:r>
-              <a:rPr sz="1000" lang="zh-TW" dirty="0">
-                <a:solidFill>
-                  <a:srgbClr val="000000"/>
-                </a:solidFill>
-                <a:latin typeface="Arial Unicode MS"/>
-                <a:ea typeface="Arial Unicode MS"/>
-                <a:cs typeface="Arial Unicode MS"/>
-              </a:rPr>
-              <a:t>給大家一點提示。拿到衛星定位的那一組可能會覺得很吃虧——它什麼都不給。但你們可以想一想：它不給前方的資訊，那它給的是什麼？沒有它的話，車子會少掉什麼？
+              <a:rPr sz="1200" lang="zh-TW" dirty="0">
+                <a:solidFill>
+                  <a:srgbClr val="000000"/>
+                </a:solidFill>
+                <a:latin typeface="Arial Unicode MS"/>
+                <a:ea typeface="Arial Unicode MS"/>
+                <a:cs typeface="Arial Unicode MS"/>
+              </a:rPr>
+              <a:t>給大家一點提示。拿到衛星定位的那一組，可能會覺得很吃虧，因為它什麼都不給。可是你們可以想一想：它不給前方的資訊，那它給的是什麼？沒有它的話，車子會少掉什麼？
 </a:t>
             </a:r>
           </a:p>
@@ -2817,19 +2597,19 @@
                 <a:spcPct val="115000"/>
               </a:lnSpc>
               <a:spcAft>
-                <a:spcPts val="500"/>
+                <a:spcPts val="600"/>
               </a:spcAft>
             </a:pPr>
             <a:r>
-              <a:rPr sz="1000" lang="zh-TW" dirty="0">
-                <a:solidFill>
-                  <a:srgbClr val="000000"/>
-                </a:solidFill>
-                <a:latin typeface="Arial Unicode MS"/>
-                <a:ea typeface="Arial Unicode MS"/>
-                <a:cs typeface="Arial Unicode MS"/>
-              </a:rPr>
-              <a:t>拿到超音波的那一組也一樣。它只有五公尺，看起來很爛，可是第一節我們看過，在那個誰都看不到的近距離，只有它看得到。
+              <a:rPr sz="1200" lang="zh-TW" dirty="0">
+                <a:solidFill>
+                  <a:srgbClr val="000000"/>
+                </a:solidFill>
+                <a:latin typeface="Arial Unicode MS"/>
+                <a:ea typeface="Arial Unicode MS"/>
+                <a:cs typeface="Arial Unicode MS"/>
+              </a:rPr>
+              <a:t>拿到超音波的那一組也一樣。它只有五公尺，看起來很弱，可是第一節我們看過，在那個誰都看不到的近距離，只有它看得到。
 </a:t>
             </a:r>
           </a:p>
@@ -2839,41 +2619,19 @@
                 <a:spcPct val="115000"/>
               </a:lnSpc>
               <a:spcAft>
-                <a:spcPts val="500"/>
+                <a:spcPts val="600"/>
               </a:spcAft>
             </a:pPr>
             <a:r>
-              <a:rPr sz="1000" lang="zh-TW" dirty="0">
-                <a:solidFill>
-                  <a:srgbClr val="000000"/>
-                </a:solidFill>
-                <a:latin typeface="Arial Unicode MS"/>
-                <a:ea typeface="Arial Unicode MS"/>
-                <a:cs typeface="Arial Unicode MS"/>
-              </a:rPr>
-              <a:t>每組一分鐘。講完交上來，這張紙期末專題會用到。
-</a:t>
-            </a:r>
-          </a:p>
-          <a:p>
-            <a:pPr algn="l">
-              <a:lnSpc>
-                <a:spcPct val="115000"/>
-              </a:lnSpc>
-              <a:spcAft>
-                <a:spcPts val="500"/>
-              </a:spcAft>
-            </a:pPr>
-            <a:r>
-              <a:rPr sz="1000" lang="zh-TW" dirty="0">
-                <a:solidFill>
-                  <a:srgbClr val="000000"/>
-                </a:solidFill>
-                <a:latin typeface="Arial Unicode MS"/>
-                <a:ea typeface="Arial Unicode MS"/>
-                <a:cs typeface="Arial Unicode MS"/>
-              </a:rPr>
-              <a:t>（時間不夠時：只收紙、不口頭報告；下週上課前五分鐘挑兩組回饋。）</a:t>
+              <a:rPr sz="1200" lang="zh-TW" dirty="0">
+                <a:solidFill>
+                  <a:srgbClr val="000000"/>
+                </a:solidFill>
+                <a:latin typeface="Arial Unicode MS"/>
+                <a:ea typeface="Arial Unicode MS"/>
+                <a:cs typeface="Arial Unicode MS"/>
+              </a:rPr>
+              <a:t>每一組一分鐘。講完交上來，這張紙期末專題會用到。</a:t>
             </a:r>
           </a:p>
         </p:txBody>
@@ -3324,7 +3082,7 @@
                 <a:ea typeface="Arial Unicode MS"/>
                 <a:cs typeface="Arial Unicode MS"/>
               </a:rPr>
-              <a:t>只改一個條件</a:t>
+              <a:t>一次只改一個條件</a:t>
             </a:r>
             <a:r>
               <a:rPr sz="1200" lang="zh-TW" dirty="0">
@@ -3401,7 +3159,7 @@
                 <a:ea typeface="Arial Unicode MS"/>
                 <a:cs typeface="Arial Unicode MS"/>
               </a:rPr>
-              <a:t>（預期結果：相機從 80 m 掉到 26 m，所以 40 m 的行人變成「超出有效距離 26 m」；光達維持 100 m、15 點不變；雷達維持 250 m；熱像從 143 m 變成 158 m，略微變好。）
+              <a:t>好，看結果。相機從八十公尺掉到二十六公尺，所以四十公尺的行人變成「超出有效距離」，那張卡是紅字。光達還是一百公尺、十五點，跟晴天一模一樣。雷達也一樣，兩百五十公尺。熱像從一百四十三變成一百五十八，不但沒變差，還稍微變好了一點。
 </a:t>
             </a:r>
           </a:p>
@@ -3467,7 +3225,7 @@
                 <a:ea typeface="Arial Unicode MS"/>
                 <a:cs typeface="Arial Unicode MS"/>
               </a:rPr>
-              <a:t>最有趣的是熱像——它不但沒變差，還稍微變好了一點。
+              <a:t>最有趣的是熱像，它變好了。
 </a:t>
             </a:r>
           </a:p>
@@ -3654,7 +3412,29 @@
                 <a:ea typeface="Arial Unicode MS"/>
                 <a:cs typeface="Arial Unicode MS"/>
               </a:rPr>
-              <a:t>（等學生回答。預期：因為沒有光。）
+              <a:t>不是你的眼睛壞了，是</a:t>
+            </a:r>
+            <a:r>
+              <a:rPr sz="1000" b="1" lang="zh-TW" dirty="0">
+                <a:solidFill>
+                  <a:srgbClr val="000000"/>
+                </a:solidFill>
+                <a:latin typeface="Arial Unicode MS"/>
+                <a:ea typeface="Arial Unicode MS"/>
+                <a:cs typeface="Arial Unicode MS"/>
+              </a:rPr>
+              <a:t>沒有光可以進到眼睛裡</a:t>
+            </a:r>
+            <a:r>
+              <a:rPr sz="1000" lang="zh-TW" dirty="0">
+                <a:solidFill>
+                  <a:srgbClr val="000000"/>
+                </a:solidFill>
+                <a:latin typeface="Arial Unicode MS"/>
+                <a:ea typeface="Arial Unicode MS"/>
+                <a:cs typeface="Arial Unicode MS"/>
+              </a:rPr>
+              <a:t>。眼睛本身不會發光，它只是一個接收器。要有光照到東西上，再反彈進你的眼睛，你才看得見。
 </a:t>
             </a:r>
           </a:p>
@@ -3676,7 +3456,7 @@
                 <a:ea typeface="Arial Unicode MS"/>
                 <a:cs typeface="Arial Unicode MS"/>
               </a:rPr>
-              <a:t>對。不是你的眼睛壞了，是</a:t>
+              <a:t>相機跟你的眼睛一模一樣。我們叫它</a:t>
             </a:r>
             <a:r>
               <a:rPr sz="1000" b="1" lang="zh-TW" dirty="0">
@@ -3687,7 +3467,7 @@
                 <a:ea typeface="Arial Unicode MS"/>
                 <a:cs typeface="Arial Unicode MS"/>
               </a:rPr>
-              <a:t>沒有光可以進到眼睛裡</a:t>
+              <a:t>被動</a:t>
             </a:r>
             <a:r>
               <a:rPr sz="1000" lang="zh-TW" dirty="0">
@@ -3698,7 +3478,7 @@
                 <a:ea typeface="Arial Unicode MS"/>
                 <a:cs typeface="Arial Unicode MS"/>
               </a:rPr>
-              <a:t>。眼睛本身不會發光，它只是一個接收器——要有光照到東西上、再反彈進你的眼睛，你才看得見。
+              <a:t>。
 </a:t>
             </a:r>
           </a:p>
@@ -3720,7 +3500,7 @@
                 <a:ea typeface="Arial Unicode MS"/>
                 <a:cs typeface="Arial Unicode MS"/>
               </a:rPr>
-              <a:t>相機跟你的眼睛一模一樣。我們叫它</a:t>
+              <a:t>請看左邊那一欄的圖。光是從</a:t>
             </a:r>
             <a:r>
               <a:rPr sz="1000" b="1" lang="zh-TW" dirty="0">
@@ -3731,7 +3511,7 @@
                 <a:ea typeface="Arial Unicode MS"/>
                 <a:cs typeface="Arial Unicode MS"/>
               </a:rPr>
-              <a:t>被動</a:t>
+              <a:t>太陽</a:t>
             </a:r>
             <a:r>
               <a:rPr sz="1000" lang="zh-TW" dirty="0">
@@ -3742,7 +3522,29 @@
                 <a:ea typeface="Arial Unicode MS"/>
                 <a:cs typeface="Arial Unicode MS"/>
               </a:rPr>
-              <a:t>。
+              <a:t>出發的，照到那個人身上，再反彈進相機。大家數數看，這一條路上有三個東西：光源、物體、相機。</a:t>
+            </a:r>
+            <a:r>
+              <a:rPr sz="1000" b="1" lang="zh-TW" dirty="0">
+                <a:solidFill>
+                  <a:srgbClr val="000000"/>
+                </a:solidFill>
+                <a:latin typeface="Arial Unicode MS"/>
+                <a:ea typeface="Arial Unicode MS"/>
+                <a:cs typeface="Arial Unicode MS"/>
+              </a:rPr>
+              <a:t>相機只負責最後一站。</a:t>
+            </a:r>
+            <a:r>
+              <a:rPr sz="1000" lang="zh-TW" dirty="0">
+                <a:solidFill>
+                  <a:srgbClr val="000000"/>
+                </a:solidFill>
+                <a:latin typeface="Arial Unicode MS"/>
+                <a:ea typeface="Arial Unicode MS"/>
+                <a:cs typeface="Arial Unicode MS"/>
+              </a:rPr>
+              <a:t>前面兩站不是它能控制的。
 </a:t>
             </a:r>
           </a:p>
@@ -3764,7 +3566,7 @@
                 <a:ea typeface="Arial Unicode MS"/>
                 <a:cs typeface="Arial Unicode MS"/>
               </a:rPr>
-              <a:t>請看左邊那一欄的圖：光是從</a:t>
+              <a:t>所以太陽下山、路燈不夠亮，這條路的第一站就斷了。相機不是做得不好，是</a:t>
             </a:r>
             <a:r>
               <a:rPr sz="1000" b="1" lang="zh-TW" dirty="0">
@@ -3775,7 +3577,7 @@
                 <a:ea typeface="Arial Unicode MS"/>
                 <a:cs typeface="Arial Unicode MS"/>
               </a:rPr>
-              <a:t>太陽</a:t>
+              <a:t>原理上就沒有東西可以收</a:t>
             </a:r>
             <a:r>
               <a:rPr sz="1000" lang="zh-TW" dirty="0">
@@ -3786,29 +3588,7 @@
                 <a:ea typeface="Arial Unicode MS"/>
                 <a:cs typeface="Arial Unicode MS"/>
               </a:rPr>
-              <a:t>出發的，照到那個人身上，再反彈進相機。你數數看，這條路上有三個東西：光源、物體、相機。</a:t>
-            </a:r>
-            <a:r>
-              <a:rPr sz="1000" b="1" lang="zh-TW" dirty="0">
-                <a:solidFill>
-                  <a:srgbClr val="000000"/>
-                </a:solidFill>
-                <a:latin typeface="Arial Unicode MS"/>
-                <a:ea typeface="Arial Unicode MS"/>
-                <a:cs typeface="Arial Unicode MS"/>
-              </a:rPr>
-              <a:t>相機只負責最後一站。</a:t>
-            </a:r>
-            <a:r>
-              <a:rPr sz="1000" lang="zh-TW" dirty="0">
-                <a:solidFill>
-                  <a:srgbClr val="000000"/>
-                </a:solidFill>
-                <a:latin typeface="Arial Unicode MS"/>
-                <a:ea typeface="Arial Unicode MS"/>
-                <a:cs typeface="Arial Unicode MS"/>
-              </a:rPr>
-              <a:t>前面兩站不是它能控制的。
+              <a:t>。
 </a:t>
             </a:r>
           </a:p>
@@ -3830,7 +3610,7 @@
                 <a:ea typeface="Arial Unicode MS"/>
                 <a:cs typeface="Arial Unicode MS"/>
               </a:rPr>
-              <a:t>所以太陽下山、路燈不夠亮，這條路的第一站就斷了。相機不是做得不好，是</a:t>
+              <a:t>現在看中間那一欄。光達和雷達是</a:t>
             </a:r>
             <a:r>
               <a:rPr sz="1000" b="1" lang="zh-TW" dirty="0">
@@ -3841,7 +3621,7 @@
                 <a:ea typeface="Arial Unicode MS"/>
                 <a:cs typeface="Arial Unicode MS"/>
               </a:rPr>
-              <a:t>原理上就沒東西可收</a:t>
+              <a:t>主動</a:t>
             </a:r>
             <a:r>
               <a:rPr sz="1000" lang="zh-TW" dirty="0">
@@ -3852,7 +3632,7 @@
                 <a:ea typeface="Arial Unicode MS"/>
                 <a:cs typeface="Arial Unicode MS"/>
               </a:rPr>
-              <a:t>。
+              <a:t>的。
 </a:t>
             </a:r>
           </a:p>
@@ -3874,7 +3654,7 @@
                 <a:ea typeface="Arial Unicode MS"/>
                 <a:cs typeface="Arial Unicode MS"/>
               </a:rPr>
-              <a:t>現在看中間那一欄。光達和雷達是</a:t>
+              <a:t>請注意那個箭頭是雙向的，而且左邊那一站不見了，沒有太陽了。為什麼？因為訊號</a:t>
             </a:r>
             <a:r>
               <a:rPr sz="1000" b="1" lang="zh-TW" dirty="0">
@@ -3885,7 +3665,7 @@
                 <a:ea typeface="Arial Unicode MS"/>
                 <a:cs typeface="Arial Unicode MS"/>
               </a:rPr>
-              <a:t>主動</a:t>
+              <a:t>是它自己發出去的</a:t>
             </a:r>
             <a:r>
               <a:rPr sz="1000" lang="zh-TW" dirty="0">
@@ -3896,7 +3676,7 @@
                 <a:ea typeface="Arial Unicode MS"/>
                 <a:cs typeface="Arial Unicode MS"/>
               </a:rPr>
-              <a:t>的。
+              <a:t>。光達自己打雷射，雷達自己發電磁波，打到人身上再彈回來，它自己接。
 </a:t>
             </a:r>
           </a:p>
@@ -3918,7 +3698,29 @@
                 <a:ea typeface="Arial Unicode MS"/>
                 <a:cs typeface="Arial Unicode MS"/>
               </a:rPr>
-              <a:t>（指著那個雙向箭頭。）
+              <a:t>用一句話講：</a:t>
+            </a:r>
+            <a:r>
+              <a:rPr sz="1000" b="1" lang="zh-TW" dirty="0">
+                <a:solidFill>
+                  <a:srgbClr val="000000"/>
+                </a:solidFill>
+                <a:latin typeface="Arial Unicode MS"/>
+                <a:ea typeface="Arial Unicode MS"/>
+                <a:cs typeface="Arial Unicode MS"/>
+              </a:rPr>
+              <a:t>它自己帶手電筒。</a:t>
+            </a:r>
+            <a:r>
+              <a:rPr sz="1000" lang="zh-TW" dirty="0">
+                <a:solidFill>
+                  <a:srgbClr val="000000"/>
+                </a:solidFill>
+                <a:latin typeface="Arial Unicode MS"/>
+                <a:ea typeface="Arial Unicode MS"/>
+                <a:cs typeface="Arial Unicode MS"/>
+              </a:rPr>
+              <a:t>
 </a:t>
             </a:r>
           </a:p>
@@ -3940,29 +3742,7 @@
                 <a:ea typeface="Arial Unicode MS"/>
                 <a:cs typeface="Arial Unicode MS"/>
               </a:rPr>
-              <a:t>請注意這個箭頭是雙向的，而且左邊那一站不見了——沒有太陽了。為什麼？因為訊號</a:t>
-            </a:r>
-            <a:r>
-              <a:rPr sz="1000" b="1" lang="zh-TW" dirty="0">
-                <a:solidFill>
-                  <a:srgbClr val="000000"/>
-                </a:solidFill>
-                <a:latin typeface="Arial Unicode MS"/>
-                <a:ea typeface="Arial Unicode MS"/>
-                <a:cs typeface="Arial Unicode MS"/>
-              </a:rPr>
-              <a:t>是它自己發出去的</a:t>
-            </a:r>
-            <a:r>
-              <a:rPr sz="1000" lang="zh-TW" dirty="0">
-                <a:solidFill>
-                  <a:srgbClr val="000000"/>
-                </a:solidFill>
-                <a:latin typeface="Arial Unicode MS"/>
-                <a:ea typeface="Arial Unicode MS"/>
-                <a:cs typeface="Arial Unicode MS"/>
-              </a:rPr>
-              <a:t>。光達自己打雷射，雷達自己發電磁波，打到人身上再彈回來，它自己接。
+              <a:t>手電筒是自己帶的，那白天晚上有差嗎？
 </a:t>
             </a:r>
           </a:p>
@@ -3984,7 +3764,7 @@
                 <a:ea typeface="Arial Unicode MS"/>
                 <a:cs typeface="Arial Unicode MS"/>
               </a:rPr>
-              <a:t>用一句話講：</a:t>
+              <a:t>完全沒有差。等一下大家操作的時候會看到，切到夜間，光達的點數和雷達的距離</a:t>
             </a:r>
             <a:r>
               <a:rPr sz="1000" b="1" lang="zh-TW" dirty="0">
@@ -3995,7 +3775,7 @@
                 <a:ea typeface="Arial Unicode MS"/>
                 <a:cs typeface="Arial Unicode MS"/>
               </a:rPr>
-              <a:t>它自己帶手電筒。</a:t>
+              <a:t>一個數字都不會動</a:t>
             </a:r>
             <a:r>
               <a:rPr sz="1000" lang="zh-TW" dirty="0">
@@ -4006,7 +3786,7 @@
                 <a:ea typeface="Arial Unicode MS"/>
                 <a:cs typeface="Arial Unicode MS"/>
               </a:rPr>
-              <a:t>
+              <a:t>。
 </a:t>
             </a:r>
           </a:p>
@@ -4028,7 +3808,7 @@
                 <a:ea typeface="Arial Unicode MS"/>
                 <a:cs typeface="Arial Unicode MS"/>
               </a:rPr>
-              <a:t>手電筒是自己帶的，所以白天晚上有差嗎？
+              <a:t>最後看右邊那一欄。熱像更特別，它連手電筒都不用帶。
 </a:t>
             </a:r>
           </a:p>
@@ -4050,7 +3830,29 @@
                 <a:ea typeface="Arial Unicode MS"/>
                 <a:cs typeface="Arial Unicode MS"/>
               </a:rPr>
-              <a:t>（等學生回答。預期：沒有差。）
+              <a:t>大家看那個人身上那幾圈波紋，因為</a:t>
+            </a:r>
+            <a:r>
+              <a:rPr sz="1000" b="1" lang="zh-TW" dirty="0">
+                <a:solidFill>
+                  <a:srgbClr val="000000"/>
+                </a:solidFill>
+                <a:latin typeface="Arial Unicode MS"/>
+                <a:ea typeface="Arial Unicode MS"/>
+                <a:cs typeface="Arial Unicode MS"/>
+              </a:rPr>
+              <a:t>發出訊號的是那個人自己</a:t>
+            </a:r>
+            <a:r>
+              <a:rPr sz="1000" lang="zh-TW" dirty="0">
+                <a:solidFill>
+                  <a:srgbClr val="000000"/>
+                </a:solidFill>
+                <a:latin typeface="Arial Unicode MS"/>
+                <a:ea typeface="Arial Unicode MS"/>
+                <a:cs typeface="Arial Unicode MS"/>
+              </a:rPr>
+              <a:t>。人的體溫三十七度，只要活著就一直在放紅外線，二十四小時不停。熱像機要做的事，就是把這些本來就存在的紅外線收下來。
 </a:t>
             </a:r>
           </a:p>
@@ -4072,7 +3874,7 @@
                 <a:ea typeface="Arial Unicode MS"/>
                 <a:cs typeface="Arial Unicode MS"/>
               </a:rPr>
-              <a:t>完全沒有差。等一下你們操作的時候會看到，切到夜間，光達的點數和雷達的距離</a:t>
+              <a:t>所以晚上它不但不會變差，反而</a:t>
             </a:r>
             <a:r>
               <a:rPr sz="1000" b="1" lang="zh-TW" dirty="0">
@@ -4083,7 +3885,7 @@
                 <a:ea typeface="Arial Unicode MS"/>
                 <a:cs typeface="Arial Unicode MS"/>
               </a:rPr>
-              <a:t>一個數字都不會動</a:t>
+              <a:t>更好</a:t>
             </a:r>
             <a:r>
               <a:rPr sz="1000" lang="zh-TW" dirty="0">
@@ -4094,7 +3896,7 @@
                 <a:ea typeface="Arial Unicode MS"/>
                 <a:cs typeface="Arial Unicode MS"/>
               </a:rPr>
-              <a:t>。
+              <a:t>。為什麼？白天太陽把柏油路曬到五、六十度，比人還熱，人跟背景的溫度差不多，就分不出來了；晚上路面涼下來，人是整條路上最熱的東西，一下子就跳出來。
 </a:t>
             </a:r>
           </a:p>
@@ -4116,7 +3918,7 @@
                 <a:ea typeface="Arial Unicode MS"/>
                 <a:cs typeface="Arial Unicode MS"/>
               </a:rPr>
-              <a:t>最後看右邊那一欄。熱像更特別——它連手電筒都不用帶。
+              <a:t>打個比方：白天找人像在吵鬧的市場裡喊一個人的名字，晚上像在安靜的圖書館裡喊。聲音一樣大，但是晚上聽得清楚多了。
 </a:t>
             </a:r>
           </a:p>
@@ -4138,7 +3940,7 @@
                 <a:ea typeface="Arial Unicode MS"/>
                 <a:cs typeface="Arial Unicode MS"/>
               </a:rPr>
-              <a:t>（指著人身上那幾圈波紋。）
+              <a:t>好，把三欄合起來看。同樣是天黑，相機那一欄是紅色的，另外兩欄是綠色的。
 </a:t>
             </a:r>
           </a:p>
@@ -4160,29 +3962,7 @@
                 <a:ea typeface="Arial Unicode MS"/>
                 <a:cs typeface="Arial Unicode MS"/>
               </a:rPr>
-              <a:t>因為</a:t>
-            </a:r>
-            <a:r>
-              <a:rPr sz="1000" b="1" lang="zh-TW" dirty="0">
-                <a:solidFill>
-                  <a:srgbClr val="000000"/>
-                </a:solidFill>
-                <a:latin typeface="Arial Unicode MS"/>
-                <a:ea typeface="Arial Unicode MS"/>
-                <a:cs typeface="Arial Unicode MS"/>
-              </a:rPr>
-              <a:t>發出訊號的是那個人自己</a:t>
-            </a:r>
-            <a:r>
-              <a:rPr sz="1000" lang="zh-TW" dirty="0">
-                <a:solidFill>
-                  <a:srgbClr val="000000"/>
-                </a:solidFill>
-                <a:latin typeface="Arial Unicode MS"/>
-                <a:ea typeface="Arial Unicode MS"/>
-                <a:cs typeface="Arial Unicode MS"/>
-              </a:rPr>
-              <a:t>。人的體溫三十七度，只要活著就一直在放紅外線，二十四小時不停。熱像機要做的事，就是把這些本來就存在的紅外線收下來。
+              <a:t>現在大家可以回答一個常常被問到的問題：為什麼自駕車不能只裝相機就好？
 </a:t>
             </a:r>
           </a:p>
@@ -4204,139 +3984,7 @@
                 <a:ea typeface="Arial Unicode MS"/>
                 <a:cs typeface="Arial Unicode MS"/>
               </a:rPr>
-              <a:t>所以晚上它不但不會變差，反而</a:t>
-            </a:r>
-            <a:r>
-              <a:rPr sz="1000" b="1" lang="zh-TW" dirty="0">
-                <a:solidFill>
-                  <a:srgbClr val="000000"/>
-                </a:solidFill>
-                <a:latin typeface="Arial Unicode MS"/>
-                <a:ea typeface="Arial Unicode MS"/>
-                <a:cs typeface="Arial Unicode MS"/>
-              </a:rPr>
-              <a:t>更好</a:t>
-            </a:r>
-            <a:r>
-              <a:rPr sz="1000" lang="zh-TW" dirty="0">
-                <a:solidFill>
-                  <a:srgbClr val="000000"/>
-                </a:solidFill>
-                <a:latin typeface="Arial Unicode MS"/>
-                <a:ea typeface="Arial Unicode MS"/>
-                <a:cs typeface="Arial Unicode MS"/>
-              </a:rPr>
-              <a:t>。為什麼？白天太陽把柏油路曬到五、六十度，比人還熱，人跟背景的溫度差不多，就分不出來了；晚上路面涼下來，人是整條路上最熱的東西，一下子就跳出來。
-</a:t>
-            </a:r>
-          </a:p>
-          <a:p>
-            <a:pPr algn="l">
-              <a:lnSpc>
-                <a:spcPct val="115000"/>
-              </a:lnSpc>
-              <a:spcAft>
-                <a:spcPts val="500"/>
-              </a:spcAft>
-            </a:pPr>
-            <a:r>
-              <a:rPr sz="1000" lang="zh-TW" dirty="0">
-                <a:solidFill>
-                  <a:srgbClr val="000000"/>
-                </a:solidFill>
-                <a:latin typeface="Arial Unicode MS"/>
-                <a:ea typeface="Arial Unicode MS"/>
-                <a:cs typeface="Arial Unicode MS"/>
-              </a:rPr>
-              <a:t>（這裡可以用一個比喻：白天找人像在吵鬧的市場裡喊一個人的名字，晚上像在安靜的圖書館裡喊——聲音一樣大，但晚上聽得清楚多了。）
-</a:t>
-            </a:r>
-          </a:p>
-          <a:p>
-            <a:pPr algn="l">
-              <a:lnSpc>
-                <a:spcPct val="115000"/>
-              </a:lnSpc>
-              <a:spcAft>
-                <a:spcPts val="500"/>
-              </a:spcAft>
-            </a:pPr>
-            <a:r>
-              <a:rPr sz="1000" lang="zh-TW" dirty="0">
-                <a:solidFill>
-                  <a:srgbClr val="000000"/>
-                </a:solidFill>
-                <a:latin typeface="Arial Unicode MS"/>
-                <a:ea typeface="Arial Unicode MS"/>
-                <a:cs typeface="Arial Unicode MS"/>
-              </a:rPr>
-              <a:t>好，把三欄合起來看。同樣是天黑，相機那一欄是紅色的，另外兩欄是綠色的。
-</a:t>
-            </a:r>
-          </a:p>
-          <a:p>
-            <a:pPr algn="l">
-              <a:lnSpc>
-                <a:spcPct val="115000"/>
-              </a:lnSpc>
-              <a:spcAft>
-                <a:spcPts val="500"/>
-              </a:spcAft>
-            </a:pPr>
-            <a:r>
-              <a:rPr sz="1000" lang="zh-TW" dirty="0">
-                <a:solidFill>
-                  <a:srgbClr val="000000"/>
-                </a:solidFill>
-                <a:latin typeface="Arial Unicode MS"/>
-                <a:ea typeface="Arial Unicode MS"/>
-                <a:cs typeface="Arial Unicode MS"/>
-              </a:rPr>
-              <a:t>現在大家可以回答一個常被問的問題：為什麼自駕車不能只裝相機就好？
-</a:t>
-            </a:r>
-          </a:p>
-          <a:p>
-            <a:pPr algn="l">
-              <a:lnSpc>
-                <a:spcPct val="115000"/>
-              </a:lnSpc>
-              <a:spcAft>
-                <a:spcPts val="500"/>
-              </a:spcAft>
-            </a:pPr>
-            <a:r>
-              <a:rPr sz="1000" lang="zh-TW" dirty="0">
-                <a:solidFill>
-                  <a:srgbClr val="000000"/>
-                </a:solidFill>
-                <a:latin typeface="Arial Unicode MS"/>
-                <a:ea typeface="Arial Unicode MS"/>
-                <a:cs typeface="Arial Unicode MS"/>
-              </a:rPr>
-              <a:t>（預期答案：天一黑就什麼都看不到了。）
-</a:t>
-            </a:r>
-          </a:p>
-          <a:p>
-            <a:pPr algn="l">
-              <a:lnSpc>
-                <a:spcPct val="115000"/>
-              </a:lnSpc>
-              <a:spcAft>
-                <a:spcPts val="500"/>
-              </a:spcAft>
-            </a:pPr>
-            <a:r>
-              <a:rPr sz="1000" lang="zh-TW" dirty="0">
-                <a:solidFill>
-                  <a:srgbClr val="000000"/>
-                </a:solidFill>
-                <a:latin typeface="Arial Unicode MS"/>
-                <a:ea typeface="Arial Unicode MS"/>
-                <a:cs typeface="Arial Unicode MS"/>
-              </a:rPr>
-              <a:t>對。不過我要補一句，這只是理由之一，還有別的。等一下第五輪你們會看到另一個。</a:t>
+              <a:t>因為天一黑，它就什麼都看不到了。不過我要補一句，這只是理由之一，還有別的。等一下第五輪大家會看到另一個。</a:t>
             </a:r>
           </a:p>
         </p:txBody>
@@ -4445,11 +4093,11 @@
                 <a:spcPct val="115000"/>
               </a:lnSpc>
               <a:spcAft>
-                <a:spcPts val="500"/>
+                <a:spcPts val="525"/>
               </a:spcAft>
             </a:pPr>
             <a:r>
-              <a:rPr sz="1000" lang="zh-TW" dirty="0">
+              <a:rPr sz="1050" lang="zh-TW" dirty="0">
                 <a:solidFill>
                   <a:srgbClr val="000000"/>
                 </a:solidFill>
@@ -4467,19 +4115,19 @@
                 <a:spcPct val="115000"/>
               </a:lnSpc>
               <a:spcAft>
-                <a:spcPts val="500"/>
+                <a:spcPts val="525"/>
               </a:spcAft>
             </a:pPr>
             <a:r>
-              <a:rPr sz="1000" lang="zh-TW" dirty="0">
-                <a:solidFill>
-                  <a:srgbClr val="000000"/>
-                </a:solidFill>
-                <a:latin typeface="Arial Unicode MS"/>
-                <a:ea typeface="Arial Unicode MS"/>
-                <a:cs typeface="Arial Unicode MS"/>
-              </a:rPr>
-              <a:t>（預期結果：相機掉到 16 m，40 m 的行人看不到；光達從 100 m 掉到 45 m，點數從 15 掉到 6；熱像從 143 m 掉到 90 m，但 40 m 的人仍看得到；雷達 225 m，照常工作。）
+              <a:rPr sz="1050" lang="zh-TW" dirty="0">
+                <a:solidFill>
+                  <a:srgbClr val="000000"/>
+                </a:solidFill>
+                <a:latin typeface="Arial Unicode MS"/>
+                <a:ea typeface="Arial Unicode MS"/>
+                <a:cs typeface="Arial Unicode MS"/>
+              </a:rPr>
+              <a:t>看結果。相機掉到十六公尺，四十公尺的行人看不到了。光達從一百公尺掉到四十五公尺，點數從十五掉到六。熱像從一百四十三掉到九十公尺，不過四十公尺的人還是看得到。雷達兩百二十五公尺，照常工作。
 </a:t>
             </a:r>
           </a:p>
@@ -4489,19 +4137,19 @@
                 <a:spcPct val="115000"/>
               </a:lnSpc>
               <a:spcAft>
-                <a:spcPts val="500"/>
+                <a:spcPts val="525"/>
               </a:spcAft>
             </a:pPr>
             <a:r>
-              <a:rPr sz="1000" lang="zh-TW" dirty="0">
-                <a:solidFill>
-                  <a:srgbClr val="000000"/>
-                </a:solidFill>
-                <a:latin typeface="Arial Unicode MS"/>
-                <a:ea typeface="Arial Unicode MS"/>
-                <a:cs typeface="Arial Unicode MS"/>
-              </a:rPr>
-              <a:t>這次跟夜間差在哪裡？
+              <a:rPr sz="1050" lang="zh-TW" dirty="0">
+                <a:solidFill>
+                  <a:srgbClr val="000000"/>
+                </a:solidFill>
+                <a:latin typeface="Arial Unicode MS"/>
+                <a:ea typeface="Arial Unicode MS"/>
+                <a:cs typeface="Arial Unicode MS"/>
+              </a:rPr>
+              <a:t>這一次跟夜間差在哪裡？
 </a:t>
             </a:r>
           </a:p>
@@ -4511,19 +4159,19 @@
                 <a:spcPct val="115000"/>
               </a:lnSpc>
               <a:spcAft>
-                <a:spcPts val="500"/>
+                <a:spcPts val="525"/>
               </a:spcAft>
             </a:pPr>
             <a:r>
-              <a:rPr sz="1000" lang="zh-TW" dirty="0">
-                <a:solidFill>
-                  <a:srgbClr val="000000"/>
-                </a:solidFill>
-                <a:latin typeface="Arial Unicode MS"/>
-                <a:ea typeface="Arial Unicode MS"/>
-                <a:cs typeface="Arial Unicode MS"/>
-              </a:rPr>
-              <a:t>（預期答案：夜間只有相機壞；濃霧是相機、光達、熱像三個一起變差。）
+              <a:rPr sz="1050" lang="zh-TW" dirty="0">
+                <a:solidFill>
+                  <a:srgbClr val="000000"/>
+                </a:solidFill>
+                <a:latin typeface="Arial Unicode MS"/>
+                <a:ea typeface="Arial Unicode MS"/>
+                <a:cs typeface="Arial Unicode MS"/>
+              </a:rPr>
+              <a:t>夜間只有相機壞掉，濃霧是相機、光達、熱像三個一起變差。所以濃霧比夜間廣，因為它同時打擊三種。
 </a:t>
             </a:r>
           </a:p>
@@ -4533,19 +4181,19 @@
                 <a:spcPct val="115000"/>
               </a:lnSpc>
               <a:spcAft>
-                <a:spcPts val="500"/>
+                <a:spcPts val="525"/>
               </a:spcAft>
             </a:pPr>
             <a:r>
-              <a:rPr sz="1000" lang="zh-TW" dirty="0">
-                <a:solidFill>
-                  <a:srgbClr val="000000"/>
-                </a:solidFill>
-                <a:latin typeface="Arial Unicode MS"/>
-                <a:ea typeface="Arial Unicode MS"/>
-                <a:cs typeface="Arial Unicode MS"/>
-              </a:rPr>
-              <a:t>對。濃霧比夜間廣，因為它同時打擊三種。
+              <a:rPr sz="1050" lang="zh-TW" dirty="0">
+                <a:solidFill>
+                  <a:srgbClr val="000000"/>
+                </a:solidFill>
+                <a:latin typeface="Arial Unicode MS"/>
+                <a:ea typeface="Arial Unicode MS"/>
+                <a:cs typeface="Arial Unicode MS"/>
+              </a:rPr>
+              <a:t>為什麼？霧是空氣裡面懸浮的小水滴。光達打出去的雷射碰到水滴就被散射掉，有一部分還沒到達行人就散掉了，所以有效距離從一百公尺掉到四十五公尺，點數從十五掉到六，少了一半以上。熱像從一百四十三掉到九十公尺，紅外線也會被水氣吸收；不過它底子厚，四十公尺的人還是看得到。
 </a:t>
             </a:r>
           </a:p>
@@ -4555,19 +4203,19 @@
                 <a:spcPct val="115000"/>
               </a:lnSpc>
               <a:spcAft>
-                <a:spcPts val="500"/>
+                <a:spcPts val="525"/>
               </a:spcAft>
             </a:pPr>
             <a:r>
-              <a:rPr sz="1000" lang="zh-TW" dirty="0">
-                <a:solidFill>
-                  <a:srgbClr val="000000"/>
-                </a:solidFill>
-                <a:latin typeface="Arial Unicode MS"/>
-                <a:ea typeface="Arial Unicode MS"/>
-                <a:cs typeface="Arial Unicode MS"/>
-              </a:rPr>
-              <a:t>為什麼？霧是空氣裡懸浮的小水滴。光達打出去的雷射碰到水滴就被散射，有一部分還沒到達行人就散掉了，所以有效距離從一百公尺掉到四十五公尺，點數從十五掉到六——少了一半以上。熱像從一百四十三掉到九十公尺，紅外線也會被水氣吸收；不過它底子厚，四十公尺的人還是看得到。
+              <a:rPr sz="1050" lang="zh-TW" dirty="0">
+                <a:solidFill>
+                  <a:srgbClr val="000000"/>
+                </a:solidFill>
+                <a:latin typeface="Arial Unicode MS"/>
+                <a:ea typeface="Arial Unicode MS"/>
+                <a:cs typeface="Arial Unicode MS"/>
+              </a:rPr>
+              <a:t>請注意這個差別：光達是「還看得到但是變糊」，相機是「整個看不到」，熱像是「掉了四成但還夠用」。三種變差的程度不一樣。
 </a:t>
             </a:r>
           </a:p>
@@ -4577,19 +4225,19 @@
                 <a:spcPct val="115000"/>
               </a:lnSpc>
               <a:spcAft>
-                <a:spcPts val="500"/>
+                <a:spcPts val="525"/>
               </a:spcAft>
             </a:pPr>
             <a:r>
-              <a:rPr sz="1000" lang="zh-TW" dirty="0">
-                <a:solidFill>
-                  <a:srgbClr val="000000"/>
-                </a:solidFill>
-                <a:latin typeface="Arial Unicode MS"/>
-                <a:ea typeface="Arial Unicode MS"/>
-                <a:cs typeface="Arial Unicode MS"/>
-              </a:rPr>
-              <a:t>請注意這個差別：光達是「還看得到但變糊」，相機是「整個看不到」，熱像是「掉了四成但還夠用」。三種變差的程度不一樣。
+              <a:rPr sz="1050" lang="zh-TW" dirty="0">
+                <a:solidFill>
+                  <a:srgbClr val="000000"/>
+                </a:solidFill>
+                <a:latin typeface="Arial Unicode MS"/>
+                <a:ea typeface="Arial Unicode MS"/>
+                <a:cs typeface="Arial Unicode MS"/>
+              </a:rPr>
+              <a:t>那誰幾乎沒事？雷達，兩百二十五公尺。
 </a:t>
             </a:r>
           </a:p>
@@ -4599,19 +4247,19 @@
                 <a:spcPct val="115000"/>
               </a:lnSpc>
               <a:spcAft>
-                <a:spcPts val="500"/>
+                <a:spcPts val="525"/>
               </a:spcAft>
             </a:pPr>
             <a:r>
-              <a:rPr sz="1000" lang="zh-TW" dirty="0">
-                <a:solidFill>
-                  <a:srgbClr val="000000"/>
-                </a:solidFill>
-                <a:latin typeface="Arial Unicode MS"/>
-                <a:ea typeface="Arial Unicode MS"/>
-                <a:cs typeface="Arial Unicode MS"/>
-              </a:rPr>
-              <a:t>那誰幾乎沒事？雷達。兩百二十五公尺。
+              <a:rPr sz="1050" lang="zh-TW" dirty="0">
+                <a:solidFill>
+                  <a:srgbClr val="000000"/>
+                </a:solidFill>
+                <a:latin typeface="Arial Unicode MS"/>
+                <a:ea typeface="Arial Unicode MS"/>
+                <a:cs typeface="Arial Unicode MS"/>
+              </a:rPr>
+              <a:t>為什麼雷達不怕霧？因為它用的電磁波波長比水滴大很多。波長比障礙物大的時候，波會直接繞過去。這就像海浪碰到一根細竹竿不會被擋住，碰到一堵牆才會。
 </a:t>
             </a:r>
           </a:p>
@@ -4621,41 +4269,19 @@
                 <a:spcPct val="115000"/>
               </a:lnSpc>
               <a:spcAft>
-                <a:spcPts val="500"/>
+                <a:spcPts val="525"/>
               </a:spcAft>
             </a:pPr>
             <a:r>
-              <a:rPr sz="1000" lang="zh-TW" dirty="0">
-                <a:solidFill>
-                  <a:srgbClr val="000000"/>
-                </a:solidFill>
-                <a:latin typeface="Arial Unicode MS"/>
-                <a:ea typeface="Arial Unicode MS"/>
-                <a:cs typeface="Arial Unicode MS"/>
-              </a:rPr>
-              <a:t>為什麼雷達不怕霧？因為它用的電磁波波長比水滴大很多——波長比障礙物大的時候，波會直接繞過去。這就像海浪碰到一根細竹竿不會被擋住，碰到一堵牆才會。
-</a:t>
-            </a:r>
-          </a:p>
-          <a:p>
-            <a:pPr algn="l">
-              <a:lnSpc>
-                <a:spcPct val="115000"/>
-              </a:lnSpc>
-              <a:spcAft>
-                <a:spcPts val="500"/>
-              </a:spcAft>
-            </a:pPr>
-            <a:r>
-              <a:rPr sz="1000" lang="zh-TW" dirty="0">
-                <a:solidFill>
-                  <a:srgbClr val="000000"/>
-                </a:solidFill>
-                <a:latin typeface="Arial Unicode MS"/>
-                <a:ea typeface="Arial Unicode MS"/>
-                <a:cs typeface="Arial Unicode MS"/>
-              </a:rPr>
-              <a:t>所以雷達是惡劣天氣裡最可靠的。可是別忘了第一節的結論——它給的東西最少。</a:t>
+              <a:rPr sz="1050" lang="zh-TW" dirty="0">
+                <a:solidFill>
+                  <a:srgbClr val="000000"/>
+                </a:solidFill>
+                <a:latin typeface="Arial Unicode MS"/>
+                <a:ea typeface="Arial Unicode MS"/>
+                <a:cs typeface="Arial Unicode MS"/>
+              </a:rPr>
+              <a:t>所以雷達是惡劣天氣裡最可靠的。可是別忘了第一節的結論，它給的東西最少。</a:t>
             </a:r>
           </a:p>
         </p:txBody>
@@ -4776,7 +4402,7 @@
                 <a:ea typeface="Arial Unicode MS"/>
                 <a:cs typeface="Arial Unicode MS"/>
               </a:rPr>
-              <a:t>剛剛的濃霧是比較極端的狀況，台灣和越南一年碰不到幾次。這一輪我們看最常見的——</a:t>
+              <a:t>剛剛的濃霧是比較極端的狀況，台灣和越南一年碰不到幾次。這一輪我們看最常見的，</a:t>
             </a:r>
             <a:r>
               <a:rPr sz="1000" b="1" lang="zh-TW" dirty="0">
@@ -4842,7 +4468,7 @@
                 <a:ea typeface="Arial Unicode MS"/>
                 <a:cs typeface="Arial Unicode MS"/>
               </a:rPr>
-              <a:t>請第三位同學上來。行人留在四十公尺，然後照順序按四次。
+              <a:t>請第三位同學上來。行人留在四十公尺，然後照順序按四次。我把四列數字寫在白板上。
 </a:t>
             </a:r>
           </a:p>
@@ -4864,7 +4490,7 @@
                 <a:ea typeface="Arial Unicode MS"/>
                 <a:cs typeface="Arial Unicode MS"/>
               </a:rPr>
-              <a:t>（預期讀值，請在白板上排成四列：
+              <a:t>晴天：相機正負零點五八、寫「行人」；光達十五點；雷達四十點零；熱像十五像素。
 </a:t>
             </a:r>
           </a:p>
@@ -4886,7 +4512,7 @@
                 <a:ea typeface="Arial Unicode MS"/>
                 <a:cs typeface="Arial Unicode MS"/>
               </a:rPr>
-              <a:t>晴天：　相機 ±0.58 行人、光達 15 點、雷達 40.0、熱像 15 px
+              <a:t>小雨：相機一樣正負零點五八；光達十三點；雷達四十點零；熱像十五像素。
 </a:t>
             </a:r>
           </a:p>
@@ -4908,7 +4534,7 @@
                 <a:ea typeface="Arial Unicode MS"/>
                 <a:cs typeface="Arial Unicode MS"/>
               </a:rPr>
-              <a:t>小雨：　相機 ±0.58 行人、光達 13 點、雷達 40.0、熱像 15 px
+              <a:t>中雨：相機還是正負零點五八；光達九點；雷達四十點零；熱像十五像素。
 </a:t>
             </a:r>
           </a:p>
@@ -4930,7 +4556,29 @@
                 <a:ea typeface="Arial Unicode MS"/>
                 <a:cs typeface="Arial Unicode MS"/>
               </a:rPr>
-              <a:t>中雨：　相機 ±0.58 行人、光達 9 點、雷達 40.0、熱像 15 px
+              <a:t>大雨：相機</a:t>
+            </a:r>
+            <a:r>
+              <a:rPr sz="1000" b="1" lang="zh-TW" dirty="0">
+                <a:solidFill>
+                  <a:srgbClr val="000000"/>
+                </a:solidFill>
+                <a:latin typeface="Arial Unicode MS"/>
+                <a:ea typeface="Arial Unicode MS"/>
+                <a:cs typeface="Arial Unicode MS"/>
+              </a:rPr>
+              <a:t>整張卡不見了</a:t>
+            </a:r>
+            <a:r>
+              <a:rPr sz="1000" lang="zh-TW" dirty="0">
+                <a:solidFill>
+                  <a:srgbClr val="000000"/>
+                </a:solidFill>
+                <a:latin typeface="Arial Unicode MS"/>
+                <a:ea typeface="Arial Unicode MS"/>
+                <a:cs typeface="Arial Unicode MS"/>
+              </a:rPr>
+              <a:t>；光達六點；雷達四十點零；熱像十五像素。
 </a:t>
             </a:r>
           </a:p>
@@ -4952,29 +4600,7 @@
                 <a:ea typeface="Arial Unicode MS"/>
                 <a:cs typeface="Arial Unicode MS"/>
               </a:rPr>
-              <a:t>大雨：　相機 </a:t>
-            </a:r>
-            <a:r>
-              <a:rPr sz="1000" b="1" lang="zh-TW" dirty="0">
-                <a:solidFill>
-                  <a:srgbClr val="000000"/>
-                </a:solidFill>
-                <a:latin typeface="Arial Unicode MS"/>
-                <a:ea typeface="Arial Unicode MS"/>
-                <a:cs typeface="Arial Unicode MS"/>
-              </a:rPr>
-              <a:t>整張卡消失</a:t>
-            </a:r>
-            <a:r>
-              <a:rPr sz="1000" lang="zh-TW" dirty="0">
-                <a:solidFill>
-                  <a:srgbClr val="000000"/>
-                </a:solidFill>
-                <a:latin typeface="Arial Unicode MS"/>
-                <a:ea typeface="Arial Unicode MS"/>
-                <a:cs typeface="Arial Unicode MS"/>
-              </a:rPr>
-              <a:t>、光達 6 點、雷達 40.0、熱像 15 px）
+              <a:t>第一題。從晴天按到中雨，相機的誤差有沒有變？
 </a:t>
             </a:r>
           </a:p>
@@ -4996,7 +4622,29 @@
                 <a:ea typeface="Arial Unicode MS"/>
                 <a:cs typeface="Arial Unicode MS"/>
               </a:rPr>
-              <a:t>第一題。從晴天按到中雨，相機的誤差有沒有變？
+              <a:t>沒有變，一個數字都沒動，一直都是正負零點五八。</a:t>
+            </a:r>
+            <a:r>
+              <a:rPr sz="1000" b="1" lang="zh-TW" dirty="0">
+                <a:solidFill>
+                  <a:srgbClr val="000000"/>
+                </a:solidFill>
+                <a:latin typeface="Arial Unicode MS"/>
+                <a:ea typeface="Arial Unicode MS"/>
+                <a:cs typeface="Arial Unicode MS"/>
+              </a:rPr>
+              <a:t>這件事很多人會猜錯。</a:t>
+            </a:r>
+            <a:r>
+              <a:rPr sz="1000" lang="zh-TW" dirty="0">
+                <a:solidFill>
+                  <a:srgbClr val="000000"/>
+                </a:solidFill>
+                <a:latin typeface="Arial Unicode MS"/>
+                <a:ea typeface="Arial Unicode MS"/>
+                <a:cs typeface="Arial Unicode MS"/>
+              </a:rPr>
+              <a:t>
 </a:t>
             </a:r>
           </a:p>
@@ -5018,7 +4666,51 @@
                 <a:ea typeface="Arial Unicode MS"/>
                 <a:cs typeface="Arial Unicode MS"/>
               </a:rPr>
-              <a:t>（等同學看白板。預期答案：沒有，一直都是正負零點五八。）
+              <a:t>為什麼下雨了相機還是一樣準？因為第二節我們算過，相機的誤差是</a:t>
+            </a:r>
+            <a:r>
+              <a:rPr sz="1000" b="1" lang="zh-TW" dirty="0">
+                <a:solidFill>
+                  <a:srgbClr val="000000"/>
+                </a:solidFill>
+                <a:latin typeface="Arial Unicode MS"/>
+                <a:ea typeface="Arial Unicode MS"/>
+                <a:cs typeface="Arial Unicode MS"/>
+              </a:rPr>
+              <a:t>幾何</a:t>
+            </a:r>
+            <a:r>
+              <a:rPr sz="1000" lang="zh-TW" dirty="0">
+                <a:solidFill>
+                  <a:srgbClr val="000000"/>
+                </a:solidFill>
+                <a:latin typeface="Arial Unicode MS"/>
+                <a:ea typeface="Arial Unicode MS"/>
+                <a:cs typeface="Arial Unicode MS"/>
+              </a:rPr>
+              <a:t>決定的，距離的平方乘每一列的角度，再除以安裝高度。下雨不會改變這台相機的像素數，也不會改變它裝多高。所以只要它</a:t>
+            </a:r>
+            <a:r>
+              <a:rPr sz="1000" b="1" lang="zh-TW" dirty="0">
+                <a:solidFill>
+                  <a:srgbClr val="000000"/>
+                </a:solidFill>
+                <a:latin typeface="Arial Unicode MS"/>
+                <a:ea typeface="Arial Unicode MS"/>
+                <a:cs typeface="Arial Unicode MS"/>
+              </a:rPr>
+              <a:t>還看得到</a:t>
+            </a:r>
+            <a:r>
+              <a:rPr sz="1000" lang="zh-TW" dirty="0">
+                <a:solidFill>
+                  <a:srgbClr val="000000"/>
+                </a:solidFill>
+                <a:latin typeface="Arial Unicode MS"/>
+                <a:ea typeface="Arial Unicode MS"/>
+                <a:cs typeface="Arial Unicode MS"/>
+              </a:rPr>
+              <a:t>那個人，算出來的距離就一樣準。
 </a:t>
             </a:r>
           </a:p>
@@ -5040,7 +4732,7 @@
                 <a:ea typeface="Arial Unicode MS"/>
                 <a:cs typeface="Arial Unicode MS"/>
               </a:rPr>
-              <a:t>沒有變。一個數字都沒動。</a:t>
+              <a:t>那雨到底改變了什麼？改變的是</a:t>
             </a:r>
             <a:r>
               <a:rPr sz="1000" b="1" lang="zh-TW" dirty="0">
@@ -5051,7 +4743,7 @@
                 <a:ea typeface="Arial Unicode MS"/>
                 <a:cs typeface="Arial Unicode MS"/>
               </a:rPr>
-              <a:t>這件事很多人會猜錯。</a:t>
+              <a:t>看得到多遠</a:t>
             </a:r>
             <a:r>
               <a:rPr sz="1000" lang="zh-TW" dirty="0">
@@ -5062,7 +4754,7 @@
                 <a:ea typeface="Arial Unicode MS"/>
                 <a:cs typeface="Arial Unicode MS"/>
               </a:rPr>
-              <a:t>
+              <a:t>。晴天八十公尺，小雨六十四，中雨四十，大雨只剩二十二。我把這四個數字也寫在誤差旁邊。
 </a:t>
             </a:r>
           </a:p>
@@ -5084,51 +4776,7 @@
                 <a:ea typeface="Arial Unicode MS"/>
                 <a:cs typeface="Arial Unicode MS"/>
               </a:rPr>
-              <a:t>為什麼下雨了相機還是一樣準？因為第二節我們算過，相機的誤差是</a:t>
-            </a:r>
-            <a:r>
-              <a:rPr sz="1000" b="1" lang="zh-TW" dirty="0">
-                <a:solidFill>
-                  <a:srgbClr val="000000"/>
-                </a:solidFill>
-                <a:latin typeface="Arial Unicode MS"/>
-                <a:ea typeface="Arial Unicode MS"/>
-                <a:cs typeface="Arial Unicode MS"/>
-              </a:rPr>
-              <a:t>幾何</a:t>
-            </a:r>
-            <a:r>
-              <a:rPr sz="1000" lang="zh-TW" dirty="0">
-                <a:solidFill>
-                  <a:srgbClr val="000000"/>
-                </a:solidFill>
-                <a:latin typeface="Arial Unicode MS"/>
-                <a:ea typeface="Arial Unicode MS"/>
-                <a:cs typeface="Arial Unicode MS"/>
-              </a:rPr>
-              <a:t>決定的——距離的平方乘每像素的角度除以安裝高度。下雨不會改變這台相機的像素數，也不會改變它裝多高。所以只要它</a:t>
-            </a:r>
-            <a:r>
-              <a:rPr sz="1000" b="1" lang="zh-TW" dirty="0">
-                <a:solidFill>
-                  <a:srgbClr val="000000"/>
-                </a:solidFill>
-                <a:latin typeface="Arial Unicode MS"/>
-                <a:ea typeface="Arial Unicode MS"/>
-                <a:cs typeface="Arial Unicode MS"/>
-              </a:rPr>
-              <a:t>還看得到</a:t>
-            </a:r>
-            <a:r>
-              <a:rPr sz="1000" lang="zh-TW" dirty="0">
-                <a:solidFill>
-                  <a:srgbClr val="000000"/>
-                </a:solidFill>
-                <a:latin typeface="Arial Unicode MS"/>
-                <a:ea typeface="Arial Unicode MS"/>
-                <a:cs typeface="Arial Unicode MS"/>
-              </a:rPr>
-              <a:t>那個人，算出來的距離就一樣準。
+              <a:t>第二題，這就是重點了。按到大雨的那一下，相機那張卡怎麼了？
 </a:t>
             </a:r>
           </a:p>
@@ -5150,29 +4798,7 @@
                 <a:ea typeface="Arial Unicode MS"/>
                 <a:cs typeface="Arial Unicode MS"/>
               </a:rPr>
-              <a:t>那雨到底改變了什麼？改變的是</a:t>
-            </a:r>
-            <a:r>
-              <a:rPr sz="1000" b="1" lang="zh-TW" dirty="0">
-                <a:solidFill>
-                  <a:srgbClr val="000000"/>
-                </a:solidFill>
-                <a:latin typeface="Arial Unicode MS"/>
-                <a:ea typeface="Arial Unicode MS"/>
-                <a:cs typeface="Arial Unicode MS"/>
-              </a:rPr>
-              <a:t>看得到多遠</a:t>
-            </a:r>
-            <a:r>
-              <a:rPr sz="1000" lang="zh-TW" dirty="0">
-                <a:solidFill>
-                  <a:srgbClr val="000000"/>
-                </a:solidFill>
-                <a:latin typeface="Arial Unicode MS"/>
-                <a:ea typeface="Arial Unicode MS"/>
-                <a:cs typeface="Arial Unicode MS"/>
-              </a:rPr>
-              <a:t>。晴天八十公尺，小雨六十四，中雨四十，大雨只剩二十二。
+              <a:t>整張消失，變成紅字「超出有效距離」。
 </a:t>
             </a:r>
           </a:p>
@@ -5194,7 +4820,51 @@
                 <a:ea typeface="Arial Unicode MS"/>
                 <a:cs typeface="Arial Unicode MS"/>
               </a:rPr>
-              <a:t>（把這四個數字也寫在白板上，寫在誤差旁邊。）
+              <a:t>注意它</a:t>
+            </a:r>
+            <a:r>
+              <a:rPr sz="1000" b="1" lang="zh-TW" dirty="0">
+                <a:solidFill>
+                  <a:srgbClr val="000000"/>
+                </a:solidFill>
+                <a:latin typeface="Arial Unicode MS"/>
+                <a:ea typeface="Arial Unicode MS"/>
+                <a:cs typeface="Arial Unicode MS"/>
+              </a:rPr>
+              <a:t>不是慢慢變模糊</a:t>
+            </a:r>
+            <a:r>
+              <a:rPr sz="1000" lang="zh-TW" dirty="0">
+                <a:solidFill>
+                  <a:srgbClr val="000000"/>
+                </a:solidFill>
+                <a:latin typeface="Arial Unicode MS"/>
+                <a:ea typeface="Arial Unicode MS"/>
+                <a:cs typeface="Arial Unicode MS"/>
+              </a:rPr>
+              <a:t>，是</a:t>
+            </a:r>
+            <a:r>
+              <a:rPr sz="1000" b="1" lang="zh-TW" dirty="0">
+                <a:solidFill>
+                  <a:srgbClr val="000000"/>
+                </a:solidFill>
+                <a:latin typeface="Arial Unicode MS"/>
+                <a:ea typeface="Arial Unicode MS"/>
+                <a:cs typeface="Arial Unicode MS"/>
+              </a:rPr>
+              <a:t>一下子整個不見</a:t>
+            </a:r>
+            <a:r>
+              <a:rPr sz="1000" lang="zh-TW" dirty="0">
+                <a:solidFill>
+                  <a:srgbClr val="000000"/>
+                </a:solidFill>
+                <a:latin typeface="Arial Unicode MS"/>
+                <a:ea typeface="Arial Unicode MS"/>
+                <a:cs typeface="Arial Unicode MS"/>
+              </a:rPr>
+              <a:t>。因為大雨的時候相機只看得到二十二公尺，而我們的行人站在四十公尺，超出去了，就什麼都沒有。
 </a:t>
             </a:r>
           </a:p>
@@ -5216,7 +4886,29 @@
                 <a:ea typeface="Arial Unicode MS"/>
                 <a:cs typeface="Arial Unicode MS"/>
               </a:rPr>
-              <a:t>第二題，這就是重點了。按到大雨的那一下，相機那張卡怎麼了？
+              <a:t>請大家記住這個現象：</a:t>
+            </a:r>
+            <a:r>
+              <a:rPr sz="1000" b="1" lang="zh-TW" dirty="0">
+                <a:solidFill>
+                  <a:srgbClr val="000000"/>
+                </a:solidFill>
+                <a:latin typeface="Arial Unicode MS"/>
+                <a:ea typeface="Arial Unicode MS"/>
+                <a:cs typeface="Arial Unicode MS"/>
+              </a:rPr>
+              <a:t>感測器失效常常不是慢慢變差，而是到了某一個程度就整個不見。</a:t>
+            </a:r>
+            <a:r>
+              <a:rPr sz="1000" lang="zh-TW" dirty="0">
+                <a:solidFill>
+                  <a:srgbClr val="000000"/>
+                </a:solidFill>
+                <a:latin typeface="Arial Unicode MS"/>
+                <a:ea typeface="Arial Unicode MS"/>
+                <a:cs typeface="Arial Unicode MS"/>
+              </a:rPr>
+              <a:t>前一秒還讀得到數字，雨再大一級就什麼都沒有了。這也是為什麼自駕車不能「看狀況還可以就繼續開」，而是要設一條線，過線就交還給人。
 </a:t>
             </a:r>
           </a:p>
@@ -5238,7 +4930,7 @@
                 <a:ea typeface="Arial Unicode MS"/>
                 <a:cs typeface="Arial Unicode MS"/>
               </a:rPr>
-              <a:t>（預期答案：整張消失，變成紅字「超出有效距離」。）
+              <a:t>如果時間夠，我們做一個小示範。把環境切回中雨，這時候相機的有效距離剛好是四十公尺，行人就站在邊界上。把行人往外拖一公尺，看它消失；再拖回來，看它出現。就在邊界上跳來跳去。真實的車在雨中也會這樣，目標時有時無，這叫閃爍，是很難處理的問題。
 </a:t>
             </a:r>
           </a:p>
@@ -5260,51 +4952,7 @@
                 <a:ea typeface="Arial Unicode MS"/>
                 <a:cs typeface="Arial Unicode MS"/>
               </a:rPr>
-              <a:t>注意它</a:t>
-            </a:r>
-            <a:r>
-              <a:rPr sz="1000" b="1" lang="zh-TW" dirty="0">
-                <a:solidFill>
-                  <a:srgbClr val="000000"/>
-                </a:solidFill>
-                <a:latin typeface="Arial Unicode MS"/>
-                <a:ea typeface="Arial Unicode MS"/>
-                <a:cs typeface="Arial Unicode MS"/>
-              </a:rPr>
-              <a:t>不是慢慢變模糊</a:t>
-            </a:r>
-            <a:r>
-              <a:rPr sz="1000" lang="zh-TW" dirty="0">
-                <a:solidFill>
-                  <a:srgbClr val="000000"/>
-                </a:solidFill>
-                <a:latin typeface="Arial Unicode MS"/>
-                <a:ea typeface="Arial Unicode MS"/>
-                <a:cs typeface="Arial Unicode MS"/>
-              </a:rPr>
-              <a:t>，是</a:t>
-            </a:r>
-            <a:r>
-              <a:rPr sz="1000" b="1" lang="zh-TW" dirty="0">
-                <a:solidFill>
-                  <a:srgbClr val="000000"/>
-                </a:solidFill>
-                <a:latin typeface="Arial Unicode MS"/>
-                <a:ea typeface="Arial Unicode MS"/>
-                <a:cs typeface="Arial Unicode MS"/>
-              </a:rPr>
-              <a:t>一下子整個不見</a:t>
-            </a:r>
-            <a:r>
-              <a:rPr sz="1000" lang="zh-TW" dirty="0">
-                <a:solidFill>
-                  <a:srgbClr val="000000"/>
-                </a:solidFill>
-                <a:latin typeface="Arial Unicode MS"/>
-                <a:ea typeface="Arial Unicode MS"/>
-                <a:cs typeface="Arial Unicode MS"/>
-              </a:rPr>
-              <a:t>。因為大雨的時候相機只看得到二十二公尺，而我們的行人站在四十公尺——超出去了，就什麼都沒有。
+              <a:t>第三題。按了四次，誰從頭到尾動都沒動？
 </a:t>
             </a:r>
           </a:p>
@@ -5326,29 +4974,7 @@
                 <a:ea typeface="Arial Unicode MS"/>
                 <a:cs typeface="Arial Unicode MS"/>
               </a:rPr>
-              <a:t>請大家記住這個現象：</a:t>
-            </a:r>
-            <a:r>
-              <a:rPr sz="1000" b="1" lang="zh-TW" dirty="0">
-                <a:solidFill>
-                  <a:srgbClr val="000000"/>
-                </a:solidFill>
-                <a:latin typeface="Arial Unicode MS"/>
-                <a:ea typeface="Arial Unicode MS"/>
-                <a:cs typeface="Arial Unicode MS"/>
-              </a:rPr>
-              <a:t>感測器失效常常不是慢慢變差，而是到了某一個程度就整個不見。</a:t>
-            </a:r>
-            <a:r>
-              <a:rPr sz="1000" lang="zh-TW" dirty="0">
-                <a:solidFill>
-                  <a:srgbClr val="000000"/>
-                </a:solidFill>
-                <a:latin typeface="Arial Unicode MS"/>
-                <a:ea typeface="Arial Unicode MS"/>
-                <a:cs typeface="Arial Unicode MS"/>
-              </a:rPr>
-              <a:t>前一秒還讀得到數字，雨再大一級就什麼都沒有了。這也是為什麼自駕車不能「看狀況還可以就繼續開」，而是要設一條線，過線就交還給人。
+              <a:t>雷達，一直是四十點零。它的有效距離從兩百五十掉到兩百，聽起來掉了不少，可是四十公尺遠遠在範圍裡面，所以它完全不受影響。這跟第一節講的一樣，毫米波的波長比雨滴大很多，波會繞過去。
 </a:t>
             </a:r>
           </a:p>
@@ -5370,7 +4996,7 @@
                 <a:ea typeface="Arial Unicode MS"/>
                 <a:cs typeface="Arial Unicode MS"/>
               </a:rPr>
-              <a:t>（如果時間夠，做一個小示範：把環境切回中雨，這時相機的有效距離剛好是四十公尺，行人就站在邊界上。把行人往外拖一公尺，看它消失；再拖回來，看它出現。就在邊界上跳來跳去——真實的車在雨中也會這樣，目標時有時無，這叫閃爍，是很難處理的問題。）
+              <a:t>順便看光達：十五、十三、九、六。這個就是慢慢往下掉的，雨每大一點就少一些。因為雨滴會把雷射散射掉一部分，雨愈大散射愈多。
 </a:t>
             </a:r>
           </a:p>
@@ -5392,7 +5018,7 @@
                 <a:ea typeface="Arial Unicode MS"/>
                 <a:cs typeface="Arial Unicode MS"/>
               </a:rPr>
-              <a:t>第三題。按了四次，誰從頭到尾動都沒動？
+              <a:t>所以同一場雨，對三種感測器做了三件不一樣的事：相機是到了某個程度就整個不見，光達是慢慢變少，雷達幾乎沒有變化。
 </a:t>
             </a:r>
           </a:p>
@@ -5414,19 +5040,19 @@
                 <a:ea typeface="Arial Unicode MS"/>
                 <a:cs typeface="Arial Unicode MS"/>
               </a:rPr>
-              <a:t>（預期答案：雷達，一直是四十點零。）
-</a:t>
-            </a:r>
-          </a:p>
-          <a:p>
-            <a:pPr algn="l">
-              <a:lnSpc>
-                <a:spcPct val="115000"/>
-              </a:lnSpc>
-              <a:spcAft>
-                <a:spcPts val="500"/>
-              </a:spcAft>
-            </a:pPr>
+              <a:t>最後補充一件工具沒有模擬、但是大家騎車一定有經驗的事：下雨的時候，前面的車會</a:t>
+            </a:r>
+            <a:r>
+              <a:rPr sz="1000" b="1" lang="zh-TW" dirty="0">
+                <a:solidFill>
+                  <a:srgbClr val="000000"/>
+                </a:solidFill>
+                <a:latin typeface="Arial Unicode MS"/>
+                <a:ea typeface="Arial Unicode MS"/>
+                <a:cs typeface="Arial Unicode MS"/>
+              </a:rPr>
+              <a:t>濺起水花</a:t>
+            </a:r>
             <a:r>
               <a:rPr sz="1000" lang="zh-TW" dirty="0">
                 <a:solidFill>
@@ -5436,96 +5062,7 @@
                 <a:ea typeface="Arial Unicode MS"/>
                 <a:cs typeface="Arial Unicode MS"/>
               </a:rPr>
-              <a:t>對。雷達的有效距離從兩百五十掉到兩百，聽起來掉了不少，但四十公尺遠遠在範圍裡面，所以它完全不受影響。這跟第一節講的一樣：毫米波的波長比雨滴大很多，波會繞過去。
-</a:t>
-            </a:r>
-          </a:p>
-          <a:p>
-            <a:pPr algn="l">
-              <a:lnSpc>
-                <a:spcPct val="115000"/>
-              </a:lnSpc>
-              <a:spcAft>
-                <a:spcPts val="500"/>
-              </a:spcAft>
-            </a:pPr>
-            <a:r>
-              <a:rPr sz="1000" lang="zh-TW" dirty="0">
-                <a:solidFill>
-                  <a:srgbClr val="000000"/>
-                </a:solidFill>
-                <a:latin typeface="Arial Unicode MS"/>
-                <a:ea typeface="Arial Unicode MS"/>
-                <a:cs typeface="Arial Unicode MS"/>
-              </a:rPr>
-              <a:t>順便看光達：十五、十三、九、六。這個就是慢慢往下掉的，雨每大一點就少一些。因為雨滴會把雷射散射掉一部分，雨愈大散射愈多。
-</a:t>
-            </a:r>
-          </a:p>
-          <a:p>
-            <a:pPr algn="l">
-              <a:lnSpc>
-                <a:spcPct val="115000"/>
-              </a:lnSpc>
-              <a:spcAft>
-                <a:spcPts val="500"/>
-              </a:spcAft>
-            </a:pPr>
-            <a:r>
-              <a:rPr sz="1000" lang="zh-TW" dirty="0">
-                <a:solidFill>
-                  <a:srgbClr val="000000"/>
-                </a:solidFill>
-                <a:latin typeface="Arial Unicode MS"/>
-                <a:ea typeface="Arial Unicode MS"/>
-                <a:cs typeface="Arial Unicode MS"/>
-              </a:rPr>
-              <a:t>所以同一場雨，對三種感測器做了三件不一樣的事：相機是到了某個程度就整個不見，光達是慢慢變少，雷達幾乎沒有變化。
-</a:t>
-            </a:r>
-          </a:p>
-          <a:p>
-            <a:pPr algn="l">
-              <a:lnSpc>
-                <a:spcPct val="115000"/>
-              </a:lnSpc>
-              <a:spcAft>
-                <a:spcPts val="500"/>
-              </a:spcAft>
-            </a:pPr>
-            <a:r>
-              <a:rPr sz="1000" lang="zh-TW" dirty="0">
-                <a:solidFill>
-                  <a:srgbClr val="000000"/>
-                </a:solidFill>
-                <a:latin typeface="Arial Unicode MS"/>
-                <a:ea typeface="Arial Unicode MS"/>
-                <a:cs typeface="Arial Unicode MS"/>
-              </a:rPr>
-              <a:t>最後補充一件工具沒有模擬的事，但你們騎車一定有經驗：下雨的時候，前面的車會</a:t>
-            </a:r>
-            <a:r>
-              <a:rPr sz="1000" b="1" lang="zh-TW" dirty="0">
-                <a:solidFill>
-                  <a:srgbClr val="000000"/>
-                </a:solidFill>
-                <a:latin typeface="Arial Unicode MS"/>
-                <a:ea typeface="Arial Unicode MS"/>
-                <a:cs typeface="Arial Unicode MS"/>
-              </a:rPr>
-              <a:t>濺起水花</a:t>
-            </a:r>
-            <a:r>
-              <a:rPr sz="1000" lang="zh-TW" dirty="0">
-                <a:solidFill>
-                  <a:srgbClr val="000000"/>
-                </a:solidFill>
-                <a:latin typeface="Arial Unicode MS"/>
-                <a:ea typeface="Arial Unicode MS"/>
-                <a:cs typeface="Arial Unicode MS"/>
-              </a:rPr>
-              <a:t>。那些水珠對光達來說跟真的障礙物一樣會反射，所以車子可能會「看到」一團根本不存在的東西，然後緊急煞車。這叫假回報，比看不到還麻煩——看不到至少你知道要小心，假的東西會讓車子做出錯誤的動作。
-</a:t>
+              <a:t>。那些水珠對光達來說，跟真的障礙物一樣會反射，所以車子可能會「看到」一團根本不存在的東西，然後緊急煞車。這叫做假回報，比看不到還麻煩——看不到至少你知道要小心，假的東西會讓車子做出錯誤的動作。</a:t>
             </a:r>
           </a:p>
         </p:txBody>
@@ -5690,7 +5227,7 @@
                 <a:ea typeface="Arial Unicode MS"/>
                 <a:cs typeface="Arial Unicode MS"/>
               </a:rPr>
-              <a:t>先講一個生活中的經驗。海邊的消波塊，大浪打過來會被擋住；但如果是很小的漣漪，碰到消波塊會怎樣？
+              <a:t>先講一個生活中的經驗。海邊的消波塊，大浪打過來會被擋住；可是如果是很小的漣漪，碰到消波塊會怎樣？會從旁邊繞過去，幾乎沒有影響。
 </a:t>
             </a:r>
           </a:p>
@@ -5712,7 +5249,7 @@
                 <a:ea typeface="Arial Unicode MS"/>
                 <a:cs typeface="Arial Unicode MS"/>
               </a:rPr>
-              <a:t>（等學生回答。預期：從旁邊繞過去、幾乎沒影響。）
+              <a:t>反過來想也一樣。你在水裡插一根很細的竹竿，大浪根本不理它，直接穿過去。
 </a:t>
             </a:r>
           </a:p>
@@ -5726,6 +5263,17 @@
               </a:spcAft>
             </a:pPr>
             <a:r>
+              <a:rPr sz="1000" b="1" lang="zh-TW" dirty="0">
+                <a:solidFill>
+                  <a:srgbClr val="000000"/>
+                </a:solidFill>
+                <a:latin typeface="Arial Unicode MS"/>
+                <a:ea typeface="Arial Unicode MS"/>
+                <a:cs typeface="Arial Unicode MS"/>
+              </a:rPr>
+              <a:t>波碰到障礙物會不會被擋住，看的是「波的大小」跟「障礙物的大小」誰大誰小。</a:t>
+            </a:r>
+            <a:r>
               <a:rPr sz="1000" lang="zh-TW" dirty="0">
                 <a:solidFill>
                   <a:srgbClr val="000000"/>
@@ -5734,7 +5282,7 @@
                 <a:ea typeface="Arial Unicode MS"/>
                 <a:cs typeface="Arial Unicode MS"/>
               </a:rPr>
-              <a:t>反過來想也一樣：你在水裡插一根很細的竹竿，大浪根本不理它，直接穿過去。
+              <a:t>波比障礙物大，就繞過去；波比障礙物小，就被擋住、被散射。
 </a:t>
             </a:r>
           </a:p>
@@ -5748,6 +5296,17 @@
               </a:spcAft>
             </a:pPr>
             <a:r>
+              <a:rPr sz="1000" lang="zh-TW" dirty="0">
+                <a:solidFill>
+                  <a:srgbClr val="000000"/>
+                </a:solidFill>
+                <a:latin typeface="Arial Unicode MS"/>
+                <a:ea typeface="Arial Unicode MS"/>
+                <a:cs typeface="Arial Unicode MS"/>
+              </a:rPr>
+              <a:t>現在看螢幕這條線。這條線上標的是</a:t>
+            </a:r>
+            <a:r>
               <a:rPr sz="1000" b="1" lang="zh-TW" dirty="0">
                 <a:solidFill>
                   <a:srgbClr val="000000"/>
@@ -5756,7 +5315,7 @@
                 <a:ea typeface="Arial Unicode MS"/>
                 <a:cs typeface="Arial Unicode MS"/>
               </a:rPr>
-              <a:t>波碰到障礙物，會不會被擋住，看的是「波的大小」跟「障礙物的大小」誰大誰小。</a:t>
+              <a:t>尺寸</a:t>
             </a:r>
             <a:r>
               <a:rPr sz="1000" lang="zh-TW" dirty="0">
@@ -5767,7 +5326,7 @@
                 <a:ea typeface="Arial Unicode MS"/>
                 <a:cs typeface="Arial Unicode MS"/>
               </a:rPr>
-              <a:t>波比障礙物大，就繞過去；波比障礙物小，就被擋住、被散射。
+              <a:t>，從左到右愈來愈大，左邊是一微米，也就是一公釐的千分之一，右邊是一公分。請注意這條軸每一格是十倍，不是加十，這樣才畫得下這麼大的範圍。
 </a:t>
             </a:r>
           </a:p>
@@ -5789,7 +5348,7 @@
                 <a:ea typeface="Arial Unicode MS"/>
                 <a:cs typeface="Arial Unicode MS"/>
               </a:rPr>
-              <a:t>現在看螢幕這條線。這條線上標的是</a:t>
+              <a:t>線的上面我標了三個感測器的</a:t>
             </a:r>
             <a:r>
               <a:rPr sz="1000" b="1" lang="zh-TW" dirty="0">
@@ -5800,7 +5359,7 @@
                 <a:ea typeface="Arial Unicode MS"/>
                 <a:cs typeface="Arial Unicode MS"/>
               </a:rPr>
-              <a:t>尺寸</a:t>
+              <a:t>波長</a:t>
             </a:r>
             <a:r>
               <a:rPr sz="1000" lang="zh-TW" dirty="0">
@@ -5811,7 +5370,7 @@
                 <a:ea typeface="Arial Unicode MS"/>
                 <a:cs typeface="Arial Unicode MS"/>
               </a:rPr>
-              <a:t>，從左到右愈來愈大，左邊是一微米——一公釐的千分之一——右邊是一公分。
+              <a:t>。
 </a:t>
             </a:r>
           </a:p>
@@ -5833,7 +5392,29 @@
                 <a:ea typeface="Arial Unicode MS"/>
                 <a:cs typeface="Arial Unicode MS"/>
               </a:rPr>
-              <a:t>（請注意這條軸每一格是十倍，不是加十。這樣才畫得下這麼大的範圍。）
+              <a:t>相機和光達差不多，都在</a:t>
+            </a:r>
+            <a:r>
+              <a:rPr sz="1000" b="1" lang="zh-TW" dirty="0">
+                <a:solidFill>
+                  <a:srgbClr val="000000"/>
+                </a:solidFill>
+                <a:latin typeface="Arial Unicode MS"/>
+                <a:ea typeface="Arial Unicode MS"/>
+                <a:cs typeface="Arial Unicode MS"/>
+              </a:rPr>
+              <a:t>一微米</a:t>
+            </a:r>
+            <a:r>
+              <a:rPr sz="1000" lang="zh-TW" dirty="0">
+                <a:solidFill>
+                  <a:srgbClr val="000000"/>
+                </a:solidFill>
+                <a:latin typeface="Arial Unicode MS"/>
+                <a:ea typeface="Arial Unicode MS"/>
+                <a:cs typeface="Arial Unicode MS"/>
+              </a:rPr>
+              <a:t>左右。相機用的是可見光，光達用的是九百零五奈米的紅外線雷射，兩個都在一微米這附近。
 </a:t>
             </a:r>
           </a:p>
@@ -5855,7 +5436,7 @@
                 <a:ea typeface="Arial Unicode MS"/>
                 <a:cs typeface="Arial Unicode MS"/>
               </a:rPr>
-              <a:t>線的上面我標了三個感測器的</a:t>
+              <a:t>熱像是</a:t>
             </a:r>
             <a:r>
               <a:rPr sz="1000" b="1" lang="zh-TW" dirty="0">
@@ -5866,7 +5447,7 @@
                 <a:ea typeface="Arial Unicode MS"/>
                 <a:cs typeface="Arial Unicode MS"/>
               </a:rPr>
-              <a:t>波長</a:t>
+              <a:t>十微米</a:t>
             </a:r>
             <a:r>
               <a:rPr sz="1000" lang="zh-TW" dirty="0">
@@ -5877,7 +5458,7 @@
                 <a:ea typeface="Arial Unicode MS"/>
                 <a:cs typeface="Arial Unicode MS"/>
               </a:rPr>
-              <a:t>：
+              <a:t>，比它們大十倍。
 </a:t>
             </a:r>
           </a:p>
@@ -5899,7 +5480,7 @@
                 <a:ea typeface="Arial Unicode MS"/>
                 <a:cs typeface="Arial Unicode MS"/>
               </a:rPr>
-              <a:t>相機和光達差不多，都在</a:t>
+              <a:t>雷達最特別，七十七 GHz 的毫米波，波長大約</a:t>
             </a:r>
             <a:r>
               <a:rPr sz="1000" b="1" lang="zh-TW" dirty="0">
@@ -5910,7 +5491,7 @@
                 <a:ea typeface="Arial Unicode MS"/>
                 <a:cs typeface="Arial Unicode MS"/>
               </a:rPr>
-              <a:t>一微米</a:t>
+              <a:t>四公釐</a:t>
             </a:r>
             <a:r>
               <a:rPr sz="1000" lang="zh-TW" dirty="0">
@@ -5921,7 +5502,29 @@
                 <a:ea typeface="Arial Unicode MS"/>
                 <a:cs typeface="Arial Unicode MS"/>
               </a:rPr>
-              <a:t>左右。相機用的是可見光，光達用的是九百零五奈米的紅外線雷射，兩個都在一微米這附近。
+              <a:t>，比相機和光達大了</a:t>
+            </a:r>
+            <a:r>
+              <a:rPr sz="1000" b="1" lang="zh-TW" dirty="0">
+                <a:solidFill>
+                  <a:srgbClr val="000000"/>
+                </a:solidFill>
+                <a:latin typeface="Arial Unicode MS"/>
+                <a:ea typeface="Arial Unicode MS"/>
+                <a:cs typeface="Arial Unicode MS"/>
+              </a:rPr>
+              <a:t>四千倍</a:t>
+            </a:r>
+            <a:r>
+              <a:rPr sz="1000" lang="zh-TW" dirty="0">
+                <a:solidFill>
+                  <a:srgbClr val="000000"/>
+                </a:solidFill>
+                <a:latin typeface="Arial Unicode MS"/>
+                <a:ea typeface="Arial Unicode MS"/>
+                <a:cs typeface="Arial Unicode MS"/>
+              </a:rPr>
+              <a:t>。
 </a:t>
             </a:r>
           </a:p>
@@ -5943,29 +5546,7 @@
                 <a:ea typeface="Arial Unicode MS"/>
                 <a:cs typeface="Arial Unicode MS"/>
               </a:rPr>
-              <a:t>熱像是</a:t>
-            </a:r>
-            <a:r>
-              <a:rPr sz="1000" b="1" lang="zh-TW" dirty="0">
-                <a:solidFill>
-                  <a:srgbClr val="000000"/>
-                </a:solidFill>
-                <a:latin typeface="Arial Unicode MS"/>
-                <a:ea typeface="Arial Unicode MS"/>
-                <a:cs typeface="Arial Unicode MS"/>
-              </a:rPr>
-              <a:t>十微米</a:t>
-            </a:r>
-            <a:r>
-              <a:rPr sz="1000" lang="zh-TW" dirty="0">
-                <a:solidFill>
-                  <a:srgbClr val="000000"/>
-                </a:solidFill>
-                <a:latin typeface="Arial Unicode MS"/>
-                <a:ea typeface="Arial Unicode MS"/>
-                <a:cs typeface="Arial Unicode MS"/>
-              </a:rPr>
-              <a:t>，比它們大十倍。
+              <a:t>線的下面是水滴的大小。霧滴很小，一到五十微米。雨滴大很多，零點五到兩公釐。
 </a:t>
             </a:r>
           </a:p>
@@ -5987,51 +5568,7 @@
                 <a:ea typeface="Arial Unicode MS"/>
                 <a:cs typeface="Arial Unicode MS"/>
               </a:rPr>
-              <a:t>雷達最特別，七十七 GHz 的毫米波，波長大約</a:t>
-            </a:r>
-            <a:r>
-              <a:rPr sz="1000" b="1" lang="zh-TW" dirty="0">
-                <a:solidFill>
-                  <a:srgbClr val="000000"/>
-                </a:solidFill>
-                <a:latin typeface="Arial Unicode MS"/>
-                <a:ea typeface="Arial Unicode MS"/>
-                <a:cs typeface="Arial Unicode MS"/>
-              </a:rPr>
-              <a:t>四公釐</a:t>
-            </a:r>
-            <a:r>
-              <a:rPr sz="1000" lang="zh-TW" dirty="0">
-                <a:solidFill>
-                  <a:srgbClr val="000000"/>
-                </a:solidFill>
-                <a:latin typeface="Arial Unicode MS"/>
-                <a:ea typeface="Arial Unicode MS"/>
-                <a:cs typeface="Arial Unicode MS"/>
-              </a:rPr>
-              <a:t>——比相機和光達大了</a:t>
-            </a:r>
-            <a:r>
-              <a:rPr sz="1000" b="1" lang="zh-TW" dirty="0">
-                <a:solidFill>
-                  <a:srgbClr val="000000"/>
-                </a:solidFill>
-                <a:latin typeface="Arial Unicode MS"/>
-                <a:ea typeface="Arial Unicode MS"/>
-                <a:cs typeface="Arial Unicode MS"/>
-              </a:rPr>
-              <a:t>四千倍</a:t>
-            </a:r>
-            <a:r>
-              <a:rPr sz="1000" lang="zh-TW" dirty="0">
-                <a:solidFill>
-                  <a:srgbClr val="000000"/>
-                </a:solidFill>
-                <a:latin typeface="Arial Unicode MS"/>
-                <a:ea typeface="Arial Unicode MS"/>
-                <a:cs typeface="Arial Unicode MS"/>
-              </a:rPr>
-              <a:t>。
+              <a:t>好，現在把上下對起來看。
 </a:t>
             </a:r>
           </a:p>
@@ -6045,6 +5582,17 @@
               </a:spcAft>
             </a:pPr>
             <a:r>
+              <a:rPr sz="1000" b="1" lang="zh-TW" dirty="0">
+                <a:solidFill>
+                  <a:srgbClr val="000000"/>
+                </a:solidFill>
+                <a:latin typeface="Arial Unicode MS"/>
+                <a:ea typeface="Arial Unicode MS"/>
+                <a:cs typeface="Arial Unicode MS"/>
+              </a:rPr>
+              <a:t>相機和光達</a:t>
+            </a:r>
+            <a:r>
               <a:rPr sz="1000" lang="zh-TW" dirty="0">
                 <a:solidFill>
                   <a:srgbClr val="000000"/>
@@ -6053,7 +5601,7 @@
                 <a:ea typeface="Arial Unicode MS"/>
                 <a:cs typeface="Arial Unicode MS"/>
               </a:rPr>
-              <a:t>線的下面是水滴的大小。霧滴很小，一到五十微米。雨滴大很多，零點五到兩公釐。
+              <a:t>的波長比霧滴還小。所以霧滴對它們來說就像一整排消波塊，光打出去撞上去就散掉了。這就是為什麼濃霧那一輪，相機從八十公尺掉到十六公尺、光達從一百掉到四十五。
 </a:t>
             </a:r>
           </a:p>
@@ -6067,6 +5615,17 @@
               </a:spcAft>
             </a:pPr>
             <a:r>
+              <a:rPr sz="1000" b="1" lang="zh-TW" dirty="0">
+                <a:solidFill>
+                  <a:srgbClr val="000000"/>
+                </a:solidFill>
+                <a:latin typeface="Arial Unicode MS"/>
+                <a:ea typeface="Arial Unicode MS"/>
+                <a:cs typeface="Arial Unicode MS"/>
+              </a:rPr>
+              <a:t>熱像</a:t>
+            </a:r>
+            <a:r>
               <a:rPr sz="1000" lang="zh-TW" dirty="0">
                 <a:solidFill>
                   <a:srgbClr val="000000"/>
@@ -6075,7 +5634,7 @@
                 <a:ea typeface="Arial Unicode MS"/>
                 <a:cs typeface="Arial Unicode MS"/>
               </a:rPr>
-              <a:t>好，現在把上下對起來看。
+              <a:t>的波長跟霧滴差不多大，所以被擋掉一部分，但是沒有那麼嚴重，從一百四十三掉到九十。
 </a:t>
             </a:r>
           </a:p>
@@ -6097,7 +5656,7 @@
                 <a:ea typeface="Arial Unicode MS"/>
                 <a:cs typeface="Arial Unicode MS"/>
               </a:rPr>
-              <a:t>相機和光達</a:t>
+              <a:t>雷達</a:t>
             </a:r>
             <a:r>
               <a:rPr sz="1000" lang="zh-TW" dirty="0">
@@ -6108,7 +5667,7 @@
                 <a:ea typeface="Arial Unicode MS"/>
                 <a:cs typeface="Arial Unicode MS"/>
               </a:rPr>
-              <a:t>的波長，比霧滴還小。所以霧滴對它們來說就像一整排消波塊，光打出去撞上去就散掉了。這就是為什麼濃霧那一輪，相機從八十公尺掉到十六公尺、光達從一百掉到四十五。
+              <a:t>的波長比霧滴大四千倍，比雨滴也還要大。對雷達來說，水滴細得像竹竿，它直接穿過去。所以剛剛那兩輪，雷達那張卡從頭到尾都是四十點零。
 </a:t>
             </a:r>
           </a:p>
@@ -6122,17 +5681,6 @@
               </a:spcAft>
             </a:pPr>
             <a:r>
-              <a:rPr sz="1000" b="1" lang="zh-TW" dirty="0">
-                <a:solidFill>
-                  <a:srgbClr val="000000"/>
-                </a:solidFill>
-                <a:latin typeface="Arial Unicode MS"/>
-                <a:ea typeface="Arial Unicode MS"/>
-                <a:cs typeface="Arial Unicode MS"/>
-              </a:rPr>
-              <a:t>熱像</a:t>
-            </a:r>
-            <a:r>
               <a:rPr sz="1000" lang="zh-TW" dirty="0">
                 <a:solidFill>
                   <a:srgbClr val="000000"/>
@@ -6141,7 +5689,7 @@
                 <a:ea typeface="Arial Unicode MS"/>
                 <a:cs typeface="Arial Unicode MS"/>
               </a:rPr>
-              <a:t>的波長跟霧滴差不多大，所以被擋掉一部分，但沒有那麼嚴重——從一百四十三掉到九十。
+              <a:t>我在白板上寫一行：波長大於顆粒，穿過去；波長小於顆粒，被擋住。
 </a:t>
             </a:r>
           </a:p>
@@ -6155,6 +5703,17 @@
               </a:spcAft>
             </a:pPr>
             <a:r>
+              <a:rPr sz="1000" lang="zh-TW" dirty="0">
+                <a:solidFill>
+                  <a:srgbClr val="000000"/>
+                </a:solidFill>
+                <a:latin typeface="Arial Unicode MS"/>
+                <a:ea typeface="Arial Unicode MS"/>
+                <a:cs typeface="Arial Unicode MS"/>
+              </a:rPr>
+              <a:t>這張圖大家只要記住一句話：</a:t>
+            </a:r>
+            <a:r>
               <a:rPr sz="1000" b="1" lang="zh-TW" dirty="0">
                 <a:solidFill>
                   <a:srgbClr val="000000"/>
@@ -6163,7 +5722,7 @@
                 <a:ea typeface="Arial Unicode MS"/>
                 <a:cs typeface="Arial Unicode MS"/>
               </a:rPr>
-              <a:t>雷達</a:t>
+              <a:t>看波長跟顆粒誰大誰小。</a:t>
             </a:r>
             <a:r>
               <a:rPr sz="1000" lang="zh-TW" dirty="0">
@@ -6174,7 +5733,7 @@
                 <a:ea typeface="Arial Unicode MS"/>
                 <a:cs typeface="Arial Unicode MS"/>
               </a:rPr>
-              <a:t>的波長比霧滴大四千倍，比雨滴也還要大。對雷達來說，水滴細得像竹竿，它直接穿過去。所以剛剛兩輪，雷達那張卡從頭到尾都是四十點零。
+              <a:t>
 </a:t>
             </a:r>
           </a:p>
@@ -6196,73 +5755,7 @@
                 <a:ea typeface="Arial Unicode MS"/>
                 <a:cs typeface="Arial Unicode MS"/>
               </a:rPr>
-              <a:t>（在白板上寫一行：波長 &gt; 顆粒 → 穿過去；波長 &lt; 顆粒 → 被擋住。）
-</a:t>
-            </a:r>
-          </a:p>
-          <a:p>
-            <a:pPr algn="l">
-              <a:lnSpc>
-                <a:spcPct val="115000"/>
-              </a:lnSpc>
-              <a:spcAft>
-                <a:spcPts val="500"/>
-              </a:spcAft>
-            </a:pPr>
-            <a:r>
-              <a:rPr sz="1000" lang="zh-TW" dirty="0">
-                <a:solidFill>
-                  <a:srgbClr val="000000"/>
-                </a:solidFill>
-                <a:latin typeface="Arial Unicode MS"/>
-                <a:ea typeface="Arial Unicode MS"/>
-                <a:cs typeface="Arial Unicode MS"/>
-              </a:rPr>
-              <a:t>這張圖你們只要記住一句話：</a:t>
-            </a:r>
-            <a:r>
-              <a:rPr sz="1000" b="1" lang="zh-TW" dirty="0">
-                <a:solidFill>
-                  <a:srgbClr val="000000"/>
-                </a:solidFill>
-                <a:latin typeface="Arial Unicode MS"/>
-                <a:ea typeface="Arial Unicode MS"/>
-                <a:cs typeface="Arial Unicode MS"/>
-              </a:rPr>
-              <a:t>看波長跟顆粒誰大誰小。</a:t>
-            </a:r>
-            <a:r>
-              <a:rPr sz="1000" lang="zh-TW" dirty="0">
-                <a:solidFill>
-                  <a:srgbClr val="000000"/>
-                </a:solidFill>
-                <a:latin typeface="Arial Unicode MS"/>
-                <a:ea typeface="Arial Unicode MS"/>
-                <a:cs typeface="Arial Unicode MS"/>
-              </a:rPr>
-              <a:t>
-</a:t>
-            </a:r>
-          </a:p>
-          <a:p>
-            <a:pPr algn="l">
-              <a:lnSpc>
-                <a:spcPct val="115000"/>
-              </a:lnSpc>
-              <a:spcAft>
-                <a:spcPts val="500"/>
-              </a:spcAft>
-            </a:pPr>
-            <a:r>
-              <a:rPr sz="1000" lang="zh-TW" dirty="0">
-                <a:solidFill>
-                  <a:srgbClr val="000000"/>
-                </a:solidFill>
-                <a:latin typeface="Arial Unicode MS"/>
-                <a:ea typeface="Arial Unicode MS"/>
-                <a:cs typeface="Arial Unicode MS"/>
-              </a:rPr>
-              <a:t>記住它，因為下一頁我要用它來考你們一題——而且這題的答案，你們現在就推得出來。</a:t>
+              <a:t>記住它，因為下一頁我要用它來考大家一題，而且這一題的答案，大家現在就推得出來。</a:t>
             </a:r>
           </a:p>
         </p:txBody>
@@ -6383,7 +5876,7 @@
                 <a:ea typeface="Arial Unicode MS"/>
                 <a:cs typeface="Arial Unicode MS"/>
               </a:rPr>
-              <a:t>這一輪不一樣。前面四次都是先按再看，這次我要大家</a:t>
+              <a:t>這一輪不一樣。前面四次都是先按再看，這一次我要大家</a:t>
             </a:r>
             <a:r>
               <a:rPr sz="1000" b="1" lang="zh-TW" dirty="0">
@@ -6405,7 +5898,7 @@
                 <a:ea typeface="Arial Unicode MS"/>
                 <a:cs typeface="Arial Unicode MS"/>
               </a:rPr>
-              <a:t>。
+              <a:t>。請先不要碰滑鼠。
 </a:t>
             </a:r>
           </a:p>
@@ -6427,7 +5920,7 @@
                 <a:ea typeface="Arial Unicode MS"/>
                 <a:cs typeface="Arial Unicode MS"/>
               </a:rPr>
-              <a:t>（先不要讓同學碰滑鼠。）
+              <a:t>上一頁那條規則：波長比顆粒大就繞得過去，比顆粒小就被擋住。
 </a:t>
             </a:r>
           </a:p>
@@ -6449,7 +5942,51 @@
                 <a:ea typeface="Arial Unicode MS"/>
                 <a:cs typeface="Arial Unicode MS"/>
               </a:rPr>
-              <a:t>上一頁那條規則：波長比顆粒大就繞得過去，比顆粒小就被擋住。
+              <a:t>現在給大家兩個數字。雪花的直徑是</a:t>
+            </a:r>
+            <a:r>
+              <a:rPr sz="1000" b="1" lang="zh-TW" dirty="0">
+                <a:solidFill>
+                  <a:srgbClr val="000000"/>
+                </a:solidFill>
+                <a:latin typeface="Arial Unicode MS"/>
+                <a:ea typeface="Arial Unicode MS"/>
+                <a:cs typeface="Arial Unicode MS"/>
+              </a:rPr>
+              <a:t>一到十公釐</a:t>
+            </a:r>
+            <a:r>
+              <a:rPr sz="1000" lang="zh-TW" dirty="0">
+                <a:solidFill>
+                  <a:srgbClr val="000000"/>
+                </a:solidFill>
+                <a:latin typeface="Arial Unicode MS"/>
+                <a:ea typeface="Arial Unicode MS"/>
+                <a:cs typeface="Arial Unicode MS"/>
+              </a:rPr>
+              <a:t>，雷達的波長是</a:t>
+            </a:r>
+            <a:r>
+              <a:rPr sz="1000" b="1" lang="zh-TW" dirty="0">
+                <a:solidFill>
+                  <a:srgbClr val="000000"/>
+                </a:solidFill>
+                <a:latin typeface="Arial Unicode MS"/>
+                <a:ea typeface="Arial Unicode MS"/>
+                <a:cs typeface="Arial Unicode MS"/>
+              </a:rPr>
+              <a:t>四公釐</a:t>
+            </a:r>
+            <a:r>
+              <a:rPr sz="1000" lang="zh-TW" dirty="0">
+                <a:solidFill>
+                  <a:srgbClr val="000000"/>
+                </a:solidFill>
+                <a:latin typeface="Arial Unicode MS"/>
+                <a:ea typeface="Arial Unicode MS"/>
+                <a:cs typeface="Arial Unicode MS"/>
+              </a:rPr>
+              <a:t>。
 </a:t>
             </a:r>
           </a:p>
@@ -6471,51 +6008,7 @@
                 <a:ea typeface="Arial Unicode MS"/>
                 <a:cs typeface="Arial Unicode MS"/>
               </a:rPr>
-              <a:t>現在給大家兩個數字。雪花的直徑是</a:t>
-            </a:r>
-            <a:r>
-              <a:rPr sz="1000" b="1" lang="zh-TW" dirty="0">
-                <a:solidFill>
-                  <a:srgbClr val="000000"/>
-                </a:solidFill>
-                <a:latin typeface="Arial Unicode MS"/>
-                <a:ea typeface="Arial Unicode MS"/>
-                <a:cs typeface="Arial Unicode MS"/>
-              </a:rPr>
-              <a:t>一到十公釐</a:t>
-            </a:r>
-            <a:r>
-              <a:rPr sz="1000" lang="zh-TW" dirty="0">
-                <a:solidFill>
-                  <a:srgbClr val="000000"/>
-                </a:solidFill>
-                <a:latin typeface="Arial Unicode MS"/>
-                <a:ea typeface="Arial Unicode MS"/>
-                <a:cs typeface="Arial Unicode MS"/>
-              </a:rPr>
-              <a:t>。雷達的波長是</a:t>
-            </a:r>
-            <a:r>
-              <a:rPr sz="1000" b="1" lang="zh-TW" dirty="0">
-                <a:solidFill>
-                  <a:srgbClr val="000000"/>
-                </a:solidFill>
-                <a:latin typeface="Arial Unicode MS"/>
-                <a:ea typeface="Arial Unicode MS"/>
-                <a:cs typeface="Arial Unicode MS"/>
-              </a:rPr>
-              <a:t>四公釐</a:t>
-            </a:r>
-            <a:r>
-              <a:rPr sz="1000" lang="zh-TW" dirty="0">
-                <a:solidFill>
-                  <a:srgbClr val="000000"/>
-                </a:solidFill>
-                <a:latin typeface="Arial Unicode MS"/>
-                <a:ea typeface="Arial Unicode MS"/>
-                <a:cs typeface="Arial Unicode MS"/>
-              </a:rPr>
-              <a:t>。
+              <a:t>請問，誰大？
 </a:t>
             </a:r>
           </a:p>
@@ -6537,7 +6030,29 @@
                 <a:ea typeface="Arial Unicode MS"/>
                 <a:cs typeface="Arial Unicode MS"/>
               </a:rPr>
-              <a:t>請問：誰大？
+              <a:t>差不多，甚至雪花還比較大。前面所有的天氣，雷達幾乎都沒有變化，因為霧滴只有幾微米、雨滴不到兩公釐，都比它的波長小很多。可是雪花不一樣，雪花的大小</a:t>
+            </a:r>
+            <a:r>
+              <a:rPr sz="1000" b="1" lang="zh-TW" dirty="0">
+                <a:solidFill>
+                  <a:srgbClr val="000000"/>
+                </a:solidFill>
+                <a:latin typeface="Arial Unicode MS"/>
+                <a:ea typeface="Arial Unicode MS"/>
+                <a:cs typeface="Arial Unicode MS"/>
+              </a:rPr>
+              <a:t>已經跟它的波長差不多了</a:t>
+            </a:r>
+            <a:r>
+              <a:rPr sz="1000" lang="zh-TW" dirty="0">
+                <a:solidFill>
+                  <a:srgbClr val="000000"/>
+                </a:solidFill>
+                <a:latin typeface="Arial Unicode MS"/>
+                <a:ea typeface="Arial Unicode MS"/>
+                <a:cs typeface="Arial Unicode MS"/>
+              </a:rPr>
+              <a:t>。
 </a:t>
             </a:r>
           </a:p>
@@ -6559,7 +6074,7 @@
                 <a:ea typeface="Arial Unicode MS"/>
                 <a:cs typeface="Arial Unicode MS"/>
               </a:rPr>
-              <a:t>（等學生回答。預期：差不多，甚至雪花比較大。）
+              <a:t>所以照規則推論，下雪的時候雷達會怎樣？會變差。
 </a:t>
             </a:r>
           </a:p>
@@ -6581,29 +6096,7 @@
                 <a:ea typeface="Arial Unicode MS"/>
                 <a:cs typeface="Arial Unicode MS"/>
               </a:rPr>
-              <a:t>對。前面所有的天氣，雷達幾乎都沒有變化，因為霧滴只有幾微米、雨滴不到兩公釐，都比它的波長小很多。但雪花不一樣，雪花的大小</a:t>
-            </a:r>
-            <a:r>
-              <a:rPr sz="1000" b="1" lang="zh-TW" dirty="0">
-                <a:solidFill>
-                  <a:srgbClr val="000000"/>
-                </a:solidFill>
-                <a:latin typeface="Arial Unicode MS"/>
-                <a:ea typeface="Arial Unicode MS"/>
-                <a:cs typeface="Arial Unicode MS"/>
-              </a:rPr>
-              <a:t>已經跟它的波長差不多了</a:t>
-            </a:r>
-            <a:r>
-              <a:rPr sz="1000" lang="zh-TW" dirty="0">
-                <a:solidFill>
-                  <a:srgbClr val="000000"/>
-                </a:solidFill>
-                <a:latin typeface="Arial Unicode MS"/>
-                <a:ea typeface="Arial Unicode MS"/>
-                <a:cs typeface="Arial Unicode MS"/>
-              </a:rPr>
-              <a:t>。
+              <a:t>好，現在請同學上來按「下雪」，我們驗證看看。
 </a:t>
             </a:r>
           </a:p>
@@ -6625,7 +6118,51 @@
                 <a:ea typeface="Arial Unicode MS"/>
                 <a:cs typeface="Arial Unicode MS"/>
               </a:rPr>
-              <a:t>所以照規則推論，下雪的時候雷達會怎樣？
+              <a:t>相機二十公尺、光達</a:t>
+            </a:r>
+            <a:r>
+              <a:rPr sz="1000" b="1" lang="zh-TW" dirty="0">
+                <a:solidFill>
+                  <a:srgbClr val="000000"/>
+                </a:solidFill>
+                <a:latin typeface="Arial Unicode MS"/>
+                <a:ea typeface="Arial Unicode MS"/>
+                <a:cs typeface="Arial Unicode MS"/>
+              </a:rPr>
+              <a:t>三十五公尺</a:t>
+            </a:r>
+            <a:r>
+              <a:rPr sz="1000" lang="zh-TW" dirty="0">
+                <a:solidFill>
+                  <a:srgbClr val="000000"/>
+                </a:solidFill>
+                <a:latin typeface="Arial Unicode MS"/>
+                <a:ea typeface="Arial Unicode MS"/>
+                <a:cs typeface="Arial Unicode MS"/>
+              </a:rPr>
+              <a:t>、雷達</a:t>
+            </a:r>
+            <a:r>
+              <a:rPr sz="1000" b="1" lang="zh-TW" dirty="0">
+                <a:solidFill>
+                  <a:srgbClr val="000000"/>
+                </a:solidFill>
+                <a:latin typeface="Arial Unicode MS"/>
+                <a:ea typeface="Arial Unicode MS"/>
+                <a:cs typeface="Arial Unicode MS"/>
+              </a:rPr>
+              <a:t>一百六十三公尺</a:t>
+            </a:r>
+            <a:r>
+              <a:rPr sz="1000" lang="zh-TW" dirty="0">
+                <a:solidFill>
+                  <a:srgbClr val="000000"/>
+                </a:solidFill>
+                <a:latin typeface="Arial Unicode MS"/>
+                <a:ea typeface="Arial Unicode MS"/>
+                <a:cs typeface="Arial Unicode MS"/>
+              </a:rPr>
+              <a:t>、熱像九十公尺。
 </a:t>
             </a:r>
           </a:p>
@@ -6647,7 +6184,29 @@
                 <a:ea typeface="Arial Unicode MS"/>
                 <a:cs typeface="Arial Unicode MS"/>
               </a:rPr>
-              <a:t>（預期答案：會變差。）
+              <a:t>先看雷達，從兩百五十掉到一百六十三。回頭對照白板，大雨是兩百，濃霧是兩百二十五——</a:t>
+            </a:r>
+            <a:r>
+              <a:rPr sz="1000" b="1" lang="zh-TW" dirty="0">
+                <a:solidFill>
+                  <a:srgbClr val="000000"/>
+                </a:solidFill>
+                <a:latin typeface="Arial Unicode MS"/>
+                <a:ea typeface="Arial Unicode MS"/>
+                <a:cs typeface="Arial Unicode MS"/>
+              </a:rPr>
+              <a:t>下雪是今天讓雷達掉最多的一種天氣。</a:t>
+            </a:r>
+            <a:r>
+              <a:rPr sz="1000" lang="zh-TW" dirty="0">
+                <a:solidFill>
+                  <a:srgbClr val="000000"/>
+                </a:solidFill>
+                <a:latin typeface="Arial Unicode MS"/>
+                <a:ea typeface="Arial Unicode MS"/>
+                <a:cs typeface="Arial Unicode MS"/>
+              </a:rPr>
+              <a:t>大家推論對了。
 </a:t>
             </a:r>
           </a:p>
@@ -6669,7 +6228,29 @@
                 <a:ea typeface="Arial Unicode MS"/>
                 <a:cs typeface="Arial Unicode MS"/>
               </a:rPr>
-              <a:t>好，現在請同學上來按「下雪」，我們驗證看看。
+              <a:t>再看光達，三十五公尺，比大雨的四十還要短。為什麼？兩個原因。第一，雪花又大又不規則，散射比雨嚴重。第二，飄在空中的雪花</a:t>
+            </a:r>
+            <a:r>
+              <a:rPr sz="1000" b="1" lang="zh-TW" dirty="0">
+                <a:solidFill>
+                  <a:srgbClr val="000000"/>
+                </a:solidFill>
+                <a:latin typeface="Arial Unicode MS"/>
+                <a:ea typeface="Arial Unicode MS"/>
+                <a:cs typeface="Arial Unicode MS"/>
+              </a:rPr>
+              <a:t>本身就會反射雷射</a:t>
+            </a:r>
+            <a:r>
+              <a:rPr sz="1000" lang="zh-TW" dirty="0">
+                <a:solidFill>
+                  <a:srgbClr val="000000"/>
+                </a:solidFill>
+                <a:latin typeface="Arial Unicode MS"/>
+                <a:ea typeface="Arial Unicode MS"/>
+                <a:cs typeface="Arial Unicode MS"/>
+              </a:rPr>
+              <a:t>。真車會把它當成障礙物，畫面上出現一堆根本不存在的點。看得到反而看到假的，比看不到更麻煩。
 </a:t>
             </a:r>
           </a:p>
@@ -6691,7 +6272,7 @@
                 <a:ea typeface="Arial Unicode MS"/>
                 <a:cs typeface="Arial Unicode MS"/>
               </a:rPr>
-              <a:t>（預期讀值：相機 20 公尺、光達 </a:t>
+              <a:t>現在做第三題，這是今天最後一個操作。把行人拖到</a:t>
             </a:r>
             <a:r>
               <a:rPr sz="1000" b="1" lang="zh-TW" dirty="0">
@@ -6702,7 +6283,7 @@
                 <a:ea typeface="Arial Unicode MS"/>
                 <a:cs typeface="Arial Unicode MS"/>
               </a:rPr>
-              <a:t>35 公尺</a:t>
+              <a:t>一百八十公尺</a:t>
             </a:r>
             <a:r>
               <a:rPr sz="1000" lang="zh-TW" dirty="0">
@@ -6713,29 +6294,7 @@
                 <a:ea typeface="Arial Unicode MS"/>
                 <a:cs typeface="Arial Unicode MS"/>
               </a:rPr>
-              <a:t>、雷達 </a:t>
-            </a:r>
-            <a:r>
-              <a:rPr sz="1000" b="1" lang="zh-TW" dirty="0">
-                <a:solidFill>
-                  <a:srgbClr val="000000"/>
-                </a:solidFill>
-                <a:latin typeface="Arial Unicode MS"/>
-                <a:ea typeface="Arial Unicode MS"/>
-                <a:cs typeface="Arial Unicode MS"/>
-              </a:rPr>
-              <a:t>163 公尺</a:t>
-            </a:r>
-            <a:r>
-              <a:rPr sz="1000" lang="zh-TW" dirty="0">
-                <a:solidFill>
-                  <a:srgbClr val="000000"/>
-                </a:solidFill>
-                <a:latin typeface="Arial Unicode MS"/>
-                <a:ea typeface="Arial Unicode MS"/>
-                <a:cs typeface="Arial Unicode MS"/>
-              </a:rPr>
-              <a:t>、熱像 90 公尺。）
+              <a:t>，然後一個一個切換環境。晴天、大雨、濃霧，雷達都還讀得到一百八十點零；切到下雪，雷達整張卡變紅字。
 </a:t>
             </a:r>
           </a:p>
@@ -6757,7 +6316,7 @@
                 <a:ea typeface="Arial Unicode MS"/>
                 <a:cs typeface="Arial Unicode MS"/>
               </a:rPr>
-              <a:t>先看雷達：兩百五十掉到一百六十三。回頭對照白板：大雨是兩百，濃霧是兩百二十五——</a:t>
+              <a:t>看到了嗎？</a:t>
             </a:r>
             <a:r>
               <a:rPr sz="1000" b="1" lang="zh-TW" dirty="0">
@@ -6768,7 +6327,7 @@
                 <a:ea typeface="Arial Unicode MS"/>
                 <a:cs typeface="Arial Unicode MS"/>
               </a:rPr>
-              <a:t>下雪是今天讓雷達掉最多的一種天氣</a:t>
+              <a:t>在一百八十公尺這個距離，九種條件裡只有下雪會讓雷達讀不到。</a:t>
             </a:r>
             <a:r>
               <a:rPr sz="1000" lang="zh-TW" dirty="0">
@@ -6779,7 +6338,7 @@
                 <a:ea typeface="Arial Unicode MS"/>
                 <a:cs typeface="Arial Unicode MS"/>
               </a:rPr>
-              <a:t>。你們推論對了。
+              <a:t>
 </a:t>
             </a:r>
           </a:p>
@@ -6801,7 +6360,29 @@
                 <a:ea typeface="Arial Unicode MS"/>
                 <a:cs typeface="Arial Unicode MS"/>
               </a:rPr>
-              <a:t>（這一刻值得停一下。前面兩節同學已經很習慣「雷達什麼都不怕」，這裡剛好打破它，而且是他們自己推出來的，不是我講的。）
+              <a:t>最後補一件工具模擬不出來的事：雪會</a:t>
+            </a:r>
+            <a:r>
+              <a:rPr sz="1000" b="1" lang="zh-TW" dirty="0">
+                <a:solidFill>
+                  <a:srgbClr val="000000"/>
+                </a:solidFill>
+                <a:latin typeface="Arial Unicode MS"/>
+                <a:ea typeface="Arial Unicode MS"/>
+                <a:cs typeface="Arial Unicode MS"/>
+              </a:rPr>
+              <a:t>積在感測器表面</a:t>
+            </a:r>
+            <a:r>
+              <a:rPr sz="1000" lang="zh-TW" dirty="0">
+                <a:solidFill>
+                  <a:srgbClr val="000000"/>
+                </a:solidFill>
+                <a:latin typeface="Arial Unicode MS"/>
+                <a:ea typeface="Arial Unicode MS"/>
+                <a:cs typeface="Arial Unicode MS"/>
+              </a:rPr>
+              <a:t>。那個效果比較接近「光達罩髒污」那顆按鈕，大家可以兩個一起打開，看數字掉到什麼程度。所以下雪對自駕車是雙重打擊，天上飄的，加上鏡頭上黏的。
 </a:t>
             </a:r>
           </a:p>
@@ -6823,7 +6404,7 @@
                 <a:ea typeface="Arial Unicode MS"/>
                 <a:cs typeface="Arial Unicode MS"/>
               </a:rPr>
-              <a:t>再看光達：三十五公尺，比大雨的四十還要短。為什麼？兩個原因。第一，雪花又大又不規則，散射比雨嚴重。第二，飄在空中的雪花</a:t>
+              <a:t>這就是為什麼北歐和日本北海道的自駕測試特別難。不是車做得不好，是</a:t>
             </a:r>
             <a:r>
               <a:rPr sz="1000" b="1" lang="zh-TW" dirty="0">
@@ -6834,7 +6415,7 @@
                 <a:ea typeface="Arial Unicode MS"/>
                 <a:cs typeface="Arial Unicode MS"/>
               </a:rPr>
-              <a:t>本身就會反射雷射</a:t>
+              <a:t>物理上就比較吃虧</a:t>
             </a:r>
             <a:r>
               <a:rPr sz="1000" lang="zh-TW" dirty="0">
@@ -6845,7 +6426,7 @@
                 <a:ea typeface="Arial Unicode MS"/>
                 <a:cs typeface="Arial Unicode MS"/>
               </a:rPr>
-              <a:t>——真車會把它當成障礙物，畫面上出現一堆根本不存在的點。看得到反而看到假的，比看不到更麻煩。
+              <a:t>。
 </a:t>
             </a:r>
           </a:p>
@@ -6867,205 +6448,7 @@
                 <a:ea typeface="Arial Unicode MS"/>
                 <a:cs typeface="Arial Unicode MS"/>
               </a:rPr>
-              <a:t>現在做第三題，這是今天最後一個操作。把行人拖到</a:t>
-            </a:r>
-            <a:r>
-              <a:rPr sz="1000" b="1" lang="zh-TW" dirty="0">
-                <a:solidFill>
-                  <a:srgbClr val="000000"/>
-                </a:solidFill>
-                <a:latin typeface="Arial Unicode MS"/>
-                <a:ea typeface="Arial Unicode MS"/>
-                <a:cs typeface="Arial Unicode MS"/>
-              </a:rPr>
-              <a:t>一百八十公尺</a:t>
-            </a:r>
-            <a:r>
-              <a:rPr sz="1000" lang="zh-TW" dirty="0">
-                <a:solidFill>
-                  <a:srgbClr val="000000"/>
-                </a:solidFill>
-                <a:latin typeface="Arial Unicode MS"/>
-                <a:ea typeface="Arial Unicode MS"/>
-                <a:cs typeface="Arial Unicode MS"/>
-              </a:rPr>
-              <a:t>。
-</a:t>
-            </a:r>
-          </a:p>
-          <a:p>
-            <a:pPr algn="l">
-              <a:lnSpc>
-                <a:spcPct val="115000"/>
-              </a:lnSpc>
-              <a:spcAft>
-                <a:spcPts val="500"/>
-              </a:spcAft>
-            </a:pPr>
-            <a:r>
-              <a:rPr sz="1000" lang="zh-TW" dirty="0">
-                <a:solidFill>
-                  <a:srgbClr val="000000"/>
-                </a:solidFill>
-                <a:latin typeface="Arial Unicode MS"/>
-                <a:ea typeface="Arial Unicode MS"/>
-                <a:cs typeface="Arial Unicode MS"/>
-              </a:rPr>
-              <a:t>（讓同學一邊拖，一邊切換環境。預期：晴天、大雨、濃霧，雷達都還讀得到一百八十點零；切到下雪，雷達整張卡變紅字。）
-</a:t>
-            </a:r>
-          </a:p>
-          <a:p>
-            <a:pPr algn="l">
-              <a:lnSpc>
-                <a:spcPct val="115000"/>
-              </a:lnSpc>
-              <a:spcAft>
-                <a:spcPts val="500"/>
-              </a:spcAft>
-            </a:pPr>
-            <a:r>
-              <a:rPr sz="1000" lang="zh-TW" dirty="0">
-                <a:solidFill>
-                  <a:srgbClr val="000000"/>
-                </a:solidFill>
-                <a:latin typeface="Arial Unicode MS"/>
-                <a:ea typeface="Arial Unicode MS"/>
-                <a:cs typeface="Arial Unicode MS"/>
-              </a:rPr>
-              <a:t>看到了嗎？</a:t>
-            </a:r>
-            <a:r>
-              <a:rPr sz="1000" b="1" lang="zh-TW" dirty="0">
-                <a:solidFill>
-                  <a:srgbClr val="000000"/>
-                </a:solidFill>
-                <a:latin typeface="Arial Unicode MS"/>
-                <a:ea typeface="Arial Unicode MS"/>
-                <a:cs typeface="Arial Unicode MS"/>
-              </a:rPr>
-              <a:t>在一百八十公尺這個距離，九種條件裡只有下雪會讓雷達讀不到。</a:t>
-            </a:r>
-            <a:r>
-              <a:rPr sz="1000" lang="zh-TW" dirty="0">
-                <a:solidFill>
-                  <a:srgbClr val="000000"/>
-                </a:solidFill>
-                <a:latin typeface="Arial Unicode MS"/>
-                <a:ea typeface="Arial Unicode MS"/>
-                <a:cs typeface="Arial Unicode MS"/>
-              </a:rPr>
-              <a:t>
-</a:t>
-            </a:r>
-          </a:p>
-          <a:p>
-            <a:pPr algn="l">
-              <a:lnSpc>
-                <a:spcPct val="115000"/>
-              </a:lnSpc>
-              <a:spcAft>
-                <a:spcPts val="500"/>
-              </a:spcAft>
-            </a:pPr>
-            <a:r>
-              <a:rPr sz="1000" lang="zh-TW" dirty="0">
-                <a:solidFill>
-                  <a:srgbClr val="000000"/>
-                </a:solidFill>
-                <a:latin typeface="Arial Unicode MS"/>
-                <a:ea typeface="Arial Unicode MS"/>
-                <a:cs typeface="Arial Unicode MS"/>
-              </a:rPr>
-              <a:t>最後補一件工具模擬不出來的事：雪會</a:t>
-            </a:r>
-            <a:r>
-              <a:rPr sz="1000" b="1" lang="zh-TW" dirty="0">
-                <a:solidFill>
-                  <a:srgbClr val="000000"/>
-                </a:solidFill>
-                <a:latin typeface="Arial Unicode MS"/>
-                <a:ea typeface="Arial Unicode MS"/>
-                <a:cs typeface="Arial Unicode MS"/>
-              </a:rPr>
-              <a:t>積在感測器表面</a:t>
-            </a:r>
-            <a:r>
-              <a:rPr sz="1000" lang="zh-TW" dirty="0">
-                <a:solidFill>
-                  <a:srgbClr val="000000"/>
-                </a:solidFill>
-                <a:latin typeface="Arial Unicode MS"/>
-                <a:ea typeface="Arial Unicode MS"/>
-                <a:cs typeface="Arial Unicode MS"/>
-              </a:rPr>
-              <a:t>。那個效果比較接近「光達罩髒污」那顆按鈕——你們可以兩個一起打開，看數字掉到什麼程度。所以下雪對自駕車是雙重打擊：天上飄的，加上鏡頭上黏的。
-</a:t>
-            </a:r>
-          </a:p>
-          <a:p>
-            <a:pPr algn="l">
-              <a:lnSpc>
-                <a:spcPct val="115000"/>
-              </a:lnSpc>
-              <a:spcAft>
-                <a:spcPts val="500"/>
-              </a:spcAft>
-            </a:pPr>
-            <a:r>
-              <a:rPr sz="1000" lang="zh-TW" dirty="0">
-                <a:solidFill>
-                  <a:srgbClr val="000000"/>
-                </a:solidFill>
-                <a:latin typeface="Arial Unicode MS"/>
-                <a:ea typeface="Arial Unicode MS"/>
-                <a:cs typeface="Arial Unicode MS"/>
-              </a:rPr>
-              <a:t>這就是為什麼北歐和日本北海道的自駕測試特別難，不是車做得不好，是</a:t>
-            </a:r>
-            <a:r>
-              <a:rPr sz="1000" b="1" lang="zh-TW" dirty="0">
-                <a:solidFill>
-                  <a:srgbClr val="000000"/>
-                </a:solidFill>
-                <a:latin typeface="Arial Unicode MS"/>
-                <a:ea typeface="Arial Unicode MS"/>
-                <a:cs typeface="Arial Unicode MS"/>
-              </a:rPr>
-              <a:t>物理上就比較吃虧</a:t>
-            </a:r>
-            <a:r>
-              <a:rPr sz="1000" lang="zh-TW" dirty="0">
-                <a:solidFill>
-                  <a:srgbClr val="000000"/>
-                </a:solidFill>
-                <a:latin typeface="Arial Unicode MS"/>
-                <a:ea typeface="Arial Unicode MS"/>
-                <a:cs typeface="Arial Unicode MS"/>
-              </a:rPr>
-              <a:t>。
-</a:t>
-            </a:r>
-          </a:p>
-          <a:p>
-            <a:pPr algn="l">
-              <a:lnSpc>
-                <a:spcPct val="115000"/>
-              </a:lnSpc>
-              <a:spcAft>
-                <a:spcPts val="500"/>
-              </a:spcAft>
-            </a:pPr>
-            <a:r>
-              <a:rPr sz="1000" lang="zh-TW" dirty="0">
-                <a:solidFill>
-                  <a:srgbClr val="000000"/>
-                </a:solidFill>
-                <a:latin typeface="Arial Unicode MS"/>
-                <a:ea typeface="Arial Unicode MS"/>
-                <a:cs typeface="Arial Unicode MS"/>
-              </a:rPr>
-              <a:t>台灣和越南平地不下雪，所以你們可能覺得這一格用不到。但反過來想：如果你們以後做的車要賣到日本或歐洲，這一格就得整個重新驗證——而這正是下一頁 ODD 要處理的事。</a:t>
+              <a:t>台灣和越南平地不下雪，所以大家可能覺得這一格用不到。可是反過來想，如果你們以後做的車要賣到日本或歐洲，這一格就得整個重新驗證。而這正是下一頁 ODD 要處理的事。</a:t>
             </a:r>
           </a:p>
         </p:txBody>
@@ -7208,7 +6591,7 @@
                 <a:ea typeface="Arial Unicode MS"/>
                 <a:cs typeface="Arial Unicode MS"/>
               </a:rPr>
-              <a:t>（先聲明一件事，表格最下面那一行也寫了：</a:t>
+              <a:t>先聲明一件事，表格最下面那一行也寫了：</a:t>
             </a:r>
             <a:r>
               <a:rPr sz="1050" b="1" lang="zh-TW" dirty="0">
@@ -7241,7 +6624,7 @@
                 <a:ea typeface="Arial Unicode MS"/>
                 <a:cs typeface="Arial Unicode MS"/>
               </a:rPr>
-              <a:t>欄與欄之間的關係</a:t>
+              <a:t>欄跟欄之間的關係</a:t>
             </a:r>
             <a:r>
               <a:rPr sz="1050" lang="zh-TW" dirty="0">
@@ -7252,7 +6635,7 @@
                 <a:ea typeface="Arial Unicode MS"/>
                 <a:cs typeface="Arial Unicode MS"/>
               </a:rPr>
-              <a:t>——哪一種掉得快、哪一種幾乎不動。）
+              <a:t>，哪一種掉得快、哪一種幾乎不動。
 </a:t>
             </a:r>
           </a:p>
@@ -7274,7 +6657,7 @@
                 <a:ea typeface="Arial Unicode MS"/>
                 <a:cs typeface="Arial Unicode MS"/>
               </a:rPr>
-              <a:t>先看雷達那一欄，從上到下：兩百五十、兩百五十、兩百五十、兩百二十五、兩百、兩百二十五——幾乎沒動。直到</a:t>
+              <a:t>先看雷達那一欄，從上到下：兩百五十、兩百五十、兩百五十、兩百二十五、兩百、兩百二十五，幾乎沒動。直到</a:t>
             </a:r>
             <a:r>
               <a:rPr sz="1050" b="1" lang="zh-TW" dirty="0">
@@ -7296,7 +6679,7 @@
                 <a:ea typeface="Arial Unicode MS"/>
                 <a:cs typeface="Arial Unicode MS"/>
               </a:rPr>
-              <a:t>：一百六十三。
+              <a:t>，一百六十三。
 </a:t>
             </a:r>
           </a:p>
@@ -7362,7 +6745,7 @@
                 <a:ea typeface="Arial Unicode MS"/>
                 <a:cs typeface="Arial Unicode MS"/>
               </a:rPr>
-              <a:t>所以如果只看這張表，好像雷達最強，什麼都該裝雷達就好。但請大家把第一節那張「每一種的弱點，由哪一種來補」的表拿出來對照——雷達讀不出燈色、不知道類別、橫越的時候徑向速度歸零，而且這一欄用的是長距雷達，視野只有二十度，兩側根本照不到。
+              <a:t>所以如果只看這張表，好像雷達最強，什麼都該裝雷達就好。可是請大家把第一節那張「每一種的弱點，由哪一種來補」拿出來對照——雷達讀不出燈色、不知道類別、橫越的時候徑向速度歸零，而且這一欄用的是長距雷達，視野只有二十度，兩側根本照不到。
 </a:t>
             </a:r>
           </a:p>
@@ -7395,7 +6778,7 @@
                 <a:ea typeface="Arial Unicode MS"/>
                 <a:cs typeface="Arial Unicode MS"/>
               </a:rPr>
-              <a:t> 這兩句話要一起講，只講一句就會誤導。
+              <a:t>這兩句話要一起講，只講一句就會誤導。
 </a:t>
             </a:r>
           </a:p>
@@ -7417,7 +6800,7 @@
                 <a:ea typeface="Arial Unicode MS"/>
                 <a:cs typeface="Arial Unicode MS"/>
               </a:rPr>
-              <a:t>最後那一行請大家一定要記住：這是課堂模型的設定值，不是任何產品的規格。真實世界裡 Ouster 的光達和別家的光達在雨裡的表現不一樣，我們不能拿這張表去說哪一家比較好。這張表只是讓大家看見「條件會改變資料」這件事。
+              <a:t>最後那一行請大家一定要記住：這是課堂模型的設定值，不是任何產品的規格。真實世界裡，這一家的光達和那一家的光達在雨裡的表現不一樣，我們不能拿這張表去說哪一家比較好。這張表只是讓大家看見「條件會改變資料」這件事。
 </a:t>
             </a:r>
           </a:p>
@@ -7552,17 +6935,6 @@
               </a:spcAft>
             </a:pPr>
             <a:r>
-              <a:rPr sz="1000" b="1" lang="zh-TW" dirty="0">
-                <a:solidFill>
-                  <a:srgbClr val="000000"/>
-                </a:solidFill>
-                <a:latin typeface="Arial Unicode MS"/>
-                <a:ea typeface="Arial Unicode MS"/>
-                <a:cs typeface="Arial Unicode MS"/>
-              </a:rPr>
-              <a:t>先看左邊這兩張圖，建立預期，再看影片。</a:t>
-            </a:r>
-            <a:r>
               <a:rPr sz="1000" lang="zh-TW" dirty="0">
                 <a:solidFill>
                   <a:srgbClr val="000000"/>
@@ -7571,7 +6943,7 @@
                 <a:ea typeface="Arial Unicode MS"/>
                 <a:cs typeface="Arial Unicode MS"/>
               </a:rPr>
-              <a:t>
+              <a:t>我們先看左邊這兩張圖，心裡先有個底，再看影片。
 </a:t>
             </a:r>
           </a:p>
@@ -7637,7 +7009,7 @@
                 <a:ea typeface="Arial Unicode MS"/>
                 <a:cs typeface="Arial Unicode MS"/>
               </a:rPr>
-              <a:t>大雨那張，行人還看得到輪廓，只是雨絲擋在中間。濃霧那張——（指一下）——那個人幾乎被霧蓋住，看不見了。右下角的數字就是我們剛剛量過的：大雨相機只剩二十二公尺，濃霧只剩十六公尺。
+              <a:t>大雨那張，行人還看得到輪廓，只是雨絲擋在中間。濃霧那張，那個人幾乎被霧蓋住，看不見了。右下角的數字就是我們剛剛量過的：大雨相機只剩二十二公尺，濃霧只剩十六公尺。
 </a:t>
             </a:r>
           </a:p>
@@ -7659,7 +7031,7 @@
                 <a:ea typeface="Arial Unicode MS"/>
                 <a:cs typeface="Arial Unicode MS"/>
               </a:rPr>
-              <a:t>請大家帶著這個預期看影片：</a:t>
+              <a:t>請大家帶著這個問題看影片：</a:t>
             </a:r>
             <a:r>
               <a:rPr sz="1000" b="1" lang="zh-TW" dirty="0">
@@ -7670,7 +7042,7 @@
                 <a:ea typeface="Arial Unicode MS"/>
                 <a:cs typeface="Arial Unicode MS"/>
               </a:rPr>
-              <a:t>如果車子只靠相機，在這兩種天氣下它看得到那個小孩嗎？</a:t>
+              <a:t>如果車子只靠相機，在這兩種天氣下，它看得到那個小孩嗎？</a:t>
             </a:r>
             <a:r>
               <a:rPr sz="1000" lang="zh-TW" dirty="0">
@@ -7695,6 +7067,17 @@
               </a:spcAft>
             </a:pPr>
             <a:r>
+              <a:rPr sz="1000" lang="zh-TW" dirty="0">
+                <a:solidFill>
+                  <a:srgbClr val="000000"/>
+                </a:solidFill>
+                <a:latin typeface="Arial Unicode MS"/>
+                <a:ea typeface="Arial Unicode MS"/>
+                <a:cs typeface="Arial Unicode MS"/>
+              </a:rPr>
+              <a:t>先介紹這支影片。拍的人叫 Mark Rober，是前 NASA 的工程師，現在是 YouTuber，他的頻道以「用誇張的實驗講科學」出名。這支影片全長十八分半，前面九分鐘是他潛進迪士尼樂園、用光達掃描太空山那條全黑的軌道，那一段很好看，但是跟今天無關，</a:t>
+            </a:r>
+            <a:r>
               <a:rPr sz="1000" b="1" lang="zh-TW" dirty="0">
                 <a:solidFill>
                   <a:srgbClr val="000000"/>
@@ -7703,7 +7086,7 @@
                 <a:ea typeface="Arial Unicode MS"/>
                 <a:cs typeface="Arial Unicode MS"/>
               </a:rPr>
-              <a:t>接下來介紹這支影片。</a:t>
+              <a:t>測試從九分六秒開始</a:t>
             </a:r>
             <a:r>
               <a:rPr sz="1000" lang="zh-TW" dirty="0">
@@ -7714,7 +7097,7 @@
                 <a:ea typeface="Arial Unicode MS"/>
                 <a:cs typeface="Arial Unicode MS"/>
               </a:rPr>
-              <a:t>
+              <a:t>。
 </a:t>
             </a:r>
           </a:p>
@@ -7736,7 +7119,7 @@
                 <a:ea typeface="Arial Unicode MS"/>
                 <a:cs typeface="Arial Unicode MS"/>
               </a:rPr>
-              <a:t>拍的人叫 Mark Rober，是前 NASA 工程師，現在是 YouTuber，他的頻道以「用誇張的實驗講科學」出名。這支影片全長約十八分半，前面九分鐘是他潛入迪士尼樂園、用光達掃描太空山那條全黑的軌道——那段很好看但跟今天無關，</a:t>
+              <a:t>他做的事很簡單：拿一台只用相機的特斯拉，跟一台裝了光達的車，兩台都用</a:t>
             </a:r>
             <a:r>
               <a:rPr sz="1000" b="1" lang="zh-TW" dirty="0">
@@ -7747,7 +7130,7 @@
                 <a:ea typeface="Arial Unicode MS"/>
                 <a:cs typeface="Arial Unicode MS"/>
               </a:rPr>
-              <a:t>測試從 9:06 開始</a:t>
+              <a:t>時速四十英里</a:t>
             </a:r>
             <a:r>
               <a:rPr sz="1000" lang="zh-TW" dirty="0">
@@ -7758,7 +7141,7 @@
                 <a:ea typeface="Arial Unicode MS"/>
                 <a:cs typeface="Arial Unicode MS"/>
               </a:rPr>
-              <a:t>。
+              <a:t>，大概六十四公里，衝向同一個小孩假人，看誰會停。一共六項測試。
 </a:t>
             </a:r>
           </a:p>
@@ -7780,29 +7163,7 @@
                 <a:ea typeface="Arial Unicode MS"/>
                 <a:cs typeface="Arial Unicode MS"/>
               </a:rPr>
-              <a:t>他做的事很簡單：拿一台只用相機的特斯拉，跟一台裝了光達的車，兩台都以</a:t>
-            </a:r>
-            <a:r>
-              <a:rPr sz="1000" b="1" lang="zh-TW" dirty="0">
-                <a:solidFill>
-                  <a:srgbClr val="000000"/>
-                </a:solidFill>
-                <a:latin typeface="Arial Unicode MS"/>
-                <a:ea typeface="Arial Unicode MS"/>
-                <a:cs typeface="Arial Unicode MS"/>
-              </a:rPr>
-              <a:t>時速四十英里（約六十四公里）</a:t>
-            </a:r>
-            <a:r>
-              <a:rPr sz="1000" lang="zh-TW" dirty="0">
-                <a:solidFill>
-                  <a:srgbClr val="000000"/>
-                </a:solidFill>
-                <a:latin typeface="Arial Unicode MS"/>
-                <a:ea typeface="Arial Unicode MS"/>
-                <a:cs typeface="Arial Unicode MS"/>
-              </a:rPr>
-              <a:t>衝向同一個小孩假人，看誰會停。一共六項測試。
+              <a:t>我們只播兩段，霧那一段和雨那一段，大概兩分鐘。其他四項我直接講結果。想完整看的同學可以課後自己看。
 </a:t>
             </a:r>
           </a:p>
@@ -7816,6 +7177,17 @@
               </a:spcAft>
             </a:pPr>
             <a:r>
+              <a:rPr sz="1000" b="1" lang="zh-TW" dirty="0">
+                <a:solidFill>
+                  <a:srgbClr val="000000"/>
+                </a:solidFill>
+                <a:latin typeface="Arial Unicode MS"/>
+                <a:ea typeface="Arial Unicode MS"/>
+                <a:cs typeface="Arial Unicode MS"/>
+              </a:rPr>
+              <a:t>第一項，小孩假人站在路中間。</a:t>
+            </a:r>
+            <a:r>
               <a:rPr sz="1000" lang="zh-TW" dirty="0">
                 <a:solidFill>
                   <a:srgbClr val="000000"/>
@@ -7824,7 +7196,7 @@
                 <a:ea typeface="Arial Unicode MS"/>
                 <a:cs typeface="Arial Unicode MS"/>
               </a:rPr>
-              <a:t>（播放建議：時間只有三分鐘，建議播</a:t>
+              <a:t>光達車偵測到、及時煞停，過。特斯拉也偵測到了，可是</a:t>
             </a:r>
             <a:r>
               <a:rPr sz="1000" b="1" lang="zh-TW" dirty="0">
@@ -7835,7 +7207,7 @@
                 <a:ea typeface="Arial Unicode MS"/>
                 <a:cs typeface="Arial Unicode MS"/>
               </a:rPr>
-              <a:t>霧</a:t>
+              <a:t>來不及煞停，撞上去</a:t>
             </a:r>
             <a:r>
               <a:rPr sz="1000" lang="zh-TW" dirty="0">
@@ -7846,29 +7218,7 @@
                 <a:ea typeface="Arial Unicode MS"/>
                 <a:cs typeface="Arial Unicode MS"/>
               </a:rPr>
-              <a:t>那一段 11:17–12:19、和</a:t>
-            </a:r>
-            <a:r>
-              <a:rPr sz="1000" b="1" lang="zh-TW" dirty="0">
-                <a:solidFill>
-                  <a:srgbClr val="000000"/>
-                </a:solidFill>
-                <a:latin typeface="Arial Unicode MS"/>
-                <a:ea typeface="Arial Unicode MS"/>
-                <a:cs typeface="Arial Unicode MS"/>
-              </a:rPr>
-              <a:t>雨</a:t>
-            </a:r>
-            <a:r>
-              <a:rPr sz="1000" lang="zh-TW" dirty="0">
-                <a:solidFill>
-                  <a:srgbClr val="000000"/>
-                </a:solidFill>
-                <a:latin typeface="Arial Unicode MS"/>
-                <a:ea typeface="Arial Unicode MS"/>
-                <a:cs typeface="Arial Unicode MS"/>
-              </a:rPr>
-              <a:t>那一段 12:21–13:20，總共約兩分鐘。其他四項我直接用嘴巴講結果。要完整看可以請同學課後自己看。需要網路；沒網路就跳過，用下面的結果講。）
+              <a:t>。
 </a:t>
             </a:r>
           </a:p>
@@ -7882,6 +7232,17 @@
               </a:spcAft>
             </a:pPr>
             <a:r>
+              <a:rPr sz="1000" lang="zh-TW" dirty="0">
+                <a:solidFill>
+                  <a:srgbClr val="000000"/>
+                </a:solidFill>
+                <a:latin typeface="Arial Unicode MS"/>
+                <a:ea typeface="Arial Unicode MS"/>
+                <a:cs typeface="Arial Unicode MS"/>
+              </a:rPr>
+              <a:t>這裡有一個細節很重要。特斯拉第一次跑的時候用的是</a:t>
+            </a:r>
+            <a:r>
               <a:rPr sz="1000" b="1" lang="zh-TW" dirty="0">
                 <a:solidFill>
                   <a:srgbClr val="000000"/>
@@ -7890,7 +7251,7 @@
                 <a:ea typeface="Arial Unicode MS"/>
                 <a:cs typeface="Arial Unicode MS"/>
               </a:rPr>
-              <a:t>六項測試和結果，我一項一項講。</a:t>
+              <a:t>自動緊急煞車</a:t>
             </a:r>
             <a:r>
               <a:rPr sz="1000" lang="zh-TW" dirty="0">
@@ -7901,7 +7262,29 @@
                 <a:ea typeface="Arial Unicode MS"/>
                 <a:cs typeface="Arial Unicode MS"/>
               </a:rPr>
-              <a:t>
+              <a:t>，那個系統假設駕駛人在專心開車，所以它要百分之百確定才會煞，免得亂煞車。後來他改用 </a:t>
+            </a:r>
+            <a:r>
+              <a:rPr sz="1000" b="1" lang="zh-TW" dirty="0">
+                <a:solidFill>
+                  <a:srgbClr val="000000"/>
+                </a:solidFill>
+                <a:latin typeface="Arial Unicode MS"/>
+                <a:ea typeface="Arial Unicode MS"/>
+                <a:cs typeface="Arial Unicode MS"/>
+              </a:rPr>
+              <a:t>Autopilot</a:t>
+            </a:r>
+            <a:r>
+              <a:rPr sz="1000" lang="zh-TW" dirty="0">
+                <a:solidFill>
+                  <a:srgbClr val="000000"/>
+                </a:solidFill>
+                <a:latin typeface="Arial Unicode MS"/>
+                <a:ea typeface="Arial Unicode MS"/>
+                <a:cs typeface="Arial Unicode MS"/>
+              </a:rPr>
+              <a:t> 重跑一次，這次及時停住了。所以拍片的人自己說「算你平手」，接下來五項全部用 Autopilot。
 </a:t>
             </a:r>
           </a:p>
@@ -7915,6 +7298,17 @@
               </a:spcAft>
             </a:pPr>
             <a:r>
+              <a:rPr sz="1000" lang="zh-TW" dirty="0">
+                <a:solidFill>
+                  <a:srgbClr val="000000"/>
+                </a:solidFill>
+                <a:latin typeface="Arial Unicode MS"/>
+                <a:ea typeface="Arial Unicode MS"/>
+                <a:cs typeface="Arial Unicode MS"/>
+              </a:rPr>
+              <a:t>這一項真正的教訓其實不是感測器，是</a:t>
+            </a:r>
+            <a:r>
               <a:rPr sz="1000" b="1" lang="zh-TW" dirty="0">
                 <a:solidFill>
                   <a:srgbClr val="000000"/>
@@ -7923,7 +7317,7 @@
                 <a:ea typeface="Arial Unicode MS"/>
                 <a:cs typeface="Arial Unicode MS"/>
               </a:rPr>
-              <a:t>第一項：小孩假人站在路中間。</a:t>
+              <a:t>同一台車、同一顆感測器，設定不一樣結果就不一樣</a:t>
             </a:r>
             <a:r>
               <a:rPr sz="1000" lang="zh-TW" dirty="0">
@@ -7934,29 +7328,7 @@
                 <a:ea typeface="Arial Unicode MS"/>
                 <a:cs typeface="Arial Unicode MS"/>
               </a:rPr>
-              <a:t>光達車偵測到、及時煞停，過。特斯拉也偵測到了，但</a:t>
-            </a:r>
-            <a:r>
-              <a:rPr sz="1000" b="1" lang="zh-TW" dirty="0">
-                <a:solidFill>
-                  <a:srgbClr val="000000"/>
-                </a:solidFill>
-                <a:latin typeface="Arial Unicode MS"/>
-                <a:ea typeface="Arial Unicode MS"/>
-                <a:cs typeface="Arial Unicode MS"/>
-              </a:rPr>
-              <a:t>來不及煞停，撞上去</a:t>
-            </a:r>
-            <a:r>
-              <a:rPr sz="1000" lang="zh-TW" dirty="0">
-                <a:solidFill>
-                  <a:srgbClr val="000000"/>
-                </a:solidFill>
-                <a:latin typeface="Arial Unicode MS"/>
-                <a:ea typeface="Arial Unicode MS"/>
-                <a:cs typeface="Arial Unicode MS"/>
-              </a:rPr>
-              <a:t>。
+              <a:t>。期末專題如果要比較兩台車，設定沒有對齊，比出來的東西沒有意義。
 </a:t>
             </a:r>
           </a:p>
@@ -7970,6 +7342,17 @@
               </a:spcAft>
             </a:pPr>
             <a:r>
+              <a:rPr sz="1000" b="1" lang="zh-TW" dirty="0">
+                <a:solidFill>
+                  <a:srgbClr val="000000"/>
+                </a:solidFill>
+                <a:latin typeface="Arial Unicode MS"/>
+                <a:ea typeface="Arial Unicode MS"/>
+                <a:cs typeface="Arial Unicode MS"/>
+              </a:rPr>
+              <a:t>第二項，小孩從停放的車子後面突然衝出來。</a:t>
+            </a:r>
+            <a:r>
               <a:rPr sz="1000" lang="zh-TW" dirty="0">
                 <a:solidFill>
                   <a:srgbClr val="000000"/>
@@ -7978,73 +7361,7 @@
                 <a:ea typeface="Arial Unicode MS"/>
                 <a:cs typeface="Arial Unicode MS"/>
               </a:rPr>
-              <a:t>這裡有一個細節很重要，不要跳過：特斯拉第一次跑的時候用的是</a:t>
-            </a:r>
-            <a:r>
-              <a:rPr sz="1000" b="1" lang="zh-TW" dirty="0">
-                <a:solidFill>
-                  <a:srgbClr val="000000"/>
-                </a:solidFill>
-                <a:latin typeface="Arial Unicode MS"/>
-                <a:ea typeface="Arial Unicode MS"/>
-                <a:cs typeface="Arial Unicode MS"/>
-              </a:rPr>
-              <a:t>自動緊急煞車</a:t>
-            </a:r>
-            <a:r>
-              <a:rPr sz="1000" lang="zh-TW" dirty="0">
-                <a:solidFill>
-                  <a:srgbClr val="000000"/>
-                </a:solidFill>
-                <a:latin typeface="Arial Unicode MS"/>
-                <a:ea typeface="Arial Unicode MS"/>
-                <a:cs typeface="Arial Unicode MS"/>
-              </a:rPr>
-              <a:t>，那個系統假設駕駛人在專心開車，所以它要「百分之百確定」才會煞，以免亂煞車。後來他改用 </a:t>
-            </a:r>
-            <a:r>
-              <a:rPr sz="1000" b="1" lang="zh-TW" dirty="0">
-                <a:solidFill>
-                  <a:srgbClr val="000000"/>
-                </a:solidFill>
-                <a:latin typeface="Arial Unicode MS"/>
-                <a:ea typeface="Arial Unicode MS"/>
-                <a:cs typeface="Arial Unicode MS"/>
-              </a:rPr>
-              <a:t>Autopilot</a:t>
-            </a:r>
-            <a:r>
-              <a:rPr sz="1000" lang="zh-TW" dirty="0">
-                <a:solidFill>
-                  <a:srgbClr val="000000"/>
-                </a:solidFill>
-                <a:latin typeface="Arial Unicode MS"/>
-                <a:ea typeface="Arial Unicode MS"/>
-                <a:cs typeface="Arial Unicode MS"/>
-              </a:rPr>
-              <a:t> 重跑一次，這次及時停住了。所以拍片的人自己說「算你平手」，並且</a:t>
-            </a:r>
-            <a:r>
-              <a:rPr sz="1000" b="1" lang="zh-TW" dirty="0">
-                <a:solidFill>
-                  <a:srgbClr val="000000"/>
-                </a:solidFill>
-                <a:latin typeface="Arial Unicode MS"/>
-                <a:ea typeface="Arial Unicode MS"/>
-                <a:cs typeface="Arial Unicode MS"/>
-              </a:rPr>
-              <a:t>接下來五項全部用 Autopilot</a:t>
-            </a:r>
-            <a:r>
-              <a:rPr sz="1000" lang="zh-TW" dirty="0">
-                <a:solidFill>
-                  <a:srgbClr val="000000"/>
-                </a:solidFill>
-                <a:latin typeface="Arial Unicode MS"/>
-                <a:ea typeface="Arial Unicode MS"/>
-                <a:cs typeface="Arial Unicode MS"/>
-              </a:rPr>
-              <a:t>。
+              <a:t>先滾出一顆球，然後假人彈出來，兩台車只有不到一秒可以反應。光達車停住，特斯拉也停住，而且還停得很從容。兩台都過。
 </a:t>
             </a:r>
           </a:p>
@@ -8058,6 +7375,17 @@
               </a:spcAft>
             </a:pPr>
             <a:r>
+              <a:rPr sz="1000" b="1" lang="zh-TW" dirty="0">
+                <a:solidFill>
+                  <a:srgbClr val="000000"/>
+                </a:solidFill>
+                <a:latin typeface="Arial Unicode MS"/>
+                <a:ea typeface="Arial Unicode MS"/>
+                <a:cs typeface="Arial Unicode MS"/>
+              </a:rPr>
+              <a:t>第三項，霧。</a:t>
+            </a:r>
+            <a:r>
               <a:rPr sz="1000" lang="zh-TW" dirty="0">
                 <a:solidFill>
                   <a:srgbClr val="000000"/>
@@ -8066,7 +7394,7 @@
                 <a:ea typeface="Arial Unicode MS"/>
                 <a:cs typeface="Arial Unicode MS"/>
               </a:rPr>
-              <a:t>（這一項的教訓其實不是感測器，是</a:t>
+              <a:t>這一項請大家專心看。拍片的人說他自己的眼睛已經完全看不到霧裡有小孩了。光達車：急煞、停住，假人好端端站著。特斯拉：</a:t>
             </a:r>
             <a:r>
               <a:rPr sz="1000" b="1" lang="zh-TW" dirty="0">
@@ -8077,7 +7405,7 @@
                 <a:ea typeface="Arial Unicode MS"/>
                 <a:cs typeface="Arial Unicode MS"/>
               </a:rPr>
-              <a:t>同一台車、同一顆感測器，設定不一樣結果就不一樣</a:t>
+              <a:t>完全沒有踩煞車，連一下都沒有。</a:t>
             </a:r>
             <a:r>
               <a:rPr sz="1000" lang="zh-TW" dirty="0">
@@ -8088,7 +7416,7 @@
                 <a:ea typeface="Arial Unicode MS"/>
                 <a:cs typeface="Arial Unicode MS"/>
               </a:rPr>
-              <a:t>。期末專題如果要比較兩台車，設定沒對齊，比出來的東西沒有意義。）
+              <a:t>
 </a:t>
             </a:r>
           </a:p>
@@ -8102,17 +7430,6 @@
               </a:spcAft>
             </a:pPr>
             <a:r>
-              <a:rPr sz="1000" b="1" lang="zh-TW" dirty="0">
-                <a:solidFill>
-                  <a:srgbClr val="000000"/>
-                </a:solidFill>
-                <a:latin typeface="Arial Unicode MS"/>
-                <a:ea typeface="Arial Unicode MS"/>
-                <a:cs typeface="Arial Unicode MS"/>
-              </a:rPr>
-              <a:t>第二項：小孩從停放的車子後面突然衝出來。</a:t>
-            </a:r>
-            <a:r>
               <a:rPr sz="1000" lang="zh-TW" dirty="0">
                 <a:solidFill>
                   <a:srgbClr val="000000"/>
@@ -8121,29 +7438,7 @@
                 <a:ea typeface="Arial Unicode MS"/>
                 <a:cs typeface="Arial Unicode MS"/>
               </a:rPr>
-              <a:t>先滾出一顆球，然後假人彈出來，兩台車只有不到一秒可以反應。光達車停住。特斯拉也停住，而且還停得很從容。</a:t>
-            </a:r>
-            <a:r>
-              <a:rPr sz="1000" b="1" lang="zh-TW" dirty="0">
-                <a:solidFill>
-                  <a:srgbClr val="000000"/>
-                </a:solidFill>
-                <a:latin typeface="Arial Unicode MS"/>
-                <a:ea typeface="Arial Unicode MS"/>
-                <a:cs typeface="Arial Unicode MS"/>
-              </a:rPr>
-              <a:t>兩台都過。</a:t>
-            </a:r>
-            <a:r>
-              <a:rPr sz="1000" lang="zh-TW" dirty="0">
-                <a:solidFill>
-                  <a:srgbClr val="000000"/>
-                </a:solidFill>
-                <a:latin typeface="Arial Unicode MS"/>
-                <a:ea typeface="Arial Unicode MS"/>
-                <a:cs typeface="Arial Unicode MS"/>
-              </a:rPr>
-              <a:t>
+              <a:t>這個結果，跟我們剛剛那張波長圖對得起來嗎？對得起來。霧滴一到五十微米，比相機的波長大，所以擋住相機；也比光達的波長大，所以光達也掉了。可是光達本來有一百公尺，掉到四十五還夠用；相機本來八十，掉到十六就來不及了。
 </a:t>
             </a:r>
           </a:p>
@@ -8165,7 +7460,7 @@
                 <a:ea typeface="Arial Unicode MS"/>
                 <a:cs typeface="Arial Unicode MS"/>
               </a:rPr>
-              <a:t>第三項：霧。</a:t>
+              <a:t>第四項，大雨。</a:t>
             </a:r>
             <a:r>
               <a:rPr sz="1000" lang="zh-TW" dirty="0">
@@ -8176,7 +7471,7 @@
                 <a:ea typeface="Arial Unicode MS"/>
                 <a:cs typeface="Arial Unicode MS"/>
               </a:rPr>
-              <a:t>這一項請大家專心看。拍片的人說他自己的眼睛已經完全看不到霧裡有小孩了。光達車：急煞、停住，假人好端端站著。特斯拉：</a:t>
+              <a:t>他們用灑水製造傾盆大雨。特斯拉的畫面上，水一灑下來，小孩就整個不見了——這正是我們第三輪按到「大雨」時看到的，相機的有效距離掉到二十二公尺。結果特斯拉</a:t>
             </a:r>
             <a:r>
               <a:rPr sz="1000" b="1" lang="zh-TW" dirty="0">
@@ -8187,7 +7482,7 @@
                 <a:ea typeface="Arial Unicode MS"/>
                 <a:cs typeface="Arial Unicode MS"/>
               </a:rPr>
-              <a:t>完全沒有踩煞車，連一下都沒有。</a:t>
+              <a:t>沒有停</a:t>
             </a:r>
             <a:r>
               <a:rPr sz="1000" lang="zh-TW" dirty="0">
@@ -8198,7 +7493,29 @@
                 <a:ea typeface="Arial Unicode MS"/>
                 <a:cs typeface="Arial Unicode MS"/>
               </a:rPr>
-              <a:t>
+              <a:t>。光達車一開始看起來也沒減速，拍片的人說「光達可能有麻煩」，可是最後</a:t>
+            </a:r>
+            <a:r>
+              <a:rPr sz="1000" b="1" lang="zh-TW" dirty="0">
+                <a:solidFill>
+                  <a:srgbClr val="000000"/>
+                </a:solidFill>
+                <a:latin typeface="Arial Unicode MS"/>
+                <a:ea typeface="Arial Unicode MS"/>
+                <a:cs typeface="Arial Unicode MS"/>
+              </a:rPr>
+              <a:t>還是停住了</a:t>
+            </a:r>
+            <a:r>
+              <a:rPr sz="1000" lang="zh-TW" dirty="0">
+                <a:solidFill>
+                  <a:srgbClr val="000000"/>
+                </a:solidFill>
+                <a:latin typeface="Arial Unicode MS"/>
+                <a:ea typeface="Arial Unicode MS"/>
+                <a:cs typeface="Arial Unicode MS"/>
+              </a:rPr>
+              <a:t>，他自己說光達讓他意外。
 </a:t>
             </a:r>
           </a:p>
@@ -8212,6 +7529,17 @@
               </a:spcAft>
             </a:pPr>
             <a:r>
+              <a:rPr sz="1000" b="1" lang="zh-TW" dirty="0">
+                <a:solidFill>
+                  <a:srgbClr val="000000"/>
+                </a:solidFill>
+                <a:latin typeface="Arial Unicode MS"/>
+                <a:ea typeface="Arial Unicode MS"/>
+                <a:cs typeface="Arial Unicode MS"/>
+              </a:rPr>
+              <a:t>第五項，強光。</a:t>
+            </a:r>
+            <a:r>
               <a:rPr sz="1000" lang="zh-TW" dirty="0">
                 <a:solidFill>
                   <a:srgbClr val="000000"/>
@@ -8220,7 +7548,29 @@
                 <a:ea typeface="Arial Unicode MS"/>
                 <a:cs typeface="Arial Unicode MS"/>
               </a:rPr>
-              <a:t>（停在這裡問全班：這個結果，跟我們剛剛那張波長圖對得起來嗎？預期答案：對得起來。霧滴一到五十微米，比相機的波長大，所以擋住相機；也比光達的波長大，所以光達也掉了——但光達本來有一百公尺，掉到四十五還夠用；相機本來八十，掉到十六就來不及了。）
+              <a:t>六盞非常亮的燈直射過來，模擬日出日落，或者對向卡車的遠光燈。光達車立刻看到，</a:t>
+            </a:r>
+            <a:r>
+              <a:rPr sz="1000" b="1" lang="zh-TW" dirty="0">
+                <a:solidFill>
+                  <a:srgbClr val="000000"/>
+                </a:solidFill>
+                <a:latin typeface="Arial Unicode MS"/>
+                <a:ea typeface="Arial Unicode MS"/>
+                <a:cs typeface="Arial Unicode MS"/>
+              </a:rPr>
+              <a:t>特斯拉這一項也過了</a:t>
+            </a:r>
+            <a:r>
+              <a:rPr sz="1000" lang="zh-TW" dirty="0">
+                <a:solidFill>
+                  <a:srgbClr val="000000"/>
+                </a:solidFill>
+                <a:latin typeface="Arial Unicode MS"/>
+                <a:ea typeface="Arial Unicode MS"/>
+                <a:cs typeface="Arial Unicode MS"/>
+              </a:rPr>
+              <a:t>。
 </a:t>
             </a:r>
           </a:p>
@@ -8234,6 +7584,17 @@
               </a:spcAft>
             </a:pPr>
             <a:r>
+              <a:rPr sz="1000" lang="zh-TW" dirty="0">
+                <a:solidFill>
+                  <a:srgbClr val="000000"/>
+                </a:solidFill>
+                <a:latin typeface="Arial Unicode MS"/>
+                <a:ea typeface="Arial Unicode MS"/>
+                <a:cs typeface="Arial Unicode MS"/>
+              </a:rPr>
+              <a:t>這一項要特別講：</a:t>
+            </a:r>
+            <a:r>
               <a:rPr sz="1000" b="1" lang="zh-TW" dirty="0">
                 <a:solidFill>
                   <a:srgbClr val="000000"/>
@@ -8242,7 +7603,7 @@
                 <a:ea typeface="Arial Unicode MS"/>
                 <a:cs typeface="Arial Unicode MS"/>
               </a:rPr>
-              <a:t>第四項：大雨。</a:t>
+              <a:t>不是相機全輸。</a:t>
             </a:r>
             <a:r>
               <a:rPr sz="1000" lang="zh-TW" dirty="0">
@@ -8253,51 +7614,7 @@
                 <a:ea typeface="Arial Unicode MS"/>
                 <a:cs typeface="Arial Unicode MS"/>
               </a:rPr>
-              <a:t>他們用灑水製造傾盆大雨。特斯拉的畫面上，水一灑下來，小孩就整個不見了——這正是我們第三輪按到「大雨」時看到的：相機的有效距離掉到二十二公尺。結果特斯拉</a:t>
-            </a:r>
-            <a:r>
-              <a:rPr sz="1000" b="1" lang="zh-TW" dirty="0">
-                <a:solidFill>
-                  <a:srgbClr val="000000"/>
-                </a:solidFill>
-                <a:latin typeface="Arial Unicode MS"/>
-                <a:ea typeface="Arial Unicode MS"/>
-                <a:cs typeface="Arial Unicode MS"/>
-              </a:rPr>
-              <a:t>沒有停</a:t>
-            </a:r>
-            <a:r>
-              <a:rPr sz="1000" lang="zh-TW" dirty="0">
-                <a:solidFill>
-                  <a:srgbClr val="000000"/>
-                </a:solidFill>
-                <a:latin typeface="Arial Unicode MS"/>
-                <a:ea typeface="Arial Unicode MS"/>
-                <a:cs typeface="Arial Unicode MS"/>
-              </a:rPr>
-              <a:t>。光達車一開始看起來也沒減速，拍片的人說「光達可能有麻煩」，但最後</a:t>
-            </a:r>
-            <a:r>
-              <a:rPr sz="1000" b="1" lang="zh-TW" dirty="0">
-                <a:solidFill>
-                  <a:srgbClr val="000000"/>
-                </a:solidFill>
-                <a:latin typeface="Arial Unicode MS"/>
-                <a:ea typeface="Arial Unicode MS"/>
-                <a:cs typeface="Arial Unicode MS"/>
-              </a:rPr>
-              <a:t>還是停住了</a:t>
-            </a:r>
-            <a:r>
-              <a:rPr sz="1000" lang="zh-TW" dirty="0">
-                <a:solidFill>
-                  <a:srgbClr val="000000"/>
-                </a:solidFill>
-                <a:latin typeface="Arial Unicode MS"/>
-                <a:ea typeface="Arial Unicode MS"/>
-                <a:cs typeface="Arial Unicode MS"/>
-              </a:rPr>
-              <a:t>，他自己說「光達讓我意外」。
+              <a:t>相機在強光下還撐得住，這跟我們表上「逆光眩光，相機十八公尺」不太一樣，因為表上那個是四十公尺外的目標，影片裡的假人比較近。條件不同，結果就不同，這也是為什麼我一直要大家問「在什麼距離、什麼條件」。
 </a:t>
             </a:r>
           </a:p>
@@ -8311,17 +7628,6 @@
               </a:spcAft>
             </a:pPr>
             <a:r>
-              <a:rPr sz="1000" b="1" lang="zh-TW" dirty="0">
-                <a:solidFill>
-                  <a:srgbClr val="000000"/>
-                </a:solidFill>
-                <a:latin typeface="Arial Unicode MS"/>
-                <a:ea typeface="Arial Unicode MS"/>
-                <a:cs typeface="Arial Unicode MS"/>
-              </a:rPr>
-              <a:t>第五項：強光。</a:t>
-            </a:r>
-            <a:r>
               <a:rPr sz="1000" lang="zh-TW" dirty="0">
                 <a:solidFill>
                   <a:srgbClr val="000000"/>
@@ -8330,29 +7636,7 @@
                 <a:ea typeface="Arial Unicode MS"/>
                 <a:cs typeface="Arial Unicode MS"/>
               </a:rPr>
-              <a:t>六盞非常亮的燈直射過來，模擬日出日落或是對向卡車的遠光燈。光達車立刻看到。</a:t>
-            </a:r>
-            <a:r>
-              <a:rPr sz="1000" b="1" lang="zh-TW" dirty="0">
-                <a:solidFill>
-                  <a:srgbClr val="000000"/>
-                </a:solidFill>
-                <a:latin typeface="Arial Unicode MS"/>
-                <a:ea typeface="Arial Unicode MS"/>
-                <a:cs typeface="Arial Unicode MS"/>
-              </a:rPr>
-              <a:t>特斯拉這一項也過了。</a:t>
-            </a:r>
-            <a:r>
-              <a:rPr sz="1000" lang="zh-TW" dirty="0">
-                <a:solidFill>
-                  <a:srgbClr val="000000"/>
-                </a:solidFill>
-                <a:latin typeface="Arial Unicode MS"/>
-                <a:ea typeface="Arial Unicode MS"/>
-                <a:cs typeface="Arial Unicode MS"/>
-              </a:rPr>
-              <a:t>
+              <a:t>進到最後一項之前的比數：光達車五項全過，特斯拉三比五。
 </a:t>
             </a:r>
           </a:p>
@@ -8366,6 +7650,17 @@
               </a:spcAft>
             </a:pPr>
             <a:r>
+              <a:rPr sz="1000" b="1" lang="zh-TW" dirty="0">
+                <a:solidFill>
+                  <a:srgbClr val="000000"/>
+                </a:solidFill>
+                <a:latin typeface="Arial Unicode MS"/>
+                <a:ea typeface="Arial Unicode MS"/>
+                <a:cs typeface="Arial Unicode MS"/>
+              </a:rPr>
+              <a:t>第六項，畫成馬路的假牆。</a:t>
+            </a:r>
+            <a:r>
               <a:rPr sz="1000" lang="zh-TW" dirty="0">
                 <a:solidFill>
                   <a:srgbClr val="000000"/>
@@ -8374,7 +7669,7 @@
                 <a:ea typeface="Arial Unicode MS"/>
                 <a:cs typeface="Arial Unicode MS"/>
               </a:rPr>
-              <a:t>（這一項要特別講：</a:t>
+              <a:t>這一項最有名。他們立了一面牆，上面畫著跟前方道路一模一樣的圖案，就像卡通裡面那種假隧道。人的眼睛看得出破綻，光達更不用說，</a:t>
             </a:r>
             <a:r>
               <a:rPr sz="1000" b="1" lang="zh-TW" dirty="0">
@@ -8385,7 +7680,7 @@
                 <a:ea typeface="Arial Unicode MS"/>
                 <a:cs typeface="Arial Unicode MS"/>
               </a:rPr>
-              <a:t>不是相機全輸。</a:t>
+              <a:t>對光達來說那就是一面牆</a:t>
             </a:r>
             <a:r>
               <a:rPr sz="1000" lang="zh-TW" dirty="0">
@@ -8396,7 +7691,7 @@
                 <a:ea typeface="Arial Unicode MS"/>
                 <a:cs typeface="Arial Unicode MS"/>
               </a:rPr>
-              <a:t>相機在強光下還撐得住，這跟我們表上「逆光眩光：相機十八公尺」不太一樣——因為表上那個是四十公尺外的目標，影片裡的假人比較近。條件不同，結果就不同，這也是為什麼我一直要你們問「在什麼距離、什麼條件」。）
+              <a:t>，因為它量的是距離，不是圖案。結果光達車輕鬆停下。
 </a:t>
             </a:r>
           </a:p>
@@ -8418,7 +7713,7 @@
                 <a:ea typeface="Arial Unicode MS"/>
                 <a:cs typeface="Arial Unicode MS"/>
               </a:rPr>
-              <a:t>進到最後一項之前的比數：</a:t>
+              <a:t>特斯拉呢？</a:t>
             </a:r>
             <a:r>
               <a:rPr sz="1000" b="1" lang="zh-TW" dirty="0">
@@ -8429,7 +7724,7 @@
                 <a:ea typeface="Arial Unicode MS"/>
                 <a:cs typeface="Arial Unicode MS"/>
               </a:rPr>
-              <a:t>光達車五項全過，特斯拉三比五。</a:t>
+              <a:t>連一下煞車都沒踩，直接撞穿。</a:t>
             </a:r>
             <a:r>
               <a:rPr sz="1000" lang="zh-TW" dirty="0">
@@ -8454,17 +7749,6 @@
               </a:spcAft>
             </a:pPr>
             <a:r>
-              <a:rPr sz="1000" b="1" lang="zh-TW" dirty="0">
-                <a:solidFill>
-                  <a:srgbClr val="000000"/>
-                </a:solidFill>
-                <a:latin typeface="Arial Unicode MS"/>
-                <a:ea typeface="Arial Unicode MS"/>
-                <a:cs typeface="Arial Unicode MS"/>
-              </a:rPr>
-              <a:t>第六項：畫成馬路的假牆。</a:t>
-            </a:r>
-            <a:r>
               <a:rPr sz="1000" lang="zh-TW" dirty="0">
                 <a:solidFill>
                   <a:srgbClr val="000000"/>
@@ -8473,29 +7757,7 @@
                 <a:ea typeface="Arial Unicode MS"/>
                 <a:cs typeface="Arial Unicode MS"/>
               </a:rPr>
-              <a:t>這一項最有名。他們立了一面牆，上面畫著跟前方道路一模一樣的圖案，就像卡通《嗶嗶鳥》裡威利狼撞的那種假隧道。人眼看得出破綻，光達更不用說——</a:t>
-            </a:r>
-            <a:r>
-              <a:rPr sz="1000" b="1" lang="zh-TW" dirty="0">
-                <a:solidFill>
-                  <a:srgbClr val="000000"/>
-                </a:solidFill>
-                <a:latin typeface="Arial Unicode MS"/>
-                <a:ea typeface="Arial Unicode MS"/>
-                <a:cs typeface="Arial Unicode MS"/>
-              </a:rPr>
-              <a:t>對光達來說那就是一面牆</a:t>
-            </a:r>
-            <a:r>
-              <a:rPr sz="1000" lang="zh-TW" dirty="0">
-                <a:solidFill>
-                  <a:srgbClr val="000000"/>
-                </a:solidFill>
-                <a:latin typeface="Arial Unicode MS"/>
-                <a:ea typeface="Arial Unicode MS"/>
-                <a:cs typeface="Arial Unicode MS"/>
-              </a:rPr>
-              <a:t>，因為它量的是距離，不是圖案。結果光達車輕鬆停下。
+              <a:t>最終比數：光達車六比六，特斯拉三比六。
 </a:t>
             </a:r>
           </a:p>
@@ -8517,29 +7779,7 @@
                 <a:ea typeface="Arial Unicode MS"/>
                 <a:cs typeface="Arial Unicode MS"/>
               </a:rPr>
-              <a:t>特斯拉呢？</a:t>
-            </a:r>
-            <a:r>
-              <a:rPr sz="1000" b="1" lang="zh-TW" dirty="0">
-                <a:solidFill>
-                  <a:srgbClr val="000000"/>
-                </a:solidFill>
-                <a:latin typeface="Arial Unicode MS"/>
-                <a:ea typeface="Arial Unicode MS"/>
-                <a:cs typeface="Arial Unicode MS"/>
-              </a:rPr>
-              <a:t>連一下煞車都沒踩，直接撞穿。</a:t>
-            </a:r>
-            <a:r>
-              <a:rPr sz="1000" lang="zh-TW" dirty="0">
-                <a:solidFill>
-                  <a:srgbClr val="000000"/>
-                </a:solidFill>
-                <a:latin typeface="Arial Unicode MS"/>
-                <a:ea typeface="Arial Unicode MS"/>
-                <a:cs typeface="Arial Unicode MS"/>
-              </a:rPr>
-              <a:t>
+              <a:t>接下來這件事更重要，請大家一定要聽。
 </a:t>
             </a:r>
           </a:p>
@@ -8553,17 +7793,6 @@
               </a:spcAft>
             </a:pPr>
             <a:r>
-              <a:rPr sz="1000" b="1" lang="zh-TW" dirty="0">
-                <a:solidFill>
-                  <a:srgbClr val="000000"/>
-                </a:solidFill>
-                <a:latin typeface="Arial Unicode MS"/>
-                <a:ea typeface="Arial Unicode MS"/>
-                <a:cs typeface="Arial Unicode MS"/>
-              </a:rPr>
-              <a:t>最終比數：光達車六比六，特斯拉三比六。</a:t>
-            </a:r>
-            <a:r>
               <a:rPr sz="1000" lang="zh-TW" dirty="0">
                 <a:solidFill>
                   <a:srgbClr val="000000"/>
@@ -8572,7 +7801,7 @@
                 <a:ea typeface="Arial Unicode MS"/>
                 <a:cs typeface="Arial Unicode MS"/>
               </a:rPr>
-              <a:t>
+              <a:t>這支影片在網路上引起很大的爭議，有很多人拍了反駁影片。爭議的點包括：用的是 Autopilot 而不是最新的 FSD、每一項只跑一次、人造的霧和雨跟真實天氣不一樣。
 </a:t>
             </a:r>
           </a:p>
@@ -8586,6 +7815,17 @@
               </a:spcAft>
             </a:pPr>
             <a:r>
+              <a:rPr sz="1000" lang="zh-TW" dirty="0">
+                <a:solidFill>
+                  <a:srgbClr val="000000"/>
+                </a:solidFill>
+                <a:latin typeface="Arial Unicode MS"/>
+                <a:ea typeface="Arial Unicode MS"/>
+                <a:cs typeface="Arial Unicode MS"/>
+              </a:rPr>
+              <a:t>我不是要告訴大家誰對誰錯。我要大家看到的是：</a:t>
+            </a:r>
+            <a:r>
               <a:rPr sz="1000" b="1" lang="zh-TW" dirty="0">
                 <a:solidFill>
                   <a:srgbClr val="000000"/>
@@ -8594,7 +7834,7 @@
                 <a:ea typeface="Arial Unicode MS"/>
                 <a:cs typeface="Arial Unicode MS"/>
               </a:rPr>
-              <a:t>接下來這件事更重要，請大家一定要聽。</a:t>
+              <a:t>每一項只跑一次。</a:t>
             </a:r>
             <a:r>
               <a:rPr sz="1000" lang="zh-TW" dirty="0">
@@ -8627,7 +7867,7 @@
                 <a:ea typeface="Arial Unicode MS"/>
                 <a:cs typeface="Arial Unicode MS"/>
               </a:rPr>
-              <a:t>這支影片在網路上引起很大的爭議，有很多人拍了反駁影片。爭議的點包括：用的是 Autopilot 而不是最新的 FSD、每一項只跑一次、人造的霧和雨跟真實天氣不一樣。
+              <a:t>這就是我們從第一節講到現在的同一句話：少量的結果不能拿來宣告誰比較安全。要下那種結論，需要幾百萬公里、幾千種條件，而且要有別人能重複驗證。
 </a:t>
             </a:r>
           </a:p>
@@ -8649,7 +7889,7 @@
                 <a:ea typeface="Arial Unicode MS"/>
                 <a:cs typeface="Arial Unicode MS"/>
               </a:rPr>
-              <a:t>我不是要告訴你們誰對誰錯。我要你們看到的是：</a:t>
+              <a:t>所以這支影片能當什麼？它是很好的</a:t>
             </a:r>
             <a:r>
               <a:rPr sz="1000" b="1" lang="zh-TW" dirty="0">
@@ -8660,7 +7900,7 @@
                 <a:ea typeface="Arial Unicode MS"/>
                 <a:cs typeface="Arial Unicode MS"/>
               </a:rPr>
-              <a:t>每一項只跑一次。</a:t>
+              <a:t>現象展示</a:t>
             </a:r>
             <a:r>
               <a:rPr sz="1000" lang="zh-TW" dirty="0">
@@ -8671,19 +7911,19 @@
                 <a:ea typeface="Arial Unicode MS"/>
                 <a:cs typeface="Arial Unicode MS"/>
               </a:rPr>
-              <a:t>
-</a:t>
-            </a:r>
-          </a:p>
-          <a:p>
-            <a:pPr algn="l">
-              <a:lnSpc>
-                <a:spcPct val="115000"/>
-              </a:lnSpc>
-              <a:spcAft>
-                <a:spcPts val="500"/>
-              </a:spcAft>
-            </a:pPr>
+              <a:t>，讓你親眼看到霧和雨真的會造成差別，也讓你看到相機在「圖案」這件事上的根本限制。它</a:t>
+            </a:r>
+            <a:r>
+              <a:rPr sz="1000" b="1" lang="zh-TW" dirty="0">
+                <a:solidFill>
+                  <a:srgbClr val="000000"/>
+                </a:solidFill>
+                <a:latin typeface="Arial Unicode MS"/>
+                <a:ea typeface="Arial Unicode MS"/>
+                <a:cs typeface="Arial Unicode MS"/>
+              </a:rPr>
+              <a:t>不能</a:t>
+            </a:r>
             <a:r>
               <a:rPr sz="1000" lang="zh-TW" dirty="0">
                 <a:solidFill>
@@ -8693,73 +7933,7 @@
                 <a:ea typeface="Arial Unicode MS"/>
                 <a:cs typeface="Arial Unicode MS"/>
               </a:rPr>
-              <a:t>這就是我們從第一節講到現在的同一句話——少量的結果不能拿來宣告誰比較安全。要下那種結論，需要幾百萬公里、幾千種條件，而且要有別人能重複驗證。
-</a:t>
-            </a:r>
-          </a:p>
-          <a:p>
-            <a:pPr algn="l">
-              <a:lnSpc>
-                <a:spcPct val="115000"/>
-              </a:lnSpc>
-              <a:spcAft>
-                <a:spcPts val="500"/>
-              </a:spcAft>
-            </a:pPr>
-            <a:r>
-              <a:rPr sz="1000" lang="zh-TW" dirty="0">
-                <a:solidFill>
-                  <a:srgbClr val="000000"/>
-                </a:solidFill>
-                <a:latin typeface="Arial Unicode MS"/>
-                <a:ea typeface="Arial Unicode MS"/>
-                <a:cs typeface="Arial Unicode MS"/>
-              </a:rPr>
-              <a:t>所以這支影片能當什麼？它是很好的</a:t>
-            </a:r>
-            <a:r>
-              <a:rPr sz="1000" b="1" lang="zh-TW" dirty="0">
-                <a:solidFill>
-                  <a:srgbClr val="000000"/>
-                </a:solidFill>
-                <a:latin typeface="Arial Unicode MS"/>
-                <a:ea typeface="Arial Unicode MS"/>
-                <a:cs typeface="Arial Unicode MS"/>
-              </a:rPr>
-              <a:t>現象展示</a:t>
-            </a:r>
-            <a:r>
-              <a:rPr sz="1000" lang="zh-TW" dirty="0">
-                <a:solidFill>
-                  <a:srgbClr val="000000"/>
-                </a:solidFill>
-                <a:latin typeface="Arial Unicode MS"/>
-                <a:ea typeface="Arial Unicode MS"/>
-                <a:cs typeface="Arial Unicode MS"/>
-              </a:rPr>
-              <a:t>，讓你親眼看到霧和雨真的會造成差別，也讓你看到相機在「圖案」這件事上的根本限制。它</a:t>
-            </a:r>
-            <a:r>
-              <a:rPr sz="1000" b="1" lang="zh-TW" dirty="0">
-                <a:solidFill>
-                  <a:srgbClr val="000000"/>
-                </a:solidFill>
-                <a:latin typeface="Arial Unicode MS"/>
-                <a:ea typeface="Arial Unicode MS"/>
-                <a:cs typeface="Arial Unicode MS"/>
-              </a:rPr>
-              <a:t>不能</a:t>
-            </a:r>
-            <a:r>
-              <a:rPr sz="1000" lang="zh-TW" dirty="0">
-                <a:solidFill>
-                  <a:srgbClr val="000000"/>
-                </a:solidFill>
-                <a:latin typeface="Arial Unicode MS"/>
-                <a:ea typeface="Arial Unicode MS"/>
-                <a:cs typeface="Arial Unicode MS"/>
-              </a:rPr>
-              <a:t>當成證據，證明哪一家的技術比較好。
+              <a:t>當成證據，去證明哪一家的技術比較好。
 </a:t>
             </a:r>
           </a:p>

--- a/第三週(09-24)/第三週_第3節_簡報.pptx
+++ b/第三週(09-24)/第三週_第3節_簡報.pptx
@@ -3159,7 +3159,7 @@
                 <a:ea typeface="Arial Unicode MS"/>
                 <a:cs typeface="Arial Unicode MS"/>
               </a:rPr>
-              <a:t>好，看結果。相機從八十公尺掉到二十六公尺，所以四十公尺的行人變成「超出有效距離」，那張卡是紅字。光達還是一百公尺、十五點，跟晴天一模一樣。雷達也一樣，兩百五十公尺。熱像從一百四十三變成一百五十八，不但沒變差，還稍微變好了一點。
+              <a:t>好，看結果。相機從八十公尺掉到二十六公尺，所以四十公尺的行人變成「超出有效距離」，那張卡是紅字。光達還是一百公尺、十五個點，跟晴天一模一樣。雷達也一樣，兩百五十公尺。熱像從一百四十三變成一百五十八，不但沒變差，還稍微變好了一點。
 </a:t>
             </a:r>
           </a:p>
@@ -3203,7 +3203,7 @@
                 <a:ea typeface="Arial Unicode MS"/>
                 <a:cs typeface="Arial Unicode MS"/>
               </a:rPr>
-              <a:t>光達呢？十五點，跟晴天一模一樣。雷達也一樣。
+              <a:t>光達呢？還是十五個點，跟晴天一模一樣。雷達也一樣。
 </a:t>
             </a:r>
           </a:p>
@@ -4105,7 +4105,7 @@
                 <a:ea typeface="Arial Unicode MS"/>
                 <a:cs typeface="Arial Unicode MS"/>
               </a:rPr>
-              <a:t>第二位同學。先按回晴天，確認數字回到十五點，再按濃霧。
+              <a:t>第二位同學。先按回晴天，確認光達那張卡的點數回到十五個點，再按濃霧。
 </a:t>
             </a:r>
           </a:p>
@@ -4490,7 +4490,7 @@
                 <a:ea typeface="Arial Unicode MS"/>
                 <a:cs typeface="Arial Unicode MS"/>
               </a:rPr>
-              <a:t>晴天：相機正負零點五八、寫「行人」；光達十五點；雷達四十點零；熱像十五像素。
+              <a:t>晴天：相機正負零點五八、寫「行人」；光達十五個點；雷達四十點零；熱像十五像素。
 </a:t>
             </a:r>
           </a:p>
@@ -4512,7 +4512,7 @@
                 <a:ea typeface="Arial Unicode MS"/>
                 <a:cs typeface="Arial Unicode MS"/>
               </a:rPr>
-              <a:t>小雨：相機一樣正負零點五八；光達十三點；雷達四十點零；熱像十五像素。
+              <a:t>小雨：相機一樣正負零點五八；光達十三個點；雷達四十點零；熱像十五像素。
 </a:t>
             </a:r>
           </a:p>
@@ -4534,7 +4534,7 @@
                 <a:ea typeface="Arial Unicode MS"/>
                 <a:cs typeface="Arial Unicode MS"/>
               </a:rPr>
-              <a:t>中雨：相機還是正負零點五八；光達九點；雷達四十點零；熱像十五像素。
+              <a:t>中雨：相機還是正負零點五八；光達九個點；雷達四十點零；熱像十五像素。
 </a:t>
             </a:r>
           </a:p>
@@ -4578,7 +4578,7 @@
                 <a:ea typeface="Arial Unicode MS"/>
                 <a:cs typeface="Arial Unicode MS"/>
               </a:rPr>
-              <a:t>；光達六點；雷達四十點零；熱像十五像素。
+              <a:t>；光達六個點；雷達四十點零；熱像十五像素。
 </a:t>
             </a:r>
           </a:p>
@@ -4996,7 +4996,7 @@
                 <a:ea typeface="Arial Unicode MS"/>
                 <a:cs typeface="Arial Unicode MS"/>
               </a:rPr>
-              <a:t>順便看光達：十五、十三、九、六。這個就是慢慢往下掉的，雨每大一點就少一些。因為雨滴會把雷射散射掉一部分，雨愈大散射愈多。
+              <a:t>順便看光達的點數：十五、十三、九、六。這個就是慢慢往下掉的，雨每大一點就少一些。因為雨滴會把雷射散射掉一部分，雨愈大散射愈多。
 </a:t>
             </a:r>
           </a:p>

--- a/第三週(09-24)/第三週_第3節_簡報.pptx
+++ b/第三週(09-24)/第三週_第3節_簡報.pptx
@@ -4093,19 +4093,63 @@
                 <a:spcPct val="115000"/>
               </a:lnSpc>
               <a:spcAft>
-                <a:spcPts val="525"/>
+                <a:spcPts val="500"/>
               </a:spcAft>
             </a:pPr>
             <a:r>
-              <a:rPr sz="1050" lang="zh-TW" dirty="0">
-                <a:solidFill>
-                  <a:srgbClr val="000000"/>
-                </a:solidFill>
-                <a:latin typeface="Arial Unicode MS"/>
-                <a:ea typeface="Arial Unicode MS"/>
-                <a:cs typeface="Arial Unicode MS"/>
-              </a:rPr>
-              <a:t>第二位同學。先按回晴天，確認光達那張卡的點數回到十五個點，再按濃霧。
+              <a:rPr sz="1000" lang="zh-TW" dirty="0">
+                <a:solidFill>
+                  <a:srgbClr val="000000"/>
+                </a:solidFill>
+                <a:latin typeface="Arial Unicode MS"/>
+                <a:ea typeface="Arial Unicode MS"/>
+                <a:cs typeface="Arial Unicode MS"/>
+              </a:rPr>
+              <a:t>第二位同學。開始之前先確認兩件事：</a:t>
+            </a:r>
+            <a:r>
+              <a:rPr sz="1000" b="1" lang="zh-TW" dirty="0">
+                <a:solidFill>
+                  <a:srgbClr val="000000"/>
+                </a:solidFill>
+                <a:latin typeface="Arial Unicode MS"/>
+                <a:ea typeface="Arial Unicode MS"/>
+                <a:cs typeface="Arial Unicode MS"/>
+              </a:rPr>
+              <a:t>行人要在四十公尺</a:t>
+            </a:r>
+            <a:r>
+              <a:rPr sz="1000" lang="zh-TW" dirty="0">
+                <a:solidFill>
+                  <a:srgbClr val="000000"/>
+                </a:solidFill>
+                <a:latin typeface="Arial Unicode MS"/>
+                <a:ea typeface="Arial Unicode MS"/>
+                <a:cs typeface="Arial Unicode MS"/>
+              </a:rPr>
+              <a:t>，環境按回</a:t>
+            </a:r>
+            <a:r>
+              <a:rPr sz="1000" b="1" lang="zh-TW" dirty="0">
+                <a:solidFill>
+                  <a:srgbClr val="000000"/>
+                </a:solidFill>
+                <a:latin typeface="Arial Unicode MS"/>
+                <a:ea typeface="Arial Unicode MS"/>
+                <a:cs typeface="Arial Unicode MS"/>
+              </a:rPr>
+              <a:t>晴天</a:t>
+            </a:r>
+            <a:r>
+              <a:rPr sz="1000" lang="zh-TW" dirty="0">
+                <a:solidFill>
+                  <a:srgbClr val="000000"/>
+                </a:solidFill>
+                <a:latin typeface="Arial Unicode MS"/>
+                <a:ea typeface="Arial Unicode MS"/>
+                <a:cs typeface="Arial Unicode MS"/>
+              </a:rPr>
+              <a:t>。
 </a:t>
             </a:r>
           </a:p>
@@ -4115,11 +4159,55 @@
                 <a:spcPct val="115000"/>
               </a:lnSpc>
               <a:spcAft>
-                <a:spcPts val="525"/>
+                <a:spcPts val="500"/>
               </a:spcAft>
             </a:pPr>
             <a:r>
-              <a:rPr sz="1050" lang="zh-TW" dirty="0">
+              <a:rPr sz="1000" lang="zh-TW" dirty="0">
+                <a:solidFill>
+                  <a:srgbClr val="000000"/>
+                </a:solidFill>
+                <a:latin typeface="Arial Unicode MS"/>
+                <a:ea typeface="Arial Unicode MS"/>
+                <a:cs typeface="Arial Unicode MS"/>
+              </a:rPr>
+              <a:t>這時候光達那張卡應該是十五個點。如果你剛剛重新整理過網頁，行人會退回預設的三十公尺，點數會變成二十八個——那就先把他拖回四十公尺再開始。
+</a:t>
+            </a:r>
+          </a:p>
+          <a:p>
+            <a:pPr algn="l">
+              <a:lnSpc>
+                <a:spcPct val="115000"/>
+              </a:lnSpc>
+              <a:spcAft>
+                <a:spcPts val="500"/>
+              </a:spcAft>
+            </a:pPr>
+            <a:r>
+              <a:rPr sz="1000" lang="zh-TW" dirty="0">
+                <a:solidFill>
+                  <a:srgbClr val="000000"/>
+                </a:solidFill>
+                <a:latin typeface="Arial Unicode MS"/>
+                <a:ea typeface="Arial Unicode MS"/>
+                <a:cs typeface="Arial Unicode MS"/>
+              </a:rPr>
+              <a:t>確認好了，按濃霧。
+</a:t>
+            </a:r>
+          </a:p>
+          <a:p>
+            <a:pPr algn="l">
+              <a:lnSpc>
+                <a:spcPct val="115000"/>
+              </a:lnSpc>
+              <a:spcAft>
+                <a:spcPts val="500"/>
+              </a:spcAft>
+            </a:pPr>
+            <a:r>
+              <a:rPr sz="1000" lang="zh-TW" dirty="0">
                 <a:solidFill>
                   <a:srgbClr val="000000"/>
                 </a:solidFill>
@@ -4137,11 +4225,11 @@
                 <a:spcPct val="115000"/>
               </a:lnSpc>
               <a:spcAft>
-                <a:spcPts val="525"/>
+                <a:spcPts val="500"/>
               </a:spcAft>
             </a:pPr>
             <a:r>
-              <a:rPr sz="1050" lang="zh-TW" dirty="0">
+              <a:rPr sz="1000" lang="zh-TW" dirty="0">
                 <a:solidFill>
                   <a:srgbClr val="000000"/>
                 </a:solidFill>
@@ -4159,11 +4247,11 @@
                 <a:spcPct val="115000"/>
               </a:lnSpc>
               <a:spcAft>
-                <a:spcPts val="525"/>
+                <a:spcPts val="500"/>
               </a:spcAft>
             </a:pPr>
             <a:r>
-              <a:rPr sz="1050" lang="zh-TW" dirty="0">
+              <a:rPr sz="1000" lang="zh-TW" dirty="0">
                 <a:solidFill>
                   <a:srgbClr val="000000"/>
                 </a:solidFill>
@@ -4181,11 +4269,11 @@
                 <a:spcPct val="115000"/>
               </a:lnSpc>
               <a:spcAft>
-                <a:spcPts val="525"/>
+                <a:spcPts val="500"/>
               </a:spcAft>
             </a:pPr>
             <a:r>
-              <a:rPr sz="1050" lang="zh-TW" dirty="0">
+              <a:rPr sz="1000" lang="zh-TW" dirty="0">
                 <a:solidFill>
                   <a:srgbClr val="000000"/>
                 </a:solidFill>
@@ -4203,11 +4291,11 @@
                 <a:spcPct val="115000"/>
               </a:lnSpc>
               <a:spcAft>
-                <a:spcPts val="525"/>
+                <a:spcPts val="500"/>
               </a:spcAft>
             </a:pPr>
             <a:r>
-              <a:rPr sz="1050" lang="zh-TW" dirty="0">
+              <a:rPr sz="1000" lang="zh-TW" dirty="0">
                 <a:solidFill>
                   <a:srgbClr val="000000"/>
                 </a:solidFill>
@@ -4225,11 +4313,11 @@
                 <a:spcPct val="115000"/>
               </a:lnSpc>
               <a:spcAft>
-                <a:spcPts val="525"/>
+                <a:spcPts val="500"/>
               </a:spcAft>
             </a:pPr>
             <a:r>
-              <a:rPr sz="1050" lang="zh-TW" dirty="0">
+              <a:rPr sz="1000" lang="zh-TW" dirty="0">
                 <a:solidFill>
                   <a:srgbClr val="000000"/>
                 </a:solidFill>
@@ -4247,11 +4335,11 @@
                 <a:spcPct val="115000"/>
               </a:lnSpc>
               <a:spcAft>
-                <a:spcPts val="525"/>
+                <a:spcPts val="500"/>
               </a:spcAft>
             </a:pPr>
             <a:r>
-              <a:rPr sz="1050" lang="zh-TW" dirty="0">
+              <a:rPr sz="1000" lang="zh-TW" dirty="0">
                 <a:solidFill>
                   <a:srgbClr val="000000"/>
                 </a:solidFill>
@@ -4269,11 +4357,11 @@
                 <a:spcPct val="115000"/>
               </a:lnSpc>
               <a:spcAft>
-                <a:spcPts val="525"/>
+                <a:spcPts val="500"/>
               </a:spcAft>
             </a:pPr>
             <a:r>
-              <a:rPr sz="1050" lang="zh-TW" dirty="0">
+              <a:rPr sz="1000" lang="zh-TW" dirty="0">
                 <a:solidFill>
                   <a:srgbClr val="000000"/>
                 </a:solidFill>

--- a/第三週(09-24)/第三週_第3節_簡報.pptx
+++ b/第三週(09-24)/第三週_第3節_簡報.pptx
@@ -3037,11 +3037,11 @@
                 <a:spcPct val="115000"/>
               </a:lnSpc>
               <a:spcAft>
-                <a:spcPts val="600"/>
+                <a:spcPts val="525"/>
               </a:spcAft>
             </a:pPr>
             <a:r>
-              <a:rPr sz="1200" lang="zh-TW" dirty="0">
+              <a:rPr sz="1050" lang="zh-TW" dirty="0">
                 <a:solidFill>
                   <a:srgbClr val="000000"/>
                 </a:solidFill>
@@ -3059,11 +3059,11 @@
                 <a:spcPct val="115000"/>
               </a:lnSpc>
               <a:spcAft>
-                <a:spcPts val="600"/>
+                <a:spcPts val="525"/>
               </a:spcAft>
             </a:pPr>
             <a:r>
-              <a:rPr sz="1200" lang="zh-TW" dirty="0">
+              <a:rPr sz="1050" lang="zh-TW" dirty="0">
                 <a:solidFill>
                   <a:srgbClr val="000000"/>
                 </a:solidFill>
@@ -3074,7 +3074,7 @@
               <a:t>規則跟前兩節一樣，而且今天特別重要：</a:t>
             </a:r>
             <a:r>
-              <a:rPr sz="1200" b="1" lang="zh-TW" dirty="0">
+              <a:rPr sz="1050" b="1" lang="zh-TW" dirty="0">
                 <a:solidFill>
                   <a:srgbClr val="000000"/>
                 </a:solidFill>
@@ -3085,7 +3085,7 @@
               <a:t>一次只改一個條件</a:t>
             </a:r>
             <a:r>
-              <a:rPr sz="1200" lang="zh-TW" dirty="0">
+              <a:rPr sz="1050" lang="zh-TW" dirty="0">
                 <a:solidFill>
                   <a:srgbClr val="000000"/>
                 </a:solidFill>
@@ -3103,11 +3103,11 @@
                 <a:spcPct val="115000"/>
               </a:lnSpc>
               <a:spcAft>
-                <a:spcPts val="600"/>
+                <a:spcPts val="525"/>
               </a:spcAft>
             </a:pPr>
             <a:r>
-              <a:rPr sz="1200" lang="zh-TW" dirty="0">
+              <a:rPr sz="1050" lang="zh-TW" dirty="0">
                 <a:solidFill>
                   <a:srgbClr val="000000"/>
                 </a:solidFill>
@@ -3125,11 +3125,11 @@
                 <a:spcPct val="115000"/>
               </a:lnSpc>
               <a:spcAft>
-                <a:spcPts val="600"/>
+                <a:spcPts val="525"/>
               </a:spcAft>
             </a:pPr>
             <a:r>
-              <a:rPr sz="1200" lang="zh-TW" dirty="0">
+              <a:rPr sz="1050" lang="zh-TW" dirty="0">
                 <a:solidFill>
                   <a:srgbClr val="000000"/>
                 </a:solidFill>
@@ -3147,19 +3147,19 @@
                 <a:spcPct val="115000"/>
               </a:lnSpc>
               <a:spcAft>
-                <a:spcPts val="600"/>
+                <a:spcPts val="525"/>
               </a:spcAft>
             </a:pPr>
             <a:r>
-              <a:rPr sz="1200" lang="zh-TW" dirty="0">
-                <a:solidFill>
-                  <a:srgbClr val="000000"/>
-                </a:solidFill>
-                <a:latin typeface="Arial Unicode MS"/>
-                <a:ea typeface="Arial Unicode MS"/>
-                <a:cs typeface="Arial Unicode MS"/>
-              </a:rPr>
-              <a:t>好，看結果。相機從八十公尺掉到二十六公尺，所以四十公尺的行人變成「超出有效距離」，那張卡是紅字。光達還是一百公尺、十五個點，跟晴天一模一樣。雷達也一樣，兩百五十公尺。熱像從一百四十三變成一百五十八，不但沒變差，還稍微變好了一點。
+              <a:rPr sz="1050" lang="zh-TW" dirty="0">
+                <a:solidFill>
+                  <a:srgbClr val="000000"/>
+                </a:solidFill>
+                <a:latin typeface="Arial Unicode MS"/>
+                <a:ea typeface="Arial Unicode MS"/>
+                <a:cs typeface="Arial Unicode MS"/>
+              </a:rPr>
+              <a:t>好，看結果。每一張卡上都有一行寫「有效距離」，這一行就是這一節的主角，它會告訴你這個天氣把這顆感測器砍成多少。
 </a:t>
             </a:r>
           </a:p>
@@ -3169,11 +3169,33 @@
                 <a:spcPct val="115000"/>
               </a:lnSpc>
               <a:spcAft>
-                <a:spcPts val="600"/>
+                <a:spcPts val="525"/>
               </a:spcAft>
             </a:pPr>
             <a:r>
-              <a:rPr sz="1200" lang="zh-TW" dirty="0">
+              <a:rPr sz="1050" lang="zh-TW" dirty="0">
+                <a:solidFill>
+                  <a:srgbClr val="000000"/>
+                </a:solidFill>
+                <a:latin typeface="Arial Unicode MS"/>
+                <a:ea typeface="Arial Unicode MS"/>
+                <a:cs typeface="Arial Unicode MS"/>
+              </a:rPr>
+              <a:t>相機那一行寫：設定八十公尺，現在二十六公尺。所以四十公尺的行人超出去了，那張卡變紅字。光達那一行寫「一百公尺，目前沒有折損」，點數還是十五個，跟晴天一模一樣。雷達也一樣，兩百五十公尺。熱像反而變好，從一百四十三變成一百五十八。
+</a:t>
+            </a:r>
+          </a:p>
+          <a:p>
+            <a:pPr algn="l">
+              <a:lnSpc>
+                <a:spcPct val="115000"/>
+              </a:lnSpc>
+              <a:spcAft>
+                <a:spcPts val="525"/>
+              </a:spcAft>
+            </a:pPr>
+            <a:r>
+              <a:rPr sz="1050" lang="zh-TW" dirty="0">
                 <a:solidFill>
                   <a:srgbClr val="000000"/>
                 </a:solidFill>
@@ -3191,11 +3213,11 @@
                 <a:spcPct val="115000"/>
               </a:lnSpc>
               <a:spcAft>
-                <a:spcPts val="600"/>
+                <a:spcPts val="525"/>
               </a:spcAft>
             </a:pPr>
             <a:r>
-              <a:rPr sz="1200" lang="zh-TW" dirty="0">
+              <a:rPr sz="1050" lang="zh-TW" dirty="0">
                 <a:solidFill>
                   <a:srgbClr val="000000"/>
                 </a:solidFill>
@@ -3213,11 +3235,11 @@
                 <a:spcPct val="115000"/>
               </a:lnSpc>
               <a:spcAft>
-                <a:spcPts val="600"/>
+                <a:spcPts val="525"/>
               </a:spcAft>
             </a:pPr>
             <a:r>
-              <a:rPr sz="1200" lang="zh-TW" dirty="0">
+              <a:rPr sz="1050" lang="zh-TW" dirty="0">
                 <a:solidFill>
                   <a:srgbClr val="000000"/>
                 </a:solidFill>
@@ -3235,11 +3257,11 @@
                 <a:spcPct val="115000"/>
               </a:lnSpc>
               <a:spcAft>
-                <a:spcPts val="600"/>
+                <a:spcPts val="525"/>
               </a:spcAft>
             </a:pPr>
             <a:r>
-              <a:rPr sz="1200" lang="zh-TW" dirty="0">
+              <a:rPr sz="1050" lang="zh-TW" dirty="0">
                 <a:solidFill>
                   <a:srgbClr val="000000"/>
                 </a:solidFill>
@@ -4215,7 +4237,95 @@
                 <a:ea typeface="Arial Unicode MS"/>
                 <a:cs typeface="Arial Unicode MS"/>
               </a:rPr>
-              <a:t>看結果。相機掉到十六公尺，四十公尺的行人看不到了。光達從一百公尺掉到四十五公尺，點數從十五掉到六。熱像從一百四十三掉到九十公尺，不過四十公尺的人還是看得到。雷達兩百二十五公尺，照常工作。
+              <a:t>看結果。請大家一張一張唸「有效距離」那一行。
+</a:t>
+            </a:r>
+          </a:p>
+          <a:p>
+            <a:pPr algn="l">
+              <a:lnSpc>
+                <a:spcPct val="115000"/>
+              </a:lnSpc>
+              <a:spcAft>
+                <a:spcPts val="500"/>
+              </a:spcAft>
+            </a:pPr>
+            <a:r>
+              <a:rPr sz="1000" lang="zh-TW" dirty="0">
+                <a:solidFill>
+                  <a:srgbClr val="000000"/>
+                </a:solidFill>
+                <a:latin typeface="Arial Unicode MS"/>
+                <a:ea typeface="Arial Unicode MS"/>
+                <a:cs typeface="Arial Unicode MS"/>
+              </a:rPr>
+              <a:t>相機：設定八十，現在十六。四十公尺的行人看不到了。
+</a:t>
+            </a:r>
+          </a:p>
+          <a:p>
+            <a:pPr algn="l">
+              <a:lnSpc>
+                <a:spcPct val="115000"/>
+              </a:lnSpc>
+              <a:spcAft>
+                <a:spcPts val="500"/>
+              </a:spcAft>
+            </a:pPr>
+            <a:r>
+              <a:rPr sz="1000" lang="zh-TW" dirty="0">
+                <a:solidFill>
+                  <a:srgbClr val="000000"/>
+                </a:solidFill>
+                <a:latin typeface="Arial Unicode MS"/>
+                <a:ea typeface="Arial Unicode MS"/>
+                <a:cs typeface="Arial Unicode MS"/>
+              </a:rPr>
+              <a:t>光達：設定一百，現在四十五。點數從十五個掉到六個。
+</a:t>
+            </a:r>
+          </a:p>
+          <a:p>
+            <a:pPr algn="l">
+              <a:lnSpc>
+                <a:spcPct val="115000"/>
+              </a:lnSpc>
+              <a:spcAft>
+                <a:spcPts val="500"/>
+              </a:spcAft>
+            </a:pPr>
+            <a:r>
+              <a:rPr sz="1000" lang="zh-TW" dirty="0">
+                <a:solidFill>
+                  <a:srgbClr val="000000"/>
+                </a:solidFill>
+                <a:latin typeface="Arial Unicode MS"/>
+                <a:ea typeface="Arial Unicode MS"/>
+                <a:cs typeface="Arial Unicode MS"/>
+              </a:rPr>
+              <a:t>熱像：設定一百五十，現在九十。四十公尺的人還是看得到。
+</a:t>
+            </a:r>
+          </a:p>
+          <a:p>
+            <a:pPr algn="l">
+              <a:lnSpc>
+                <a:spcPct val="115000"/>
+              </a:lnSpc>
+              <a:spcAft>
+                <a:spcPts val="500"/>
+              </a:spcAft>
+            </a:pPr>
+            <a:r>
+              <a:rPr sz="1000" lang="zh-TW" dirty="0">
+                <a:solidFill>
+                  <a:srgbClr val="000000"/>
+                </a:solidFill>
+                <a:latin typeface="Arial Unicode MS"/>
+                <a:ea typeface="Arial Unicode MS"/>
+                <a:cs typeface="Arial Unicode MS"/>
+              </a:rPr>
+              <a:t>雷達：設定兩百五十，現在兩百二十五。照常工作。
 </a:t>
             </a:r>
           </a:p>

--- a/第三週(09-24)/第三週_第3節_簡報.pptx
+++ b/第三週(09-24)/第三週_第3節_簡報.pptx
@@ -2465,19 +2465,19 @@
                 <a:spcPct val="115000"/>
               </a:lnSpc>
               <a:spcAft>
-                <a:spcPts val="600"/>
+                <a:spcPts val="550"/>
               </a:spcAft>
             </a:pPr>
             <a:r>
-              <a:rPr sz="1200" lang="zh-TW" dirty="0">
-                <a:solidFill>
-                  <a:srgbClr val="000000"/>
-                </a:solidFill>
-                <a:latin typeface="Arial Unicode MS"/>
-                <a:ea typeface="Arial Unicode MS"/>
-                <a:cs typeface="Arial Unicode MS"/>
-              </a:rPr>
-              <a:t>最後十分鐘，六組，每組認養一種感測器。第一組相機、第二組光達、第三組雷達、第四組超音波、第五組衛星定位、第六組熱像。
+              <a:rPr sz="1100" lang="zh-TW" dirty="0">
+                <a:solidFill>
+                  <a:srgbClr val="000000"/>
+                </a:solidFill>
+                <a:latin typeface="Arial Unicode MS"/>
+                <a:ea typeface="Arial Unicode MS"/>
+                <a:cs typeface="Arial Unicode MS"/>
+              </a:rPr>
+              <a:t>最後十分鐘，我發學習單下去。
 </a:t>
             </a:r>
           </a:p>
@@ -2487,19 +2487,41 @@
                 <a:spcPct val="115000"/>
               </a:lnSpc>
               <a:spcAft>
-                <a:spcPts val="600"/>
+                <a:spcPts val="550"/>
               </a:spcAft>
             </a:pPr>
             <a:r>
-              <a:rPr sz="1200" lang="zh-TW" dirty="0">
-                <a:solidFill>
-                  <a:srgbClr val="000000"/>
-                </a:solidFill>
-                <a:latin typeface="Arial Unicode MS"/>
-                <a:ea typeface="Arial Unicode MS"/>
-                <a:cs typeface="Arial Unicode MS"/>
-              </a:rPr>
-              <a:t>每一組只寫兩行。
+              <a:rPr sz="1100" lang="zh-TW" dirty="0">
+                <a:solidFill>
+                  <a:srgbClr val="000000"/>
+                </a:solidFill>
+                <a:latin typeface="Arial Unicode MS"/>
+                <a:ea typeface="Arial Unicode MS"/>
+                <a:cs typeface="Arial Unicode MS"/>
+              </a:rPr>
+              <a:t>這一張是</a:t>
+            </a:r>
+            <a:r>
+              <a:rPr sz="1100" b="1" lang="zh-TW" dirty="0">
+                <a:solidFill>
+                  <a:srgbClr val="000000"/>
+                </a:solidFill>
+                <a:latin typeface="Arial Unicode MS"/>
+                <a:ea typeface="Arial Unicode MS"/>
+                <a:cs typeface="Arial Unicode MS"/>
+              </a:rPr>
+              <a:t>個人作答，不分組</a:t>
+            </a:r>
+            <a:r>
+              <a:rPr sz="1100" lang="zh-TW" dirty="0">
+                <a:solidFill>
+                  <a:srgbClr val="000000"/>
+                </a:solidFill>
+                <a:latin typeface="Arial Unicode MS"/>
+                <a:ea typeface="Arial Unicode MS"/>
+                <a:cs typeface="Arial Unicode MS"/>
+              </a:rPr>
+              <a:t>，每個人交一張。上面有九題，除了最後一題以外，每一題都要先在電腦上操作，再把畫面上的數字抄下來。
 </a:t>
             </a:r>
           </a:p>
@@ -2509,41 +2531,19 @@
                 <a:spcPct val="115000"/>
               </a:lnSpc>
               <a:spcAft>
-                <a:spcPts val="600"/>
+                <a:spcPts val="550"/>
               </a:spcAft>
             </a:pPr>
             <a:r>
-              <a:rPr sz="1200" lang="zh-TW" dirty="0">
-                <a:solidFill>
-                  <a:srgbClr val="000000"/>
-                </a:solidFill>
-                <a:latin typeface="Arial Unicode MS"/>
-                <a:ea typeface="Arial Unicode MS"/>
-                <a:cs typeface="Arial Unicode MS"/>
-              </a:rPr>
-              <a:t>第一行：你那一種送回來什麼是別人沒有的？這一行我要求要有</a:t>
-            </a:r>
-            <a:r>
-              <a:rPr sz="1200" b="1" lang="zh-TW" dirty="0">
-                <a:solidFill>
-                  <a:srgbClr val="000000"/>
-                </a:solidFill>
-                <a:latin typeface="Arial Unicode MS"/>
-                <a:ea typeface="Arial Unicode MS"/>
-                <a:cs typeface="Arial Unicode MS"/>
-              </a:rPr>
-              <a:t>今天看到的數字</a:t>
-            </a:r>
-            <a:r>
-              <a:rPr sz="1200" lang="zh-TW" dirty="0">
-                <a:solidFill>
-                  <a:srgbClr val="000000"/>
-                </a:solidFill>
-                <a:latin typeface="Arial Unicode MS"/>
-                <a:ea typeface="Arial Unicode MS"/>
-                <a:cs typeface="Arial Unicode MS"/>
-              </a:rPr>
-              <a:t>。不可以只寫「相機可以看到顏色」，要寫「只有相機讀得出燈色，其他五種都讀不出來；晴天有效八十公尺，夜間剩二十六」。
+              <a:rPr sz="1100" lang="zh-TW" dirty="0">
+                <a:solidFill>
+                  <a:srgbClr val="000000"/>
+                </a:solidFill>
+                <a:latin typeface="Arial Unicode MS"/>
+                <a:ea typeface="Arial Unicode MS"/>
+                <a:cs typeface="Arial Unicode MS"/>
+              </a:rPr>
+              <a:t>我先把規則講清楚。
 </a:t>
             </a:r>
           </a:p>
@@ -2553,19 +2553,41 @@
                 <a:spcPct val="115000"/>
               </a:lnSpc>
               <a:spcAft>
-                <a:spcPts val="600"/>
+                <a:spcPts val="550"/>
               </a:spcAft>
             </a:pPr>
             <a:r>
-              <a:rPr sz="1200" lang="zh-TW" dirty="0">
-                <a:solidFill>
-                  <a:srgbClr val="000000"/>
-                </a:solidFill>
-                <a:latin typeface="Arial Unicode MS"/>
-                <a:ea typeface="Arial Unicode MS"/>
-                <a:cs typeface="Arial Unicode MS"/>
-              </a:rPr>
-              <a:t>第二行比較難，也是我真正想看的：什麼條件會讓它失效？那個時候誰來補它？
+              <a:rPr sz="1100" lang="zh-TW" dirty="0">
+                <a:solidFill>
+                  <a:srgbClr val="000000"/>
+                </a:solidFill>
+                <a:latin typeface="Arial Unicode MS"/>
+                <a:ea typeface="Arial Unicode MS"/>
+                <a:cs typeface="Arial Unicode MS"/>
+              </a:rPr>
+              <a:t>第一，</a:t>
+            </a:r>
+            <a:r>
+              <a:rPr sz="1100" b="1" lang="zh-TW" dirty="0">
+                <a:solidFill>
+                  <a:srgbClr val="000000"/>
+                </a:solidFill>
+                <a:latin typeface="Arial Unicode MS"/>
+                <a:ea typeface="Arial Unicode MS"/>
+                <a:cs typeface="Arial Unicode MS"/>
+              </a:rPr>
+              <a:t>題目怎麼做，紙上都寫了</a:t>
+            </a:r>
+            <a:r>
+              <a:rPr sz="1100" lang="zh-TW" dirty="0">
+                <a:solidFill>
+                  <a:srgbClr val="000000"/>
+                </a:solidFill>
+                <a:latin typeface="Arial Unicode MS"/>
+                <a:ea typeface="Arial Unicode MS"/>
+                <a:cs typeface="Arial Unicode MS"/>
+              </a:rPr>
+              <a:t>。例如第一題要你把行人拖到二十公尺、再拖到四十公尺，抄下相機那張卡的正負多少。你只要照著做，數字就在畫面上。
 </a:t>
             </a:r>
           </a:p>
@@ -2575,19 +2597,41 @@
                 <a:spcPct val="115000"/>
               </a:lnSpc>
               <a:spcAft>
-                <a:spcPts val="600"/>
+                <a:spcPts val="550"/>
               </a:spcAft>
             </a:pPr>
             <a:r>
-              <a:rPr sz="1200" lang="zh-TW" dirty="0">
-                <a:solidFill>
-                  <a:srgbClr val="000000"/>
-                </a:solidFill>
-                <a:latin typeface="Arial Unicode MS"/>
-                <a:ea typeface="Arial Unicode MS"/>
-                <a:cs typeface="Arial Unicode MS"/>
-              </a:rPr>
-              <a:t>給大家一點提示。拿到衛星定位的那一組，可能會覺得很吃虧，因為它什麼都不給。可是你們可以想一想：它不給前方的資訊，那它給的是什麼？沒有它的話，車子會少掉什麼？
+              <a:rPr sz="1100" lang="zh-TW" dirty="0">
+                <a:solidFill>
+                  <a:srgbClr val="000000"/>
+                </a:solidFill>
+                <a:latin typeface="Arial Unicode MS"/>
+                <a:ea typeface="Arial Unicode MS"/>
+                <a:cs typeface="Arial Unicode MS"/>
+              </a:rPr>
+              <a:t>第二，</a:t>
+            </a:r>
+            <a:r>
+              <a:rPr sz="1100" b="1" lang="zh-TW" dirty="0">
+                <a:solidFill>
+                  <a:srgbClr val="000000"/>
+                </a:solidFill>
+                <a:latin typeface="Arial Unicode MS"/>
+                <a:ea typeface="Arial Unicode MS"/>
+                <a:cs typeface="Arial Unicode MS"/>
+              </a:rPr>
+              <a:t>前面八題有標準答案</a:t>
+            </a:r>
+            <a:r>
+              <a:rPr sz="1100" lang="zh-TW" dirty="0">
+                <a:solidFill>
+                  <a:srgbClr val="000000"/>
+                </a:solidFill>
+                <a:latin typeface="Arial Unicode MS"/>
+                <a:ea typeface="Arial Unicode MS"/>
+                <a:cs typeface="Arial Unicode MS"/>
+              </a:rPr>
+              <a:t>。抄錯數字就是錯，所以請一題一題慢慢來，不要急。
 </a:t>
             </a:r>
           </a:p>
@@ -2597,19 +2641,63 @@
                 <a:spcPct val="115000"/>
               </a:lnSpc>
               <a:spcAft>
-                <a:spcPts val="600"/>
+                <a:spcPts val="550"/>
               </a:spcAft>
             </a:pPr>
             <a:r>
-              <a:rPr sz="1200" lang="zh-TW" dirty="0">
-                <a:solidFill>
-                  <a:srgbClr val="000000"/>
-                </a:solidFill>
-                <a:latin typeface="Arial Unicode MS"/>
-                <a:ea typeface="Arial Unicode MS"/>
-                <a:cs typeface="Arial Unicode MS"/>
-              </a:rPr>
-              <a:t>拿到超音波的那一組也一樣。它只有五公尺，看起來很弱，可是第一節我們看過，在那個誰都看不到的近距離，只有它看得到。
+              <a:rPr sz="1100" lang="zh-TW" dirty="0">
+                <a:solidFill>
+                  <a:srgbClr val="000000"/>
+                </a:solidFill>
+                <a:latin typeface="Arial Unicode MS"/>
+                <a:ea typeface="Arial Unicode MS"/>
+                <a:cs typeface="Arial Unicode MS"/>
+              </a:rPr>
+              <a:t>第三，</a:t>
+            </a:r>
+            <a:r>
+              <a:rPr sz="1100" b="1" lang="zh-TW" dirty="0">
+                <a:solidFill>
+                  <a:srgbClr val="000000"/>
+                </a:solidFill>
+                <a:latin typeface="Arial Unicode MS"/>
+                <a:ea typeface="Arial Unicode MS"/>
+                <a:cs typeface="Arial Unicode MS"/>
+              </a:rPr>
+              <a:t>最後一題是設計題</a:t>
+            </a:r>
+            <a:r>
+              <a:rPr sz="1100" lang="zh-TW" dirty="0">
+                <a:solidFill>
+                  <a:srgbClr val="000000"/>
+                </a:solidFill>
+                <a:latin typeface="Arial Unicode MS"/>
+                <a:ea typeface="Arial Unicode MS"/>
+                <a:cs typeface="Arial Unicode MS"/>
+              </a:rPr>
+              <a:t>，要你幫一台市區小巴選三種感測器。那一題沒有標準答案，可是有一個硬性要求：</a:t>
+            </a:r>
+            <a:r>
+              <a:rPr sz="1100" b="1" lang="zh-TW" dirty="0">
+                <a:solidFill>
+                  <a:srgbClr val="000000"/>
+                </a:solidFill>
+                <a:latin typeface="Arial Unicode MS"/>
+                <a:ea typeface="Arial Unicode MS"/>
+                <a:cs typeface="Arial Unicode MS"/>
+              </a:rPr>
+              <a:t>每一個理由都要引用你前面抄下來的一個數字</a:t>
+            </a:r>
+            <a:r>
+              <a:rPr sz="1100" lang="zh-TW" dirty="0">
+                <a:solidFill>
+                  <a:srgbClr val="000000"/>
+                </a:solidFill>
+                <a:latin typeface="Arial Unicode MS"/>
+                <a:ea typeface="Arial Unicode MS"/>
+                <a:cs typeface="Arial Unicode MS"/>
+              </a:rPr>
+              <a:t>。只寫「相機可以看到顏色」不給分，要寫「只有相機讀得出紅綠燈，而且大雨的時候只剩二十二公尺」。
 </a:t>
             </a:r>
           </a:p>
@@ -2619,19 +2707,85 @@
                 <a:spcPct val="115000"/>
               </a:lnSpc>
               <a:spcAft>
-                <a:spcPts val="600"/>
+                <a:spcPts val="550"/>
               </a:spcAft>
             </a:pPr>
             <a:r>
-              <a:rPr sz="1200" lang="zh-TW" dirty="0">
-                <a:solidFill>
-                  <a:srgbClr val="000000"/>
-                </a:solidFill>
-                <a:latin typeface="Arial Unicode MS"/>
-                <a:ea typeface="Arial Unicode MS"/>
-                <a:cs typeface="Arial Unicode MS"/>
-              </a:rPr>
-              <a:t>每一組一分鐘。講完交上來，這張紙期末專題會用到。</a:t>
+              <a:rPr sz="1100" lang="zh-TW" dirty="0">
+                <a:solidFill>
+                  <a:srgbClr val="000000"/>
+                </a:solidFill>
+                <a:latin typeface="Arial Unicode MS"/>
+                <a:ea typeface="Arial Unicode MS"/>
+                <a:cs typeface="Arial Unicode MS"/>
+              </a:rPr>
+              <a:t>第四，有幾題會叫你改參數，例如把解析度改成三千八百四十、把線束數改成十六。</a:t>
+            </a:r>
+            <a:r>
+              <a:rPr sz="1100" b="1" lang="zh-TW" dirty="0">
+                <a:solidFill>
+                  <a:srgbClr val="000000"/>
+                </a:solidFill>
+                <a:latin typeface="Arial Unicode MS"/>
+                <a:ea typeface="Arial Unicode MS"/>
+                <a:cs typeface="Arial Unicode MS"/>
+              </a:rPr>
+              <a:t>改完記得改回來</a:t>
+            </a:r>
+            <a:r>
+              <a:rPr sz="1100" lang="zh-TW" dirty="0">
+                <a:solidFill>
+                  <a:srgbClr val="000000"/>
+                </a:solidFill>
+                <a:latin typeface="Arial Unicode MS"/>
+                <a:ea typeface="Arial Unicode MS"/>
+                <a:cs typeface="Arial Unicode MS"/>
+              </a:rPr>
+              <a:t>，題目上都有註明，不然下一題的數字會不對。
+</a:t>
+            </a:r>
+          </a:p>
+          <a:p>
+            <a:pPr algn="l">
+              <a:lnSpc>
+                <a:spcPct val="115000"/>
+              </a:lnSpc>
+              <a:spcAft>
+                <a:spcPts val="550"/>
+              </a:spcAft>
+            </a:pPr>
+            <a:r>
+              <a:rPr sz="1100" lang="zh-TW" dirty="0">
+                <a:solidFill>
+                  <a:srgbClr val="000000"/>
+                </a:solidFill>
+                <a:latin typeface="Arial Unicode MS"/>
+                <a:ea typeface="Arial Unicode MS"/>
+                <a:cs typeface="Arial Unicode MS"/>
+              </a:rPr>
+              <a:t>如果中途被卡住，舉手問我。剩下的時間就開始做，下課前交上來。
+</a:t>
+            </a:r>
+          </a:p>
+          <a:p>
+            <a:pPr algn="l">
+              <a:lnSpc>
+                <a:spcPct val="115000"/>
+              </a:lnSpc>
+              <a:spcAft>
+                <a:spcPts val="550"/>
+              </a:spcAft>
+            </a:pPr>
+            <a:r>
+              <a:rPr sz="1100" lang="zh-TW" dirty="0">
+                <a:solidFill>
+                  <a:srgbClr val="000000"/>
+                </a:solidFill>
+                <a:latin typeface="Arial Unicode MS"/>
+                <a:ea typeface="Arial Unicode MS"/>
+                <a:cs typeface="Arial Unicode MS"/>
+              </a:rPr>
+              <a:t>寫完的同學可以自己再驗證一次：把每一題重做一遍，看數字是不是一樣。</a:t>
             </a:r>
           </a:p>
         </p:txBody>
@@ -2928,7 +3082,7 @@
                 <a:ea typeface="Arial Unicode MS"/>
                 <a:cs typeface="Arial Unicode MS"/>
               </a:rPr>
-              <a:t>你們那兩行請保留好。下課。</a:t>
+              <a:t>學習單交上來之前，請確認上面有寫班級和名字。下課。</a:t>
             </a:r>
           </a:p>
         </p:txBody>
@@ -13754,7 +13908,7 @@
                 <a:ea typeface="Arial" pitchFamily="34" charset="-122"/>
                 <a:cs typeface="Arial" pitchFamily="34" charset="-120"/>
               </a:rPr>
-              <a:t>Việc của nhóm · 分組任務</a:t>
+              <a:t>Phiếu thực hành · 課堂實作學習單（個人）</a:t>
             </a:r>
             <a:endParaRPr lang="en-US" sz="1250" dirty="0"/>
           </a:p>
@@ -13796,7 +13950,7 @@
                 <a:ea typeface="Arial" pitchFamily="34" charset="-122"/>
                 <a:cs typeface="Arial" pitchFamily="34" charset="-120"/>
               </a:rPr>
-              <a:t>Sáu nhóm, mỗi nhóm một cảm biến. Viết hai dòng, nộp cuối giờ.</a:t>
+              <a:t>Mỗi người một tờ. Làm từng câu trên máy, chép con số trên màn hình.</a:t>
             </a:r>
             <a:endParaRPr lang="en-US" sz="2300" dirty="0"/>
           </a:p>
@@ -13816,7 +13970,7 @@
                 <a:ea typeface="微軟正黑體" pitchFamily="34" charset="-122"/>
                 <a:cs typeface="微軟正黑體" pitchFamily="34" charset="-120"/>
               </a:rPr>
-              <a:t>六組，每組認養一種感測器。寫兩行，下課前交。</a:t>
+              <a:t>每人一張。照題目在電腦上操作，把畫面上的數字抄下來。</a:t>
             </a:r>
             <a:endParaRPr lang="en-US" sz="2300" dirty="0"/>
           </a:p>
@@ -13939,7 +14093,7 @@
                 <a:ea typeface="Arial" pitchFamily="34" charset="-122"/>
                 <a:cs typeface="Arial" pitchFamily="34" charset="-120"/>
               </a:rPr>
-              <a:t>Dòng 1: cảm biến của nhóm đưa về cái gì mà loại khác không có? Viết kèm con số hôm nay thấy.</a:t>
+              <a:t>Chín câu: kéo người đi bộ, đổi tham số, đổi thời tiết, bật hỏng cảm biến.</a:t>
             </a:r>
             <a:endParaRPr lang="en-US" sz="1250" dirty="0"/>
           </a:p>
@@ -13959,7 +14113,7 @@
                 <a:ea typeface="微軟正黑體" pitchFamily="34" charset="-122"/>
                 <a:cs typeface="微軟正黑體" pitchFamily="34" charset="-120"/>
               </a:rPr>
-              <a:t>第 1 行：你那一種送回來什麼是別人沒有的？要附上今天看到的數字。</a:t>
+              <a:t>九題：拖行人、改參數、切天氣、打開單一感測器故障。</a:t>
             </a:r>
             <a:endParaRPr lang="en-US" sz="1250" dirty="0"/>
           </a:p>
@@ -14082,7 +14236,7 @@
                 <a:ea typeface="Arial" pitchFamily="34" charset="-122"/>
                 <a:cs typeface="Arial" pitchFamily="34" charset="-120"/>
               </a:rPr>
-              <a:t>Dòng 2: điều kiện nào làm nó vô dụng? Và lúc đó ai bù cho nó?</a:t>
+              <a:t>Tám câu đầu có đáp án đúng — chép sai con số là sai. Câu cuối tự thiết kế, nhưng lý do phải dẫn số.</a:t>
             </a:r>
             <a:endParaRPr lang="en-US" sz="1250" dirty="0"/>
           </a:p>
@@ -14102,7 +14256,7 @@
                 <a:ea typeface="微軟正黑體" pitchFamily="34" charset="-122"/>
                 <a:cs typeface="微軟正黑體" pitchFamily="34" charset="-120"/>
               </a:rPr>
-              <a:t>第 2 行：什麼條件會讓它失效？那時候誰來補它？</a:t>
+              <a:t>前八題有標準答案，數字抄錯就是錯。最後一題自己設計，但理由一定要帶數字。</a:t>
             </a:r>
             <a:endParaRPr lang="en-US" sz="1250" dirty="0"/>
           </a:p>
@@ -14225,7 +14379,7 @@
                 <a:ea typeface="Arial" pitchFamily="34" charset="-122"/>
                 <a:cs typeface="Arial" pitchFamily="34" charset="-120"/>
               </a:rPr>
-              <a:t>Mỗi nhóm một phút. Dùng lại cho chuyên đề cuối kỳ.</a:t>
+              <a:t>Làm cá nhân, không chia nhóm. Nộp trước khi hết giờ.</a:t>
             </a:r>
             <a:endParaRPr lang="en-US" sz="1250" dirty="0"/>
           </a:p>
@@ -14245,7 +14399,7 @@
                 <a:ea typeface="微軟正黑體" pitchFamily="34" charset="-122"/>
                 <a:cs typeface="微軟正黑體" pitchFamily="34" charset="-120"/>
               </a:rPr>
-              <a:t>每組講一分鐘。期末專題會用到。</a:t>
+              <a:t>個人作答，不分組。下課前交回。</a:t>
             </a:r>
             <a:endParaRPr lang="en-US" sz="1250" dirty="0"/>
           </a:p>
@@ -14287,7 +14441,7 @@
                 <a:ea typeface="Arial" pitchFamily="34" charset="-122"/>
                 <a:cs typeface="Arial" pitchFamily="34" charset="-120"/>
               </a:rPr>
-              <a:t>Dòng 2 khó hơn. Nhóm nào nói được ai bù cho mình là nhóm hiểu bài.</a:t>
+              <a:t>Viết xong có thể tự kiểm chứng lại bằng chính công cụ này.</a:t>
             </a:r>
             <a:endParaRPr lang="en-US" sz="1250" dirty="0"/>
           </a:p>
@@ -14307,7 +14461,7 @@
                 <a:ea typeface="微軟正黑體" pitchFamily="34" charset="-122"/>
                 <a:cs typeface="微軟正黑體" pitchFamily="34" charset="-120"/>
               </a:rPr>
-              <a:t>第 2 行比較難。講得出誰來補自己的那一組，才是真的懂了。</a:t>
+              <a:t>寫完可以用同一個工具，自己把每個數字再驗證一次。</a:t>
             </a:r>
             <a:endParaRPr lang="en-US" sz="1250" dirty="0"/>
           </a:p>

--- a/第三週(09-24)/第三週_第3節_簡報.pptx
+++ b/第三週(09-24)/第三週_第3節_簡報.pptx
@@ -4413,7 +4413,7 @@
                 <a:ea typeface="Arial Unicode MS"/>
                 <a:cs typeface="Arial Unicode MS"/>
               </a:rPr>
-              <a:t>相機：設定八十，現在十六。四十公尺的行人看不到了。
+              <a:t>先看相機，設定八十、現在十六，所以四十公尺的行人看不到了。
 </a:t>
             </a:r>
           </a:p>
@@ -4435,7 +4435,7 @@
                 <a:ea typeface="Arial Unicode MS"/>
                 <a:cs typeface="Arial Unicode MS"/>
               </a:rPr>
-              <a:t>光達：設定一百，現在四十五。點數從十五個掉到六個。
+              <a:t>再看光達，設定一百、現在四十五，點數從十五個掉到六個。
 </a:t>
             </a:r>
           </a:p>
@@ -4457,7 +4457,7 @@
                 <a:ea typeface="Arial Unicode MS"/>
                 <a:cs typeface="Arial Unicode MS"/>
               </a:rPr>
-              <a:t>熱像：設定一百五十，現在九十。四十公尺的人還是看得到。
+              <a:t>熱像是設定一百五十、現在九十，四十公尺的人還是看得到。
 </a:t>
             </a:r>
           </a:p>
@@ -4479,7 +4479,7 @@
                 <a:ea typeface="Arial Unicode MS"/>
                 <a:cs typeface="Arial Unicode MS"/>
               </a:rPr>
-              <a:t>雷達：設定兩百五十，現在兩百二十五。照常工作。
+              <a:t>雷達是設定兩百五十、現在兩百二十五，照常工作。
 </a:t>
             </a:r>
           </a:p>
@@ -4842,7 +4842,7 @@
                 <a:ea typeface="Arial Unicode MS"/>
                 <a:cs typeface="Arial Unicode MS"/>
               </a:rPr>
-              <a:t>晴天：相機正負零點五八、寫「行人」；光達十五個點；雷達四十點零；熱像十五像素。
+              <a:t>晴天的時候，相機是正負零點五八、寫「行人」，光達十五個點，雷達四十點零，熱像十五像素。
 </a:t>
             </a:r>
           </a:p>
@@ -4864,7 +4864,7 @@
                 <a:ea typeface="Arial Unicode MS"/>
                 <a:cs typeface="Arial Unicode MS"/>
               </a:rPr>
-              <a:t>小雨：相機一樣正負零點五八；光達十三個點；雷達四十點零；熱像十五像素。
+              <a:t>按到小雨，相機一樣是正負零點五八，光達剩十三個點，雷達四十點零，熱像十五像素。
 </a:t>
             </a:r>
           </a:p>
@@ -4886,7 +4886,7 @@
                 <a:ea typeface="Arial Unicode MS"/>
                 <a:cs typeface="Arial Unicode MS"/>
               </a:rPr>
-              <a:t>中雨：相機還是正負零點五八；光達九個點；雷達四十點零；熱像十五像素。
+              <a:t>按到中雨，相機還是正負零點五八，光達剩九個點，雷達四十點零，熱像十五像素。
 </a:t>
             </a:r>
           </a:p>
@@ -4908,7 +4908,7 @@
                 <a:ea typeface="Arial Unicode MS"/>
                 <a:cs typeface="Arial Unicode MS"/>
               </a:rPr>
-              <a:t>大雨：相機</a:t>
+              <a:t>按到大雨，相機</a:t>
             </a:r>
             <a:r>
               <a:rPr sz="1000" b="1" lang="zh-TW" dirty="0">
@@ -4930,7 +4930,7 @@
                 <a:ea typeface="Arial Unicode MS"/>
                 <a:cs typeface="Arial Unicode MS"/>
               </a:rPr>
-              <a:t>；光達六個點；雷達四十點零；熱像十五像素。
+              <a:t>，光達剩六個點，雷達四十點零，熱像十五像素。
 </a:t>
             </a:r>
           </a:p>

--- a/第三週(09-24)/第三週_第3節_簡報.pptx
+++ b/第三週(09-24)/第三週_第3節_簡報.pptx
@@ -7339,7 +7339,7 @@
                 <a:ea typeface="Arial Unicode MS"/>
                 <a:cs typeface="Arial Unicode MS"/>
               </a:rPr>
-              <a:t>，只有天氣不同。
+              <a:t>，只有天氣不同。大雨那張，行人還看得到輪廓，只是雨絲擋在中間。濃霧那張，那個人幾乎被霧蓋住，看不見了。右下角的數字就是我們剛剛量過的：大雨相機只剩二十二公尺，濃霧只剩十六公尺。
 </a:t>
             </a:r>
           </a:p>
@@ -7361,7 +7361,29 @@
                 <a:ea typeface="Arial Unicode MS"/>
                 <a:cs typeface="Arial Unicode MS"/>
               </a:rPr>
-              <a:t>大雨那張，行人還看得到輪廓，只是雨絲擋在中間。濃霧那張，那個人幾乎被霧蓋住，看不見了。右下角的數字就是我們剛剛量過的：大雨相機只剩二十二公尺，濃霧只剩十六公尺。
+              <a:t>接下來介紹這支影片。拍的人叫 Mark Rober，是前 NASA 的工程師，現在是 YouTuber，他的頻道以「用誇張的實驗講科學」出名。影片全長十八分五十四秒。前面九分鐘是他潛進迪士尼樂園、用光達掃描太空山那條全黑的軌道，那一段很好看，可是跟今天無關，我們跳過。</a:t>
+            </a:r>
+            <a:r>
+              <a:rPr sz="1000" b="1" lang="zh-TW" dirty="0">
+                <a:solidFill>
+                  <a:srgbClr val="000000"/>
+                </a:solidFill>
+                <a:latin typeface="Arial Unicode MS"/>
+                <a:ea typeface="Arial Unicode MS"/>
+                <a:cs typeface="Arial Unicode MS"/>
+              </a:rPr>
+              <a:t>測試從九分六秒開始。</a:t>
+            </a:r>
+            <a:r>
+              <a:rPr sz="1000" lang="zh-TW" dirty="0">
+                <a:solidFill>
+                  <a:srgbClr val="000000"/>
+                </a:solidFill>
+                <a:latin typeface="Arial Unicode MS"/>
+                <a:ea typeface="Arial Unicode MS"/>
+                <a:cs typeface="Arial Unicode MS"/>
+              </a:rPr>
+              <a:t>
 </a:t>
             </a:r>
           </a:p>
@@ -7383,7 +7405,7 @@
                 <a:ea typeface="Arial Unicode MS"/>
                 <a:cs typeface="Arial Unicode MS"/>
               </a:rPr>
-              <a:t>請大家帶著這個問題看影片：</a:t>
+              <a:t>他做的事很簡單：一台只用相機的特斯拉，一台裝了光達的車，兩台都用</a:t>
             </a:r>
             <a:r>
               <a:rPr sz="1000" b="1" lang="zh-TW" dirty="0">
@@ -7394,7 +7416,7 @@
                 <a:ea typeface="Arial Unicode MS"/>
                 <a:cs typeface="Arial Unicode MS"/>
               </a:rPr>
-              <a:t>如果車子只靠相機，在這兩種天氣下，它看得到那個小孩嗎？</a:t>
+              <a:t>時速四十英里</a:t>
             </a:r>
             <a:r>
               <a:rPr sz="1000" lang="zh-TW" dirty="0">
@@ -7405,7 +7427,7 @@
                 <a:ea typeface="Arial Unicode MS"/>
                 <a:cs typeface="Arial Unicode MS"/>
               </a:rPr>
-              <a:t>
+              <a:t>，大概六十四公里，衝向同一個小孩假人，看誰會停。一共六項測試。
 </a:t>
             </a:r>
           </a:p>
@@ -7427,7 +7449,7 @@
                 <a:ea typeface="Arial Unicode MS"/>
                 <a:cs typeface="Arial Unicode MS"/>
               </a:rPr>
-              <a:t>先介紹這支影片。拍的人叫 Mark Rober，是前 NASA 的工程師，現在是 YouTuber，他的頻道以「用誇張的實驗講科學」出名。這支影片全長十八分半，前面九分鐘是他潛進迪士尼樂園、用光達掃描太空山那條全黑的軌道，那一段很好看，但是跟今天無關，</a:t>
+              <a:t>今天我們</a:t>
             </a:r>
             <a:r>
               <a:rPr sz="1000" b="1" lang="zh-TW" dirty="0">
@@ -7438,7 +7460,7 @@
                 <a:ea typeface="Arial Unicode MS"/>
                 <a:cs typeface="Arial Unicode MS"/>
               </a:rPr>
-              <a:t>測試從九分六秒開始</a:t>
+              <a:t>從九分六秒開始，一路播到最後那面假牆撞上去為止，中間不停</a:t>
             </a:r>
             <a:r>
               <a:rPr sz="1000" lang="zh-TW" dirty="0">
@@ -7449,7 +7471,7 @@
                 <a:ea typeface="Arial Unicode MS"/>
                 <a:cs typeface="Arial Unicode MS"/>
               </a:rPr>
-              <a:t>。
+              <a:t>，大概八分鐘。撞完就停，後面是結語跟廣告，不用看。
 </a:t>
             </a:r>
           </a:p>
@@ -7471,29 +7493,7 @@
                 <a:ea typeface="Arial Unicode MS"/>
                 <a:cs typeface="Arial Unicode MS"/>
               </a:rPr>
-              <a:t>他做的事很簡單：拿一台只用相機的特斯拉，跟一台裝了光達的車，兩台都用</a:t>
-            </a:r>
-            <a:r>
-              <a:rPr sz="1000" b="1" lang="zh-TW" dirty="0">
-                <a:solidFill>
-                  <a:srgbClr val="000000"/>
-                </a:solidFill>
-                <a:latin typeface="Arial Unicode MS"/>
-                <a:ea typeface="Arial Unicode MS"/>
-                <a:cs typeface="Arial Unicode MS"/>
-              </a:rPr>
-              <a:t>時速四十英里</a:t>
-            </a:r>
-            <a:r>
-              <a:rPr sz="1000" lang="zh-TW" dirty="0">
-                <a:solidFill>
-                  <a:srgbClr val="000000"/>
-                </a:solidFill>
-                <a:latin typeface="Arial Unicode MS"/>
-                <a:ea typeface="Arial Unicode MS"/>
-                <a:cs typeface="Arial Unicode MS"/>
-              </a:rPr>
-              <a:t>，大概六十四公里，衝向同一個小孩假人，看誰會停。一共六項測試。
+              <a:t>播之前先交代兩件事。
 </a:t>
             </a:r>
           </a:p>
@@ -7515,7 +7515,7 @@
                 <a:ea typeface="Arial Unicode MS"/>
                 <a:cs typeface="Arial Unicode MS"/>
               </a:rPr>
-              <a:t>我們只播兩段，霧那一段和雨那一段，大概兩分鐘。其他四項我直接講結果。想完整看的同學可以課後自己看。
+              <a:t>第一，請每個人在紙上畫兩欄，一欄光達車、一欄特斯拉，六項測試，過的打勾、沒過的打叉。等一下我們一起對答案。
 </a:t>
             </a:r>
           </a:p>
@@ -7529,6 +7529,17 @@
               </a:spcAft>
             </a:pPr>
             <a:r>
+              <a:rPr sz="1000" lang="zh-TW" dirty="0">
+                <a:solidFill>
+                  <a:srgbClr val="000000"/>
+                </a:solidFill>
+                <a:latin typeface="Arial Unicode MS"/>
+                <a:ea typeface="Arial Unicode MS"/>
+                <a:cs typeface="Arial Unicode MS"/>
+              </a:rPr>
+              <a:t>第二，請帶著這個問題看：</a:t>
+            </a:r>
+            <a:r>
               <a:rPr sz="1000" b="1" lang="zh-TW" dirty="0">
                 <a:solidFill>
                   <a:srgbClr val="000000"/>
@@ -7537,7 +7548,7 @@
                 <a:ea typeface="Arial Unicode MS"/>
                 <a:cs typeface="Arial Unicode MS"/>
               </a:rPr>
-              <a:t>第一項，小孩假人站在路中間。</a:t>
+              <a:t>如果車子只靠相機，在霧裡和雨裡，它看得到那個小孩嗎？</a:t>
             </a:r>
             <a:r>
               <a:rPr sz="1000" lang="zh-TW" dirty="0">
@@ -7548,29 +7559,7 @@
                 <a:ea typeface="Arial Unicode MS"/>
                 <a:cs typeface="Arial Unicode MS"/>
               </a:rPr>
-              <a:t>光達車偵測到、及時煞停，過。特斯拉也偵測到了，可是</a:t>
-            </a:r>
-            <a:r>
-              <a:rPr sz="1000" b="1" lang="zh-TW" dirty="0">
-                <a:solidFill>
-                  <a:srgbClr val="000000"/>
-                </a:solidFill>
-                <a:latin typeface="Arial Unicode MS"/>
-                <a:ea typeface="Arial Unicode MS"/>
-                <a:cs typeface="Arial Unicode MS"/>
-              </a:rPr>
-              <a:t>來不及煞停，撞上去</a:t>
-            </a:r>
-            <a:r>
-              <a:rPr sz="1000" lang="zh-TW" dirty="0">
-                <a:solidFill>
-                  <a:srgbClr val="000000"/>
-                </a:solidFill>
-                <a:latin typeface="Arial Unicode MS"/>
-                <a:ea typeface="Arial Unicode MS"/>
-                <a:cs typeface="Arial Unicode MS"/>
-              </a:rPr>
-              <a:t>。
+              <a:t>
 </a:t>
             </a:r>
           </a:p>
@@ -7592,51 +7581,7 @@
                 <a:ea typeface="Arial Unicode MS"/>
                 <a:cs typeface="Arial Unicode MS"/>
               </a:rPr>
-              <a:t>這裡有一個細節很重要。特斯拉第一次跑的時候用的是</a:t>
-            </a:r>
-            <a:r>
-              <a:rPr sz="1000" b="1" lang="zh-TW" dirty="0">
-                <a:solidFill>
-                  <a:srgbClr val="000000"/>
-                </a:solidFill>
-                <a:latin typeface="Arial Unicode MS"/>
-                <a:ea typeface="Arial Unicode MS"/>
-                <a:cs typeface="Arial Unicode MS"/>
-              </a:rPr>
-              <a:t>自動緊急煞車</a:t>
-            </a:r>
-            <a:r>
-              <a:rPr sz="1000" lang="zh-TW" dirty="0">
-                <a:solidFill>
-                  <a:srgbClr val="000000"/>
-                </a:solidFill>
-                <a:latin typeface="Arial Unicode MS"/>
-                <a:ea typeface="Arial Unicode MS"/>
-                <a:cs typeface="Arial Unicode MS"/>
-              </a:rPr>
-              <a:t>，那個系統假設駕駛人在專心開車，所以它要百分之百確定才會煞，免得亂煞車。後來他改用 </a:t>
-            </a:r>
-            <a:r>
-              <a:rPr sz="1000" b="1" lang="zh-TW" dirty="0">
-                <a:solidFill>
-                  <a:srgbClr val="000000"/>
-                </a:solidFill>
-                <a:latin typeface="Arial Unicode MS"/>
-                <a:ea typeface="Arial Unicode MS"/>
-                <a:cs typeface="Arial Unicode MS"/>
-              </a:rPr>
-              <a:t>Autopilot</a:t>
-            </a:r>
-            <a:r>
-              <a:rPr sz="1000" lang="zh-TW" dirty="0">
-                <a:solidFill>
-                  <a:srgbClr val="000000"/>
-                </a:solidFill>
-                <a:latin typeface="Arial Unicode MS"/>
-                <a:ea typeface="Arial Unicode MS"/>
-                <a:cs typeface="Arial Unicode MS"/>
-              </a:rPr>
-              <a:t> 重跑一次，這次及時停住了。所以拍片的人自己說「算你平手」，接下來五項全部用 Autopilot。
+              <a:t>好，我們開始播。
 </a:t>
             </a:r>
           </a:p>
@@ -7658,7 +7603,7 @@
                 <a:ea typeface="Arial Unicode MS"/>
                 <a:cs typeface="Arial Unicode MS"/>
               </a:rPr>
-              <a:t>這一項真正的教訓其實不是感測器，是</a:t>
+              <a:t>好，影片就看到這裡。我們先對答案。</a:t>
             </a:r>
             <a:r>
               <a:rPr sz="1000" b="1" lang="zh-TW" dirty="0">
@@ -7669,7 +7614,7 @@
                 <a:ea typeface="Arial Unicode MS"/>
                 <a:cs typeface="Arial Unicode MS"/>
               </a:rPr>
-              <a:t>同一台車、同一顆感測器，設定不一樣結果就不一樣</a:t>
+              <a:t>光達車六比六，特斯拉三比六。</a:t>
             </a:r>
             <a:r>
               <a:rPr sz="1000" lang="zh-TW" dirty="0">
@@ -7680,7 +7625,7 @@
                 <a:ea typeface="Arial Unicode MS"/>
                 <a:cs typeface="Arial Unicode MS"/>
               </a:rPr>
-              <a:t>。期末專題如果要比較兩台車，設定沒有對齊，比出來的東西沒有意義。
+              <a:t>
 </a:t>
             </a:r>
           </a:p>
@@ -7694,6 +7639,17 @@
               </a:spcAft>
             </a:pPr>
             <a:r>
+              <a:rPr sz="1000" lang="zh-TW" dirty="0">
+                <a:solidFill>
+                  <a:srgbClr val="000000"/>
+                </a:solidFill>
+                <a:latin typeface="Arial Unicode MS"/>
+                <a:ea typeface="Arial Unicode MS"/>
+                <a:cs typeface="Arial Unicode MS"/>
+              </a:rPr>
+              <a:t>第一項，小孩假人站在路中間。特斯拉其實偵測到了，可是來不及煞停，撞上去。這裡有一個細節很重要。特斯拉第一次跑的時候用的是</a:t>
+            </a:r>
+            <a:r>
               <a:rPr sz="1000" b="1" lang="zh-TW" dirty="0">
                 <a:solidFill>
                   <a:srgbClr val="000000"/>
@@ -7702,7 +7658,7 @@
                 <a:ea typeface="Arial Unicode MS"/>
                 <a:cs typeface="Arial Unicode MS"/>
               </a:rPr>
-              <a:t>第二項，小孩從停放的車子後面突然衝出來。</a:t>
+              <a:t>自動緊急煞車</a:t>
             </a:r>
             <a:r>
               <a:rPr sz="1000" lang="zh-TW" dirty="0">
@@ -7713,7 +7669,29 @@
                 <a:ea typeface="Arial Unicode MS"/>
                 <a:cs typeface="Arial Unicode MS"/>
               </a:rPr>
-              <a:t>先滾出一顆球，然後假人彈出來，兩台車只有不到一秒可以反應。光達車停住，特斯拉也停住，而且還停得很從容。兩台都過。
+              <a:t>，那個系統假設駕駛人在專心開車，所以它要很確定才會煞，免得亂煞車。後來他改用 </a:t>
+            </a:r>
+            <a:r>
+              <a:rPr sz="1000" b="1" lang="zh-TW" dirty="0">
+                <a:solidFill>
+                  <a:srgbClr val="000000"/>
+                </a:solidFill>
+                <a:latin typeface="Arial Unicode MS"/>
+                <a:ea typeface="Arial Unicode MS"/>
+                <a:cs typeface="Arial Unicode MS"/>
+              </a:rPr>
+              <a:t>Autopilot</a:t>
+            </a:r>
+            <a:r>
+              <a:rPr sz="1000" lang="zh-TW" dirty="0">
+                <a:solidFill>
+                  <a:srgbClr val="000000"/>
+                </a:solidFill>
+                <a:latin typeface="Arial Unicode MS"/>
+                <a:ea typeface="Arial Unicode MS"/>
+                <a:cs typeface="Arial Unicode MS"/>
+              </a:rPr>
+              <a:t> 重跑一次，這次及時停住了。所以拍片的人自己說「算你平手」，接下來五項全部用 Autopilot。
 </a:t>
             </a:r>
           </a:p>
@@ -7727,6 +7705,17 @@
               </a:spcAft>
             </a:pPr>
             <a:r>
+              <a:rPr sz="1000" lang="zh-TW" dirty="0">
+                <a:solidFill>
+                  <a:srgbClr val="000000"/>
+                </a:solidFill>
+                <a:latin typeface="Arial Unicode MS"/>
+                <a:ea typeface="Arial Unicode MS"/>
+                <a:cs typeface="Arial Unicode MS"/>
+              </a:rPr>
+              <a:t>這一項真正的教訓其實不是感測器，是</a:t>
+            </a:r>
+            <a:r>
               <a:rPr sz="1000" b="1" lang="zh-TW" dirty="0">
                 <a:solidFill>
                   <a:srgbClr val="000000"/>
@@ -7735,7 +7724,7 @@
                 <a:ea typeface="Arial Unicode MS"/>
                 <a:cs typeface="Arial Unicode MS"/>
               </a:rPr>
-              <a:t>第三項，霧。</a:t>
+              <a:t>同一台車、同一顆感測器，設定不一樣結果就不一樣</a:t>
             </a:r>
             <a:r>
               <a:rPr sz="1000" lang="zh-TW" dirty="0">
@@ -7746,29 +7735,7 @@
                 <a:ea typeface="Arial Unicode MS"/>
                 <a:cs typeface="Arial Unicode MS"/>
               </a:rPr>
-              <a:t>這一項請大家專心看。拍片的人說他自己的眼睛已經完全看不到霧裡有小孩了。光達車：急煞、停住，假人好端端站著。特斯拉：</a:t>
-            </a:r>
-            <a:r>
-              <a:rPr sz="1000" b="1" lang="zh-TW" dirty="0">
-                <a:solidFill>
-                  <a:srgbClr val="000000"/>
-                </a:solidFill>
-                <a:latin typeface="Arial Unicode MS"/>
-                <a:ea typeface="Arial Unicode MS"/>
-                <a:cs typeface="Arial Unicode MS"/>
-              </a:rPr>
-              <a:t>完全沒有踩煞車，連一下都沒有。</a:t>
-            </a:r>
-            <a:r>
-              <a:rPr sz="1000" lang="zh-TW" dirty="0">
-                <a:solidFill>
-                  <a:srgbClr val="000000"/>
-                </a:solidFill>
-                <a:latin typeface="Arial Unicode MS"/>
-                <a:ea typeface="Arial Unicode MS"/>
-                <a:cs typeface="Arial Unicode MS"/>
-              </a:rPr>
-              <a:t>
+              <a:t>。期末專題如果要比較兩台車，設定沒有對齊，比出來的東西沒有意義。
 </a:t>
             </a:r>
           </a:p>
@@ -7790,7 +7757,7 @@
                 <a:ea typeface="Arial Unicode MS"/>
                 <a:cs typeface="Arial Unicode MS"/>
               </a:rPr>
-              <a:t>這個結果，跟我們剛剛那張波長圖對得起來嗎？對得起來。霧滴一到五十微米，比相機的波長大，所以擋住相機；也比光達的波長大，所以光達也掉了。可是光達本來有一百公尺，掉到四十五還夠用；相機本來八十，掉到十六就來不及了。
+              <a:t>霧那一項，請大家回想剛剛那張波長圖。對得起來嗎？對得起來。霧滴一到五十微米，比相機的波長大，所以擋住相機；也比光達的波長大，所以光達也掉了。可是光達本來有一百公尺，掉到四十五還夠用；相機本來八十，掉到十六就來不及了。
 </a:t>
             </a:r>
           </a:p>
@@ -7804,17 +7771,6 @@
               </a:spcAft>
             </a:pPr>
             <a:r>
-              <a:rPr sz="1000" b="1" lang="zh-TW" dirty="0">
-                <a:solidFill>
-                  <a:srgbClr val="000000"/>
-                </a:solidFill>
-                <a:latin typeface="Arial Unicode MS"/>
-                <a:ea typeface="Arial Unicode MS"/>
-                <a:cs typeface="Arial Unicode MS"/>
-              </a:rPr>
-              <a:t>第四項，大雨。</a:t>
-            </a:r>
-            <a:r>
               <a:rPr sz="1000" lang="zh-TW" dirty="0">
                 <a:solidFill>
                   <a:srgbClr val="000000"/>
@@ -7823,51 +7779,7 @@
                 <a:ea typeface="Arial Unicode MS"/>
                 <a:cs typeface="Arial Unicode MS"/>
               </a:rPr>
-              <a:t>他們用灑水製造傾盆大雨。特斯拉的畫面上，水一灑下來，小孩就整個不見了——這正是我們第三輪按到「大雨」時看到的，相機的有效距離掉到二十二公尺。結果特斯拉</a:t>
-            </a:r>
-            <a:r>
-              <a:rPr sz="1000" b="1" lang="zh-TW" dirty="0">
-                <a:solidFill>
-                  <a:srgbClr val="000000"/>
-                </a:solidFill>
-                <a:latin typeface="Arial Unicode MS"/>
-                <a:ea typeface="Arial Unicode MS"/>
-                <a:cs typeface="Arial Unicode MS"/>
-              </a:rPr>
-              <a:t>沒有停</a:t>
-            </a:r>
-            <a:r>
-              <a:rPr sz="1000" lang="zh-TW" dirty="0">
-                <a:solidFill>
-                  <a:srgbClr val="000000"/>
-                </a:solidFill>
-                <a:latin typeface="Arial Unicode MS"/>
-                <a:ea typeface="Arial Unicode MS"/>
-                <a:cs typeface="Arial Unicode MS"/>
-              </a:rPr>
-              <a:t>。光達車一開始看起來也沒減速，拍片的人說「光達可能有麻煩」，可是最後</a:t>
-            </a:r>
-            <a:r>
-              <a:rPr sz="1000" b="1" lang="zh-TW" dirty="0">
-                <a:solidFill>
-                  <a:srgbClr val="000000"/>
-                </a:solidFill>
-                <a:latin typeface="Arial Unicode MS"/>
-                <a:ea typeface="Arial Unicode MS"/>
-                <a:cs typeface="Arial Unicode MS"/>
-              </a:rPr>
-              <a:t>還是停住了</a:t>
-            </a:r>
-            <a:r>
-              <a:rPr sz="1000" lang="zh-TW" dirty="0">
-                <a:solidFill>
-                  <a:srgbClr val="000000"/>
-                </a:solidFill>
-                <a:latin typeface="Arial Unicode MS"/>
-                <a:ea typeface="Arial Unicode MS"/>
-                <a:cs typeface="Arial Unicode MS"/>
-              </a:rPr>
-              <a:t>，他自己說光達讓他意外。
+              <a:t>大雨那一項，水一灑下來，特斯拉的畫面上小孩就整個不見了——這正是我們第三輪按到「大雨」時看到的，相機的有效距離掉到二十二公尺。光達車一開始看起來也沒減速，拍片的人還說「光達可能有麻煩」，可是最後還是停住了。
 </a:t>
             </a:r>
           </a:p>
@@ -7881,6 +7793,17 @@
               </a:spcAft>
             </a:pPr>
             <a:r>
+              <a:rPr sz="1000" lang="zh-TW" dirty="0">
+                <a:solidFill>
+                  <a:srgbClr val="000000"/>
+                </a:solidFill>
+                <a:latin typeface="Arial Unicode MS"/>
+                <a:ea typeface="Arial Unicode MS"/>
+                <a:cs typeface="Arial Unicode MS"/>
+              </a:rPr>
+              <a:t>強光那一項要特別講：</a:t>
+            </a:r>
+            <a:r>
               <a:rPr sz="1000" b="1" lang="zh-TW" dirty="0">
                 <a:solidFill>
                   <a:srgbClr val="000000"/>
@@ -7889,7 +7812,7 @@
                 <a:ea typeface="Arial Unicode MS"/>
                 <a:cs typeface="Arial Unicode MS"/>
               </a:rPr>
-              <a:t>第五項，強光。</a:t>
+              <a:t>不是相機全輸。</a:t>
             </a:r>
             <a:r>
               <a:rPr sz="1000" lang="zh-TW" dirty="0">
@@ -7900,29 +7823,7 @@
                 <a:ea typeface="Arial Unicode MS"/>
                 <a:cs typeface="Arial Unicode MS"/>
               </a:rPr>
-              <a:t>六盞非常亮的燈直射過來，模擬日出日落，或者對向卡車的遠光燈。光達車立刻看到，</a:t>
-            </a:r>
-            <a:r>
-              <a:rPr sz="1000" b="1" lang="zh-TW" dirty="0">
-                <a:solidFill>
-                  <a:srgbClr val="000000"/>
-                </a:solidFill>
-                <a:latin typeface="Arial Unicode MS"/>
-                <a:ea typeface="Arial Unicode MS"/>
-                <a:cs typeface="Arial Unicode MS"/>
-              </a:rPr>
-              <a:t>特斯拉這一項也過了</a:t>
-            </a:r>
-            <a:r>
-              <a:rPr sz="1000" lang="zh-TW" dirty="0">
-                <a:solidFill>
-                  <a:srgbClr val="000000"/>
-                </a:solidFill>
-                <a:latin typeface="Arial Unicode MS"/>
-                <a:ea typeface="Arial Unicode MS"/>
-                <a:cs typeface="Arial Unicode MS"/>
-              </a:rPr>
-              <a:t>。
+              <a:t>相機在強光下還撐得住，這跟我們表上「逆光眩光，相機十八公尺」不太一樣，因為表上那個是四十公尺外的目標，影片裡的假人比較近。條件不同，結果就不同，這也是為什麼我一直要大家問「在什麼距離、什麼條件」。
 </a:t>
             </a:r>
           </a:p>
@@ -7944,7 +7845,7 @@
                 <a:ea typeface="Arial Unicode MS"/>
                 <a:cs typeface="Arial Unicode MS"/>
               </a:rPr>
-              <a:t>這一項要特別講：</a:t>
+              <a:t>最後那面假牆，牆上畫的圖案跟前面的路一模一樣。</a:t>
             </a:r>
             <a:r>
               <a:rPr sz="1000" b="1" lang="zh-TW" dirty="0">
@@ -7955,7 +7856,7 @@
                 <a:ea typeface="Arial Unicode MS"/>
                 <a:cs typeface="Arial Unicode MS"/>
               </a:rPr>
-              <a:t>不是相機全輸。</a:t>
+              <a:t>對光達來說那就是一面牆</a:t>
             </a:r>
             <a:r>
               <a:rPr sz="1000" lang="zh-TW" dirty="0">
@@ -7966,7 +7867,29 @@
                 <a:ea typeface="Arial Unicode MS"/>
                 <a:cs typeface="Arial Unicode MS"/>
               </a:rPr>
-              <a:t>相機在強光下還撐得住，這跟我們表上「逆光眩光，相機十八公尺」不太一樣，因為表上那個是四十公尺外的目標，影片裡的假人比較近。條件不同，結果就不同，這也是為什麼我一直要大家問「在什麼距離、什麼條件」。
+              <a:t>，因為它量的是距離，不是圖案。可是對只有相機的車來說，畫面上的像素跟真的路長得一樣，它就沒有任何一條線索可以拆穿。相機量到的是角度和亮度，距離是</a:t>
+            </a:r>
+            <a:r>
+              <a:rPr sz="1000" b="1" lang="zh-TW" dirty="0">
+                <a:solidFill>
+                  <a:srgbClr val="000000"/>
+                </a:solidFill>
+                <a:latin typeface="Arial Unicode MS"/>
+                <a:ea typeface="Arial Unicode MS"/>
+                <a:cs typeface="Arial Unicode MS"/>
+              </a:rPr>
+              <a:t>推算</a:t>
+            </a:r>
+            <a:r>
+              <a:rPr sz="1000" lang="zh-TW" dirty="0">
+                <a:solidFill>
+                  <a:srgbClr val="000000"/>
+                </a:solidFill>
+                <a:latin typeface="Arial Unicode MS"/>
+                <a:ea typeface="Arial Unicode MS"/>
+                <a:cs typeface="Arial Unicode MS"/>
+              </a:rPr>
+              <a:t>出來的；圖案騙得過推算，騙不過量測。
 </a:t>
             </a:r>
           </a:p>
@@ -7988,7 +7911,7 @@
                 <a:ea typeface="Arial Unicode MS"/>
                 <a:cs typeface="Arial Unicode MS"/>
               </a:rPr>
-              <a:t>進到最後一項之前的比數：光達車五項全過，特斯拉三比五。
+              <a:t>接下來這件事更重要，請大家一定要聽。
 </a:t>
             </a:r>
           </a:p>
@@ -8002,6 +7925,17 @@
               </a:spcAft>
             </a:pPr>
             <a:r>
+              <a:rPr sz="1000" lang="zh-TW" dirty="0">
+                <a:solidFill>
+                  <a:srgbClr val="000000"/>
+                </a:solidFill>
+                <a:latin typeface="Arial Unicode MS"/>
+                <a:ea typeface="Arial Unicode MS"/>
+                <a:cs typeface="Arial Unicode MS"/>
+              </a:rPr>
+              <a:t>這支影片在網路上引起很大的爭議，有很多人拍了反駁影片。爭議的點包括：用的是 Autopilot 而不是最新的 FSD、每一項只跑一次、人造的霧和雨跟真實天氣不一樣。後來也真的有人用比較新的相機硬體配比較新的 FSD，去撞同一種假牆，那一次車子停住了。可是那一次</a:t>
+            </a:r>
+            <a:r>
               <a:rPr sz="1000" b="1" lang="zh-TW" dirty="0">
                 <a:solidFill>
                   <a:srgbClr val="000000"/>
@@ -8010,7 +7944,7 @@
                 <a:ea typeface="Arial Unicode MS"/>
                 <a:cs typeface="Arial Unicode MS"/>
               </a:rPr>
-              <a:t>第六項，畫成馬路的假牆。</a:t>
+              <a:t>相機硬體和軟體版本是同時換掉的</a:t>
             </a:r>
             <a:r>
               <a:rPr sz="1000" lang="zh-TW" dirty="0">
@@ -8021,139 +7955,7 @@
                 <a:ea typeface="Arial Unicode MS"/>
                 <a:cs typeface="Arial Unicode MS"/>
               </a:rPr>
-              <a:t>這一項最有名。他們立了一面牆，上面畫著跟前方道路一模一樣的圖案，就像卡通裡面那種假隧道。人的眼睛看得出破綻，光達更不用說，</a:t>
-            </a:r>
-            <a:r>
-              <a:rPr sz="1000" b="1" lang="zh-TW" dirty="0">
-                <a:solidFill>
-                  <a:srgbClr val="000000"/>
-                </a:solidFill>
-                <a:latin typeface="Arial Unicode MS"/>
-                <a:ea typeface="Arial Unicode MS"/>
-                <a:cs typeface="Arial Unicode MS"/>
-              </a:rPr>
-              <a:t>對光達來說那就是一面牆</a:t>
-            </a:r>
-            <a:r>
-              <a:rPr sz="1000" lang="zh-TW" dirty="0">
-                <a:solidFill>
-                  <a:srgbClr val="000000"/>
-                </a:solidFill>
-                <a:latin typeface="Arial Unicode MS"/>
-                <a:ea typeface="Arial Unicode MS"/>
-                <a:cs typeface="Arial Unicode MS"/>
-              </a:rPr>
-              <a:t>，因為它量的是距離，不是圖案。結果光達車輕鬆停下。
-</a:t>
-            </a:r>
-          </a:p>
-          <a:p>
-            <a:pPr algn="l">
-              <a:lnSpc>
-                <a:spcPct val="115000"/>
-              </a:lnSpc>
-              <a:spcAft>
-                <a:spcPts val="500"/>
-              </a:spcAft>
-            </a:pPr>
-            <a:r>
-              <a:rPr sz="1000" lang="zh-TW" dirty="0">
-                <a:solidFill>
-                  <a:srgbClr val="000000"/>
-                </a:solidFill>
-                <a:latin typeface="Arial Unicode MS"/>
-                <a:ea typeface="Arial Unicode MS"/>
-                <a:cs typeface="Arial Unicode MS"/>
-              </a:rPr>
-              <a:t>特斯拉呢？</a:t>
-            </a:r>
-            <a:r>
-              <a:rPr sz="1000" b="1" lang="zh-TW" dirty="0">
-                <a:solidFill>
-                  <a:srgbClr val="000000"/>
-                </a:solidFill>
-                <a:latin typeface="Arial Unicode MS"/>
-                <a:ea typeface="Arial Unicode MS"/>
-                <a:cs typeface="Arial Unicode MS"/>
-              </a:rPr>
-              <a:t>連一下煞車都沒踩，直接撞穿。</a:t>
-            </a:r>
-            <a:r>
-              <a:rPr sz="1000" lang="zh-TW" dirty="0">
-                <a:solidFill>
-                  <a:srgbClr val="000000"/>
-                </a:solidFill>
-                <a:latin typeface="Arial Unicode MS"/>
-                <a:ea typeface="Arial Unicode MS"/>
-                <a:cs typeface="Arial Unicode MS"/>
-              </a:rPr>
-              <a:t>
-</a:t>
-            </a:r>
-          </a:p>
-          <a:p>
-            <a:pPr algn="l">
-              <a:lnSpc>
-                <a:spcPct val="115000"/>
-              </a:lnSpc>
-              <a:spcAft>
-                <a:spcPts val="500"/>
-              </a:spcAft>
-            </a:pPr>
-            <a:r>
-              <a:rPr sz="1000" lang="zh-TW" dirty="0">
-                <a:solidFill>
-                  <a:srgbClr val="000000"/>
-                </a:solidFill>
-                <a:latin typeface="Arial Unicode MS"/>
-                <a:ea typeface="Arial Unicode MS"/>
-                <a:cs typeface="Arial Unicode MS"/>
-              </a:rPr>
-              <a:t>最終比數：光達車六比六，特斯拉三比六。
-</a:t>
-            </a:r>
-          </a:p>
-          <a:p>
-            <a:pPr algn="l">
-              <a:lnSpc>
-                <a:spcPct val="115000"/>
-              </a:lnSpc>
-              <a:spcAft>
-                <a:spcPts val="500"/>
-              </a:spcAft>
-            </a:pPr>
-            <a:r>
-              <a:rPr sz="1000" lang="zh-TW" dirty="0">
-                <a:solidFill>
-                  <a:srgbClr val="000000"/>
-                </a:solidFill>
-                <a:latin typeface="Arial Unicode MS"/>
-                <a:ea typeface="Arial Unicode MS"/>
-                <a:cs typeface="Arial Unicode MS"/>
-              </a:rPr>
-              <a:t>接下來這件事更重要，請大家一定要聽。
-</a:t>
-            </a:r>
-          </a:p>
-          <a:p>
-            <a:pPr algn="l">
-              <a:lnSpc>
-                <a:spcPct val="115000"/>
-              </a:lnSpc>
-              <a:spcAft>
-                <a:spcPts val="500"/>
-              </a:spcAft>
-            </a:pPr>
-            <a:r>
-              <a:rPr sz="1000" lang="zh-TW" dirty="0">
-                <a:solidFill>
-                  <a:srgbClr val="000000"/>
-                </a:solidFill>
-                <a:latin typeface="Arial Unicode MS"/>
-                <a:ea typeface="Arial Unicode MS"/>
-                <a:cs typeface="Arial Unicode MS"/>
-              </a:rPr>
-              <a:t>這支影片在網路上引起很大的爭議，有很多人拍了反駁影片。爭議的點包括：用的是 Autopilot 而不是最新的 FSD、每一項只跑一次、人造的霧和雨跟真實天氣不一樣。
+              <a:t>，所以到底是哪一個幫上忙，一樣分不出來。
 </a:t>
             </a:r>
           </a:p>
@@ -27135,7 +26937,7 @@
                 <a:ea typeface="Arial" pitchFamily="34" charset="-122"/>
                 <a:cs typeface="Arial" pitchFamily="34" charset="-120"/>
               </a:rPr>
-              <a:t>Mark Rober　·　≈18:30</a:t>
+              <a:t>Mark Rober　·　≈18:54</a:t>
             </a:r>
             <a:endParaRPr lang="en-US" sz="900" dirty="0"/>
           </a:p>
@@ -27245,7 +27047,7 @@
                 <a:ea typeface="Arial" pitchFamily="34" charset="-122"/>
                 <a:cs typeface="Arial" pitchFamily="34" charset="-120"/>
               </a:rPr>
-              <a:t>6 bài: trẻ đứng · trẻ lao ra · sương mù · mưa · đèn chói · tường vẽ</a:t>
+              <a:t>Vừa xem vừa ghi 6 bài: xe LiDAR qua chưa, Tesla qua chưa</a:t>
             </a:r>
             <a:endParaRPr lang="en-US" sz="950" dirty="0"/>
           </a:p>
@@ -27265,7 +27067,7 @@
                 <a:ea typeface="微軟正黑體" pitchFamily="34" charset="-122"/>
                 <a:cs typeface="微軟正黑體" pitchFamily="34" charset="-120"/>
               </a:rPr>
-              <a:t>六項：站著的小孩・突然衝出・霧・雨・強光・假牆</a:t>
+              <a:t>邊看邊記六項：光達車過了沒、特斯拉過了沒</a:t>
             </a:r>
             <a:endParaRPr lang="en-US" sz="950" dirty="0"/>
           </a:p>

--- a/第三週(09-24)/第三週_第3節_簡報.pptx
+++ b/第三週(09-24)/第三週_第3節_簡報.pptx
@@ -4094,7 +4094,7 @@
                 <a:ea typeface="Arial Unicode MS"/>
                 <a:cs typeface="Arial Unicode MS"/>
               </a:rPr>
-              <a:t>打個比方：白天找人像在吵鬧的市場裡喊一個人的名字，晚上像在安靜的圖書館裡喊。聲音一樣大，但是晚上聽得清楚多了。
+              <a:t>好，把三欄合起來看。同樣是天黑，相機那一欄是紅色的，另外兩欄是綠色的。
 </a:t>
             </a:r>
           </a:p>
@@ -4116,7 +4116,7 @@
                 <a:ea typeface="Arial Unicode MS"/>
                 <a:cs typeface="Arial Unicode MS"/>
               </a:rPr>
-              <a:t>好，把三欄合起來看。同樣是天黑，相機那一欄是紅色的，另外兩欄是綠色的。
+              <a:t>現在大家可以回答一個常常被問到的問題：為什麼自駕車不能只裝相機就好？
 </a:t>
             </a:r>
           </a:p>
@@ -4138,7 +4138,7 @@
                 <a:ea typeface="Arial Unicode MS"/>
                 <a:cs typeface="Arial Unicode MS"/>
               </a:rPr>
-              <a:t>現在大家可以回答一個常常被問到的問題：為什麼自駕車不能只裝相機就好？
+              <a:t>因為天一黑，相機看得到多遠就不是它自己說了算。
 </a:t>
             </a:r>
           </a:p>
@@ -4160,7 +4160,183 @@
                 <a:ea typeface="Arial Unicode MS"/>
                 <a:cs typeface="Arial Unicode MS"/>
               </a:rPr>
-              <a:t>因為天一黑，它就什麼都看不到了。不過我要補一句，這只是理由之一，還有別的。等一下第五輪大家會看到另一個。</a:t>
+              <a:t>有人一定會問：</a:t>
+            </a:r>
+            <a:r>
+              <a:rPr sz="1000" b="1" lang="zh-TW" dirty="0">
+                <a:solidFill>
+                  <a:srgbClr val="000000"/>
+                </a:solidFill>
+                <a:latin typeface="Arial Unicode MS"/>
+                <a:ea typeface="Arial Unicode MS"/>
+                <a:cs typeface="Arial Unicode MS"/>
+              </a:rPr>
+              <a:t>特斯拉不是只有相機嗎？</a:t>
+            </a:r>
+            <a:r>
+              <a:rPr sz="1000" lang="zh-TW" dirty="0">
+                <a:solidFill>
+                  <a:srgbClr val="000000"/>
+                </a:solidFill>
+                <a:latin typeface="Arial Unicode MS"/>
+                <a:ea typeface="Arial Unicode MS"/>
+                <a:cs typeface="Arial Unicode MS"/>
+              </a:rPr>
+              <a:t>對，Model 3 和 Model Y 就是只有相機，它們晚上照樣在路上跑。這不衝突，因為它們晚上靠的是</a:t>
+            </a:r>
+            <a:r>
+              <a:rPr sz="1000" b="1" lang="zh-TW" dirty="0">
+                <a:solidFill>
+                  <a:srgbClr val="000000"/>
+                </a:solidFill>
+                <a:latin typeface="Arial Unicode MS"/>
+                <a:ea typeface="Arial Unicode MS"/>
+                <a:cs typeface="Arial Unicode MS"/>
+              </a:rPr>
+              <a:t>大燈</a:t>
+            </a:r>
+            <a:r>
+              <a:rPr sz="1000" lang="zh-TW" dirty="0">
+                <a:solidFill>
+                  <a:srgbClr val="000000"/>
+                </a:solidFill>
+                <a:latin typeface="Arial Unicode MS"/>
+                <a:ea typeface="Arial Unicode MS"/>
+                <a:cs typeface="Arial Unicode MS"/>
+              </a:rPr>
+              <a:t>。
+</a:t>
+            </a:r>
+          </a:p>
+          <a:p>
+            <a:pPr algn="l">
+              <a:lnSpc>
+                <a:spcPct val="115000"/>
+              </a:lnSpc>
+              <a:spcAft>
+                <a:spcPts val="500"/>
+              </a:spcAft>
+            </a:pPr>
+            <a:r>
+              <a:rPr sz="1000" lang="zh-TW" dirty="0">
+                <a:solidFill>
+                  <a:srgbClr val="000000"/>
+                </a:solidFill>
+                <a:latin typeface="Arial Unicode MS"/>
+                <a:ea typeface="Arial Unicode MS"/>
+                <a:cs typeface="Arial Unicode MS"/>
+              </a:rPr>
+              <a:t>大燈就是相機的手電筒。只是這支手電筒跟光達那支不一樣：它不長在感測器身上，是另外一個零件，而且照不遠。近光燈大概照到六十公尺，遠光燈一百公尺出頭，可是對向有車的時候不能開遠光。
+</a:t>
+            </a:r>
+          </a:p>
+          <a:p>
+            <a:pPr algn="l">
+              <a:lnSpc>
+                <a:spcPct val="115000"/>
+              </a:lnSpc>
+              <a:spcAft>
+                <a:spcPts val="500"/>
+              </a:spcAft>
+            </a:pPr>
+            <a:r>
+              <a:rPr sz="1000" lang="zh-TW" dirty="0">
+                <a:solidFill>
+                  <a:srgbClr val="000000"/>
+                </a:solidFill>
+                <a:latin typeface="Arial Unicode MS"/>
+                <a:ea typeface="Arial Unicode MS"/>
+                <a:cs typeface="Arial Unicode MS"/>
+              </a:rPr>
+              <a:t>六十公尺夠不夠？用第一節那條煞停距離算：時速六十公里要二十八公尺，夠；時速一百公里要七十三公尺，</a:t>
+            </a:r>
+            <a:r>
+              <a:rPr sz="1000" b="1" lang="zh-TW" dirty="0">
+                <a:solidFill>
+                  <a:srgbClr val="000000"/>
+                </a:solidFill>
+                <a:latin typeface="Arial Unicode MS"/>
+                <a:ea typeface="Arial Unicode MS"/>
+                <a:cs typeface="Arial Unicode MS"/>
+              </a:rPr>
+              <a:t>比大燈照得到的還遠</a:t>
+            </a:r>
+            <a:r>
+              <a:rPr sz="1000" lang="zh-TW" dirty="0">
+                <a:solidFill>
+                  <a:srgbClr val="000000"/>
+                </a:solidFill>
+                <a:latin typeface="Arial Unicode MS"/>
+                <a:ea typeface="Arial Unicode MS"/>
+                <a:cs typeface="Arial Unicode MS"/>
+              </a:rPr>
+              <a:t>。
+</a:t>
+            </a:r>
+          </a:p>
+          <a:p>
+            <a:pPr algn="l">
+              <a:lnSpc>
+                <a:spcPct val="115000"/>
+              </a:lnSpc>
+              <a:spcAft>
+                <a:spcPts val="500"/>
+              </a:spcAft>
+            </a:pPr>
+            <a:r>
+              <a:rPr sz="1000" lang="zh-TW" dirty="0">
+                <a:solidFill>
+                  <a:srgbClr val="000000"/>
+                </a:solidFill>
+                <a:latin typeface="Arial Unicode MS"/>
+                <a:ea typeface="Arial Unicode MS"/>
+                <a:cs typeface="Arial Unicode MS"/>
+              </a:rPr>
+              <a:t>所以精確的講法不是「天黑就看不到」，是</a:t>
+            </a:r>
+            <a:r>
+              <a:rPr sz="1000" b="1" lang="zh-TW" dirty="0">
+                <a:solidFill>
+                  <a:srgbClr val="000000"/>
+                </a:solidFill>
+                <a:latin typeface="Arial Unicode MS"/>
+                <a:ea typeface="Arial Unicode MS"/>
+                <a:cs typeface="Arial Unicode MS"/>
+              </a:rPr>
+              <a:t>天黑之後，相機看得到多遠，取決於車子以外的東西</a:t>
+            </a:r>
+            <a:r>
+              <a:rPr sz="1000" lang="zh-TW" dirty="0">
+                <a:solidFill>
+                  <a:srgbClr val="000000"/>
+                </a:solidFill>
+                <a:latin typeface="Arial Unicode MS"/>
+                <a:ea typeface="Arial Unicode MS"/>
+                <a:cs typeface="Arial Unicode MS"/>
+              </a:rPr>
+              <a:t>。光達和雷達沒有這個問題，它們的手電筒長在自己身上。
+</a:t>
+            </a:r>
+          </a:p>
+          <a:p>
+            <a:pPr algn="l">
+              <a:lnSpc>
+                <a:spcPct val="115000"/>
+              </a:lnSpc>
+              <a:spcAft>
+                <a:spcPts val="500"/>
+              </a:spcAft>
+            </a:pPr>
+            <a:r>
+              <a:rPr sz="1000" lang="zh-TW" dirty="0">
+                <a:solidFill>
+                  <a:srgbClr val="000000"/>
+                </a:solidFill>
+                <a:latin typeface="Arial Unicode MS"/>
+                <a:ea typeface="Arial Unicode MS"/>
+                <a:cs typeface="Arial Unicode MS"/>
+              </a:rPr>
+              <a:t>這只是理由之一，還有別的。等一下第五輪大家會看到另一個。</a:t>
             </a:r>
           </a:p>
         </p:txBody>

--- a/第三週(09-24)/第三週_第3節_簡報.pptx
+++ b/第三週(09-24)/第三週_第3節_簡報.pptx
@@ -5755,7 +5755,7 @@
                 <a:ea typeface="Arial Unicode MS"/>
                 <a:cs typeface="Arial Unicode MS"/>
               </a:rPr>
-              <a:t>先講一個生活中的經驗。海邊的消波塊，大浪打過來會被擋住；可是如果是很小的漣漪，碰到消波塊會怎樣？會從旁邊繞過去，幾乎沒有影響。
+              <a:t>先講一個生活中的經驗。你在水裡插一根很細的竹竿。大浪打過來，根本不理它，直接穿過去，竹竿後面照樣是大浪。
 </a:t>
             </a:r>
           </a:p>
@@ -5777,7 +5777,7 @@
                 <a:ea typeface="Arial Unicode MS"/>
                 <a:cs typeface="Arial Unicode MS"/>
               </a:rPr>
-              <a:t>反過來想也一樣。你在水裡插一根很細的竹竿，大浪根本不理它，直接穿過去。
+              <a:t>可是如果來的是很細的漣漪呢？漣漪會被那根竹竿擋住，竹竿後面會出現一小塊平靜的水面。
 </a:t>
             </a:r>
           </a:p>
@@ -5791,17 +5791,6 @@
               </a:spcAft>
             </a:pPr>
             <a:r>
-              <a:rPr sz="1000" b="1" lang="zh-TW" dirty="0">
-                <a:solidFill>
-                  <a:srgbClr val="000000"/>
-                </a:solidFill>
-                <a:latin typeface="Arial Unicode MS"/>
-                <a:ea typeface="Arial Unicode MS"/>
-                <a:cs typeface="Arial Unicode MS"/>
-              </a:rPr>
-              <a:t>波碰到障礙物會不會被擋住，看的是「波的大小」跟「障礙物的大小」誰大誰小。</a:t>
-            </a:r>
-            <a:r>
               <a:rPr sz="1000" lang="zh-TW" dirty="0">
                 <a:solidFill>
                   <a:srgbClr val="000000"/>
@@ -5810,7 +5799,7 @@
                 <a:ea typeface="Arial Unicode MS"/>
                 <a:cs typeface="Arial Unicode MS"/>
               </a:rPr>
-              <a:t>波比障礙物大，就繞過去；波比障礙物小，就被擋住、被散射。
+              <a:t>同一根竹竿，來的波不一樣，結果剛好相反。
 </a:t>
             </a:r>
           </a:p>
@@ -5824,6 +5813,17 @@
               </a:spcAft>
             </a:pPr>
             <a:r>
+              <a:rPr sz="1000" b="1" lang="zh-TW" dirty="0">
+                <a:solidFill>
+                  <a:srgbClr val="000000"/>
+                </a:solidFill>
+                <a:latin typeface="Arial Unicode MS"/>
+                <a:ea typeface="Arial Unicode MS"/>
+                <a:cs typeface="Arial Unicode MS"/>
+              </a:rPr>
+              <a:t>波碰到障礙物會不會被擋住，看的是「波的大小」跟「障礙物的大小」誰大誰小。</a:t>
+            </a:r>
+            <a:r>
               <a:rPr sz="1000" lang="zh-TW" dirty="0">
                 <a:solidFill>
                   <a:srgbClr val="000000"/>
@@ -5832,29 +5832,7 @@
                 <a:ea typeface="Arial Unicode MS"/>
                 <a:cs typeface="Arial Unicode MS"/>
               </a:rPr>
-              <a:t>現在看螢幕這條線。這條線上標的是</a:t>
-            </a:r>
-            <a:r>
-              <a:rPr sz="1000" b="1" lang="zh-TW" dirty="0">
-                <a:solidFill>
-                  <a:srgbClr val="000000"/>
-                </a:solidFill>
-                <a:latin typeface="Arial Unicode MS"/>
-                <a:ea typeface="Arial Unicode MS"/>
-                <a:cs typeface="Arial Unicode MS"/>
-              </a:rPr>
-              <a:t>尺寸</a:t>
-            </a:r>
-            <a:r>
-              <a:rPr sz="1000" lang="zh-TW" dirty="0">
-                <a:solidFill>
-                  <a:srgbClr val="000000"/>
-                </a:solidFill>
-                <a:latin typeface="Arial Unicode MS"/>
-                <a:ea typeface="Arial Unicode MS"/>
-                <a:cs typeface="Arial Unicode MS"/>
-              </a:rPr>
-              <a:t>，從左到右愈來愈大，左邊是一微米，也就是一公釐的千分之一，右邊是一公分。請注意這條軸每一格是十倍，不是加十，這樣才畫得下這麼大的範圍。
+              <a:t>波比障礙物大，就繞過去；波比障礙物小，就被擋住、被散射。
 </a:t>
             </a:r>
           </a:p>
@@ -5876,7 +5854,7 @@
                 <a:ea typeface="Arial Unicode MS"/>
                 <a:cs typeface="Arial Unicode MS"/>
               </a:rPr>
-              <a:t>線的上面我標了三個感測器的</a:t>
+              <a:t>現在看螢幕這條線。這條線上標的是</a:t>
             </a:r>
             <a:r>
               <a:rPr sz="1000" b="1" lang="zh-TW" dirty="0">
@@ -5887,7 +5865,7 @@
                 <a:ea typeface="Arial Unicode MS"/>
                 <a:cs typeface="Arial Unicode MS"/>
               </a:rPr>
-              <a:t>波長</a:t>
+              <a:t>尺寸</a:t>
             </a:r>
             <a:r>
               <a:rPr sz="1000" lang="zh-TW" dirty="0">
@@ -5898,7 +5876,7 @@
                 <a:ea typeface="Arial Unicode MS"/>
                 <a:cs typeface="Arial Unicode MS"/>
               </a:rPr>
-              <a:t>。
+              <a:t>，從左到右愈來愈大，左邊是一微米，也就是一公釐的千分之一，右邊是一公分。請注意這條軸每一格是十倍，不是加十，這樣才畫得下這麼大的範圍。
 </a:t>
             </a:r>
           </a:p>
@@ -5920,7 +5898,7 @@
                 <a:ea typeface="Arial Unicode MS"/>
                 <a:cs typeface="Arial Unicode MS"/>
               </a:rPr>
-              <a:t>相機和光達差不多，都在</a:t>
+              <a:t>線的上面我標了三個感測器的</a:t>
             </a:r>
             <a:r>
               <a:rPr sz="1000" b="1" lang="zh-TW" dirty="0">
@@ -5931,7 +5909,7 @@
                 <a:ea typeface="Arial Unicode MS"/>
                 <a:cs typeface="Arial Unicode MS"/>
               </a:rPr>
-              <a:t>一微米</a:t>
+              <a:t>波長</a:t>
             </a:r>
             <a:r>
               <a:rPr sz="1000" lang="zh-TW" dirty="0">
@@ -5942,7 +5920,7 @@
                 <a:ea typeface="Arial Unicode MS"/>
                 <a:cs typeface="Arial Unicode MS"/>
               </a:rPr>
-              <a:t>左右。相機用的是可見光，光達用的是九百零五奈米的紅外線雷射，兩個都在一微米這附近。
+              <a:t>。
 </a:t>
             </a:r>
           </a:p>
@@ -5964,7 +5942,7 @@
                 <a:ea typeface="Arial Unicode MS"/>
                 <a:cs typeface="Arial Unicode MS"/>
               </a:rPr>
-              <a:t>熱像是</a:t>
+              <a:t>相機和光達差不多，都在</a:t>
             </a:r>
             <a:r>
               <a:rPr sz="1000" b="1" lang="zh-TW" dirty="0">
@@ -5975,7 +5953,7 @@
                 <a:ea typeface="Arial Unicode MS"/>
                 <a:cs typeface="Arial Unicode MS"/>
               </a:rPr>
-              <a:t>十微米</a:t>
+              <a:t>一微米</a:t>
             </a:r>
             <a:r>
               <a:rPr sz="1000" lang="zh-TW" dirty="0">
@@ -5986,7 +5964,7 @@
                 <a:ea typeface="Arial Unicode MS"/>
                 <a:cs typeface="Arial Unicode MS"/>
               </a:rPr>
-              <a:t>，比它們大十倍。
+              <a:t>左右。相機用的是可見光，光達用的是九百零五奈米的紅外線雷射，兩個都在一微米這附近。
 </a:t>
             </a:r>
           </a:p>
@@ -6008,7 +5986,7 @@
                 <a:ea typeface="Arial Unicode MS"/>
                 <a:cs typeface="Arial Unicode MS"/>
               </a:rPr>
-              <a:t>雷達最特別，七十七 GHz 的毫米波，波長大約</a:t>
+              <a:t>熱像是</a:t>
             </a:r>
             <a:r>
               <a:rPr sz="1000" b="1" lang="zh-TW" dirty="0">
@@ -6019,7 +5997,7 @@
                 <a:ea typeface="Arial Unicode MS"/>
                 <a:cs typeface="Arial Unicode MS"/>
               </a:rPr>
-              <a:t>四公釐</a:t>
+              <a:t>十微米</a:t>
             </a:r>
             <a:r>
               <a:rPr sz="1000" lang="zh-TW" dirty="0">
@@ -6030,29 +6008,7 @@
                 <a:ea typeface="Arial Unicode MS"/>
                 <a:cs typeface="Arial Unicode MS"/>
               </a:rPr>
-              <a:t>，比相機和光達大了</a:t>
-            </a:r>
-            <a:r>
-              <a:rPr sz="1000" b="1" lang="zh-TW" dirty="0">
-                <a:solidFill>
-                  <a:srgbClr val="000000"/>
-                </a:solidFill>
-                <a:latin typeface="Arial Unicode MS"/>
-                <a:ea typeface="Arial Unicode MS"/>
-                <a:cs typeface="Arial Unicode MS"/>
-              </a:rPr>
-              <a:t>四千倍</a:t>
-            </a:r>
-            <a:r>
-              <a:rPr sz="1000" lang="zh-TW" dirty="0">
-                <a:solidFill>
-                  <a:srgbClr val="000000"/>
-                </a:solidFill>
-                <a:latin typeface="Arial Unicode MS"/>
-                <a:ea typeface="Arial Unicode MS"/>
-                <a:cs typeface="Arial Unicode MS"/>
-              </a:rPr>
-              <a:t>。
+              <a:t>，比它們大十倍。
 </a:t>
             </a:r>
           </a:p>
@@ -6074,7 +6030,51 @@
                 <a:ea typeface="Arial Unicode MS"/>
                 <a:cs typeface="Arial Unicode MS"/>
               </a:rPr>
-              <a:t>線的下面是水滴的大小。霧滴很小，一到五十微米。雨滴大很多，零點五到兩公釐。
+              <a:t>雷達最特別，七十七 GHz 的毫米波，波長大約</a:t>
+            </a:r>
+            <a:r>
+              <a:rPr sz="1000" b="1" lang="zh-TW" dirty="0">
+                <a:solidFill>
+                  <a:srgbClr val="000000"/>
+                </a:solidFill>
+                <a:latin typeface="Arial Unicode MS"/>
+                <a:ea typeface="Arial Unicode MS"/>
+                <a:cs typeface="Arial Unicode MS"/>
+              </a:rPr>
+              <a:t>四公釐</a:t>
+            </a:r>
+            <a:r>
+              <a:rPr sz="1000" lang="zh-TW" dirty="0">
+                <a:solidFill>
+                  <a:srgbClr val="000000"/>
+                </a:solidFill>
+                <a:latin typeface="Arial Unicode MS"/>
+                <a:ea typeface="Arial Unicode MS"/>
+                <a:cs typeface="Arial Unicode MS"/>
+              </a:rPr>
+              <a:t>，比相機和光達大了</a:t>
+            </a:r>
+            <a:r>
+              <a:rPr sz="1000" b="1" lang="zh-TW" dirty="0">
+                <a:solidFill>
+                  <a:srgbClr val="000000"/>
+                </a:solidFill>
+                <a:latin typeface="Arial Unicode MS"/>
+                <a:ea typeface="Arial Unicode MS"/>
+                <a:cs typeface="Arial Unicode MS"/>
+              </a:rPr>
+              <a:t>四千倍</a:t>
+            </a:r>
+            <a:r>
+              <a:rPr sz="1000" lang="zh-TW" dirty="0">
+                <a:solidFill>
+                  <a:srgbClr val="000000"/>
+                </a:solidFill>
+                <a:latin typeface="Arial Unicode MS"/>
+                <a:ea typeface="Arial Unicode MS"/>
+                <a:cs typeface="Arial Unicode MS"/>
+              </a:rPr>
+              <a:t>。
 </a:t>
             </a:r>
           </a:p>
@@ -6096,7 +6096,7 @@
                 <a:ea typeface="Arial Unicode MS"/>
                 <a:cs typeface="Arial Unicode MS"/>
               </a:rPr>
-              <a:t>好，現在把上下對起來看。
+              <a:t>線的下面是水滴的大小。霧滴很小，一到五十微米。雨滴大很多，零點五到兩公釐。
 </a:t>
             </a:r>
           </a:p>
@@ -6110,17 +6110,6 @@
               </a:spcAft>
             </a:pPr>
             <a:r>
-              <a:rPr sz="1000" b="1" lang="zh-TW" dirty="0">
-                <a:solidFill>
-                  <a:srgbClr val="000000"/>
-                </a:solidFill>
-                <a:latin typeface="Arial Unicode MS"/>
-                <a:ea typeface="Arial Unicode MS"/>
-                <a:cs typeface="Arial Unicode MS"/>
-              </a:rPr>
-              <a:t>相機和光達</a:t>
-            </a:r>
-            <a:r>
               <a:rPr sz="1000" lang="zh-TW" dirty="0">
                 <a:solidFill>
                   <a:srgbClr val="000000"/>
@@ -6129,7 +6118,7 @@
                 <a:ea typeface="Arial Unicode MS"/>
                 <a:cs typeface="Arial Unicode MS"/>
               </a:rPr>
-              <a:t>的波長比霧滴還小。所以霧滴對它們來說就像一整排消波塊，光打出去撞上去就散掉了。這就是為什麼濃霧那一輪，相機從八十公尺掉到十六公尺、光達從一百掉到四十五。
+              <a:t>好，現在把上下對起來看。
 </a:t>
             </a:r>
           </a:p>
@@ -6151,7 +6140,7 @@
                 <a:ea typeface="Arial Unicode MS"/>
                 <a:cs typeface="Arial Unicode MS"/>
               </a:rPr>
-              <a:t>熱像</a:t>
+              <a:t>相機和光達</a:t>
             </a:r>
             <a:r>
               <a:rPr sz="1000" lang="zh-TW" dirty="0">
@@ -6162,7 +6151,7 @@
                 <a:ea typeface="Arial Unicode MS"/>
                 <a:cs typeface="Arial Unicode MS"/>
               </a:rPr>
-              <a:t>的波長跟霧滴差不多大，所以被擋掉一部分，但是沒有那麼嚴重，從一百四十三掉到九十。
+              <a:t>的波長比霧滴還小。所以霧滴對它們來說就像滿天都是竹竿，光打出去撞上去就散掉了。這就是為什麼濃霧那一輪，相機從八十公尺掉到十六公尺、光達從一百掉到四十五。
 </a:t>
             </a:r>
           </a:p>
@@ -6184,7 +6173,7 @@
                 <a:ea typeface="Arial Unicode MS"/>
                 <a:cs typeface="Arial Unicode MS"/>
               </a:rPr>
-              <a:t>雷達</a:t>
+              <a:t>熱像</a:t>
             </a:r>
             <a:r>
               <a:rPr sz="1000" lang="zh-TW" dirty="0">
@@ -6195,7 +6184,7 @@
                 <a:ea typeface="Arial Unicode MS"/>
                 <a:cs typeface="Arial Unicode MS"/>
               </a:rPr>
-              <a:t>的波長比霧滴大四千倍，比雨滴也還要大。對雷達來說，水滴細得像竹竿，它直接穿過去。所以剛剛那兩輪，雷達那張卡從頭到尾都是四十點零。
+              <a:t>的波長跟霧滴差不多大，所以被擋掉一部分，但是沒有那麼嚴重，從一百四十三掉到九十。
 </a:t>
             </a:r>
           </a:p>
@@ -6209,6 +6198,17 @@
               </a:spcAft>
             </a:pPr>
             <a:r>
+              <a:rPr sz="1000" b="1" lang="zh-TW" dirty="0">
+                <a:solidFill>
+                  <a:srgbClr val="000000"/>
+                </a:solidFill>
+                <a:latin typeface="Arial Unicode MS"/>
+                <a:ea typeface="Arial Unicode MS"/>
+                <a:cs typeface="Arial Unicode MS"/>
+              </a:rPr>
+              <a:t>雷達</a:t>
+            </a:r>
+            <a:r>
               <a:rPr sz="1000" lang="zh-TW" dirty="0">
                 <a:solidFill>
                   <a:srgbClr val="000000"/>
@@ -6217,7 +6217,7 @@
                 <a:ea typeface="Arial Unicode MS"/>
                 <a:cs typeface="Arial Unicode MS"/>
               </a:rPr>
-              <a:t>我在白板上寫一行：波長大於顆粒，穿過去；波長小於顆粒，被擋住。
+              <a:t>的波長比霧滴大四千倍，比雨滴也還要大。對雷達來說，水滴細得像竹竿，它直接穿過去。所以剛剛那兩輪，雷達那張卡從頭到尾都是四十點零。
 </a:t>
             </a:r>
           </a:p>
@@ -6239,29 +6239,7 @@
                 <a:ea typeface="Arial Unicode MS"/>
                 <a:cs typeface="Arial Unicode MS"/>
               </a:rPr>
-              <a:t>這張圖大家只要記住一句話：</a:t>
-            </a:r>
-            <a:r>
-              <a:rPr sz="1000" b="1" lang="zh-TW" dirty="0">
-                <a:solidFill>
-                  <a:srgbClr val="000000"/>
-                </a:solidFill>
-                <a:latin typeface="Arial Unicode MS"/>
-                <a:ea typeface="Arial Unicode MS"/>
-                <a:cs typeface="Arial Unicode MS"/>
-              </a:rPr>
-              <a:t>看波長跟顆粒誰大誰小。</a:t>
-            </a:r>
-            <a:r>
-              <a:rPr sz="1000" lang="zh-TW" dirty="0">
-                <a:solidFill>
-                  <a:srgbClr val="000000"/>
-                </a:solidFill>
-                <a:latin typeface="Arial Unicode MS"/>
-                <a:ea typeface="Arial Unicode MS"/>
-                <a:cs typeface="Arial Unicode MS"/>
-              </a:rPr>
-              <a:t>
+              <a:t>我在白板上寫一行：波長大於顆粒，穿過去；波長小於顆粒，被擋住。
 </a:t>
             </a:r>
           </a:p>
